--- a/pySEAFOM_updates.pptx
+++ b/pySEAFOM_updates.pptx
@@ -9,12 +9,14 @@
     <p:sldId id="257" r:id="rId3"/>
     <p:sldId id="258" r:id="rId4"/>
     <p:sldId id="263" r:id="rId5"/>
-    <p:sldId id="260" r:id="rId6"/>
-    <p:sldId id="264" r:id="rId7"/>
-    <p:sldId id="259" r:id="rId8"/>
-    <p:sldId id="265" r:id="rId9"/>
-    <p:sldId id="266" r:id="rId10"/>
+    <p:sldId id="264" r:id="rId6"/>
+    <p:sldId id="259" r:id="rId7"/>
+    <p:sldId id="267" r:id="rId8"/>
+    <p:sldId id="266" r:id="rId9"/>
+    <p:sldId id="268" r:id="rId10"/>
     <p:sldId id="262" r:id="rId11"/>
+    <p:sldId id="260" r:id="rId12"/>
+    <p:sldId id="265" r:id="rId13"/>
   </p:sldIdLst>
   <p:sldSz cx="12192000" cy="6858000"/>
   <p:notesSz cx="6858000" cy="9144000"/>
@@ -124,7 +126,7 @@
 <file path=ppt/revisionInfo.xml><?xml version="1.0" encoding="utf-8"?>
 <p1510:revInfo xmlns:a="http://schemas.openxmlformats.org/drawingml/2006/main" xmlns:r="http://schemas.openxmlformats.org/officeDocument/2006/relationships" xmlns:p1510="http://schemas.microsoft.com/office/powerpoint/2015/10/main">
   <p1510:revLst>
-    <p1510:client id="{C2F2CB6F-16AD-4657-ABB9-2079F8BF5977}" v="77" dt="2026-01-09T20:04:37.126"/>
+    <p1510:client id="{C2F2CB6F-16AD-4657-ABB9-2079F8BF5977}" v="177" dt="2026-02-20T12:43:51.878"/>
   </p1510:revLst>
 </p1510:revInfo>
 </file>
@@ -151,14 +153,6 @@
           <pc:docMk/>
           <pc:sldMk cId="3609631159" sldId="258"/>
         </pc:sldMkLst>
-        <pc:graphicFrameChg chg="modGraphic">
-          <ac:chgData name="Moradi, Peyman" userId="dba91eb0-4a36-42e9-bb56-2c55a234965d" providerId="ADAL" clId="{BB04EFC6-8268-4F75-9FC2-149BB3B3C991}" dt="2025-11-19T12:38:59.452" v="369" actId="403"/>
-          <ac:graphicFrameMkLst>
-            <pc:docMk/>
-            <pc:sldMk cId="3609631159" sldId="258"/>
-            <ac:graphicFrameMk id="5" creationId="{34D34C36-F082-C7B3-1633-8E43E374AAC9}"/>
-          </ac:graphicFrameMkLst>
-        </pc:graphicFrameChg>
       </pc:sldChg>
       <pc:sldChg chg="addSp delSp modSp mod ord">
         <pc:chgData name="Moradi, Peyman" userId="dba91eb0-4a36-42e9-bb56-2c55a234965d" providerId="ADAL" clId="{BB04EFC6-8268-4F75-9FC2-149BB3B3C991}" dt="2025-11-19T15:19:26.935" v="802" actId="207"/>
@@ -166,38 +160,6 @@
           <pc:docMk/>
           <pc:sldMk cId="348206209" sldId="259"/>
         </pc:sldMkLst>
-        <pc:spChg chg="add mod">
-          <ac:chgData name="Moradi, Peyman" userId="dba91eb0-4a36-42e9-bb56-2c55a234965d" providerId="ADAL" clId="{BB04EFC6-8268-4F75-9FC2-149BB3B3C991}" dt="2025-11-19T15:18:02.567" v="775" actId="1076"/>
-          <ac:spMkLst>
-            <pc:docMk/>
-            <pc:sldMk cId="348206209" sldId="259"/>
-            <ac:spMk id="2" creationId="{22D6B876-51A5-CDD2-898A-E4BB297A725F}"/>
-          </ac:spMkLst>
-        </pc:spChg>
-        <pc:graphicFrameChg chg="add mod modGraphic">
-          <ac:chgData name="Moradi, Peyman" userId="dba91eb0-4a36-42e9-bb56-2c55a234965d" providerId="ADAL" clId="{BB04EFC6-8268-4F75-9FC2-149BB3B3C991}" dt="2025-11-19T15:18:28.962" v="780" actId="14100"/>
-          <ac:graphicFrameMkLst>
-            <pc:docMk/>
-            <pc:sldMk cId="348206209" sldId="259"/>
-            <ac:graphicFrameMk id="9" creationId="{AC6D72F3-4A60-50F7-4E1A-41769F30B1FC}"/>
-          </ac:graphicFrameMkLst>
-        </pc:graphicFrameChg>
-        <pc:graphicFrameChg chg="mod modGraphic">
-          <ac:chgData name="Moradi, Peyman" userId="dba91eb0-4a36-42e9-bb56-2c55a234965d" providerId="ADAL" clId="{BB04EFC6-8268-4F75-9FC2-149BB3B3C991}" dt="2025-11-19T15:19:26.935" v="802" actId="207"/>
-          <ac:graphicFrameMkLst>
-            <pc:docMk/>
-            <pc:sldMk cId="348206209" sldId="259"/>
-            <ac:graphicFrameMk id="10" creationId="{04FFF0D5-86E4-BFB4-A048-E34CF6C0B9DB}"/>
-          </ac:graphicFrameMkLst>
-        </pc:graphicFrameChg>
-        <pc:picChg chg="add mod">
-          <ac:chgData name="Moradi, Peyman" userId="dba91eb0-4a36-42e9-bb56-2c55a234965d" providerId="ADAL" clId="{BB04EFC6-8268-4F75-9FC2-149BB3B3C991}" dt="2025-11-19T15:19:20.401" v="800" actId="1076"/>
-          <ac:picMkLst>
-            <pc:docMk/>
-            <pc:sldMk cId="348206209" sldId="259"/>
-            <ac:picMk id="1032" creationId="{DD8C88D5-2ECC-586E-F688-6577B864EA43}"/>
-          </ac:picMkLst>
-        </pc:picChg>
       </pc:sldChg>
       <pc:sldChg chg="addSp delSp modSp mod">
         <pc:chgData name="Moradi, Peyman" userId="dba91eb0-4a36-42e9-bb56-2c55a234965d" providerId="ADAL" clId="{BB04EFC6-8268-4F75-9FC2-149BB3B3C991}" dt="2025-11-19T13:54:47.604" v="569" actId="478"/>
@@ -205,14 +167,6 @@
           <pc:docMk/>
           <pc:sldMk cId="3903256587" sldId="261"/>
         </pc:sldMkLst>
-        <pc:spChg chg="mod">
-          <ac:chgData name="Moradi, Peyman" userId="dba91eb0-4a36-42e9-bb56-2c55a234965d" providerId="ADAL" clId="{BB04EFC6-8268-4F75-9FC2-149BB3B3C991}" dt="2025-11-19T13:53:49.161" v="558" actId="20577"/>
-          <ac:spMkLst>
-            <pc:docMk/>
-            <pc:sldMk cId="3903256587" sldId="261"/>
-            <ac:spMk id="3" creationId="{DD77DABC-AAF1-EE8C-CBC3-473EB5ADCA85}"/>
-          </ac:spMkLst>
-        </pc:spChg>
       </pc:sldChg>
       <pc:sldChg chg="addSp delSp modSp mod">
         <pc:chgData name="Moradi, Peyman" userId="dba91eb0-4a36-42e9-bb56-2c55a234965d" providerId="ADAL" clId="{BB04EFC6-8268-4F75-9FC2-149BB3B3C991}" dt="2025-11-19T15:50:15.941" v="803" actId="404"/>
@@ -220,54 +174,6 @@
           <pc:docMk/>
           <pc:sldMk cId="2701834378" sldId="263"/>
         </pc:sldMkLst>
-        <pc:spChg chg="add mod">
-          <ac:chgData name="Moradi, Peyman" userId="dba91eb0-4a36-42e9-bb56-2c55a234965d" providerId="ADAL" clId="{BB04EFC6-8268-4F75-9FC2-149BB3B3C991}" dt="2025-11-19T12:32:11.932" v="100"/>
-          <ac:spMkLst>
-            <pc:docMk/>
-            <pc:sldMk cId="2701834378" sldId="263"/>
-            <ac:spMk id="3" creationId="{76E2CA01-898D-DBBA-C98A-CA86B04C572D}"/>
-          </ac:spMkLst>
-        </pc:spChg>
-        <pc:spChg chg="mod">
-          <ac:chgData name="Moradi, Peyman" userId="dba91eb0-4a36-42e9-bb56-2c55a234965d" providerId="ADAL" clId="{BB04EFC6-8268-4F75-9FC2-149BB3B3C991}" dt="2025-11-19T12:32:10.750" v="99"/>
-          <ac:spMkLst>
-            <pc:docMk/>
-            <pc:sldMk cId="2701834378" sldId="263"/>
-            <ac:spMk id="4" creationId="{18E6EFF1-1DF3-4285-3413-8486395A3965}"/>
-          </ac:spMkLst>
-        </pc:spChg>
-        <pc:spChg chg="add mod">
-          <ac:chgData name="Moradi, Peyman" userId="dba91eb0-4a36-42e9-bb56-2c55a234965d" providerId="ADAL" clId="{BB04EFC6-8268-4F75-9FC2-149BB3B3C991}" dt="2025-11-19T12:32:48.952" v="129" actId="115"/>
-          <ac:spMkLst>
-            <pc:docMk/>
-            <pc:sldMk cId="2701834378" sldId="263"/>
-            <ac:spMk id="6" creationId="{36F6C389-D919-A1B0-4C41-85B67C778205}"/>
-          </ac:spMkLst>
-        </pc:spChg>
-        <pc:spChg chg="add mod">
-          <ac:chgData name="Moradi, Peyman" userId="dba91eb0-4a36-42e9-bb56-2c55a234965d" providerId="ADAL" clId="{BB04EFC6-8268-4F75-9FC2-149BB3B3C991}" dt="2025-11-19T12:36:23.308" v="359" actId="14100"/>
-          <ac:spMkLst>
-            <pc:docMk/>
-            <pc:sldMk cId="2701834378" sldId="263"/>
-            <ac:spMk id="7" creationId="{77D0BFEA-E1DE-DBB0-4626-7D50AAA747A3}"/>
-          </ac:spMkLst>
-        </pc:spChg>
-        <pc:grpChg chg="add mod">
-          <ac:chgData name="Moradi, Peyman" userId="dba91eb0-4a36-42e9-bb56-2c55a234965d" providerId="ADAL" clId="{BB04EFC6-8268-4F75-9FC2-149BB3B3C991}" dt="2025-11-19T12:36:29.948" v="364" actId="1035"/>
-          <ac:grpSpMkLst>
-            <pc:docMk/>
-            <pc:sldMk cId="2701834378" sldId="263"/>
-            <ac:grpSpMk id="2" creationId="{1F39D5F6-70C7-6FD5-5A63-387650AD3795}"/>
-          </ac:grpSpMkLst>
-        </pc:grpChg>
-        <pc:graphicFrameChg chg="mod modGraphic">
-          <ac:chgData name="Moradi, Peyman" userId="dba91eb0-4a36-42e9-bb56-2c55a234965d" providerId="ADAL" clId="{BB04EFC6-8268-4F75-9FC2-149BB3B3C991}" dt="2025-11-19T15:50:15.941" v="803" actId="404"/>
-          <ac:graphicFrameMkLst>
-            <pc:docMk/>
-            <pc:sldMk cId="2701834378" sldId="263"/>
-            <ac:graphicFrameMk id="5" creationId="{908E90FC-1670-F7B7-C787-26BECD49125B}"/>
-          </ac:graphicFrameMkLst>
-        </pc:graphicFrameChg>
       </pc:sldChg>
       <pc:sldChg chg="addSp delSp modSp new mod">
         <pc:chgData name="Moradi, Peyman" userId="dba91eb0-4a36-42e9-bb56-2c55a234965d" providerId="ADAL" clId="{BB04EFC6-8268-4F75-9FC2-149BB3B3C991}" dt="2025-11-19T13:27:53.148" v="403" actId="20577"/>
@@ -275,30 +181,6 @@
           <pc:docMk/>
           <pc:sldMk cId="178843416" sldId="264"/>
         </pc:sldMkLst>
-        <pc:spChg chg="add mod">
-          <ac:chgData name="Moradi, Peyman" userId="dba91eb0-4a36-42e9-bb56-2c55a234965d" providerId="ADAL" clId="{BB04EFC6-8268-4F75-9FC2-149BB3B3C991}" dt="2025-11-19T13:27:25.665" v="395" actId="403"/>
-          <ac:spMkLst>
-            <pc:docMk/>
-            <pc:sldMk cId="178843416" sldId="264"/>
-            <ac:spMk id="8" creationId="{D309792C-9703-002E-6000-DA4BE63B6216}"/>
-          </ac:spMkLst>
-        </pc:spChg>
-        <pc:spChg chg="add mod">
-          <ac:chgData name="Moradi, Peyman" userId="dba91eb0-4a36-42e9-bb56-2c55a234965d" providerId="ADAL" clId="{BB04EFC6-8268-4F75-9FC2-149BB3B3C991}" dt="2025-11-19T13:27:53.148" v="403" actId="20577"/>
-          <ac:spMkLst>
-            <pc:docMk/>
-            <pc:sldMk cId="178843416" sldId="264"/>
-            <ac:spMk id="12" creationId="{DDF99BFB-3ACB-57E1-8080-72F34CCFA474}"/>
-          </ac:spMkLst>
-        </pc:spChg>
-        <pc:picChg chg="add mod ord">
-          <ac:chgData name="Moradi, Peyman" userId="dba91eb0-4a36-42e9-bb56-2c55a234965d" providerId="ADAL" clId="{BB04EFC6-8268-4F75-9FC2-149BB3B3C991}" dt="2025-11-19T13:27:45.128" v="399" actId="1076"/>
-          <ac:picMkLst>
-            <pc:docMk/>
-            <pc:sldMk cId="178843416" sldId="264"/>
-            <ac:picMk id="7" creationId="{06750C7B-352F-E1D2-7698-7F93851933A5}"/>
-          </ac:picMkLst>
-        </pc:picChg>
       </pc:sldChg>
       <pc:sldChg chg="addSp delSp modSp new mod">
         <pc:chgData name="Moradi, Peyman" userId="dba91eb0-4a36-42e9-bb56-2c55a234965d" providerId="ADAL" clId="{BB04EFC6-8268-4F75-9FC2-149BB3B3C991}" dt="2025-11-19T13:55:33.907" v="585" actId="20577"/>
@@ -306,30 +188,6 @@
           <pc:docMk/>
           <pc:sldMk cId="4178740839" sldId="265"/>
         </pc:sldMkLst>
-        <pc:spChg chg="add mod">
-          <ac:chgData name="Moradi, Peyman" userId="dba91eb0-4a36-42e9-bb56-2c55a234965d" providerId="ADAL" clId="{BB04EFC6-8268-4F75-9FC2-149BB3B3C991}" dt="2025-11-19T13:55:33.907" v="585" actId="20577"/>
-          <ac:spMkLst>
-            <pc:docMk/>
-            <pc:sldMk cId="4178740839" sldId="265"/>
-            <ac:spMk id="4" creationId="{ACA91D11-76A7-43B7-ED6D-050256E5C1D9}"/>
-          </ac:spMkLst>
-        </pc:spChg>
-        <pc:picChg chg="add mod">
-          <ac:chgData name="Moradi, Peyman" userId="dba91eb0-4a36-42e9-bb56-2c55a234965d" providerId="ADAL" clId="{BB04EFC6-8268-4F75-9FC2-149BB3B3C991}" dt="2025-11-19T13:29:01.689" v="437" actId="1076"/>
-          <ac:picMkLst>
-            <pc:docMk/>
-            <pc:sldMk cId="4178740839" sldId="265"/>
-            <ac:picMk id="8" creationId="{AA818E3A-38ED-908A-8800-150E885C0D8F}"/>
-          </ac:picMkLst>
-        </pc:picChg>
-        <pc:picChg chg="add mod">
-          <ac:chgData name="Moradi, Peyman" userId="dba91eb0-4a36-42e9-bb56-2c55a234965d" providerId="ADAL" clId="{BB04EFC6-8268-4F75-9FC2-149BB3B3C991}" dt="2025-11-19T13:30:43.035" v="449" actId="1076"/>
-          <ac:picMkLst>
-            <pc:docMk/>
-            <pc:sldMk cId="4178740839" sldId="265"/>
-            <ac:picMk id="12" creationId="{4B0088F7-6B2A-E319-0369-F807EA8AB7E8}"/>
-          </ac:picMkLst>
-        </pc:picChg>
       </pc:sldChg>
       <pc:sldChg chg="addSp delSp modSp add mod">
         <pc:chgData name="Moradi, Peyman" userId="dba91eb0-4a36-42e9-bb56-2c55a234965d" providerId="ADAL" clId="{BB04EFC6-8268-4F75-9FC2-149BB3B3C991}" dt="2025-11-19T13:55:46.655" v="615" actId="6549"/>
@@ -337,38 +195,6 @@
           <pc:docMk/>
           <pc:sldMk cId="1528255773" sldId="266"/>
         </pc:sldMkLst>
-        <pc:spChg chg="mod">
-          <ac:chgData name="Moradi, Peyman" userId="dba91eb0-4a36-42e9-bb56-2c55a234965d" providerId="ADAL" clId="{BB04EFC6-8268-4F75-9FC2-149BB3B3C991}" dt="2025-11-19T13:55:46.655" v="615" actId="6549"/>
-          <ac:spMkLst>
-            <pc:docMk/>
-            <pc:sldMk cId="1528255773" sldId="266"/>
-            <ac:spMk id="4" creationId="{88F8AC78-AEF7-1AE4-6FE2-0B25B9B25E6D}"/>
-          </ac:spMkLst>
-        </pc:spChg>
-        <pc:picChg chg="add mod">
-          <ac:chgData name="Moradi, Peyman" userId="dba91eb0-4a36-42e9-bb56-2c55a234965d" providerId="ADAL" clId="{BB04EFC6-8268-4F75-9FC2-149BB3B3C991}" dt="2025-11-19T13:45:42.992" v="483" actId="1076"/>
-          <ac:picMkLst>
-            <pc:docMk/>
-            <pc:sldMk cId="1528255773" sldId="266"/>
-            <ac:picMk id="11" creationId="{A149FA92-0621-FC2A-85C0-3E9E2FE8A91F}"/>
-          </ac:picMkLst>
-        </pc:picChg>
-        <pc:picChg chg="add mod">
-          <ac:chgData name="Moradi, Peyman" userId="dba91eb0-4a36-42e9-bb56-2c55a234965d" providerId="ADAL" clId="{BB04EFC6-8268-4F75-9FC2-149BB3B3C991}" dt="2025-11-19T13:45:53.633" v="487" actId="14100"/>
-          <ac:picMkLst>
-            <pc:docMk/>
-            <pc:sldMk cId="1528255773" sldId="266"/>
-            <ac:picMk id="14" creationId="{671EBFFD-41B8-9C8A-B276-4BDE92F8F0DB}"/>
-          </ac:picMkLst>
-        </pc:picChg>
-        <pc:picChg chg="add mod">
-          <ac:chgData name="Moradi, Peyman" userId="dba91eb0-4a36-42e9-bb56-2c55a234965d" providerId="ADAL" clId="{BB04EFC6-8268-4F75-9FC2-149BB3B3C991}" dt="2025-11-19T13:48:19.989" v="491" actId="1076"/>
-          <ac:picMkLst>
-            <pc:docMk/>
-            <pc:sldMk cId="1528255773" sldId="266"/>
-            <ac:picMk id="16" creationId="{0125EB6F-872D-CAC9-4F0A-98D875F50CF3}"/>
-          </ac:picMkLst>
-        </pc:picChg>
       </pc:sldChg>
       <pc:sldMasterChg chg="modSldLayout">
         <pc:chgData name="Moradi, Peyman" userId="dba91eb0-4a36-42e9-bb56-2c55a234965d" providerId="ADAL" clId="{BB04EFC6-8268-4F75-9FC2-149BB3B3C991}" dt="2025-11-19T13:54:38.953" v="568" actId="14100"/>
@@ -383,8 +209,350 @@
             <pc:sldMasterMk cId="4273989651" sldId="2147483648"/>
             <pc:sldLayoutMk cId="3198248103" sldId="2147483650"/>
           </pc:sldLayoutMkLst>
+        </pc:sldLayoutChg>
+      </pc:sldMasterChg>
+    </pc:docChg>
+  </pc:docChgLst>
+  <pc:docChgLst>
+    <pc:chgData name="Moradi, Peyman" userId="dba91eb0-4a36-42e9-bb56-2c55a234965d" providerId="ADAL" clId="{C2F2CB6F-16AD-4657-ABB9-2079F8BF5977}"/>
+    <pc:docChg chg="undo custSel addSld modSld sldOrd modMainMaster">
+      <pc:chgData name="Moradi, Peyman" userId="dba91eb0-4a36-42e9-bb56-2c55a234965d" providerId="ADAL" clId="{C2F2CB6F-16AD-4657-ABB9-2079F8BF5977}" dt="2026-02-20T12:45:22.766" v="333" actId="20577"/>
+      <pc:docMkLst>
+        <pc:docMk/>
+      </pc:docMkLst>
+      <pc:sldChg chg="modSp mod">
+        <pc:chgData name="Moradi, Peyman" userId="dba91eb0-4a36-42e9-bb56-2c55a234965d" providerId="ADAL" clId="{C2F2CB6F-16AD-4657-ABB9-2079F8BF5977}" dt="2026-02-20T12:32:43.743" v="109" actId="14100"/>
+        <pc:sldMkLst>
+          <pc:docMk/>
+          <pc:sldMk cId="997169851" sldId="257"/>
+        </pc:sldMkLst>
+        <pc:spChg chg="mod">
+          <ac:chgData name="Moradi, Peyman" userId="dba91eb0-4a36-42e9-bb56-2c55a234965d" providerId="ADAL" clId="{C2F2CB6F-16AD-4657-ABB9-2079F8BF5977}" dt="2026-02-20T12:32:43.743" v="109" actId="14100"/>
+          <ac:spMkLst>
+            <pc:docMk/>
+            <pc:sldMk cId="997169851" sldId="257"/>
+            <ac:spMk id="9" creationId="{258FEDE9-F563-4959-C0F4-C01EFD9AA067}"/>
+          </ac:spMkLst>
+        </pc:spChg>
+      </pc:sldChg>
+      <pc:sldChg chg="addSp modSp">
+        <pc:chgData name="Moradi, Peyman" userId="dba91eb0-4a36-42e9-bb56-2c55a234965d" providerId="ADAL" clId="{C2F2CB6F-16AD-4657-ABB9-2079F8BF5977}" dt="2026-02-20T12:30:49.170" v="90"/>
+        <pc:sldMkLst>
+          <pc:docMk/>
+          <pc:sldMk cId="3609631159" sldId="258"/>
+        </pc:sldMkLst>
+        <pc:picChg chg="add mod">
+          <ac:chgData name="Moradi, Peyman" userId="dba91eb0-4a36-42e9-bb56-2c55a234965d" providerId="ADAL" clId="{C2F2CB6F-16AD-4657-ABB9-2079F8BF5977}" dt="2026-02-20T12:30:49.170" v="90"/>
+          <ac:picMkLst>
+            <pc:docMk/>
+            <pc:sldMk cId="3609631159" sldId="258"/>
+            <ac:picMk id="2" creationId="{3DB1111D-0211-AA57-F873-67C51840D33B}"/>
+          </ac:picMkLst>
+        </pc:picChg>
+      </pc:sldChg>
+      <pc:sldChg chg="addSp delSp modSp mod">
+        <pc:chgData name="Moradi, Peyman" userId="dba91eb0-4a36-42e9-bb56-2c55a234965d" providerId="ADAL" clId="{C2F2CB6F-16AD-4657-ABB9-2079F8BF5977}" dt="2026-02-20T12:45:22.766" v="333" actId="20577"/>
+        <pc:sldMkLst>
+          <pc:docMk/>
+          <pc:sldMk cId="348206209" sldId="259"/>
+        </pc:sldMkLst>
+        <pc:spChg chg="mod">
+          <ac:chgData name="Moradi, Peyman" userId="dba91eb0-4a36-42e9-bb56-2c55a234965d" providerId="ADAL" clId="{C2F2CB6F-16AD-4657-ABB9-2079F8BF5977}" dt="2026-02-20T12:37:45.932" v="213" actId="1076"/>
+          <ac:spMkLst>
+            <pc:docMk/>
+            <pc:sldMk cId="348206209" sldId="259"/>
+            <ac:spMk id="2" creationId="{22D6B876-51A5-CDD2-898A-E4BB297A725F}"/>
+          </ac:spMkLst>
+        </pc:spChg>
+        <pc:spChg chg="mod">
+          <ac:chgData name="Moradi, Peyman" userId="dba91eb0-4a36-42e9-bb56-2c55a234965d" providerId="ADAL" clId="{C2F2CB6F-16AD-4657-ABB9-2079F8BF5977}" dt="2026-02-20T12:45:22.766" v="333" actId="20577"/>
+          <ac:spMkLst>
+            <pc:docMk/>
+            <pc:sldMk cId="348206209" sldId="259"/>
+            <ac:spMk id="4" creationId="{E3199A79-7AF1-F97A-782A-9810527253DD}"/>
+          </ac:spMkLst>
+        </pc:spChg>
+        <pc:grpChg chg="add mod">
+          <ac:chgData name="Moradi, Peyman" userId="dba91eb0-4a36-42e9-bb56-2c55a234965d" providerId="ADAL" clId="{C2F2CB6F-16AD-4657-ABB9-2079F8BF5977}" dt="2026-02-20T12:37:58.751" v="216" actId="164"/>
+          <ac:grpSpMkLst>
+            <pc:docMk/>
+            <pc:sldMk cId="348206209" sldId="259"/>
+            <ac:grpSpMk id="3" creationId="{B4216EDE-9EFB-A14A-81F7-A698B9A65E2A}"/>
+          </ac:grpSpMkLst>
+        </pc:grpChg>
+        <pc:graphicFrameChg chg="del">
+          <ac:chgData name="Moradi, Peyman" userId="dba91eb0-4a36-42e9-bb56-2c55a234965d" providerId="ADAL" clId="{C2F2CB6F-16AD-4657-ABB9-2079F8BF5977}" dt="2026-02-20T12:37:42.577" v="211" actId="478"/>
+          <ac:graphicFrameMkLst>
+            <pc:docMk/>
+            <pc:sldMk cId="348206209" sldId="259"/>
+            <ac:graphicFrameMk id="9" creationId="{AC6D72F3-4A60-50F7-4E1A-41769F30B1FC}"/>
+          </ac:graphicFrameMkLst>
+        </pc:graphicFrameChg>
+        <pc:graphicFrameChg chg="mod modGraphic">
+          <ac:chgData name="Moradi, Peyman" userId="dba91eb0-4a36-42e9-bb56-2c55a234965d" providerId="ADAL" clId="{C2F2CB6F-16AD-4657-ABB9-2079F8BF5977}" dt="2026-02-20T12:37:58.751" v="216" actId="164"/>
+          <ac:graphicFrameMkLst>
+            <pc:docMk/>
+            <pc:sldMk cId="348206209" sldId="259"/>
+            <ac:graphicFrameMk id="10" creationId="{04FFF0D5-86E4-BFB4-A048-E34CF6C0B9DB}"/>
+          </ac:graphicFrameMkLst>
+        </pc:graphicFrameChg>
+        <pc:picChg chg="add del mod">
+          <ac:chgData name="Moradi, Peyman" userId="dba91eb0-4a36-42e9-bb56-2c55a234965d" providerId="ADAL" clId="{C2F2CB6F-16AD-4657-ABB9-2079F8BF5977}" dt="2026-02-20T12:37:43.243" v="212" actId="478"/>
+          <ac:picMkLst>
+            <pc:docMk/>
+            <pc:sldMk cId="348206209" sldId="259"/>
+            <ac:picMk id="5" creationId="{4F541BD6-DD7D-990B-BC10-2FFD4339654B}"/>
+          </ac:picMkLst>
+        </pc:picChg>
+        <pc:picChg chg="mod">
+          <ac:chgData name="Moradi, Peyman" userId="dba91eb0-4a36-42e9-bb56-2c55a234965d" providerId="ADAL" clId="{C2F2CB6F-16AD-4657-ABB9-2079F8BF5977}" dt="2026-02-20T12:37:58.751" v="216" actId="164"/>
+          <ac:picMkLst>
+            <pc:docMk/>
+            <pc:sldMk cId="348206209" sldId="259"/>
+            <ac:picMk id="1032" creationId="{DD8C88D5-2ECC-586E-F688-6577B864EA43}"/>
+          </ac:picMkLst>
+        </pc:picChg>
+      </pc:sldChg>
+      <pc:sldChg chg="mod ord modShow">
+        <pc:chgData name="Moradi, Peyman" userId="dba91eb0-4a36-42e9-bb56-2c55a234965d" providerId="ADAL" clId="{C2F2CB6F-16AD-4657-ABB9-2079F8BF5977}" dt="2026-02-20T12:35:27.344" v="155"/>
+        <pc:sldMkLst>
+          <pc:docMk/>
+          <pc:sldMk cId="334279111" sldId="260"/>
+        </pc:sldMkLst>
+      </pc:sldChg>
+      <pc:sldChg chg="addSp modSp mod">
+        <pc:chgData name="Moradi, Peyman" userId="dba91eb0-4a36-42e9-bb56-2c55a234965d" providerId="ADAL" clId="{C2F2CB6F-16AD-4657-ABB9-2079F8BF5977}" dt="2026-02-20T12:31:05.991" v="97" actId="1076"/>
+        <pc:sldMkLst>
+          <pc:docMk/>
+          <pc:sldMk cId="3903256587" sldId="261"/>
+        </pc:sldMkLst>
+        <pc:spChg chg="mod">
+          <ac:chgData name="Moradi, Peyman" userId="dba91eb0-4a36-42e9-bb56-2c55a234965d" providerId="ADAL" clId="{C2F2CB6F-16AD-4657-ABB9-2079F8BF5977}" dt="2026-02-20T12:30:56.695" v="95" actId="20577"/>
+          <ac:spMkLst>
+            <pc:docMk/>
+            <pc:sldMk cId="3903256587" sldId="261"/>
+            <ac:spMk id="3" creationId="{DD77DABC-AAF1-EE8C-CBC3-473EB5ADCA85}"/>
+          </ac:spMkLst>
+        </pc:spChg>
+        <pc:picChg chg="add mod">
+          <ac:chgData name="Moradi, Peyman" userId="dba91eb0-4a36-42e9-bb56-2c55a234965d" providerId="ADAL" clId="{C2F2CB6F-16AD-4657-ABB9-2079F8BF5977}" dt="2026-02-20T12:31:05.991" v="97" actId="1076"/>
+          <ac:picMkLst>
+            <pc:docMk/>
+            <pc:sldMk cId="3903256587" sldId="261"/>
+            <ac:picMk id="5" creationId="{C6429DA1-C5EF-6642-CEF4-A779DD0557EB}"/>
+          </ac:picMkLst>
+        </pc:picChg>
+        <pc:picChg chg="add mod">
+          <ac:chgData name="Moradi, Peyman" userId="dba91eb0-4a36-42e9-bb56-2c55a234965d" providerId="ADAL" clId="{C2F2CB6F-16AD-4657-ABB9-2079F8BF5977}" dt="2026-02-20T12:30:51.426" v="91"/>
+          <ac:picMkLst>
+            <pc:docMk/>
+            <pc:sldMk cId="3903256587" sldId="261"/>
+            <ac:picMk id="6" creationId="{5FB39458-D30B-1D02-D3DD-64B631B584E1}"/>
+          </ac:picMkLst>
+        </pc:picChg>
+      </pc:sldChg>
+      <pc:sldChg chg="modSp">
+        <pc:chgData name="Moradi, Peyman" userId="dba91eb0-4a36-42e9-bb56-2c55a234965d" providerId="ADAL" clId="{C2F2CB6F-16AD-4657-ABB9-2079F8BF5977}" dt="2026-02-20T12:33:14.768" v="111" actId="693"/>
+        <pc:sldMkLst>
+          <pc:docMk/>
+          <pc:sldMk cId="2701834378" sldId="263"/>
+        </pc:sldMkLst>
+        <pc:graphicFrameChg chg="mod">
+          <ac:chgData name="Moradi, Peyman" userId="dba91eb0-4a36-42e9-bb56-2c55a234965d" providerId="ADAL" clId="{C2F2CB6F-16AD-4657-ABB9-2079F8BF5977}" dt="2026-02-20T12:33:14.768" v="111" actId="693"/>
+          <ac:graphicFrameMkLst>
+            <pc:docMk/>
+            <pc:sldMk cId="2701834378" sldId="263"/>
+            <ac:graphicFrameMk id="5" creationId="{908E90FC-1670-F7B7-C787-26BECD49125B}"/>
+          </ac:graphicFrameMkLst>
+        </pc:graphicFrameChg>
+      </pc:sldChg>
+      <pc:sldChg chg="addSp delSp modSp mod">
+        <pc:chgData name="Moradi, Peyman" userId="dba91eb0-4a36-42e9-bb56-2c55a234965d" providerId="ADAL" clId="{C2F2CB6F-16AD-4657-ABB9-2079F8BF5977}" dt="2026-02-20T12:35:11.115" v="153" actId="313"/>
+        <pc:sldMkLst>
+          <pc:docMk/>
+          <pc:sldMk cId="178843416" sldId="264"/>
+        </pc:sldMkLst>
+        <pc:spChg chg="mod">
+          <ac:chgData name="Moradi, Peyman" userId="dba91eb0-4a36-42e9-bb56-2c55a234965d" providerId="ADAL" clId="{C2F2CB6F-16AD-4657-ABB9-2079F8BF5977}" dt="2026-02-20T12:35:11.115" v="153" actId="313"/>
+          <ac:spMkLst>
+            <pc:docMk/>
+            <pc:sldMk cId="178843416" sldId="264"/>
+            <ac:spMk id="8" creationId="{D309792C-9703-002E-6000-DA4BE63B6216}"/>
+          </ac:spMkLst>
+        </pc:spChg>
+        <pc:spChg chg="mod">
+          <ac:chgData name="Moradi, Peyman" userId="dba91eb0-4a36-42e9-bb56-2c55a234965d" providerId="ADAL" clId="{C2F2CB6F-16AD-4657-ABB9-2079F8BF5977}" dt="2026-02-20T12:35:00.862" v="122" actId="1076"/>
+          <ac:spMkLst>
+            <pc:docMk/>
+            <pc:sldMk cId="178843416" sldId="264"/>
+            <ac:spMk id="12" creationId="{DDF99BFB-3ACB-57E1-8080-72F34CCFA474}"/>
+          </ac:spMkLst>
+        </pc:spChg>
+        <pc:picChg chg="add mod">
+          <ac:chgData name="Moradi, Peyman" userId="dba91eb0-4a36-42e9-bb56-2c55a234965d" providerId="ADAL" clId="{C2F2CB6F-16AD-4657-ABB9-2079F8BF5977}" dt="2026-02-20T12:34:21.555" v="117" actId="1076"/>
+          <ac:picMkLst>
+            <pc:docMk/>
+            <pc:sldMk cId="178843416" sldId="264"/>
+            <ac:picMk id="3" creationId="{B3BC7833-1857-CCF4-B04B-7AD16567E70A}"/>
+          </ac:picMkLst>
+        </pc:picChg>
+        <pc:picChg chg="add mod">
+          <ac:chgData name="Moradi, Peyman" userId="dba91eb0-4a36-42e9-bb56-2c55a234965d" providerId="ADAL" clId="{C2F2CB6F-16AD-4657-ABB9-2079F8BF5977}" dt="2026-02-20T12:34:52.005" v="121" actId="1076"/>
+          <ac:picMkLst>
+            <pc:docMk/>
+            <pc:sldMk cId="178843416" sldId="264"/>
+            <ac:picMk id="5" creationId="{E30F6090-A84F-85AE-E70C-A9A21187BF9A}"/>
+          </ac:picMkLst>
+        </pc:picChg>
+        <pc:picChg chg="del mod">
+          <ac:chgData name="Moradi, Peyman" userId="dba91eb0-4a36-42e9-bb56-2c55a234965d" providerId="ADAL" clId="{C2F2CB6F-16AD-4657-ABB9-2079F8BF5977}" dt="2026-02-20T12:34:14.819" v="114" actId="478"/>
+          <ac:picMkLst>
+            <pc:docMk/>
+            <pc:sldMk cId="178843416" sldId="264"/>
+            <ac:picMk id="7" creationId="{06750C7B-352F-E1D2-7698-7F93851933A5}"/>
+          </ac:picMkLst>
+        </pc:picChg>
+      </pc:sldChg>
+      <pc:sldChg chg="ord">
+        <pc:chgData name="Moradi, Peyman" userId="dba91eb0-4a36-42e9-bb56-2c55a234965d" providerId="ADAL" clId="{C2F2CB6F-16AD-4657-ABB9-2079F8BF5977}" dt="2026-02-20T12:43:41.534" v="313"/>
+        <pc:sldMkLst>
+          <pc:docMk/>
+          <pc:sldMk cId="4178740839" sldId="265"/>
+        </pc:sldMkLst>
+      </pc:sldChg>
+      <pc:sldChg chg="modSp mod ord">
+        <pc:chgData name="Moradi, Peyman" userId="dba91eb0-4a36-42e9-bb56-2c55a234965d" providerId="ADAL" clId="{C2F2CB6F-16AD-4657-ABB9-2079F8BF5977}" dt="2026-02-20T12:43:40.033" v="311"/>
+        <pc:sldMkLst>
+          <pc:docMk/>
+          <pc:sldMk cId="1528255773" sldId="266"/>
+        </pc:sldMkLst>
+        <pc:spChg chg="mod">
+          <ac:chgData name="Moradi, Peyman" userId="dba91eb0-4a36-42e9-bb56-2c55a234965d" providerId="ADAL" clId="{C2F2CB6F-16AD-4657-ABB9-2079F8BF5977}" dt="2026-02-20T12:43:38.331" v="309" actId="20577"/>
+          <ac:spMkLst>
+            <pc:docMk/>
+            <pc:sldMk cId="1528255773" sldId="266"/>
+            <ac:spMk id="4" creationId="{88F8AC78-AEF7-1AE4-6FE2-0B25B9B25E6D}"/>
+          </ac:spMkLst>
+        </pc:spChg>
+      </pc:sldChg>
+      <pc:sldChg chg="addSp delSp modSp add mod">
+        <pc:chgData name="Moradi, Peyman" userId="dba91eb0-4a36-42e9-bb56-2c55a234965d" providerId="ADAL" clId="{C2F2CB6F-16AD-4657-ABB9-2079F8BF5977}" dt="2026-02-20T12:44:58.328" v="326" actId="403"/>
+        <pc:sldMkLst>
+          <pc:docMk/>
+          <pc:sldMk cId="1785318421" sldId="267"/>
+        </pc:sldMkLst>
+        <pc:spChg chg="add del">
+          <ac:chgData name="Moradi, Peyman" userId="dba91eb0-4a36-42e9-bb56-2c55a234965d" providerId="ADAL" clId="{C2F2CB6F-16AD-4657-ABB9-2079F8BF5977}" dt="2026-02-20T12:38:55.301" v="233" actId="478"/>
+          <ac:spMkLst>
+            <pc:docMk/>
+            <pc:sldMk cId="1785318421" sldId="267"/>
+            <ac:spMk id="2" creationId="{AA18AC7E-51BC-2890-B748-4ED5CE587E17}"/>
+          </ac:spMkLst>
+        </pc:spChg>
+        <pc:spChg chg="mod">
+          <ac:chgData name="Moradi, Peyman" userId="dba91eb0-4a36-42e9-bb56-2c55a234965d" providerId="ADAL" clId="{C2F2CB6F-16AD-4657-ABB9-2079F8BF5977}" dt="2026-02-20T12:44:58.328" v="326" actId="403"/>
+          <ac:spMkLst>
+            <pc:docMk/>
+            <pc:sldMk cId="1785318421" sldId="267"/>
+            <ac:spMk id="4" creationId="{40D892B3-6ED8-9655-75E1-6A5D6C659248}"/>
+          </ac:spMkLst>
+        </pc:spChg>
+        <pc:graphicFrameChg chg="mod modGraphic">
+          <ac:chgData name="Moradi, Peyman" userId="dba91eb0-4a36-42e9-bb56-2c55a234965d" providerId="ADAL" clId="{C2F2CB6F-16AD-4657-ABB9-2079F8BF5977}" dt="2026-02-20T12:43:24.780" v="302" actId="403"/>
+          <ac:graphicFrameMkLst>
+            <pc:docMk/>
+            <pc:sldMk cId="1785318421" sldId="267"/>
+            <ac:graphicFrameMk id="9" creationId="{F4A65CC7-2DFA-3E51-4EFD-5E4E7CF17266}"/>
+          </ac:graphicFrameMkLst>
+        </pc:graphicFrameChg>
+        <pc:graphicFrameChg chg="del">
+          <ac:chgData name="Moradi, Peyman" userId="dba91eb0-4a36-42e9-bb56-2c55a234965d" providerId="ADAL" clId="{C2F2CB6F-16AD-4657-ABB9-2079F8BF5977}" dt="2026-02-20T12:38:03.230" v="217" actId="478"/>
+          <ac:graphicFrameMkLst>
+            <pc:docMk/>
+            <pc:sldMk cId="1785318421" sldId="267"/>
+            <ac:graphicFrameMk id="10" creationId="{40290919-E4E5-C19C-AF5E-E36CB7648FD5}"/>
+          </ac:graphicFrameMkLst>
+        </pc:graphicFrameChg>
+        <pc:picChg chg="add del">
+          <ac:chgData name="Moradi, Peyman" userId="dba91eb0-4a36-42e9-bb56-2c55a234965d" providerId="ADAL" clId="{C2F2CB6F-16AD-4657-ABB9-2079F8BF5977}" dt="2026-02-20T12:40:22.692" v="275" actId="478"/>
+          <ac:picMkLst>
+            <pc:docMk/>
+            <pc:sldMk cId="1785318421" sldId="267"/>
+            <ac:picMk id="5" creationId="{A01A39A7-DDB4-159F-7BC6-6E6613A701DC}"/>
+          </ac:picMkLst>
+        </pc:picChg>
+        <pc:picChg chg="del">
+          <ac:chgData name="Moradi, Peyman" userId="dba91eb0-4a36-42e9-bb56-2c55a234965d" providerId="ADAL" clId="{C2F2CB6F-16AD-4657-ABB9-2079F8BF5977}" dt="2026-02-20T12:38:05.190" v="218" actId="478"/>
+          <ac:picMkLst>
+            <pc:docMk/>
+            <pc:sldMk cId="1785318421" sldId="267"/>
+            <ac:picMk id="1032" creationId="{F5AA8EDC-5700-570A-AA6C-FB6E17CF3858}"/>
+          </ac:picMkLst>
+        </pc:picChg>
+      </pc:sldChg>
+      <pc:sldChg chg="addSp delSp modSp new mod">
+        <pc:chgData name="Moradi, Peyman" userId="dba91eb0-4a36-42e9-bb56-2c55a234965d" providerId="ADAL" clId="{C2F2CB6F-16AD-4657-ABB9-2079F8BF5977}" dt="2026-02-20T12:43:55.950" v="324" actId="478"/>
+        <pc:sldMkLst>
+          <pc:docMk/>
+          <pc:sldMk cId="2192517749" sldId="268"/>
+        </pc:sldMkLst>
+        <pc:spChg chg="del mod">
+          <ac:chgData name="Moradi, Peyman" userId="dba91eb0-4a36-42e9-bb56-2c55a234965d" providerId="ADAL" clId="{C2F2CB6F-16AD-4657-ABB9-2079F8BF5977}" dt="2026-02-20T12:43:53.787" v="322" actId="478"/>
+          <ac:spMkLst>
+            <pc:docMk/>
+            <pc:sldMk cId="2192517749" sldId="268"/>
+            <ac:spMk id="2" creationId="{E89043BA-38FD-8AD1-092F-D56136FD1FE2}"/>
+          </ac:spMkLst>
+        </pc:spChg>
+        <pc:spChg chg="del">
+          <ac:chgData name="Moradi, Peyman" userId="dba91eb0-4a36-42e9-bb56-2c55a234965d" providerId="ADAL" clId="{C2F2CB6F-16AD-4657-ABB9-2079F8BF5977}" dt="2026-02-20T12:43:55.347" v="323" actId="478"/>
+          <ac:spMkLst>
+            <pc:docMk/>
+            <pc:sldMk cId="2192517749" sldId="268"/>
+            <ac:spMk id="3" creationId="{2EE4F911-9A81-91D6-CD82-54EDF6A6FF58}"/>
+          </ac:spMkLst>
+        </pc:spChg>
+        <pc:spChg chg="add mod">
+          <ac:chgData name="Moradi, Peyman" userId="dba91eb0-4a36-42e9-bb56-2c55a234965d" providerId="ADAL" clId="{C2F2CB6F-16AD-4657-ABB9-2079F8BF5977}" dt="2026-02-20T12:43:51.878" v="321"/>
+          <ac:spMkLst>
+            <pc:docMk/>
+            <pc:sldMk cId="2192517749" sldId="268"/>
+            <ac:spMk id="4" creationId="{79B40E0F-6392-1FE3-D9EB-EFA9D71A09BD}"/>
+          </ac:spMkLst>
+        </pc:spChg>
+        <pc:spChg chg="add del mod">
+          <ac:chgData name="Moradi, Peyman" userId="dba91eb0-4a36-42e9-bb56-2c55a234965d" providerId="ADAL" clId="{C2F2CB6F-16AD-4657-ABB9-2079F8BF5977}" dt="2026-02-20T12:43:55.950" v="324" actId="478"/>
+          <ac:spMkLst>
+            <pc:docMk/>
+            <pc:sldMk cId="2192517749" sldId="268"/>
+            <ac:spMk id="6" creationId="{E3FD4BDD-95D8-EA5F-1D61-7B3F4A025191}"/>
+          </ac:spMkLst>
+        </pc:spChg>
+      </pc:sldChg>
+      <pc:sldMasterChg chg="modSldLayout">
+        <pc:chgData name="Moradi, Peyman" userId="dba91eb0-4a36-42e9-bb56-2c55a234965d" providerId="ADAL" clId="{C2F2CB6F-16AD-4657-ABB9-2079F8BF5977}" dt="2026-02-20T12:32:19.123" v="107" actId="14100"/>
+        <pc:sldMasterMkLst>
+          <pc:docMk/>
+          <pc:sldMasterMk cId="4273989651" sldId="2147483648"/>
+        </pc:sldMasterMkLst>
+        <pc:sldLayoutChg chg="addSp delSp modSp mod">
+          <pc:chgData name="Moradi, Peyman" userId="dba91eb0-4a36-42e9-bb56-2c55a234965d" providerId="ADAL" clId="{C2F2CB6F-16AD-4657-ABB9-2079F8BF5977}" dt="2026-02-20T12:32:19.123" v="107" actId="14100"/>
+          <pc:sldLayoutMkLst>
+            <pc:docMk/>
+            <pc:sldMasterMk cId="4273989651" sldId="2147483648"/>
+            <pc:sldLayoutMk cId="3198248103" sldId="2147483650"/>
+          </pc:sldLayoutMkLst>
           <pc:picChg chg="add mod">
-            <ac:chgData name="Moradi, Peyman" userId="dba91eb0-4a36-42e9-bb56-2c55a234965d" providerId="ADAL" clId="{BB04EFC6-8268-4F75-9FC2-149BB3B3C991}" dt="2025-11-19T13:54:38.953" v="568" actId="14100"/>
+            <ac:chgData name="Moradi, Peyman" userId="dba91eb0-4a36-42e9-bb56-2c55a234965d" providerId="ADAL" clId="{C2F2CB6F-16AD-4657-ABB9-2079F8BF5977}" dt="2026-02-20T12:32:19.123" v="107" actId="14100"/>
+            <ac:picMkLst>
+              <pc:docMk/>
+              <pc:sldMasterMk cId="4273989651" sldId="2147483648"/>
+              <pc:sldLayoutMk cId="3198248103" sldId="2147483650"/>
+              <ac:picMk id="7" creationId="{5E0AE5C6-C3A3-4D45-378C-0785B6B731AE}"/>
+            </ac:picMkLst>
+          </pc:picChg>
+          <pc:picChg chg="del">
+            <ac:chgData name="Moradi, Peyman" userId="dba91eb0-4a36-42e9-bb56-2c55a234965d" providerId="ADAL" clId="{C2F2CB6F-16AD-4657-ABB9-2079F8BF5977}" dt="2026-02-20T12:32:05.883" v="101" actId="478"/>
             <ac:picMkLst>
               <pc:docMk/>
               <pc:sldMasterMk cId="4273989651" sldId="2147483648"/>
@@ -394,46 +562,6 @@
           </pc:picChg>
         </pc:sldLayoutChg>
       </pc:sldMasterChg>
-    </pc:docChg>
-  </pc:docChgLst>
-  <pc:docChgLst>
-    <pc:chgData name="Moradi, Peyman" userId="dba91eb0-4a36-42e9-bb56-2c55a234965d" providerId="ADAL" clId="{C2F2CB6F-16AD-4657-ABB9-2079F8BF5977}"/>
-    <pc:docChg chg="modSld">
-      <pc:chgData name="Moradi, Peyman" userId="dba91eb0-4a36-42e9-bb56-2c55a234965d" providerId="ADAL" clId="{C2F2CB6F-16AD-4657-ABB9-2079F8BF5977}" dt="2026-01-11T19:47:19.296" v="70" actId="1076"/>
-      <pc:docMkLst>
-        <pc:docMk/>
-      </pc:docMkLst>
-      <pc:sldChg chg="addSp modSp mod">
-        <pc:chgData name="Moradi, Peyman" userId="dba91eb0-4a36-42e9-bb56-2c55a234965d" providerId="ADAL" clId="{C2F2CB6F-16AD-4657-ABB9-2079F8BF5977}" dt="2026-01-11T19:47:19.296" v="70" actId="1076"/>
-        <pc:sldMkLst>
-          <pc:docMk/>
-          <pc:sldMk cId="348206209" sldId="259"/>
-        </pc:sldMkLst>
-        <pc:graphicFrameChg chg="mod">
-          <ac:chgData name="Moradi, Peyman" userId="dba91eb0-4a36-42e9-bb56-2c55a234965d" providerId="ADAL" clId="{C2F2CB6F-16AD-4657-ABB9-2079F8BF5977}" dt="2026-01-09T20:04:16.371" v="34" actId="20577"/>
-          <ac:graphicFrameMkLst>
-            <pc:docMk/>
-            <pc:sldMk cId="348206209" sldId="259"/>
-            <ac:graphicFrameMk id="10" creationId="{04FFF0D5-86E4-BFB4-A048-E34CF6C0B9DB}"/>
-          </ac:graphicFrameMkLst>
-        </pc:graphicFrameChg>
-        <pc:picChg chg="add mod">
-          <ac:chgData name="Moradi, Peyman" userId="dba91eb0-4a36-42e9-bb56-2c55a234965d" providerId="ADAL" clId="{C2F2CB6F-16AD-4657-ABB9-2079F8BF5977}" dt="2026-01-11T19:47:19.296" v="70" actId="1076"/>
-          <ac:picMkLst>
-            <pc:docMk/>
-            <pc:sldMk cId="348206209" sldId="259"/>
-            <ac:picMk id="5" creationId="{4F541BD6-DD7D-990B-BC10-2FFD4339654B}"/>
-          </ac:picMkLst>
-        </pc:picChg>
-        <pc:picChg chg="mod">
-          <ac:chgData name="Moradi, Peyman" userId="dba91eb0-4a36-42e9-bb56-2c55a234965d" providerId="ADAL" clId="{C2F2CB6F-16AD-4657-ABB9-2079F8BF5977}" dt="2026-01-09T20:04:37.126" v="68" actId="1038"/>
-          <ac:picMkLst>
-            <pc:docMk/>
-            <pc:sldMk cId="348206209" sldId="259"/>
-            <ac:picMk id="1032" creationId="{DD8C88D5-2ECC-586E-F688-6577B864EA43}"/>
-          </ac:picMkLst>
-        </pc:picChg>
-      </pc:sldChg>
     </pc:docChg>
   </pc:docChgLst>
   <pc:docChgLst>
@@ -3657,249 +3785,37 @@
 </file>
 
 <file path=ppt/diagrams/colors5.xml><?xml version="1.0" encoding="utf-8"?>
-<dgm:colorsDef xmlns:dgm="http://schemas.openxmlformats.org/drawingml/2006/diagram" xmlns:a="http://schemas.openxmlformats.org/drawingml/2006/main" uniqueId="urn:microsoft.com/office/officeart/2005/8/colors/accent3_1">
+<dgm:colorsDef xmlns:dgm="http://schemas.openxmlformats.org/drawingml/2006/diagram" xmlns:a="http://schemas.openxmlformats.org/drawingml/2006/main" uniqueId="urn:microsoft.com/office/officeart/2005/8/colors/accent3_2">
   <dgm:title val=""/>
   <dgm:desc val=""/>
   <dgm:catLst>
-    <dgm:cat type="accent3" pri="11100"/>
+    <dgm:cat type="accent3" pri="11200"/>
   </dgm:catLst>
   <dgm:styleLbl name="node0">
     <dgm:fillClrLst meth="repeat">
-      <a:schemeClr val="lt1"/>
+      <a:schemeClr val="accent3"/>
     </dgm:fillClrLst>
     <dgm:linClrLst meth="repeat">
-      <a:schemeClr val="accent3">
-        <a:shade val="80000"/>
-      </a:schemeClr>
-    </dgm:linClrLst>
-    <dgm:effectClrLst/>
-    <dgm:txLinClrLst/>
-    <dgm:txFillClrLst meth="repeat">
-      <a:schemeClr val="dk1"/>
-    </dgm:txFillClrLst>
-    <dgm:txEffectClrLst/>
-  </dgm:styleLbl>
-  <dgm:styleLbl name="node1">
-    <dgm:fillClrLst meth="repeat">
       <a:schemeClr val="lt1"/>
-    </dgm:fillClrLst>
-    <dgm:linClrLst meth="repeat">
-      <a:schemeClr val="accent3">
-        <a:shade val="80000"/>
-      </a:schemeClr>
-    </dgm:linClrLst>
-    <dgm:effectClrLst/>
-    <dgm:txLinClrLst/>
-    <dgm:txFillClrLst meth="repeat">
-      <a:schemeClr val="dk1"/>
-    </dgm:txFillClrLst>
-    <dgm:txEffectClrLst/>
-  </dgm:styleLbl>
-  <dgm:styleLbl name="alignNode1">
-    <dgm:fillClrLst meth="repeat">
-      <a:schemeClr val="lt1"/>
-    </dgm:fillClrLst>
-    <dgm:linClrLst meth="repeat">
-      <a:schemeClr val="accent3">
-        <a:shade val="80000"/>
-      </a:schemeClr>
-    </dgm:linClrLst>
-    <dgm:effectClrLst/>
-    <dgm:txLinClrLst/>
-    <dgm:txFillClrLst meth="repeat">
-      <a:schemeClr val="dk1"/>
-    </dgm:txFillClrLst>
-    <dgm:txEffectClrLst/>
-  </dgm:styleLbl>
-  <dgm:styleLbl name="lnNode1">
-    <dgm:fillClrLst meth="repeat">
-      <a:schemeClr val="lt1"/>
-    </dgm:fillClrLst>
-    <dgm:linClrLst meth="repeat">
-      <a:schemeClr val="accent3">
-        <a:shade val="80000"/>
-      </a:schemeClr>
-    </dgm:linClrLst>
-    <dgm:effectClrLst/>
-    <dgm:txLinClrLst/>
-    <dgm:txFillClrLst meth="repeat">
-      <a:schemeClr val="dk1"/>
-    </dgm:txFillClrLst>
-    <dgm:txEffectClrLst/>
-  </dgm:styleLbl>
-  <dgm:styleLbl name="vennNode1">
-    <dgm:fillClrLst meth="repeat">
-      <a:schemeClr val="lt1">
-        <a:alpha val="50000"/>
-      </a:schemeClr>
-    </dgm:fillClrLst>
-    <dgm:linClrLst meth="repeat">
-      <a:schemeClr val="accent3">
-        <a:shade val="80000"/>
-      </a:schemeClr>
     </dgm:linClrLst>
     <dgm:effectClrLst/>
     <dgm:txLinClrLst/>
     <dgm:txFillClrLst/>
     <dgm:txEffectClrLst/>
   </dgm:styleLbl>
-  <dgm:styleLbl name="node2">
+  <dgm:styleLbl name="node1">
     <dgm:fillClrLst meth="repeat">
-      <a:schemeClr val="lt1"/>
+      <a:schemeClr val="accent3"/>
     </dgm:fillClrLst>
     <dgm:linClrLst meth="repeat">
-      <a:schemeClr val="accent3">
-        <a:shade val="80000"/>
-      </a:schemeClr>
+      <a:schemeClr val="lt1"/>
     </dgm:linClrLst>
     <dgm:effectClrLst/>
     <dgm:txLinClrLst/>
-    <dgm:txFillClrLst meth="repeat">
-      <a:schemeClr val="dk1"/>
-    </dgm:txFillClrLst>
+    <dgm:txFillClrLst/>
     <dgm:txEffectClrLst/>
   </dgm:styleLbl>
-  <dgm:styleLbl name="node3">
-    <dgm:fillClrLst meth="repeat">
-      <a:schemeClr val="lt1"/>
-    </dgm:fillClrLst>
-    <dgm:linClrLst meth="repeat">
-      <a:schemeClr val="accent3">
-        <a:shade val="80000"/>
-      </a:schemeClr>
-    </dgm:linClrLst>
-    <dgm:effectClrLst/>
-    <dgm:txLinClrLst/>
-    <dgm:txFillClrLst meth="repeat">
-      <a:schemeClr val="dk1"/>
-    </dgm:txFillClrLst>
-    <dgm:txEffectClrLst/>
-  </dgm:styleLbl>
-  <dgm:styleLbl name="node4">
-    <dgm:fillClrLst meth="repeat">
-      <a:schemeClr val="lt1"/>
-    </dgm:fillClrLst>
-    <dgm:linClrLst meth="repeat">
-      <a:schemeClr val="accent3">
-        <a:shade val="80000"/>
-      </a:schemeClr>
-    </dgm:linClrLst>
-    <dgm:effectClrLst/>
-    <dgm:txLinClrLst/>
-    <dgm:txFillClrLst meth="repeat">
-      <a:schemeClr val="dk1"/>
-    </dgm:txFillClrLst>
-    <dgm:txEffectClrLst/>
-  </dgm:styleLbl>
-  <dgm:styleLbl name="fgImgPlace1">
-    <dgm:fillClrLst meth="repeat">
-      <a:schemeClr val="accent3">
-        <a:tint val="40000"/>
-      </a:schemeClr>
-    </dgm:fillClrLst>
-    <dgm:linClrLst meth="repeat">
-      <a:schemeClr val="accent3">
-        <a:shade val="80000"/>
-      </a:schemeClr>
-    </dgm:linClrLst>
-    <dgm:effectClrLst/>
-    <dgm:txLinClrLst/>
-    <dgm:txFillClrLst meth="repeat">
-      <a:schemeClr val="lt1"/>
-    </dgm:txFillClrLst>
-    <dgm:txEffectClrLst/>
-  </dgm:styleLbl>
-  <dgm:styleLbl name="alignImgPlace1">
-    <dgm:fillClrLst meth="repeat">
-      <a:schemeClr val="accent3">
-        <a:tint val="40000"/>
-      </a:schemeClr>
-    </dgm:fillClrLst>
-    <dgm:linClrLst meth="repeat">
-      <a:schemeClr val="accent3">
-        <a:shade val="80000"/>
-      </a:schemeClr>
-    </dgm:linClrLst>
-    <dgm:effectClrLst/>
-    <dgm:txLinClrLst/>
-    <dgm:txFillClrLst meth="repeat">
-      <a:schemeClr val="lt1"/>
-    </dgm:txFillClrLst>
-    <dgm:txEffectClrLst/>
-  </dgm:styleLbl>
-  <dgm:styleLbl name="bgImgPlace1">
-    <dgm:fillClrLst meth="repeat">
-      <a:schemeClr val="accent3">
-        <a:tint val="40000"/>
-      </a:schemeClr>
-    </dgm:fillClrLst>
-    <dgm:linClrLst meth="repeat">
-      <a:schemeClr val="accent3">
-        <a:shade val="80000"/>
-      </a:schemeClr>
-    </dgm:linClrLst>
-    <dgm:effectClrLst/>
-    <dgm:txLinClrLst/>
-    <dgm:txFillClrLst meth="repeat">
-      <a:schemeClr val="lt1"/>
-    </dgm:txFillClrLst>
-    <dgm:txEffectClrLst/>
-  </dgm:styleLbl>
-  <dgm:styleLbl name="sibTrans2D1">
-    <dgm:fillClrLst meth="repeat">
-      <a:schemeClr val="accent3">
-        <a:tint val="60000"/>
-      </a:schemeClr>
-    </dgm:fillClrLst>
-    <dgm:linClrLst meth="repeat">
-      <a:schemeClr val="accent3">
-        <a:tint val="60000"/>
-      </a:schemeClr>
-    </dgm:linClrLst>
-    <dgm:effectClrLst/>
-    <dgm:txLinClrLst/>
-    <dgm:txFillClrLst meth="repeat">
-      <a:schemeClr val="dk1"/>
-    </dgm:txFillClrLst>
-    <dgm:txEffectClrLst/>
-  </dgm:styleLbl>
-  <dgm:styleLbl name="fgSibTrans2D1">
-    <dgm:fillClrLst meth="repeat">
-      <a:schemeClr val="accent3">
-        <a:tint val="60000"/>
-      </a:schemeClr>
-    </dgm:fillClrLst>
-    <dgm:linClrLst meth="repeat">
-      <a:schemeClr val="accent3">
-        <a:tint val="60000"/>
-      </a:schemeClr>
-    </dgm:linClrLst>
-    <dgm:effectClrLst/>
-    <dgm:txLinClrLst/>
-    <dgm:txFillClrLst meth="repeat">
-      <a:schemeClr val="dk1"/>
-    </dgm:txFillClrLst>
-    <dgm:txEffectClrLst/>
-  </dgm:styleLbl>
-  <dgm:styleLbl name="bgSibTrans2D1">
-    <dgm:fillClrLst meth="repeat">
-      <a:schemeClr val="accent3">
-        <a:tint val="60000"/>
-      </a:schemeClr>
-    </dgm:fillClrLst>
-    <dgm:linClrLst meth="repeat">
-      <a:schemeClr val="accent3">
-        <a:tint val="60000"/>
-      </a:schemeClr>
-    </dgm:linClrLst>
-    <dgm:effectClrLst/>
-    <dgm:txLinClrLst/>
-    <dgm:txFillClrLst meth="repeat">
-      <a:schemeClr val="dk1"/>
-    </dgm:txFillClrLst>
-    <dgm:txEffectClrLst/>
-  </dgm:styleLbl>
-  <dgm:styleLbl name="sibTrans1D1">
+  <dgm:styleLbl name="alignNode1">
     <dgm:fillClrLst meth="repeat">
       <a:schemeClr val="accent3"/>
     </dgm:fillClrLst>
@@ -3908,106 +3824,120 @@
     </dgm:linClrLst>
     <dgm:effectClrLst/>
     <dgm:txLinClrLst/>
-    <dgm:txFillClrLst meth="repeat">
-      <a:schemeClr val="tx1"/>
-    </dgm:txFillClrLst>
+    <dgm:txFillClrLst/>
     <dgm:txEffectClrLst/>
   </dgm:styleLbl>
-  <dgm:styleLbl name="callout">
+  <dgm:styleLbl name="lnNode1">
     <dgm:fillClrLst meth="repeat">
       <a:schemeClr val="accent3"/>
     </dgm:fillClrLst>
     <dgm:linClrLst meth="repeat">
+      <a:schemeClr val="lt1"/>
+    </dgm:linClrLst>
+    <dgm:effectClrLst/>
+    <dgm:txLinClrLst/>
+    <dgm:txFillClrLst/>
+    <dgm:txEffectClrLst/>
+  </dgm:styleLbl>
+  <dgm:styleLbl name="vennNode1">
+    <dgm:fillClrLst meth="repeat">
+      <a:schemeClr val="accent3">
+        <a:alpha val="50000"/>
+      </a:schemeClr>
+    </dgm:fillClrLst>
+    <dgm:linClrLst meth="repeat">
+      <a:schemeClr val="lt1"/>
+    </dgm:linClrLst>
+    <dgm:effectClrLst/>
+    <dgm:txLinClrLst/>
+    <dgm:txFillClrLst/>
+    <dgm:txEffectClrLst/>
+  </dgm:styleLbl>
+  <dgm:styleLbl name="node2">
+    <dgm:fillClrLst meth="repeat">
       <a:schemeClr val="accent3"/>
+    </dgm:fillClrLst>
+    <dgm:linClrLst meth="repeat">
+      <a:schemeClr val="lt1"/>
+    </dgm:linClrLst>
+    <dgm:effectClrLst/>
+    <dgm:txLinClrLst/>
+    <dgm:txFillClrLst/>
+    <dgm:txEffectClrLst/>
+  </dgm:styleLbl>
+  <dgm:styleLbl name="node3">
+    <dgm:fillClrLst meth="repeat">
+      <a:schemeClr val="accent3"/>
+    </dgm:fillClrLst>
+    <dgm:linClrLst meth="repeat">
+      <a:schemeClr val="lt1"/>
+    </dgm:linClrLst>
+    <dgm:effectClrLst/>
+    <dgm:txLinClrLst/>
+    <dgm:txFillClrLst/>
+    <dgm:txEffectClrLst/>
+  </dgm:styleLbl>
+  <dgm:styleLbl name="node4">
+    <dgm:fillClrLst meth="repeat">
+      <a:schemeClr val="accent3"/>
+    </dgm:fillClrLst>
+    <dgm:linClrLst meth="repeat">
+      <a:schemeClr val="lt1"/>
+    </dgm:linClrLst>
+    <dgm:effectClrLst/>
+    <dgm:txLinClrLst/>
+    <dgm:txFillClrLst/>
+    <dgm:txEffectClrLst/>
+  </dgm:styleLbl>
+  <dgm:styleLbl name="fgImgPlace1">
+    <dgm:fillClrLst meth="repeat">
+      <a:schemeClr val="accent3">
+        <a:tint val="50000"/>
+      </a:schemeClr>
+    </dgm:fillClrLst>
+    <dgm:linClrLst meth="repeat">
+      <a:schemeClr val="lt1"/>
     </dgm:linClrLst>
     <dgm:effectClrLst/>
     <dgm:txLinClrLst/>
     <dgm:txFillClrLst meth="repeat">
-      <a:schemeClr val="tx1"/>
+      <a:schemeClr val="lt1"/>
     </dgm:txFillClrLst>
     <dgm:txEffectClrLst/>
   </dgm:styleLbl>
-  <dgm:styleLbl name="asst0">
+  <dgm:styleLbl name="alignImgPlace1">
     <dgm:fillClrLst meth="repeat">
-      <a:schemeClr val="lt1"/>
+      <a:schemeClr val="accent3">
+        <a:tint val="50000"/>
+      </a:schemeClr>
     </dgm:fillClrLst>
     <dgm:linClrLst meth="repeat">
-      <a:schemeClr val="accent3">
-        <a:shade val="80000"/>
-      </a:schemeClr>
+      <a:schemeClr val="lt1"/>
     </dgm:linClrLst>
     <dgm:effectClrLst/>
     <dgm:txLinClrLst/>
     <dgm:txFillClrLst meth="repeat">
-      <a:schemeClr val="dk1"/>
+      <a:schemeClr val="lt1"/>
     </dgm:txFillClrLst>
     <dgm:txEffectClrLst/>
   </dgm:styleLbl>
-  <dgm:styleLbl name="asst1">
+  <dgm:styleLbl name="bgImgPlace1">
     <dgm:fillClrLst meth="repeat">
-      <a:schemeClr val="lt1"/>
+      <a:schemeClr val="accent3">
+        <a:tint val="50000"/>
+      </a:schemeClr>
     </dgm:fillClrLst>
     <dgm:linClrLst meth="repeat">
-      <a:schemeClr val="accent3">
-        <a:shade val="80000"/>
-      </a:schemeClr>
+      <a:schemeClr val="lt1"/>
     </dgm:linClrLst>
     <dgm:effectClrLst/>
     <dgm:txLinClrLst/>
     <dgm:txFillClrLst meth="repeat">
-      <a:schemeClr val="dk1"/>
+      <a:schemeClr val="lt1"/>
     </dgm:txFillClrLst>
     <dgm:txEffectClrLst/>
   </dgm:styleLbl>
-  <dgm:styleLbl name="asst2">
-    <dgm:fillClrLst meth="repeat">
-      <a:schemeClr val="lt1"/>
-    </dgm:fillClrLst>
-    <dgm:linClrLst meth="repeat">
-      <a:schemeClr val="accent3">
-        <a:shade val="80000"/>
-      </a:schemeClr>
-    </dgm:linClrLst>
-    <dgm:effectClrLst/>
-    <dgm:txLinClrLst/>
-    <dgm:txFillClrLst meth="repeat">
-      <a:schemeClr val="dk1"/>
-    </dgm:txFillClrLst>
-    <dgm:txEffectClrLst/>
-  </dgm:styleLbl>
-  <dgm:styleLbl name="asst3">
-    <dgm:fillClrLst meth="repeat">
-      <a:schemeClr val="lt1"/>
-    </dgm:fillClrLst>
-    <dgm:linClrLst meth="repeat">
-      <a:schemeClr val="accent3">
-        <a:shade val="80000"/>
-      </a:schemeClr>
-    </dgm:linClrLst>
-    <dgm:effectClrLst/>
-    <dgm:txLinClrLst/>
-    <dgm:txFillClrLst meth="repeat">
-      <a:schemeClr val="dk1"/>
-    </dgm:txFillClrLst>
-    <dgm:txEffectClrLst/>
-  </dgm:styleLbl>
-  <dgm:styleLbl name="asst4">
-    <dgm:fillClrLst meth="repeat">
-      <a:schemeClr val="lt1"/>
-    </dgm:fillClrLst>
-    <dgm:linClrLst meth="repeat">
-      <a:schemeClr val="accent3">
-        <a:shade val="80000"/>
-      </a:schemeClr>
-    </dgm:linClrLst>
-    <dgm:effectClrLst/>
-    <dgm:txLinClrLst/>
-    <dgm:txFillClrLst meth="repeat">
-      <a:schemeClr val="dk1"/>
-    </dgm:txFillClrLst>
-    <dgm:txEffectClrLst/>
-  </dgm:styleLbl>
-  <dgm:styleLbl name="parChTrans2D1">
+  <dgm:styleLbl name="sibTrans2D1">
     <dgm:fillClrLst meth="repeat">
       <a:schemeClr val="accent3">
         <a:tint val="60000"/>
@@ -4023,6 +3953,146 @@
     <dgm:txFillClrLst/>
     <dgm:txEffectClrLst/>
   </dgm:styleLbl>
+  <dgm:styleLbl name="fgSibTrans2D1">
+    <dgm:fillClrLst meth="repeat">
+      <a:schemeClr val="accent3">
+        <a:tint val="60000"/>
+      </a:schemeClr>
+    </dgm:fillClrLst>
+    <dgm:linClrLst meth="repeat">
+      <a:schemeClr val="accent3">
+        <a:tint val="60000"/>
+      </a:schemeClr>
+    </dgm:linClrLst>
+    <dgm:effectClrLst/>
+    <dgm:txLinClrLst/>
+    <dgm:txFillClrLst/>
+    <dgm:txEffectClrLst/>
+  </dgm:styleLbl>
+  <dgm:styleLbl name="bgSibTrans2D1">
+    <dgm:fillClrLst meth="repeat">
+      <a:schemeClr val="accent3">
+        <a:tint val="60000"/>
+      </a:schemeClr>
+    </dgm:fillClrLst>
+    <dgm:linClrLst meth="repeat">
+      <a:schemeClr val="accent3">
+        <a:tint val="60000"/>
+      </a:schemeClr>
+    </dgm:linClrLst>
+    <dgm:effectClrLst/>
+    <dgm:txLinClrLst/>
+    <dgm:txFillClrLst/>
+    <dgm:txEffectClrLst/>
+  </dgm:styleLbl>
+  <dgm:styleLbl name="sibTrans1D1">
+    <dgm:fillClrLst meth="repeat">
+      <a:schemeClr val="accent3"/>
+    </dgm:fillClrLst>
+    <dgm:linClrLst meth="repeat">
+      <a:schemeClr val="accent3"/>
+    </dgm:linClrLst>
+    <dgm:effectClrLst/>
+    <dgm:txLinClrLst/>
+    <dgm:txFillClrLst meth="repeat">
+      <a:schemeClr val="tx1"/>
+    </dgm:txFillClrLst>
+    <dgm:txEffectClrLst/>
+  </dgm:styleLbl>
+  <dgm:styleLbl name="callout">
+    <dgm:fillClrLst meth="repeat">
+      <a:schemeClr val="accent3"/>
+    </dgm:fillClrLst>
+    <dgm:linClrLst meth="repeat">
+      <a:schemeClr val="accent3">
+        <a:tint val="50000"/>
+      </a:schemeClr>
+    </dgm:linClrLst>
+    <dgm:effectClrLst/>
+    <dgm:txLinClrLst/>
+    <dgm:txFillClrLst meth="repeat">
+      <a:schemeClr val="tx1"/>
+    </dgm:txFillClrLst>
+    <dgm:txEffectClrLst/>
+  </dgm:styleLbl>
+  <dgm:styleLbl name="asst0">
+    <dgm:fillClrLst meth="repeat">
+      <a:schemeClr val="accent3"/>
+    </dgm:fillClrLst>
+    <dgm:linClrLst meth="repeat">
+      <a:schemeClr val="lt1"/>
+    </dgm:linClrLst>
+    <dgm:effectClrLst/>
+    <dgm:txLinClrLst/>
+    <dgm:txFillClrLst/>
+    <dgm:txEffectClrLst/>
+  </dgm:styleLbl>
+  <dgm:styleLbl name="asst1">
+    <dgm:fillClrLst meth="repeat">
+      <a:schemeClr val="accent3"/>
+    </dgm:fillClrLst>
+    <dgm:linClrLst meth="repeat">
+      <a:schemeClr val="lt1"/>
+    </dgm:linClrLst>
+    <dgm:effectClrLst/>
+    <dgm:txLinClrLst/>
+    <dgm:txFillClrLst/>
+    <dgm:txEffectClrLst/>
+  </dgm:styleLbl>
+  <dgm:styleLbl name="asst2">
+    <dgm:fillClrLst meth="repeat">
+      <a:schemeClr val="accent3"/>
+    </dgm:fillClrLst>
+    <dgm:linClrLst meth="repeat">
+      <a:schemeClr val="lt1"/>
+    </dgm:linClrLst>
+    <dgm:effectClrLst/>
+    <dgm:txLinClrLst/>
+    <dgm:txFillClrLst/>
+    <dgm:txEffectClrLst/>
+  </dgm:styleLbl>
+  <dgm:styleLbl name="asst3">
+    <dgm:fillClrLst meth="repeat">
+      <a:schemeClr val="accent3"/>
+    </dgm:fillClrLst>
+    <dgm:linClrLst meth="repeat">
+      <a:schemeClr val="lt1"/>
+    </dgm:linClrLst>
+    <dgm:effectClrLst/>
+    <dgm:txLinClrLst/>
+    <dgm:txFillClrLst/>
+    <dgm:txEffectClrLst/>
+  </dgm:styleLbl>
+  <dgm:styleLbl name="asst4">
+    <dgm:fillClrLst meth="repeat">
+      <a:schemeClr val="accent3"/>
+    </dgm:fillClrLst>
+    <dgm:linClrLst meth="repeat">
+      <a:schemeClr val="lt1"/>
+    </dgm:linClrLst>
+    <dgm:effectClrLst/>
+    <dgm:txLinClrLst/>
+    <dgm:txFillClrLst/>
+    <dgm:txEffectClrLst/>
+  </dgm:styleLbl>
+  <dgm:styleLbl name="parChTrans2D1">
+    <dgm:fillClrLst meth="repeat">
+      <a:schemeClr val="accent3">
+        <a:tint val="60000"/>
+      </a:schemeClr>
+    </dgm:fillClrLst>
+    <dgm:linClrLst meth="repeat">
+      <a:schemeClr val="accent3">
+        <a:tint val="60000"/>
+      </a:schemeClr>
+    </dgm:linClrLst>
+    <dgm:effectClrLst/>
+    <dgm:txLinClrLst/>
+    <dgm:txFillClrLst meth="repeat">
+      <a:schemeClr val="lt1"/>
+    </dgm:txFillClrLst>
+    <dgm:txEffectClrLst/>
+  </dgm:styleLbl>
   <dgm:styleLbl name="parChTrans2D2">
     <dgm:fillClrLst meth="repeat">
       <a:schemeClr val="accent3"/>
@@ -4032,7 +4102,9 @@
     </dgm:linClrLst>
     <dgm:effectClrLst/>
     <dgm:txLinClrLst/>
-    <dgm:txFillClrLst/>
+    <dgm:txFillClrLst meth="repeat">
+      <a:schemeClr val="lt1"/>
+    </dgm:txFillClrLst>
     <dgm:txEffectClrLst/>
   </dgm:styleLbl>
   <dgm:styleLbl name="parChTrans2D3">
@@ -4044,7 +4116,9 @@
     </dgm:linClrLst>
     <dgm:effectClrLst/>
     <dgm:txLinClrLst/>
-    <dgm:txFillClrLst/>
+    <dgm:txFillClrLst meth="repeat">
+      <a:schemeClr val="lt1"/>
+    </dgm:txFillClrLst>
     <dgm:txEffectClrLst/>
   </dgm:styleLbl>
   <dgm:styleLbl name="parChTrans2D4">
@@ -4127,9 +4201,8 @@
   </dgm:styleLbl>
   <dgm:styleLbl name="fgAcc1">
     <dgm:fillClrLst meth="repeat">
-      <a:schemeClr val="accent3">
+      <a:schemeClr val="lt1">
         <a:alpha val="90000"/>
-        <a:tint val="40000"/>
       </a:schemeClr>
     </dgm:fillClrLst>
     <dgm:linClrLst meth="repeat">
@@ -4144,9 +4217,8 @@
   </dgm:styleLbl>
   <dgm:styleLbl name="conFgAcc1">
     <dgm:fillClrLst meth="repeat">
-      <a:schemeClr val="accent3">
+      <a:schemeClr val="lt1">
         <a:alpha val="90000"/>
-        <a:tint val="40000"/>
       </a:schemeClr>
     </dgm:fillClrLst>
     <dgm:linClrLst meth="repeat">
@@ -4161,9 +4233,8 @@
   </dgm:styleLbl>
   <dgm:styleLbl name="alignAcc1">
     <dgm:fillClrLst meth="repeat">
-      <a:schemeClr val="accent3">
+      <a:schemeClr val="lt1">
         <a:alpha val="90000"/>
-        <a:tint val="40000"/>
       </a:schemeClr>
     </dgm:fillClrLst>
     <dgm:linClrLst meth="repeat">
@@ -4178,9 +4249,8 @@
   </dgm:styleLbl>
   <dgm:styleLbl name="trAlignAcc1">
     <dgm:fillClrLst meth="repeat">
-      <a:schemeClr val="accent3">
+      <a:schemeClr val="lt1">
         <a:alpha val="40000"/>
-        <a:tint val="40000"/>
       </a:schemeClr>
     </dgm:fillClrLst>
     <dgm:linClrLst meth="repeat">
@@ -4195,9 +4265,8 @@
   </dgm:styleLbl>
   <dgm:styleLbl name="bgAcc1">
     <dgm:fillClrLst meth="repeat">
-      <a:schemeClr val="accent3">
+      <a:schemeClr val="lt1">
         <a:alpha val="90000"/>
-        <a:tint val="40000"/>
       </a:schemeClr>
     </dgm:fillClrLst>
     <dgm:linClrLst meth="repeat">
@@ -4254,7 +4323,7 @@
   </dgm:styleLbl>
   <dgm:styleLbl name="fgAccFollowNode1">
     <dgm:fillClrLst meth="repeat">
-      <a:schemeClr val="lt1">
+      <a:schemeClr val="accent3">
         <a:alpha val="90000"/>
         <a:tint val="40000"/>
       </a:schemeClr>
@@ -4262,6 +4331,7 @@
     <dgm:linClrLst meth="repeat">
       <a:schemeClr val="accent3">
         <a:alpha val="90000"/>
+        <a:tint val="40000"/>
       </a:schemeClr>
     </dgm:linClrLst>
     <dgm:effectClrLst/>
@@ -4273,7 +4343,7 @@
   </dgm:styleLbl>
   <dgm:styleLbl name="alignAccFollowNode1">
     <dgm:fillClrLst meth="repeat">
-      <a:schemeClr val="lt1">
+      <a:schemeClr val="accent3">
         <a:alpha val="90000"/>
         <a:tint val="40000"/>
       </a:schemeClr>
@@ -4281,6 +4351,7 @@
     <dgm:linClrLst meth="repeat">
       <a:schemeClr val="accent3">
         <a:alpha val="90000"/>
+        <a:tint val="40000"/>
       </a:schemeClr>
     </dgm:linClrLst>
     <dgm:effectClrLst/>
@@ -4292,7 +4363,7 @@
   </dgm:styleLbl>
   <dgm:styleLbl name="bgAccFollowNode1">
     <dgm:fillClrLst meth="repeat">
-      <a:schemeClr val="lt1">
+      <a:schemeClr val="accent3">
         <a:alpha val="90000"/>
         <a:tint val="40000"/>
       </a:schemeClr>
@@ -4300,6 +4371,7 @@
     <dgm:linClrLst meth="repeat">
       <a:schemeClr val="accent3">
         <a:alpha val="90000"/>
+        <a:tint val="40000"/>
       </a:schemeClr>
     </dgm:linClrLst>
     <dgm:effectClrLst/>
@@ -4311,9 +4383,8 @@
   </dgm:styleLbl>
   <dgm:styleLbl name="fgAcc0">
     <dgm:fillClrLst meth="repeat">
-      <a:schemeClr val="accent3">
+      <a:schemeClr val="lt1">
         <a:alpha val="90000"/>
-        <a:tint val="40000"/>
       </a:schemeClr>
     </dgm:fillClrLst>
     <dgm:linClrLst meth="repeat">
@@ -4328,9 +4399,8 @@
   </dgm:styleLbl>
   <dgm:styleLbl name="fgAcc2">
     <dgm:fillClrLst meth="repeat">
-      <a:schemeClr val="accent3">
+      <a:schemeClr val="lt1">
         <a:alpha val="90000"/>
-        <a:tint val="40000"/>
       </a:schemeClr>
     </dgm:fillClrLst>
     <dgm:linClrLst meth="repeat">
@@ -4345,9 +4415,8 @@
   </dgm:styleLbl>
   <dgm:styleLbl name="fgAcc3">
     <dgm:fillClrLst meth="repeat">
-      <a:schemeClr val="accent3">
+      <a:schemeClr val="lt1">
         <a:alpha val="90000"/>
-        <a:tint val="40000"/>
       </a:schemeClr>
     </dgm:fillClrLst>
     <dgm:linClrLst meth="repeat">
@@ -4362,9 +4431,8 @@
   </dgm:styleLbl>
   <dgm:styleLbl name="fgAcc4">
     <dgm:fillClrLst meth="repeat">
-      <a:schemeClr val="accent3">
+      <a:schemeClr val="lt1">
         <a:alpha val="90000"/>
-        <a:tint val="40000"/>
       </a:schemeClr>
     </dgm:fillClrLst>
     <dgm:linClrLst meth="repeat">
@@ -6299,7 +6367,14 @@
     </dgm:pt>
     <dgm:pt modelId="{87B7AE7A-3846-47F8-8FEC-58F18E9BAEC1}">
       <dgm:prSet custT="1"/>
-      <dgm:spPr/>
+      <dgm:spPr>
+        <a:ln>
+          <a:solidFill>
+            <a:schemeClr val="tx1"/>
+          </a:solidFill>
+          <a:prstDash val="dash"/>
+        </a:ln>
+      </dgm:spPr>
       <dgm:t>
         <a:bodyPr/>
         <a:lstStyle/>
@@ -7262,7 +7337,7 @@
         <a:lstStyle/>
         <a:p>
           <a:r>
-            <a:rPr lang="en-US" sz="1100" b="1">
+            <a:rPr lang="en-US" sz="1400" b="1">
               <a:solidFill>
                 <a:schemeClr val="tx1"/>
               </a:solidFill>
@@ -7279,7 +7354,7 @@
         <a:bodyPr/>
         <a:lstStyle/>
         <a:p>
-          <a:endParaRPr lang="en-US" sz="4000" b="1"/>
+          <a:endParaRPr lang="en-US" sz="4800" b="1"/>
         </a:p>
       </dgm:t>
     </dgm:pt>
@@ -7290,7 +7365,7 @@
         <a:bodyPr/>
         <a:lstStyle/>
         <a:p>
-          <a:endParaRPr lang="en-US" sz="4000" b="1"/>
+          <a:endParaRPr lang="en-US" sz="4800" b="1"/>
         </a:p>
       </dgm:t>
     </dgm:pt>
@@ -7332,7 +7407,7 @@
             <a:buNone/>
           </a:pPr>
           <a:r>
-            <a:rPr lang="en-US" sz="1100" b="1" kern="1200" dirty="0">
+            <a:rPr lang="en-US" sz="1400" b="1" kern="1200" dirty="0">
               <a:solidFill>
                 <a:prstClr val="white"/>
               </a:solidFill>
@@ -7340,7 +7415,7 @@
               <a:ea typeface="+mn-ea"/>
               <a:cs typeface="+mn-cs"/>
             </a:rPr>
-            <a:t>2. Dynamic Range</a:t>
+            <a:t>Dynamic Range</a:t>
           </a:r>
         </a:p>
         <a:p>
@@ -7358,11 +7433,11 @@
             <a:buNone/>
           </a:pPr>
           <a:r>
-            <a:rPr lang="en-US" sz="1100" b="0" i="0" kern="1200" dirty="0"/>
+            <a:rPr lang="en-US" sz="1400" b="0" i="0" kern="1200" dirty="0"/>
             <a:t>✓</a:t>
           </a:r>
           <a:r>
-            <a:rPr lang="en-US" sz="1100" b="1" kern="1200" dirty="0">
+            <a:rPr lang="en-US" sz="1400" b="1" kern="1200" dirty="0">
               <a:solidFill>
                 <a:prstClr val="white"/>
               </a:solidFill>
@@ -7382,7 +7457,7 @@
         <a:bodyPr/>
         <a:lstStyle/>
         <a:p>
-          <a:endParaRPr lang="en-US" sz="1050" b="1"/>
+          <a:endParaRPr lang="en-US" sz="1200" b="1"/>
         </a:p>
       </dgm:t>
     </dgm:pt>
@@ -7393,7 +7468,7 @@
         <a:bodyPr/>
         <a:lstStyle/>
         <a:p>
-          <a:endParaRPr lang="en-US" sz="4000" b="1"/>
+          <a:endParaRPr lang="en-US" sz="4800" b="1"/>
         </a:p>
       </dgm:t>
     </dgm:pt>
@@ -7401,9 +7476,7 @@
       <dgm:prSet custT="1"/>
       <dgm:spPr>
         <a:solidFill>
-          <a:schemeClr val="bg2">
-            <a:lumMod val="75000"/>
-          </a:schemeClr>
+          <a:schemeClr val="accent6"/>
         </a:solidFill>
       </dgm:spPr>
       <dgm:t>
@@ -7415,9 +7488,20 @@
             <a:buAutoNum type="arabicPeriod"/>
           </a:pPr>
           <a:r>
-            <a:rPr lang="en-US" sz="1100" b="1" dirty="0"/>
-            <a:t>3. Frequency Response </a:t>
+            <a:rPr lang="en-US" sz="1400" b="1" dirty="0"/>
+            <a:t>Frequency Response </a:t>
           </a:r>
+        </a:p>
+        <a:p>
+          <a:pPr>
+            <a:buFont typeface="+mj-lt"/>
+            <a:buAutoNum type="arabicPeriod"/>
+          </a:pPr>
+          <a:r>
+            <a:rPr lang="en-US" sz="1400" b="0" i="0" dirty="0"/>
+            <a:t>✓</a:t>
+          </a:r>
+          <a:endParaRPr lang="en-US" sz="1400" b="1" dirty="0"/>
         </a:p>
       </dgm:t>
     </dgm:pt>
@@ -7428,7 +7512,7 @@
         <a:bodyPr/>
         <a:lstStyle/>
         <a:p>
-          <a:endParaRPr lang="en-US" sz="1050" b="1"/>
+          <a:endParaRPr lang="en-US" sz="1200" b="1"/>
         </a:p>
       </dgm:t>
     </dgm:pt>
@@ -7439,7 +7523,7 @@
         <a:bodyPr/>
         <a:lstStyle/>
         <a:p>
-          <a:endParaRPr lang="en-US" sz="4000" b="1"/>
+          <a:endParaRPr lang="en-US" sz="4800" b="1"/>
         </a:p>
       </dgm:t>
     </dgm:pt>
@@ -7461,8 +7545,8 @@
             <a:buAutoNum type="arabicPeriod"/>
           </a:pPr>
           <a:r>
-            <a:rPr lang="en-US" sz="1100" b="1" dirty="0"/>
-            <a:t>6. Spatial Resolution </a:t>
+            <a:rPr lang="en-US" sz="1400" b="1" dirty="0"/>
+            <a:t>Spatial Resolution </a:t>
           </a:r>
         </a:p>
       </dgm:t>
@@ -7474,7 +7558,7 @@
         <a:bodyPr/>
         <a:lstStyle/>
         <a:p>
-          <a:endParaRPr lang="en-US" sz="1050" b="1"/>
+          <a:endParaRPr lang="en-US" sz="1200" b="1"/>
         </a:p>
       </dgm:t>
     </dgm:pt>
@@ -7485,7 +7569,7 @@
         <a:bodyPr/>
         <a:lstStyle/>
         <a:p>
-          <a:endParaRPr lang="en-US" sz="4000" b="1"/>
+          <a:endParaRPr lang="en-US" sz="4800" b="1"/>
         </a:p>
       </dgm:t>
     </dgm:pt>
@@ -7505,14 +7589,14 @@
             <a:buAutoNum type="arabicPeriod"/>
           </a:pPr>
           <a:r>
-            <a:rPr lang="en-US" sz="1100" b="1" dirty="0"/>
-            <a:t>1. Self Noise </a:t>
+            <a:rPr lang="en-US" sz="1400" b="1" dirty="0"/>
+            <a:t>Self Noise </a:t>
           </a:r>
           <a:r>
-            <a:rPr lang="en-US" sz="1100" b="0" i="0" dirty="0"/>
+            <a:rPr lang="en-US" sz="1400" b="0" i="0" dirty="0"/>
             <a:t>✓</a:t>
           </a:r>
-          <a:endParaRPr lang="en-US" sz="1100" b="1" dirty="0"/>
+          <a:endParaRPr lang="en-US" sz="1400" b="1" dirty="0"/>
         </a:p>
       </dgm:t>
     </dgm:pt>
@@ -7523,7 +7607,7 @@
         <a:bodyPr/>
         <a:lstStyle/>
         <a:p>
-          <a:endParaRPr lang="en-US" sz="400"/>
+          <a:endParaRPr lang="en-US" sz="600"/>
         </a:p>
       </dgm:t>
     </dgm:pt>
@@ -7534,7 +7618,7 @@
         <a:bodyPr/>
         <a:lstStyle/>
         <a:p>
-          <a:endParaRPr lang="en-US" sz="1600"/>
+          <a:endParaRPr lang="en-US" sz="2000"/>
         </a:p>
       </dgm:t>
     </dgm:pt>
@@ -7554,8 +7638,8 @@
             <a:buAutoNum type="arabicPeriod"/>
           </a:pPr>
           <a:r>
-            <a:rPr lang="en-US" sz="1100" b="1" dirty="0"/>
-            <a:t>5. Loss Budget</a:t>
+            <a:rPr lang="en-US" sz="1400" b="1" dirty="0"/>
+            <a:t>Loss Budget</a:t>
           </a:r>
         </a:p>
         <a:p>
@@ -7564,24 +7648,24 @@
             <a:buAutoNum type="arabicPeriod"/>
           </a:pPr>
           <a:r>
-            <a:rPr lang="en-US" sz="1100" b="0" i="0" dirty="0"/>
+            <a:rPr lang="en-US" sz="1400" b="0" i="0" dirty="0"/>
             <a:t>✓</a:t>
           </a:r>
           <a:r>
-            <a:rPr lang="en-US" sz="1100" b="1" dirty="0"/>
+            <a:rPr lang="en-US" sz="1400" b="1" dirty="0"/>
             <a:t> </a:t>
           </a:r>
         </a:p>
       </dgm:t>
     </dgm:pt>
     <dgm:pt modelId="{AC75B354-EAB7-44F9-A1F5-C819F398FE79}" type="parTrans" cxnId="{1CFA5964-286E-4BE2-BF23-B83915218287}">
-      <dgm:prSet/>
+      <dgm:prSet custT="1"/>
       <dgm:spPr/>
       <dgm:t>
         <a:bodyPr/>
         <a:lstStyle/>
         <a:p>
-          <a:endParaRPr lang="en-US"/>
+          <a:endParaRPr lang="en-US" sz="700"/>
         </a:p>
       </dgm:t>
     </dgm:pt>
@@ -7592,7 +7676,7 @@
         <a:bodyPr/>
         <a:lstStyle/>
         <a:p>
-          <a:endParaRPr lang="en-US"/>
+          <a:endParaRPr lang="en-US" sz="2400"/>
         </a:p>
       </dgm:t>
     </dgm:pt>
@@ -7634,7 +7718,7 @@
             <a:buNone/>
           </a:pPr>
           <a:r>
-            <a:rPr lang="en-US" sz="1100" b="1" kern="1200" dirty="0">
+            <a:rPr lang="en-US" sz="1400" b="1" kern="1200" dirty="0">
               <a:solidFill>
                 <a:prstClr val="white"/>
               </a:solidFill>
@@ -7642,7 +7726,7 @@
               <a:ea typeface="+mn-ea"/>
               <a:cs typeface="+mn-cs"/>
             </a:rPr>
-            <a:t>4. Fidelity</a:t>
+            <a:t>Fidelity</a:t>
           </a:r>
         </a:p>
         <a:p>
@@ -7660,10 +7744,10 @@
             <a:buNone/>
           </a:pPr>
           <a:r>
-            <a:rPr lang="en-US" sz="1100" b="0" i="0" kern="1200" dirty="0"/>
+            <a:rPr lang="en-US" sz="1400" b="0" i="0" kern="1200" dirty="0"/>
             <a:t>✓</a:t>
           </a:r>
-          <a:endParaRPr lang="en-US" sz="1100" b="1" kern="1200" dirty="0">
+          <a:endParaRPr lang="en-US" sz="1400" b="1" kern="1200" dirty="0">
             <a:solidFill>
               <a:prstClr val="white"/>
             </a:solidFill>
@@ -7675,13 +7759,13 @@
       </dgm:t>
     </dgm:pt>
     <dgm:pt modelId="{50EF01FF-9F4A-44BE-AF75-01ADE32A4BD1}" type="parTrans" cxnId="{ACB607CB-1027-46B0-B941-9D6C782BBBC4}">
-      <dgm:prSet/>
+      <dgm:prSet custT="1"/>
       <dgm:spPr/>
       <dgm:t>
         <a:bodyPr/>
         <a:lstStyle/>
         <a:p>
-          <a:endParaRPr lang="en-US"/>
+          <a:endParaRPr lang="en-US" sz="700"/>
         </a:p>
       </dgm:t>
     </dgm:pt>
@@ -7692,7 +7776,7 @@
         <a:bodyPr/>
         <a:lstStyle/>
         <a:p>
-          <a:endParaRPr lang="en-US"/>
+          <a:endParaRPr lang="en-US" sz="2400"/>
         </a:p>
       </dgm:t>
     </dgm:pt>
@@ -7734,7 +7818,7 @@
             <a:buNone/>
           </a:pPr>
           <a:r>
-            <a:rPr lang="en-US" sz="1100" b="1" kern="1200" dirty="0">
+            <a:rPr lang="en-US" sz="1400" b="1" kern="1200" dirty="0">
               <a:solidFill>
                 <a:prstClr val="white"/>
               </a:solidFill>
@@ -7742,7 +7826,7 @@
               <a:ea typeface="+mn-ea"/>
               <a:cs typeface="+mn-cs"/>
             </a:rPr>
-            <a:t>7. Cross Talk</a:t>
+            <a:t>Cross Talk</a:t>
           </a:r>
         </a:p>
         <a:p>
@@ -7760,11 +7844,11 @@
             <a:buNone/>
           </a:pPr>
           <a:r>
-            <a:rPr lang="en-US" sz="1100" b="0" i="0" kern="1200" dirty="0"/>
+            <a:rPr lang="en-US" sz="1400" b="0" i="0" kern="1200" dirty="0"/>
             <a:t>✓</a:t>
           </a:r>
           <a:r>
-            <a:rPr lang="en-US" sz="1100" b="1" kern="1200" dirty="0">
+            <a:rPr lang="en-US" sz="1400" b="1" kern="1200" dirty="0">
               <a:solidFill>
                 <a:prstClr val="white"/>
               </a:solidFill>
@@ -7778,13 +7862,13 @@
       </dgm:t>
     </dgm:pt>
     <dgm:pt modelId="{289487A0-EA96-456F-9739-128913BC60F7}" type="parTrans" cxnId="{AF535C3B-733F-49F3-9E7F-F0A993ABA9AF}">
-      <dgm:prSet/>
+      <dgm:prSet custT="1"/>
       <dgm:spPr/>
       <dgm:t>
         <a:bodyPr/>
         <a:lstStyle/>
         <a:p>
-          <a:endParaRPr lang="en-US"/>
+          <a:endParaRPr lang="en-US" sz="700"/>
         </a:p>
       </dgm:t>
     </dgm:pt>
@@ -7795,7 +7879,7 @@
         <a:bodyPr/>
         <a:lstStyle/>
         <a:p>
-          <a:endParaRPr lang="en-US"/>
+          <a:endParaRPr lang="en-US" sz="2400"/>
         </a:p>
       </dgm:t>
     </dgm:pt>
@@ -8020,7 +8104,7 @@
 <dgm:dataModel xmlns:dgm="http://schemas.openxmlformats.org/drawingml/2006/diagram" xmlns:a="http://schemas.openxmlformats.org/drawingml/2006/main">
   <dgm:ptLst>
     <dgm:pt modelId="{774E6CD7-6191-4A32-A630-07369787CD3F}" type="doc">
-      <dgm:prSet loTypeId="urn:microsoft.com/office/officeart/2005/8/layout/process1" loCatId="process" qsTypeId="urn:microsoft.com/office/officeart/2005/8/quickstyle/simple1" qsCatId="simple" csTypeId="urn:microsoft.com/office/officeart/2005/8/colors/accent3_1" csCatId="accent3" phldr="1"/>
+      <dgm:prSet loTypeId="urn:microsoft.com/office/officeart/2005/8/layout/hProcess4" loCatId="process" qsTypeId="urn:microsoft.com/office/officeart/2005/8/quickstyle/simple1" qsCatId="simple" csTypeId="urn:microsoft.com/office/officeart/2005/8/colors/accent3_2" csCatId="accent3" phldr="1"/>
       <dgm:spPr/>
       <dgm:t>
         <a:bodyPr/>
@@ -8038,14 +8122,10 @@
         <a:lstStyle/>
         <a:p>
           <a:r>
-            <a:rPr lang="en-US" sz="1000" dirty="0"/>
-            <a:t>pip install </a:t>
+            <a:rPr lang="en-US" sz="1400" b="1" i="0"/>
+            <a:t>Install the processing package</a:t>
           </a:r>
-          <a:r>
-            <a:rPr lang="en-US" sz="1000" dirty="0" err="1"/>
-            <a:t>pySEAFOM</a:t>
-          </a:r>
-          <a:endParaRPr lang="en-US" sz="1000" dirty="0"/>
+          <a:endParaRPr lang="en-US" sz="1400" dirty="0"/>
         </a:p>
       </dgm:t>
     </dgm:pt>
@@ -8056,7 +8136,7 @@
         <a:bodyPr/>
         <a:lstStyle/>
         <a:p>
-          <a:endParaRPr lang="en-US" sz="3600"/>
+          <a:endParaRPr lang="en-US" sz="4400"/>
         </a:p>
       </dgm:t>
     </dgm:pt>
@@ -8067,11 +8147,11 @@
         <a:bodyPr/>
         <a:lstStyle/>
         <a:p>
-          <a:endParaRPr lang="en-US" sz="3600"/>
+          <a:endParaRPr lang="en-US" sz="4400"/>
         </a:p>
       </dgm:t>
     </dgm:pt>
-    <dgm:pt modelId="{59CC3D0C-0590-475C-B738-76839FEE9C1B}">
+    <dgm:pt modelId="{14EB2374-863D-48FB-8474-61A54816547B}">
       <dgm:prSet custT="1"/>
       <dgm:spPr/>
       <dgm:t>
@@ -8079,36 +8159,35 @@
         <a:lstStyle/>
         <a:p>
           <a:r>
-            <a:rPr lang="en-US" sz="1000" b="0" i="0" dirty="0"/>
-            <a:t>Prepare your 2D array (channels × samples)</a:t>
+            <a:rPr lang="en-US" sz="1100" b="1" i="0" dirty="0"/>
+            <a:t>pip install pySEAFOM (or integrate the repo into your environment)</a:t>
           </a:r>
-          <a:endParaRPr lang="en-US" sz="1000" dirty="0"/>
         </a:p>
       </dgm:t>
     </dgm:pt>
-    <dgm:pt modelId="{AC4242AF-F2DC-4DED-85C0-FD3F598DD38A}" type="parTrans" cxnId="{E9BC0AA8-8F4D-4130-B4CE-A3D32B386556}">
+    <dgm:pt modelId="{1254772A-2CD9-4624-9100-BEC5D570E75C}" type="parTrans" cxnId="{4DB37B5C-136E-41EF-A36B-2AFC9512A622}">
       <dgm:prSet/>
       <dgm:spPr/>
       <dgm:t>
         <a:bodyPr/>
         <a:lstStyle/>
         <a:p>
-          <a:endParaRPr lang="en-US" sz="3600"/>
+          <a:endParaRPr lang="en-US"/>
         </a:p>
       </dgm:t>
     </dgm:pt>
-    <dgm:pt modelId="{F1B21123-7991-41CC-A668-4F17303A0E96}" type="sibTrans" cxnId="{E9BC0AA8-8F4D-4130-B4CE-A3D32B386556}">
-      <dgm:prSet custT="1"/>
+    <dgm:pt modelId="{43295346-60EA-4A15-9D7E-0CBE897F0221}" type="sibTrans" cxnId="{4DB37B5C-136E-41EF-A36B-2AFC9512A622}">
+      <dgm:prSet/>
       <dgm:spPr/>
       <dgm:t>
         <a:bodyPr/>
         <a:lstStyle/>
         <a:p>
-          <a:endParaRPr lang="en-US" sz="3600"/>
+          <a:endParaRPr lang="en-US"/>
         </a:p>
       </dgm:t>
     </dgm:pt>
-    <dgm:pt modelId="{D90388B4-EC75-4E73-9C24-8B4DF0AAE4A9}">
+    <dgm:pt modelId="{0F90B91D-22D5-46D3-8A5C-B4E479E27A70}">
       <dgm:prSet custT="1"/>
       <dgm:spPr/>
       <dgm:t>
@@ -8116,173 +8195,458 @@
         <a:lstStyle/>
         <a:p>
           <a:r>
-            <a:rPr lang="en-US" sz="1000" b="0" i="0" dirty="0"/>
-            <a:t>Call the module’s plot and report function(s) </a:t>
+            <a:rPr lang="en-US" sz="1400" b="1" i="0" dirty="0"/>
+            <a:t>Prepare input data</a:t>
           </a:r>
-          <a:endParaRPr lang="en-US" sz="1000" dirty="0"/>
         </a:p>
       </dgm:t>
     </dgm:pt>
-    <dgm:pt modelId="{02AD2A7C-4B29-4B5F-9B3E-2079BEBE61BD}" type="parTrans" cxnId="{09729ECE-F685-4D93-B5A9-146264990B19}">
+    <dgm:pt modelId="{A6E215EF-34A4-43E0-A78B-648112E05BC5}" type="parTrans" cxnId="{760AB06F-ABAF-4335-A11F-BCC48807A3B1}">
       <dgm:prSet/>
       <dgm:spPr/>
       <dgm:t>
         <a:bodyPr/>
         <a:lstStyle/>
         <a:p>
-          <a:endParaRPr lang="en-US" sz="2000"/>
+          <a:endParaRPr lang="en-US"/>
         </a:p>
       </dgm:t>
     </dgm:pt>
-    <dgm:pt modelId="{3DD1A510-A550-43ED-B171-D87B7DA58936}" type="sibTrans" cxnId="{09729ECE-F685-4D93-B5A9-146264990B19}">
+    <dgm:pt modelId="{7492C9B1-83D3-4843-9891-B75ED24C2C9D}" type="sibTrans" cxnId="{760AB06F-ABAF-4335-A11F-BCC48807A3B1}">
       <dgm:prSet/>
       <dgm:spPr/>
       <dgm:t>
         <a:bodyPr/>
         <a:lstStyle/>
         <a:p>
-          <a:endParaRPr lang="en-US" sz="2000"/>
+          <a:endParaRPr lang="en-US"/>
         </a:p>
       </dgm:t>
     </dgm:pt>
-    <dgm:pt modelId="{F58D4C73-F670-4ED4-977A-3E6B9878C2CD}">
+    <dgm:pt modelId="{C90E1D4B-C042-40DD-8DB9-453042BBD5DF}">
       <dgm:prSet custT="1"/>
       <dgm:spPr/>
       <dgm:t>
         <a:bodyPr/>
         <a:lstStyle/>
         <a:p>
-          <a:pPr>
-            <a:buNone/>
-          </a:pPr>
           <a:r>
-            <a:rPr lang="en-US" sz="1000" b="0" i="0" dirty="0"/>
-            <a:t>Call the module’s compute function(s)</a:t>
+            <a:rPr lang="en-US" sz="1100" b="1" i="0" dirty="0"/>
+            <a:t>Load and format acoustic data into the required 2D array (channels × samples)</a:t>
           </a:r>
-          <a:endParaRPr lang="en-US" sz="2000" dirty="0"/>
         </a:p>
       </dgm:t>
     </dgm:pt>
-    <dgm:pt modelId="{DE58405E-5EA6-4C88-8463-4BA81818A712}" type="parTrans" cxnId="{0074DA70-A17A-4BE7-A4ED-FF76A9A1553C}">
+    <dgm:pt modelId="{1668CE28-5A06-49C2-A62C-5978689DC52D}" type="parTrans" cxnId="{FD497AA3-0CAB-41C2-BBC2-583E79EF17F1}">
       <dgm:prSet/>
       <dgm:spPr/>
       <dgm:t>
         <a:bodyPr/>
         <a:lstStyle/>
         <a:p>
-          <a:endParaRPr lang="en-US" sz="2000"/>
+          <a:endParaRPr lang="en-US"/>
         </a:p>
       </dgm:t>
     </dgm:pt>
-    <dgm:pt modelId="{48F1C68A-C0E3-4C57-8596-3834D434555C}" type="sibTrans" cxnId="{0074DA70-A17A-4BE7-A4ED-FF76A9A1553C}">
-      <dgm:prSet custT="1"/>
+    <dgm:pt modelId="{3CD7E98D-138D-4C04-80C5-0C410FB18505}" type="sibTrans" cxnId="{FD497AA3-0CAB-41C2-BBC2-583E79EF17F1}">
+      <dgm:prSet/>
       <dgm:spPr/>
       <dgm:t>
         <a:bodyPr/>
         <a:lstStyle/>
         <a:p>
-          <a:endParaRPr lang="en-US" sz="1200"/>
+          <a:endParaRPr lang="en-US"/>
         </a:p>
       </dgm:t>
     </dgm:pt>
-    <dgm:pt modelId="{4F8E7018-46CB-4088-A074-F1F2353C704B}" type="pres">
+    <dgm:pt modelId="{F519D0D4-95F0-4940-AC35-CEE08A059E19}">
+      <dgm:prSet custT="1"/>
+      <dgm:spPr/>
+      <dgm:t>
+        <a:bodyPr/>
+        <a:lstStyle/>
+        <a:p>
+          <a:r>
+            <a:rPr lang="en-US" sz="1400" b="1" i="0" dirty="0"/>
+            <a:t>Run core compute functions</a:t>
+          </a:r>
+        </a:p>
+      </dgm:t>
+    </dgm:pt>
+    <dgm:pt modelId="{98C8D3F2-378A-4A00-8950-D8EB32639866}" type="parTrans" cxnId="{5D05314A-39B9-43DF-B2D6-8C6A5D981230}">
+      <dgm:prSet/>
+      <dgm:spPr/>
+      <dgm:t>
+        <a:bodyPr/>
+        <a:lstStyle/>
+        <a:p>
+          <a:endParaRPr lang="en-US"/>
+        </a:p>
+      </dgm:t>
+    </dgm:pt>
+    <dgm:pt modelId="{A4EE692F-15C6-40F6-A3A7-528F41F7EFA9}" type="sibTrans" cxnId="{5D05314A-39B9-43DF-B2D6-8C6A5D981230}">
+      <dgm:prSet/>
+      <dgm:spPr/>
+      <dgm:t>
+        <a:bodyPr/>
+        <a:lstStyle/>
+        <a:p>
+          <a:endParaRPr lang="en-US"/>
+        </a:p>
+      </dgm:t>
+    </dgm:pt>
+    <dgm:pt modelId="{072EE138-7ADD-45CB-93E6-FAD75EBED361}">
+      <dgm:prSet custT="1"/>
+      <dgm:spPr/>
+      <dgm:t>
+        <a:bodyPr/>
+        <a:lstStyle/>
+        <a:p>
+          <a:r>
+            <a:rPr lang="en-US" sz="1100" b="1" i="0" dirty="0"/>
+            <a:t>Call the library’s feature‑extraction and processing functions</a:t>
+          </a:r>
+        </a:p>
+      </dgm:t>
+    </dgm:pt>
+    <dgm:pt modelId="{C1A641BC-7E55-4DCB-8C8C-FF3932AF1550}" type="parTrans" cxnId="{0C8638A4-C2E8-4E0F-8F48-733EF2597080}">
+      <dgm:prSet/>
+      <dgm:spPr/>
+      <dgm:t>
+        <a:bodyPr/>
+        <a:lstStyle/>
+        <a:p>
+          <a:endParaRPr lang="en-US"/>
+        </a:p>
+      </dgm:t>
+    </dgm:pt>
+    <dgm:pt modelId="{D94FA11A-4682-40CC-B9BE-1D442C5D53E7}" type="sibTrans" cxnId="{0C8638A4-C2E8-4E0F-8F48-733EF2597080}">
+      <dgm:prSet/>
+      <dgm:spPr/>
+      <dgm:t>
+        <a:bodyPr/>
+        <a:lstStyle/>
+        <a:p>
+          <a:endParaRPr lang="en-US"/>
+        </a:p>
+      </dgm:t>
+    </dgm:pt>
+    <dgm:pt modelId="{A1B8CC49-3753-4853-87C3-CBD0985DBB71}">
+      <dgm:prSet custT="1"/>
+      <dgm:spPr/>
+      <dgm:t>
+        <a:bodyPr/>
+        <a:lstStyle/>
+        <a:p>
+          <a:r>
+            <a:rPr lang="en-US" sz="1400" b="1" i="0" dirty="0"/>
+            <a:t>Generate outputs</a:t>
+          </a:r>
+        </a:p>
+      </dgm:t>
+    </dgm:pt>
+    <dgm:pt modelId="{FE65BC70-E183-43C0-AD2B-16A842BF95C5}" type="parTrans" cxnId="{38683ECA-13F8-4E5F-9FD3-6FCF5D7E8AF8}">
+      <dgm:prSet/>
+      <dgm:spPr/>
+      <dgm:t>
+        <a:bodyPr/>
+        <a:lstStyle/>
+        <a:p>
+          <a:endParaRPr lang="en-US"/>
+        </a:p>
+      </dgm:t>
+    </dgm:pt>
+    <dgm:pt modelId="{FD29A225-47CE-4570-BCAF-9060038DEFAA}" type="sibTrans" cxnId="{38683ECA-13F8-4E5F-9FD3-6FCF5D7E8AF8}">
+      <dgm:prSet/>
+      <dgm:spPr/>
+      <dgm:t>
+        <a:bodyPr/>
+        <a:lstStyle/>
+        <a:p>
+          <a:endParaRPr lang="en-US"/>
+        </a:p>
+      </dgm:t>
+    </dgm:pt>
+    <dgm:pt modelId="{6510424B-C2A3-4FD5-ADEE-C0CCF7652FBB}">
+      <dgm:prSet custT="1"/>
+      <dgm:spPr/>
+      <dgm:t>
+        <a:bodyPr/>
+        <a:lstStyle/>
+        <a:p>
+          <a:r>
+            <a:rPr lang="en-US" sz="1100" b="1" i="0" dirty="0"/>
+            <a:t>Use the module’s plotting and reporting functions to produce graphs, metrics, and analysis artifacts</a:t>
+          </a:r>
+        </a:p>
+      </dgm:t>
+    </dgm:pt>
+    <dgm:pt modelId="{F973350C-CDA5-43AD-A324-2D0B8B4DCD95}" type="parTrans" cxnId="{A2DE6AC0-4075-4C4C-8746-36B8D665B0C9}">
+      <dgm:prSet/>
+      <dgm:spPr/>
+      <dgm:t>
+        <a:bodyPr/>
+        <a:lstStyle/>
+        <a:p>
+          <a:endParaRPr lang="en-US"/>
+        </a:p>
+      </dgm:t>
+    </dgm:pt>
+    <dgm:pt modelId="{C598214D-7333-466B-8536-AE46D5C8F8BE}" type="sibTrans" cxnId="{A2DE6AC0-4075-4C4C-8746-36B8D665B0C9}">
+      <dgm:prSet/>
+      <dgm:spPr/>
+      <dgm:t>
+        <a:bodyPr/>
+        <a:lstStyle/>
+        <a:p>
+          <a:endParaRPr lang="en-US"/>
+        </a:p>
+      </dgm:t>
+    </dgm:pt>
+    <dgm:pt modelId="{1F27389D-627D-4887-9519-B656F7272D68}" type="pres">
       <dgm:prSet presAssocID="{774E6CD7-6191-4A32-A630-07369787CD3F}" presName="Name0" presStyleCnt="0">
         <dgm:presLayoutVars>
           <dgm:dir/>
+          <dgm:animLvl val="lvl"/>
           <dgm:resizeHandles val="exact"/>
         </dgm:presLayoutVars>
       </dgm:prSet>
       <dgm:spPr/>
     </dgm:pt>
-    <dgm:pt modelId="{198FC083-0163-42D5-A56D-4B109F1CAE31}" type="pres">
-      <dgm:prSet presAssocID="{360DA6D8-B6B0-406D-8898-C6142A1DBC88}" presName="node" presStyleLbl="node1" presStyleIdx="0" presStyleCnt="4">
+    <dgm:pt modelId="{A4702F92-689F-409C-B1EB-3EF2BE1E9C85}" type="pres">
+      <dgm:prSet presAssocID="{774E6CD7-6191-4A32-A630-07369787CD3F}" presName="tSp" presStyleCnt="0"/>
+      <dgm:spPr/>
+    </dgm:pt>
+    <dgm:pt modelId="{502C3353-21CE-4C43-84BC-7A6FEB8101DC}" type="pres">
+      <dgm:prSet presAssocID="{774E6CD7-6191-4A32-A630-07369787CD3F}" presName="bSp" presStyleCnt="0"/>
+      <dgm:spPr/>
+    </dgm:pt>
+    <dgm:pt modelId="{59C33D22-7788-4105-8E72-77A24F0CF9D6}" type="pres">
+      <dgm:prSet presAssocID="{774E6CD7-6191-4A32-A630-07369787CD3F}" presName="process" presStyleCnt="0"/>
+      <dgm:spPr/>
+    </dgm:pt>
+    <dgm:pt modelId="{9F6774F5-A8B6-4E3B-ABA9-FD9E217E768D}" type="pres">
+      <dgm:prSet presAssocID="{360DA6D8-B6B0-406D-8898-C6142A1DBC88}" presName="composite1" presStyleCnt="0"/>
+      <dgm:spPr/>
+    </dgm:pt>
+    <dgm:pt modelId="{A781D285-EAF0-4198-BB8A-6B47C5760143}" type="pres">
+      <dgm:prSet presAssocID="{360DA6D8-B6B0-406D-8898-C6142A1DBC88}" presName="dummyNode1" presStyleLbl="node1" presStyleIdx="0" presStyleCnt="4"/>
+      <dgm:spPr/>
+    </dgm:pt>
+    <dgm:pt modelId="{C9F5EEE1-7F32-43D0-B414-A24955CF6411}" type="pres">
+      <dgm:prSet presAssocID="{360DA6D8-B6B0-406D-8898-C6142A1DBC88}" presName="childNode1" presStyleLbl="bgAcc1" presStyleIdx="0" presStyleCnt="4">
         <dgm:presLayoutVars>
           <dgm:bulletEnabled val="1"/>
         </dgm:presLayoutVars>
       </dgm:prSet>
       <dgm:spPr/>
     </dgm:pt>
-    <dgm:pt modelId="{37F80E5B-C0CA-4F81-ACAD-F3A5EB722D96}" type="pres">
-      <dgm:prSet presAssocID="{96A7BF06-3A6B-40EA-99E5-86983638BC40}" presName="sibTrans" presStyleLbl="sibTrans2D1" presStyleIdx="0" presStyleCnt="3"/>
-      <dgm:spPr/>
-    </dgm:pt>
-    <dgm:pt modelId="{0CA39724-0620-407E-9A91-1703B9C2D23C}" type="pres">
-      <dgm:prSet presAssocID="{96A7BF06-3A6B-40EA-99E5-86983638BC40}" presName="connectorText" presStyleLbl="sibTrans2D1" presStyleIdx="0" presStyleCnt="3"/>
-      <dgm:spPr/>
-    </dgm:pt>
-    <dgm:pt modelId="{92B177F5-5799-41E8-94D2-6753E1430578}" type="pres">
-      <dgm:prSet presAssocID="{59CC3D0C-0590-475C-B738-76839FEE9C1B}" presName="node" presStyleLbl="node1" presStyleIdx="1" presStyleCnt="4">
+    <dgm:pt modelId="{A54F6D19-CB35-4D2A-A475-5E05391D1BB2}" type="pres">
+      <dgm:prSet presAssocID="{360DA6D8-B6B0-406D-8898-C6142A1DBC88}" presName="childNode1tx" presStyleLbl="bgAcc1" presStyleIdx="0" presStyleCnt="4">
         <dgm:presLayoutVars>
           <dgm:bulletEnabled val="1"/>
         </dgm:presLayoutVars>
       </dgm:prSet>
       <dgm:spPr/>
     </dgm:pt>
-    <dgm:pt modelId="{AD97A4AC-09A6-4A35-AB70-9F6504BE89E6}" type="pres">
-      <dgm:prSet presAssocID="{F1B21123-7991-41CC-A668-4F17303A0E96}" presName="sibTrans" presStyleLbl="sibTrans2D1" presStyleIdx="1" presStyleCnt="3"/>
-      <dgm:spPr/>
-    </dgm:pt>
-    <dgm:pt modelId="{6871553C-6A63-44AE-AFAA-9AB969B90F17}" type="pres">
-      <dgm:prSet presAssocID="{F1B21123-7991-41CC-A668-4F17303A0E96}" presName="connectorText" presStyleLbl="sibTrans2D1" presStyleIdx="1" presStyleCnt="3"/>
-      <dgm:spPr/>
-    </dgm:pt>
-    <dgm:pt modelId="{BCA32F45-8225-4186-B7B2-3E75E3588E41}" type="pres">
-      <dgm:prSet presAssocID="{F58D4C73-F670-4ED4-977A-3E6B9878C2CD}" presName="node" presStyleLbl="node1" presStyleIdx="2" presStyleCnt="4">
+    <dgm:pt modelId="{2C2B6695-81C2-445C-8C0A-2D668EC6C123}" type="pres">
+      <dgm:prSet presAssocID="{360DA6D8-B6B0-406D-8898-C6142A1DBC88}" presName="parentNode1" presStyleLbl="node1" presStyleIdx="0" presStyleCnt="4">
+        <dgm:presLayoutVars>
+          <dgm:chMax val="1"/>
+          <dgm:bulletEnabled val="1"/>
+        </dgm:presLayoutVars>
+      </dgm:prSet>
+      <dgm:spPr/>
+    </dgm:pt>
+    <dgm:pt modelId="{A3E95AC4-9FA5-42E0-9DD1-68017A2E09E3}" type="pres">
+      <dgm:prSet presAssocID="{360DA6D8-B6B0-406D-8898-C6142A1DBC88}" presName="connSite1" presStyleCnt="0"/>
+      <dgm:spPr/>
+    </dgm:pt>
+    <dgm:pt modelId="{5FAA9B61-0F86-451A-A039-83E1785AFFB8}" type="pres">
+      <dgm:prSet presAssocID="{96A7BF06-3A6B-40EA-99E5-86983638BC40}" presName="Name9" presStyleLbl="sibTrans2D1" presStyleIdx="0" presStyleCnt="3"/>
+      <dgm:spPr/>
+    </dgm:pt>
+    <dgm:pt modelId="{70CF29E4-845E-44FD-BE8B-798AF6C6EBD2}" type="pres">
+      <dgm:prSet presAssocID="{0F90B91D-22D5-46D3-8A5C-B4E479E27A70}" presName="composite2" presStyleCnt="0"/>
+      <dgm:spPr/>
+    </dgm:pt>
+    <dgm:pt modelId="{403FF250-84A3-4307-BE45-5504259A0B63}" type="pres">
+      <dgm:prSet presAssocID="{0F90B91D-22D5-46D3-8A5C-B4E479E27A70}" presName="dummyNode2" presStyleLbl="node1" presStyleIdx="0" presStyleCnt="4"/>
+      <dgm:spPr/>
+    </dgm:pt>
+    <dgm:pt modelId="{BFB62CDE-5B4A-4B7F-8C63-93D11A4EBA2C}" type="pres">
+      <dgm:prSet presAssocID="{0F90B91D-22D5-46D3-8A5C-B4E479E27A70}" presName="childNode2" presStyleLbl="bgAcc1" presStyleIdx="1" presStyleCnt="4">
         <dgm:presLayoutVars>
           <dgm:bulletEnabled val="1"/>
         </dgm:presLayoutVars>
       </dgm:prSet>
       <dgm:spPr/>
     </dgm:pt>
-    <dgm:pt modelId="{FFD00C3A-1B97-4E30-988D-761D33D51C69}" type="pres">
-      <dgm:prSet presAssocID="{48F1C68A-C0E3-4C57-8596-3834D434555C}" presName="sibTrans" presStyleLbl="sibTrans2D1" presStyleIdx="2" presStyleCnt="3"/>
-      <dgm:spPr/>
-    </dgm:pt>
-    <dgm:pt modelId="{C6486BA8-812E-47BA-B7B9-19862395076B}" type="pres">
-      <dgm:prSet presAssocID="{48F1C68A-C0E3-4C57-8596-3834D434555C}" presName="connectorText" presStyleLbl="sibTrans2D1" presStyleIdx="2" presStyleCnt="3"/>
-      <dgm:spPr/>
-    </dgm:pt>
-    <dgm:pt modelId="{A84AEDA7-DF7A-46A2-8B14-785AA474DFCC}" type="pres">
-      <dgm:prSet presAssocID="{D90388B4-EC75-4E73-9C24-8B4DF0AAE4A9}" presName="node" presStyleLbl="node1" presStyleIdx="3" presStyleCnt="4">
+    <dgm:pt modelId="{A95708A6-8EBA-49EE-9793-B04A4BBA39DE}" type="pres">
+      <dgm:prSet presAssocID="{0F90B91D-22D5-46D3-8A5C-B4E479E27A70}" presName="childNode2tx" presStyleLbl="bgAcc1" presStyleIdx="1" presStyleCnt="4">
         <dgm:presLayoutVars>
           <dgm:bulletEnabled val="1"/>
         </dgm:presLayoutVars>
       </dgm:prSet>
       <dgm:spPr/>
     </dgm:pt>
+    <dgm:pt modelId="{22157AB5-EA6F-4171-9F2B-D42EA5CC7D09}" type="pres">
+      <dgm:prSet presAssocID="{0F90B91D-22D5-46D3-8A5C-B4E479E27A70}" presName="parentNode2" presStyleLbl="node1" presStyleIdx="1" presStyleCnt="4">
+        <dgm:presLayoutVars>
+          <dgm:chMax val="0"/>
+          <dgm:bulletEnabled val="1"/>
+        </dgm:presLayoutVars>
+      </dgm:prSet>
+      <dgm:spPr/>
+    </dgm:pt>
+    <dgm:pt modelId="{B44E524D-A2C9-45F9-99B8-716EE4ECD3EC}" type="pres">
+      <dgm:prSet presAssocID="{0F90B91D-22D5-46D3-8A5C-B4E479E27A70}" presName="connSite2" presStyleCnt="0"/>
+      <dgm:spPr/>
+    </dgm:pt>
+    <dgm:pt modelId="{B90460B7-0401-4A52-915A-39C0EEA8D048}" type="pres">
+      <dgm:prSet presAssocID="{7492C9B1-83D3-4843-9891-B75ED24C2C9D}" presName="Name18" presStyleLbl="sibTrans2D1" presStyleIdx="1" presStyleCnt="3"/>
+      <dgm:spPr/>
+    </dgm:pt>
+    <dgm:pt modelId="{23B720DE-251D-4B4A-9C34-02746361711C}" type="pres">
+      <dgm:prSet presAssocID="{F519D0D4-95F0-4940-AC35-CEE08A059E19}" presName="composite1" presStyleCnt="0"/>
+      <dgm:spPr/>
+    </dgm:pt>
+    <dgm:pt modelId="{430F7BA3-B29D-41A0-8B27-B5A9A7C04C47}" type="pres">
+      <dgm:prSet presAssocID="{F519D0D4-95F0-4940-AC35-CEE08A059E19}" presName="dummyNode1" presStyleLbl="node1" presStyleIdx="1" presStyleCnt="4"/>
+      <dgm:spPr/>
+    </dgm:pt>
+    <dgm:pt modelId="{75DF6C70-0067-4BA0-A1F3-01CCEA8B956E}" type="pres">
+      <dgm:prSet presAssocID="{F519D0D4-95F0-4940-AC35-CEE08A059E19}" presName="childNode1" presStyleLbl="bgAcc1" presStyleIdx="2" presStyleCnt="4">
+        <dgm:presLayoutVars>
+          <dgm:bulletEnabled val="1"/>
+        </dgm:presLayoutVars>
+      </dgm:prSet>
+      <dgm:spPr/>
+    </dgm:pt>
+    <dgm:pt modelId="{1E1F9420-B4E1-4A73-B89E-54846EB7FDFA}" type="pres">
+      <dgm:prSet presAssocID="{F519D0D4-95F0-4940-AC35-CEE08A059E19}" presName="childNode1tx" presStyleLbl="bgAcc1" presStyleIdx="2" presStyleCnt="4">
+        <dgm:presLayoutVars>
+          <dgm:bulletEnabled val="1"/>
+        </dgm:presLayoutVars>
+      </dgm:prSet>
+      <dgm:spPr/>
+    </dgm:pt>
+    <dgm:pt modelId="{3E280082-7468-4132-9F22-64673CF263DE}" type="pres">
+      <dgm:prSet presAssocID="{F519D0D4-95F0-4940-AC35-CEE08A059E19}" presName="parentNode1" presStyleLbl="node1" presStyleIdx="2" presStyleCnt="4">
+        <dgm:presLayoutVars>
+          <dgm:chMax val="1"/>
+          <dgm:bulletEnabled val="1"/>
+        </dgm:presLayoutVars>
+      </dgm:prSet>
+      <dgm:spPr/>
+    </dgm:pt>
+    <dgm:pt modelId="{74FA9880-5FA2-464C-A375-2AB8DDC3A270}" type="pres">
+      <dgm:prSet presAssocID="{F519D0D4-95F0-4940-AC35-CEE08A059E19}" presName="connSite1" presStyleCnt="0"/>
+      <dgm:spPr/>
+    </dgm:pt>
+    <dgm:pt modelId="{BC7BF6D4-56BD-435E-8C17-60EBB4878659}" type="pres">
+      <dgm:prSet presAssocID="{A4EE692F-15C6-40F6-A3A7-528F41F7EFA9}" presName="Name9" presStyleLbl="sibTrans2D1" presStyleIdx="2" presStyleCnt="3"/>
+      <dgm:spPr/>
+    </dgm:pt>
+    <dgm:pt modelId="{5E0E8086-704E-4105-B4F8-EADCD54DD5A9}" type="pres">
+      <dgm:prSet presAssocID="{A1B8CC49-3753-4853-87C3-CBD0985DBB71}" presName="composite2" presStyleCnt="0"/>
+      <dgm:spPr/>
+    </dgm:pt>
+    <dgm:pt modelId="{602F4DD1-7EFB-4C09-B5BA-DAFE2BD0C804}" type="pres">
+      <dgm:prSet presAssocID="{A1B8CC49-3753-4853-87C3-CBD0985DBB71}" presName="dummyNode2" presStyleLbl="node1" presStyleIdx="2" presStyleCnt="4"/>
+      <dgm:spPr/>
+    </dgm:pt>
+    <dgm:pt modelId="{05874099-273A-402C-A4DC-F1F993D9F15C}" type="pres">
+      <dgm:prSet presAssocID="{A1B8CC49-3753-4853-87C3-CBD0985DBB71}" presName="childNode2" presStyleLbl="bgAcc1" presStyleIdx="3" presStyleCnt="4">
+        <dgm:presLayoutVars>
+          <dgm:bulletEnabled val="1"/>
+        </dgm:presLayoutVars>
+      </dgm:prSet>
+      <dgm:spPr/>
+    </dgm:pt>
+    <dgm:pt modelId="{7800494B-F984-42E9-9735-444033B5C708}" type="pres">
+      <dgm:prSet presAssocID="{A1B8CC49-3753-4853-87C3-CBD0985DBB71}" presName="childNode2tx" presStyleLbl="bgAcc1" presStyleIdx="3" presStyleCnt="4">
+        <dgm:presLayoutVars>
+          <dgm:bulletEnabled val="1"/>
+        </dgm:presLayoutVars>
+      </dgm:prSet>
+      <dgm:spPr/>
+    </dgm:pt>
+    <dgm:pt modelId="{F25E4087-8A23-4E4D-85E4-1E618AF60BBF}" type="pres">
+      <dgm:prSet presAssocID="{A1B8CC49-3753-4853-87C3-CBD0985DBB71}" presName="parentNode2" presStyleLbl="node1" presStyleIdx="3" presStyleCnt="4">
+        <dgm:presLayoutVars>
+          <dgm:chMax val="0"/>
+          <dgm:bulletEnabled val="1"/>
+        </dgm:presLayoutVars>
+      </dgm:prSet>
+      <dgm:spPr/>
+    </dgm:pt>
+    <dgm:pt modelId="{AED715D2-BFFF-4F6B-99F9-3542C35D16C8}" type="pres">
+      <dgm:prSet presAssocID="{A1B8CC49-3753-4853-87C3-CBD0985DBB71}" presName="connSite2" presStyleCnt="0"/>
+      <dgm:spPr/>
+    </dgm:pt>
   </dgm:ptLst>
   <dgm:cxnLst>
-    <dgm:cxn modelId="{64199C02-2E10-4433-906B-8499CED88AD3}" type="presOf" srcId="{F1B21123-7991-41CC-A668-4F17303A0E96}" destId="{AD97A4AC-09A6-4A35-AB70-9F6504BE89E6}" srcOrd="0" destOrd="0" presId="urn:microsoft.com/office/officeart/2005/8/layout/process1"/>
-    <dgm:cxn modelId="{008CE314-9D1D-4B87-A582-782386E3C366}" type="presOf" srcId="{D90388B4-EC75-4E73-9C24-8B4DF0AAE4A9}" destId="{A84AEDA7-DF7A-46A2-8B14-785AA474DFCC}" srcOrd="0" destOrd="0" presId="urn:microsoft.com/office/officeart/2005/8/layout/process1"/>
-    <dgm:cxn modelId="{61C88F25-9FAE-4175-9983-65834E3C53DC}" type="presOf" srcId="{96A7BF06-3A6B-40EA-99E5-86983638BC40}" destId="{37F80E5B-C0CA-4F81-ACAD-F3A5EB722D96}" srcOrd="0" destOrd="0" presId="urn:microsoft.com/office/officeart/2005/8/layout/process1"/>
-    <dgm:cxn modelId="{84720729-F388-43C7-853A-9A3F36976073}" type="presOf" srcId="{774E6CD7-6191-4A32-A630-07369787CD3F}" destId="{4F8E7018-46CB-4088-A074-F1F2353C704B}" srcOrd="0" destOrd="0" presId="urn:microsoft.com/office/officeart/2005/8/layout/process1"/>
-    <dgm:cxn modelId="{E7946835-9822-4CAC-8424-F3121A825BDB}" type="presOf" srcId="{59CC3D0C-0590-475C-B738-76839FEE9C1B}" destId="{92B177F5-5799-41E8-94D2-6753E1430578}" srcOrd="0" destOrd="0" presId="urn:microsoft.com/office/officeart/2005/8/layout/process1"/>
-    <dgm:cxn modelId="{D24AE84A-0087-447B-A5AC-66F7468B102F}" type="presOf" srcId="{96A7BF06-3A6B-40EA-99E5-86983638BC40}" destId="{0CA39724-0620-407E-9A91-1703B9C2D23C}" srcOrd="1" destOrd="0" presId="urn:microsoft.com/office/officeart/2005/8/layout/process1"/>
-    <dgm:cxn modelId="{0074DA70-A17A-4BE7-A4ED-FF76A9A1553C}" srcId="{774E6CD7-6191-4A32-A630-07369787CD3F}" destId="{F58D4C73-F670-4ED4-977A-3E6B9878C2CD}" srcOrd="2" destOrd="0" parTransId="{DE58405E-5EA6-4C88-8463-4BA81818A712}" sibTransId="{48F1C68A-C0E3-4C57-8596-3834D434555C}"/>
+    <dgm:cxn modelId="{FBBA8800-6BA4-4E67-8D72-3A7E839A1D64}" type="presOf" srcId="{A4EE692F-15C6-40F6-A3A7-528F41F7EFA9}" destId="{BC7BF6D4-56BD-435E-8C17-60EBB4878659}" srcOrd="0" destOrd="0" presId="urn:microsoft.com/office/officeart/2005/8/layout/hProcess4"/>
+    <dgm:cxn modelId="{D3BF2001-2C62-44DA-9BD1-63D461324046}" type="presOf" srcId="{774E6CD7-6191-4A32-A630-07369787CD3F}" destId="{1F27389D-627D-4887-9519-B656F7272D68}" srcOrd="0" destOrd="0" presId="urn:microsoft.com/office/officeart/2005/8/layout/hProcess4"/>
+    <dgm:cxn modelId="{F427130A-89D4-4E13-8B31-AD0C3C9F23FD}" type="presOf" srcId="{7492C9B1-83D3-4843-9891-B75ED24C2C9D}" destId="{B90460B7-0401-4A52-915A-39C0EEA8D048}" srcOrd="0" destOrd="0" presId="urn:microsoft.com/office/officeart/2005/8/layout/hProcess4"/>
+    <dgm:cxn modelId="{A052B51C-7B80-4512-8802-AFACB3E5E09C}" type="presOf" srcId="{072EE138-7ADD-45CB-93E6-FAD75EBED361}" destId="{1E1F9420-B4E1-4A73-B89E-54846EB7FDFA}" srcOrd="1" destOrd="0" presId="urn:microsoft.com/office/officeart/2005/8/layout/hProcess4"/>
+    <dgm:cxn modelId="{4DB37B5C-136E-41EF-A36B-2AFC9512A622}" srcId="{360DA6D8-B6B0-406D-8898-C6142A1DBC88}" destId="{14EB2374-863D-48FB-8474-61A54816547B}" srcOrd="0" destOrd="0" parTransId="{1254772A-2CD9-4624-9100-BEC5D570E75C}" sibTransId="{43295346-60EA-4A15-9D7E-0CBE897F0221}"/>
+    <dgm:cxn modelId="{5D05314A-39B9-43DF-B2D6-8C6A5D981230}" srcId="{774E6CD7-6191-4A32-A630-07369787CD3F}" destId="{F519D0D4-95F0-4940-AC35-CEE08A059E19}" srcOrd="2" destOrd="0" parTransId="{98C8D3F2-378A-4A00-8950-D8EB32639866}" sibTransId="{A4EE692F-15C6-40F6-A3A7-528F41F7EFA9}"/>
+    <dgm:cxn modelId="{2BE0BE4C-0F0B-417B-8684-3D091D592E39}" type="presOf" srcId="{0F90B91D-22D5-46D3-8A5C-B4E479E27A70}" destId="{22157AB5-EA6F-4171-9F2B-D42EA5CC7D09}" srcOrd="0" destOrd="0" presId="urn:microsoft.com/office/officeart/2005/8/layout/hProcess4"/>
+    <dgm:cxn modelId="{4AB4114D-49A8-4F42-B1F4-15A68882C6C5}" type="presOf" srcId="{C90E1D4B-C042-40DD-8DB9-453042BBD5DF}" destId="{A95708A6-8EBA-49EE-9793-B04A4BBA39DE}" srcOrd="1" destOrd="0" presId="urn:microsoft.com/office/officeart/2005/8/layout/hProcess4"/>
+    <dgm:cxn modelId="{760AB06F-ABAF-4335-A11F-BCC48807A3B1}" srcId="{774E6CD7-6191-4A32-A630-07369787CD3F}" destId="{0F90B91D-22D5-46D3-8A5C-B4E479E27A70}" srcOrd="1" destOrd="0" parTransId="{A6E215EF-34A4-43E0-A78B-648112E05BC5}" sibTransId="{7492C9B1-83D3-4843-9891-B75ED24C2C9D}"/>
+    <dgm:cxn modelId="{ECF90175-8740-4933-B55B-1CF1579BCF80}" type="presOf" srcId="{96A7BF06-3A6B-40EA-99E5-86983638BC40}" destId="{5FAA9B61-0F86-451A-A039-83E1785AFFB8}" srcOrd="0" destOrd="0" presId="urn:microsoft.com/office/officeart/2005/8/layout/hProcess4"/>
     <dgm:cxn modelId="{02C4D877-F9FA-4BFA-A22F-A1402FDC9B72}" srcId="{774E6CD7-6191-4A32-A630-07369787CD3F}" destId="{360DA6D8-B6B0-406D-8898-C6142A1DBC88}" srcOrd="0" destOrd="0" parTransId="{47D6E7BC-9C03-44F7-B653-711D1857E6F6}" sibTransId="{96A7BF06-3A6B-40EA-99E5-86983638BC40}"/>
-    <dgm:cxn modelId="{1532B480-6F64-4C86-B841-71F8D2FBA2E0}" type="presOf" srcId="{F1B21123-7991-41CC-A668-4F17303A0E96}" destId="{6871553C-6A63-44AE-AFAA-9AB969B90F17}" srcOrd="1" destOrd="0" presId="urn:microsoft.com/office/officeart/2005/8/layout/process1"/>
-    <dgm:cxn modelId="{23290684-BE5C-483E-A4F8-A609C6F0C4A6}" type="presOf" srcId="{F58D4C73-F670-4ED4-977A-3E6B9878C2CD}" destId="{BCA32F45-8225-4186-B7B2-3E75E3588E41}" srcOrd="0" destOrd="0" presId="urn:microsoft.com/office/officeart/2005/8/layout/process1"/>
-    <dgm:cxn modelId="{BFEA9289-BB5D-4876-9AA3-B233EB15592A}" type="presOf" srcId="{48F1C68A-C0E3-4C57-8596-3834D434555C}" destId="{C6486BA8-812E-47BA-B7B9-19862395076B}" srcOrd="1" destOrd="0" presId="urn:microsoft.com/office/officeart/2005/8/layout/process1"/>
-    <dgm:cxn modelId="{A01ADCA4-BDB3-402F-9057-A7E8EAB92B1C}" type="presOf" srcId="{48F1C68A-C0E3-4C57-8596-3834D434555C}" destId="{FFD00C3A-1B97-4E30-988D-761D33D51C69}" srcOrd="0" destOrd="0" presId="urn:microsoft.com/office/officeart/2005/8/layout/process1"/>
-    <dgm:cxn modelId="{E9BC0AA8-8F4D-4130-B4CE-A3D32B386556}" srcId="{774E6CD7-6191-4A32-A630-07369787CD3F}" destId="{59CC3D0C-0590-475C-B738-76839FEE9C1B}" srcOrd="1" destOrd="0" parTransId="{AC4242AF-F2DC-4DED-85C0-FD3F598DD38A}" sibTransId="{F1B21123-7991-41CC-A668-4F17303A0E96}"/>
-    <dgm:cxn modelId="{6E6222AC-13FA-41B0-94E1-BAA39C3CD341}" type="presOf" srcId="{360DA6D8-B6B0-406D-8898-C6142A1DBC88}" destId="{198FC083-0163-42D5-A56D-4B109F1CAE31}" srcOrd="0" destOrd="0" presId="urn:microsoft.com/office/officeart/2005/8/layout/process1"/>
-    <dgm:cxn modelId="{09729ECE-F685-4D93-B5A9-146264990B19}" srcId="{774E6CD7-6191-4A32-A630-07369787CD3F}" destId="{D90388B4-EC75-4E73-9C24-8B4DF0AAE4A9}" srcOrd="3" destOrd="0" parTransId="{02AD2A7C-4B29-4B5F-9B3E-2079BEBE61BD}" sibTransId="{3DD1A510-A550-43ED-B171-D87B7DA58936}"/>
-    <dgm:cxn modelId="{AEB448C6-4ECE-4860-9B92-5A7A2E828BA1}" type="presParOf" srcId="{4F8E7018-46CB-4088-A074-F1F2353C704B}" destId="{198FC083-0163-42D5-A56D-4B109F1CAE31}" srcOrd="0" destOrd="0" presId="urn:microsoft.com/office/officeart/2005/8/layout/process1"/>
-    <dgm:cxn modelId="{9FC5DC60-44BB-4D2C-A5EE-8E00201FAB17}" type="presParOf" srcId="{4F8E7018-46CB-4088-A074-F1F2353C704B}" destId="{37F80E5B-C0CA-4F81-ACAD-F3A5EB722D96}" srcOrd="1" destOrd="0" presId="urn:microsoft.com/office/officeart/2005/8/layout/process1"/>
-    <dgm:cxn modelId="{59CEA41A-DC79-4E66-99FD-9CD6DAD29CA7}" type="presParOf" srcId="{37F80E5B-C0CA-4F81-ACAD-F3A5EB722D96}" destId="{0CA39724-0620-407E-9A91-1703B9C2D23C}" srcOrd="0" destOrd="0" presId="urn:microsoft.com/office/officeart/2005/8/layout/process1"/>
-    <dgm:cxn modelId="{409F1C89-7D13-4EB3-8BB2-4AE427BA5AA3}" type="presParOf" srcId="{4F8E7018-46CB-4088-A074-F1F2353C704B}" destId="{92B177F5-5799-41E8-94D2-6753E1430578}" srcOrd="2" destOrd="0" presId="urn:microsoft.com/office/officeart/2005/8/layout/process1"/>
-    <dgm:cxn modelId="{C4FC5843-0F21-46AF-8928-A76A37FC18D9}" type="presParOf" srcId="{4F8E7018-46CB-4088-A074-F1F2353C704B}" destId="{AD97A4AC-09A6-4A35-AB70-9F6504BE89E6}" srcOrd="3" destOrd="0" presId="urn:microsoft.com/office/officeart/2005/8/layout/process1"/>
-    <dgm:cxn modelId="{152B6D9A-3F31-45EF-AE89-D28D885B3E3F}" type="presParOf" srcId="{AD97A4AC-09A6-4A35-AB70-9F6504BE89E6}" destId="{6871553C-6A63-44AE-AFAA-9AB969B90F17}" srcOrd="0" destOrd="0" presId="urn:microsoft.com/office/officeart/2005/8/layout/process1"/>
-    <dgm:cxn modelId="{7CC44B8E-0F6E-4499-A10B-5A2DACE713EB}" type="presParOf" srcId="{4F8E7018-46CB-4088-A074-F1F2353C704B}" destId="{BCA32F45-8225-4186-B7B2-3E75E3588E41}" srcOrd="4" destOrd="0" presId="urn:microsoft.com/office/officeart/2005/8/layout/process1"/>
-    <dgm:cxn modelId="{5DA17FAB-88A8-4690-86DD-387CA980AAB5}" type="presParOf" srcId="{4F8E7018-46CB-4088-A074-F1F2353C704B}" destId="{FFD00C3A-1B97-4E30-988D-761D33D51C69}" srcOrd="5" destOrd="0" presId="urn:microsoft.com/office/officeart/2005/8/layout/process1"/>
-    <dgm:cxn modelId="{F52CF06D-37FB-4E7A-B2FB-E177D1EE45F2}" type="presParOf" srcId="{FFD00C3A-1B97-4E30-988D-761D33D51C69}" destId="{C6486BA8-812E-47BA-B7B9-19862395076B}" srcOrd="0" destOrd="0" presId="urn:microsoft.com/office/officeart/2005/8/layout/process1"/>
-    <dgm:cxn modelId="{75AA4D04-A036-4624-927A-D62F8B64EA81}" type="presParOf" srcId="{4F8E7018-46CB-4088-A074-F1F2353C704B}" destId="{A84AEDA7-DF7A-46A2-8B14-785AA474DFCC}" srcOrd="6" destOrd="0" presId="urn:microsoft.com/office/officeart/2005/8/layout/process1"/>
+    <dgm:cxn modelId="{5FC22D7F-BC21-4199-8EBF-213B9DD26AE8}" type="presOf" srcId="{C90E1D4B-C042-40DD-8DB9-453042BBD5DF}" destId="{BFB62CDE-5B4A-4B7F-8C63-93D11A4EBA2C}" srcOrd="0" destOrd="0" presId="urn:microsoft.com/office/officeart/2005/8/layout/hProcess4"/>
+    <dgm:cxn modelId="{F7E48093-62FA-4E93-961A-F6D5EF368B8F}" type="presOf" srcId="{F519D0D4-95F0-4940-AC35-CEE08A059E19}" destId="{3E280082-7468-4132-9F22-64673CF263DE}" srcOrd="0" destOrd="0" presId="urn:microsoft.com/office/officeart/2005/8/layout/hProcess4"/>
+    <dgm:cxn modelId="{F7D67F97-FD66-4FFB-93A4-CF5F871268D2}" type="presOf" srcId="{360DA6D8-B6B0-406D-8898-C6142A1DBC88}" destId="{2C2B6695-81C2-445C-8C0A-2D668EC6C123}" srcOrd="0" destOrd="0" presId="urn:microsoft.com/office/officeart/2005/8/layout/hProcess4"/>
+    <dgm:cxn modelId="{FD497AA3-0CAB-41C2-BBC2-583E79EF17F1}" srcId="{0F90B91D-22D5-46D3-8A5C-B4E479E27A70}" destId="{C90E1D4B-C042-40DD-8DB9-453042BBD5DF}" srcOrd="0" destOrd="0" parTransId="{1668CE28-5A06-49C2-A62C-5978689DC52D}" sibTransId="{3CD7E98D-138D-4C04-80C5-0C410FB18505}"/>
+    <dgm:cxn modelId="{0C8638A4-C2E8-4E0F-8F48-733EF2597080}" srcId="{F519D0D4-95F0-4940-AC35-CEE08A059E19}" destId="{072EE138-7ADD-45CB-93E6-FAD75EBED361}" srcOrd="0" destOrd="0" parTransId="{C1A641BC-7E55-4DCB-8C8C-FF3932AF1550}" sibTransId="{D94FA11A-4682-40CC-B9BE-1D442C5D53E7}"/>
+    <dgm:cxn modelId="{9C5646BB-DA6B-49C4-95B6-38A0B5D6DB22}" type="presOf" srcId="{14EB2374-863D-48FB-8474-61A54816547B}" destId="{C9F5EEE1-7F32-43D0-B414-A24955CF6411}" srcOrd="0" destOrd="0" presId="urn:microsoft.com/office/officeart/2005/8/layout/hProcess4"/>
+    <dgm:cxn modelId="{A2DE6AC0-4075-4C4C-8746-36B8D665B0C9}" srcId="{A1B8CC49-3753-4853-87C3-CBD0985DBB71}" destId="{6510424B-C2A3-4FD5-ADEE-C0CCF7652FBB}" srcOrd="0" destOrd="0" parTransId="{F973350C-CDA5-43AD-A324-2D0B8B4DCD95}" sibTransId="{C598214D-7333-466B-8536-AE46D5C8F8BE}"/>
+    <dgm:cxn modelId="{E78004C8-6A33-4631-90F7-82DFA3634C8C}" type="presOf" srcId="{A1B8CC49-3753-4853-87C3-CBD0985DBB71}" destId="{F25E4087-8A23-4E4D-85E4-1E618AF60BBF}" srcOrd="0" destOrd="0" presId="urn:microsoft.com/office/officeart/2005/8/layout/hProcess4"/>
+    <dgm:cxn modelId="{38683ECA-13F8-4E5F-9FD3-6FCF5D7E8AF8}" srcId="{774E6CD7-6191-4A32-A630-07369787CD3F}" destId="{A1B8CC49-3753-4853-87C3-CBD0985DBB71}" srcOrd="3" destOrd="0" parTransId="{FE65BC70-E183-43C0-AD2B-16A842BF95C5}" sibTransId="{FD29A225-47CE-4570-BCAF-9060038DEFAA}"/>
+    <dgm:cxn modelId="{1CAEDDCD-D2A2-4487-ADB0-CD416B7100CE}" type="presOf" srcId="{6510424B-C2A3-4FD5-ADEE-C0CCF7652FBB}" destId="{05874099-273A-402C-A4DC-F1F993D9F15C}" srcOrd="0" destOrd="0" presId="urn:microsoft.com/office/officeart/2005/8/layout/hProcess4"/>
+    <dgm:cxn modelId="{96DC31E0-32E0-446E-81D6-42AE1463A402}" type="presOf" srcId="{072EE138-7ADD-45CB-93E6-FAD75EBED361}" destId="{75DF6C70-0067-4BA0-A1F3-01CCEA8B956E}" srcOrd="0" destOrd="0" presId="urn:microsoft.com/office/officeart/2005/8/layout/hProcess4"/>
+    <dgm:cxn modelId="{5BD34AEB-5BFA-4F3C-B1BB-306229F45806}" type="presOf" srcId="{14EB2374-863D-48FB-8474-61A54816547B}" destId="{A54F6D19-CB35-4D2A-A475-5E05391D1BB2}" srcOrd="1" destOrd="0" presId="urn:microsoft.com/office/officeart/2005/8/layout/hProcess4"/>
+    <dgm:cxn modelId="{4A0EF6F0-7C94-4DB0-8360-DF5E700941C4}" type="presOf" srcId="{6510424B-C2A3-4FD5-ADEE-C0CCF7652FBB}" destId="{7800494B-F984-42E9-9735-444033B5C708}" srcOrd="1" destOrd="0" presId="urn:microsoft.com/office/officeart/2005/8/layout/hProcess4"/>
+    <dgm:cxn modelId="{21F11F99-1EE0-4D87-9B56-87F4CC39828F}" type="presParOf" srcId="{1F27389D-627D-4887-9519-B656F7272D68}" destId="{A4702F92-689F-409C-B1EB-3EF2BE1E9C85}" srcOrd="0" destOrd="0" presId="urn:microsoft.com/office/officeart/2005/8/layout/hProcess4"/>
+    <dgm:cxn modelId="{6786D601-631D-4CE4-9B0C-5B692213C865}" type="presParOf" srcId="{1F27389D-627D-4887-9519-B656F7272D68}" destId="{502C3353-21CE-4C43-84BC-7A6FEB8101DC}" srcOrd="1" destOrd="0" presId="urn:microsoft.com/office/officeart/2005/8/layout/hProcess4"/>
+    <dgm:cxn modelId="{650C2D2F-1DB3-4AD5-9E91-E47F2558EFE2}" type="presParOf" srcId="{1F27389D-627D-4887-9519-B656F7272D68}" destId="{59C33D22-7788-4105-8E72-77A24F0CF9D6}" srcOrd="2" destOrd="0" presId="urn:microsoft.com/office/officeart/2005/8/layout/hProcess4"/>
+    <dgm:cxn modelId="{118B53EA-F9ED-42C0-844D-D1FE074347B5}" type="presParOf" srcId="{59C33D22-7788-4105-8E72-77A24F0CF9D6}" destId="{9F6774F5-A8B6-4E3B-ABA9-FD9E217E768D}" srcOrd="0" destOrd="0" presId="urn:microsoft.com/office/officeart/2005/8/layout/hProcess4"/>
+    <dgm:cxn modelId="{F8BDC946-A9E0-442A-99DB-FA08AA96D63C}" type="presParOf" srcId="{9F6774F5-A8B6-4E3B-ABA9-FD9E217E768D}" destId="{A781D285-EAF0-4198-BB8A-6B47C5760143}" srcOrd="0" destOrd="0" presId="urn:microsoft.com/office/officeart/2005/8/layout/hProcess4"/>
+    <dgm:cxn modelId="{0D944557-6A08-4704-9EBE-954E45F65141}" type="presParOf" srcId="{9F6774F5-A8B6-4E3B-ABA9-FD9E217E768D}" destId="{C9F5EEE1-7F32-43D0-B414-A24955CF6411}" srcOrd="1" destOrd="0" presId="urn:microsoft.com/office/officeart/2005/8/layout/hProcess4"/>
+    <dgm:cxn modelId="{03870F1D-6232-434B-81CC-D85E1DE54641}" type="presParOf" srcId="{9F6774F5-A8B6-4E3B-ABA9-FD9E217E768D}" destId="{A54F6D19-CB35-4D2A-A475-5E05391D1BB2}" srcOrd="2" destOrd="0" presId="urn:microsoft.com/office/officeart/2005/8/layout/hProcess4"/>
+    <dgm:cxn modelId="{BCDFF54B-618B-460A-B4F8-AB8D06B33175}" type="presParOf" srcId="{9F6774F5-A8B6-4E3B-ABA9-FD9E217E768D}" destId="{2C2B6695-81C2-445C-8C0A-2D668EC6C123}" srcOrd="3" destOrd="0" presId="urn:microsoft.com/office/officeart/2005/8/layout/hProcess4"/>
+    <dgm:cxn modelId="{2E181E93-50D1-4FBB-A6C1-03CCFCA4AD58}" type="presParOf" srcId="{9F6774F5-A8B6-4E3B-ABA9-FD9E217E768D}" destId="{A3E95AC4-9FA5-42E0-9DD1-68017A2E09E3}" srcOrd="4" destOrd="0" presId="urn:microsoft.com/office/officeart/2005/8/layout/hProcess4"/>
+    <dgm:cxn modelId="{94DAFED9-983E-4850-9F78-E6E87A22BA2E}" type="presParOf" srcId="{59C33D22-7788-4105-8E72-77A24F0CF9D6}" destId="{5FAA9B61-0F86-451A-A039-83E1785AFFB8}" srcOrd="1" destOrd="0" presId="urn:microsoft.com/office/officeart/2005/8/layout/hProcess4"/>
+    <dgm:cxn modelId="{BB8C8C62-4530-4AE0-B2EB-D6160B8EC403}" type="presParOf" srcId="{59C33D22-7788-4105-8E72-77A24F0CF9D6}" destId="{70CF29E4-845E-44FD-BE8B-798AF6C6EBD2}" srcOrd="2" destOrd="0" presId="urn:microsoft.com/office/officeart/2005/8/layout/hProcess4"/>
+    <dgm:cxn modelId="{A82AF1DC-4E6A-433B-B056-00EE1275A255}" type="presParOf" srcId="{70CF29E4-845E-44FD-BE8B-798AF6C6EBD2}" destId="{403FF250-84A3-4307-BE45-5504259A0B63}" srcOrd="0" destOrd="0" presId="urn:microsoft.com/office/officeart/2005/8/layout/hProcess4"/>
+    <dgm:cxn modelId="{BE6FB427-3A67-4CD0-B08F-162418B9206D}" type="presParOf" srcId="{70CF29E4-845E-44FD-BE8B-798AF6C6EBD2}" destId="{BFB62CDE-5B4A-4B7F-8C63-93D11A4EBA2C}" srcOrd="1" destOrd="0" presId="urn:microsoft.com/office/officeart/2005/8/layout/hProcess4"/>
+    <dgm:cxn modelId="{5D4D8302-4D42-40C1-8E53-359DB9A7DF68}" type="presParOf" srcId="{70CF29E4-845E-44FD-BE8B-798AF6C6EBD2}" destId="{A95708A6-8EBA-49EE-9793-B04A4BBA39DE}" srcOrd="2" destOrd="0" presId="urn:microsoft.com/office/officeart/2005/8/layout/hProcess4"/>
+    <dgm:cxn modelId="{9D24BF05-41F3-46F6-B828-03CB0957C047}" type="presParOf" srcId="{70CF29E4-845E-44FD-BE8B-798AF6C6EBD2}" destId="{22157AB5-EA6F-4171-9F2B-D42EA5CC7D09}" srcOrd="3" destOrd="0" presId="urn:microsoft.com/office/officeart/2005/8/layout/hProcess4"/>
+    <dgm:cxn modelId="{9A2B05F8-E064-4B7D-8241-AABC56A4B80F}" type="presParOf" srcId="{70CF29E4-845E-44FD-BE8B-798AF6C6EBD2}" destId="{B44E524D-A2C9-45F9-99B8-716EE4ECD3EC}" srcOrd="4" destOrd="0" presId="urn:microsoft.com/office/officeart/2005/8/layout/hProcess4"/>
+    <dgm:cxn modelId="{1F65D5A9-1318-404D-90AB-E46B2A20598B}" type="presParOf" srcId="{59C33D22-7788-4105-8E72-77A24F0CF9D6}" destId="{B90460B7-0401-4A52-915A-39C0EEA8D048}" srcOrd="3" destOrd="0" presId="urn:microsoft.com/office/officeart/2005/8/layout/hProcess4"/>
+    <dgm:cxn modelId="{BEBDDB25-09A8-4394-BEC4-124F406A853B}" type="presParOf" srcId="{59C33D22-7788-4105-8E72-77A24F0CF9D6}" destId="{23B720DE-251D-4B4A-9C34-02746361711C}" srcOrd="4" destOrd="0" presId="urn:microsoft.com/office/officeart/2005/8/layout/hProcess4"/>
+    <dgm:cxn modelId="{E2AE7D60-E8A7-433F-8AAA-AC0E9E922B66}" type="presParOf" srcId="{23B720DE-251D-4B4A-9C34-02746361711C}" destId="{430F7BA3-B29D-41A0-8B27-B5A9A7C04C47}" srcOrd="0" destOrd="0" presId="urn:microsoft.com/office/officeart/2005/8/layout/hProcess4"/>
+    <dgm:cxn modelId="{4CAA0E7B-FBBB-4AFA-8590-DC3339E36CA5}" type="presParOf" srcId="{23B720DE-251D-4B4A-9C34-02746361711C}" destId="{75DF6C70-0067-4BA0-A1F3-01CCEA8B956E}" srcOrd="1" destOrd="0" presId="urn:microsoft.com/office/officeart/2005/8/layout/hProcess4"/>
+    <dgm:cxn modelId="{FF33014D-FD7B-40E0-8EF4-E58FE7B5FA26}" type="presParOf" srcId="{23B720DE-251D-4B4A-9C34-02746361711C}" destId="{1E1F9420-B4E1-4A73-B89E-54846EB7FDFA}" srcOrd="2" destOrd="0" presId="urn:microsoft.com/office/officeart/2005/8/layout/hProcess4"/>
+    <dgm:cxn modelId="{8C5BE1EB-2CD2-48AF-8C5B-0E716DB137F4}" type="presParOf" srcId="{23B720DE-251D-4B4A-9C34-02746361711C}" destId="{3E280082-7468-4132-9F22-64673CF263DE}" srcOrd="3" destOrd="0" presId="urn:microsoft.com/office/officeart/2005/8/layout/hProcess4"/>
+    <dgm:cxn modelId="{2490D48C-23B9-4BDF-A5AB-1755A85DDFCD}" type="presParOf" srcId="{23B720DE-251D-4B4A-9C34-02746361711C}" destId="{74FA9880-5FA2-464C-A375-2AB8DDC3A270}" srcOrd="4" destOrd="0" presId="urn:microsoft.com/office/officeart/2005/8/layout/hProcess4"/>
+    <dgm:cxn modelId="{D6F394D1-0C1A-4626-8C36-E8767BA761D1}" type="presParOf" srcId="{59C33D22-7788-4105-8E72-77A24F0CF9D6}" destId="{BC7BF6D4-56BD-435E-8C17-60EBB4878659}" srcOrd="5" destOrd="0" presId="urn:microsoft.com/office/officeart/2005/8/layout/hProcess4"/>
+    <dgm:cxn modelId="{7E89BD5E-79CF-42AB-9F53-2A2115EEC65E}" type="presParOf" srcId="{59C33D22-7788-4105-8E72-77A24F0CF9D6}" destId="{5E0E8086-704E-4105-B4F8-EADCD54DD5A9}" srcOrd="6" destOrd="0" presId="urn:microsoft.com/office/officeart/2005/8/layout/hProcess4"/>
+    <dgm:cxn modelId="{702FBA83-6F68-4D4E-82F1-A964C8D699E6}" type="presParOf" srcId="{5E0E8086-704E-4105-B4F8-EADCD54DD5A9}" destId="{602F4DD1-7EFB-4C09-B5BA-DAFE2BD0C804}" srcOrd="0" destOrd="0" presId="urn:microsoft.com/office/officeart/2005/8/layout/hProcess4"/>
+    <dgm:cxn modelId="{7F2EFC30-ECF6-467F-9554-2908EB4691F4}" type="presParOf" srcId="{5E0E8086-704E-4105-B4F8-EADCD54DD5A9}" destId="{05874099-273A-402C-A4DC-F1F993D9F15C}" srcOrd="1" destOrd="0" presId="urn:microsoft.com/office/officeart/2005/8/layout/hProcess4"/>
+    <dgm:cxn modelId="{B83605E7-162B-4AF2-8B36-D2C51F876421}" type="presParOf" srcId="{5E0E8086-704E-4105-B4F8-EADCD54DD5A9}" destId="{7800494B-F984-42E9-9735-444033B5C708}" srcOrd="2" destOrd="0" presId="urn:microsoft.com/office/officeart/2005/8/layout/hProcess4"/>
+    <dgm:cxn modelId="{399AB96B-651C-4CC8-BEA8-9372AAB4CC8E}" type="presParOf" srcId="{5E0E8086-704E-4105-B4F8-EADCD54DD5A9}" destId="{F25E4087-8A23-4E4D-85E4-1E618AF60BBF}" srcOrd="3" destOrd="0" presId="urn:microsoft.com/office/officeart/2005/8/layout/hProcess4"/>
+    <dgm:cxn modelId="{D106FC9E-0A58-49C8-B239-46291AAAAD7E}" type="presParOf" srcId="{5E0E8086-704E-4105-B4F8-EADCD54DD5A9}" destId="{AED715D2-BFFF-4F6B-99F9-3542C35D16C8}" srcOrd="4" destOrd="0" presId="urn:microsoft.com/office/officeart/2005/8/layout/hProcess4"/>
   </dgm:cxnLst>
   <dgm:bg/>
   <dgm:whole/>
   <dgm:extLst>
     <a:ext uri="http://schemas.microsoft.com/office/drawing/2008/diagram">
-      <dsp:dataModelExt xmlns:dsp="http://schemas.microsoft.com/office/drawing/2008/diagram" relId="rId11" minVer="http://schemas.openxmlformats.org/drawingml/2006/diagram"/>
+      <dsp:dataModelExt xmlns:dsp="http://schemas.microsoft.com/office/drawing/2008/diagram" relId="rId6" minVer="http://schemas.openxmlformats.org/drawingml/2006/diagram"/>
     </a:ext>
   </dgm:extLst>
 </dgm:dataModel>
@@ -10085,14 +10449,9 @@
         </a:solidFill>
         <a:ln w="19050" cap="flat" cmpd="sng" algn="ctr">
           <a:solidFill>
-            <a:schemeClr val="lt1">
-              <a:hueOff val="0"/>
-              <a:satOff val="0"/>
-              <a:lumOff val="0"/>
-              <a:alphaOff val="0"/>
-            </a:schemeClr>
+            <a:schemeClr val="tx1"/>
           </a:solidFill>
-          <a:prstDash val="solid"/>
+          <a:prstDash val="dash"/>
           <a:miter lim="800000"/>
         </a:ln>
         <a:effectLst/>
@@ -11953,12 +12312,12 @@
         </a:fontRef>
       </dsp:style>
       <dsp:txBody>
-        <a:bodyPr spcFirstLastPara="0" vert="horz" wrap="square" lIns="6985" tIns="6985" rIns="6985" bIns="6985" numCol="1" spcCol="1270" anchor="ctr" anchorCtr="0">
+        <a:bodyPr spcFirstLastPara="0" vert="horz" wrap="square" lIns="8890" tIns="8890" rIns="8890" bIns="8890" numCol="1" spcCol="1270" anchor="ctr" anchorCtr="0">
           <a:noAutofit/>
         </a:bodyPr>
         <a:lstStyle/>
         <a:p>
-          <a:pPr marL="0" lvl="0" indent="0" algn="ctr" defTabSz="488950">
+          <a:pPr marL="0" lvl="0" indent="0" algn="ctr" defTabSz="622300">
             <a:lnSpc>
               <a:spcPct val="90000"/>
             </a:lnSpc>
@@ -11971,7 +12330,7 @@
             <a:buNone/>
           </a:pPr>
           <a:r>
-            <a:rPr lang="en-US" sz="1100" b="1" kern="1200">
+            <a:rPr lang="en-US" sz="1400" b="1" kern="1200">
               <a:solidFill>
                 <a:schemeClr val="tx1"/>
               </a:solidFill>
@@ -12045,7 +12404,7 @@
         </a:bodyPr>
         <a:lstStyle/>
         <a:p>
-          <a:pPr marL="0" lvl="0" indent="0" algn="ctr" defTabSz="177800">
+          <a:pPr marL="0" lvl="0" indent="0" algn="ctr" defTabSz="266700">
             <a:lnSpc>
               <a:spcPct val="90000"/>
             </a:lnSpc>
@@ -12057,7 +12416,7 @@
             </a:spcAft>
             <a:buNone/>
           </a:pPr>
-          <a:endParaRPr lang="en-US" sz="400" kern="1200"/>
+          <a:endParaRPr lang="en-US" sz="600" kern="1200"/>
         </a:p>
       </dsp:txBody>
       <dsp:txXfrm>
@@ -12110,12 +12469,12 @@
         </a:fontRef>
       </dsp:style>
       <dsp:txBody>
-        <a:bodyPr spcFirstLastPara="0" vert="horz" wrap="square" lIns="6985" tIns="6985" rIns="6985" bIns="6985" numCol="1" spcCol="1270" anchor="ctr" anchorCtr="0">
+        <a:bodyPr spcFirstLastPara="0" vert="horz" wrap="square" lIns="8890" tIns="8890" rIns="8890" bIns="8890" numCol="1" spcCol="1270" anchor="ctr" anchorCtr="0">
           <a:noAutofit/>
         </a:bodyPr>
         <a:lstStyle/>
         <a:p>
-          <a:pPr marL="0" lvl="0" indent="0" algn="ctr" defTabSz="488950">
+          <a:pPr marL="0" lvl="0" indent="0" algn="ctr" defTabSz="622300">
             <a:lnSpc>
               <a:spcPct val="90000"/>
             </a:lnSpc>
@@ -12129,14 +12488,14 @@
             <a:buNone/>
           </a:pPr>
           <a:r>
-            <a:rPr lang="en-US" sz="1100" b="1" kern="1200" dirty="0"/>
-            <a:t>1. Self Noise </a:t>
+            <a:rPr lang="en-US" sz="1400" b="1" kern="1200" dirty="0"/>
+            <a:t>Self Noise </a:t>
           </a:r>
           <a:r>
-            <a:rPr lang="en-US" sz="1100" b="0" i="0" kern="1200" dirty="0"/>
+            <a:rPr lang="en-US" sz="1400" b="0" i="0" kern="1200" dirty="0"/>
             <a:t>✓</a:t>
           </a:r>
-          <a:endParaRPr lang="en-US" sz="1100" b="1" kern="1200" dirty="0"/>
+          <a:endParaRPr lang="en-US" sz="1400" b="1" kern="1200" dirty="0"/>
         </a:p>
       </dsp:txBody>
       <dsp:txXfrm>
@@ -12204,7 +12563,7 @@
         </a:bodyPr>
         <a:lstStyle/>
         <a:p>
-          <a:pPr marL="0" lvl="0" indent="0" algn="ctr" defTabSz="222250">
+          <a:pPr marL="0" lvl="0" indent="0" algn="ctr" defTabSz="311150">
             <a:lnSpc>
               <a:spcPct val="90000"/>
             </a:lnSpc>
@@ -12216,7 +12575,7 @@
             </a:spcAft>
             <a:buNone/>
           </a:pPr>
-          <a:endParaRPr lang="en-US" sz="500" kern="1200"/>
+          <a:endParaRPr lang="en-US" sz="700" kern="1200"/>
         </a:p>
       </dsp:txBody>
       <dsp:txXfrm>
@@ -12269,12 +12628,12 @@
         </a:fontRef>
       </dsp:style>
       <dsp:txBody>
-        <a:bodyPr spcFirstLastPara="0" vert="horz" wrap="square" lIns="6985" tIns="6985" rIns="6985" bIns="6985" numCol="1" spcCol="1270" anchor="ctr" anchorCtr="0">
+        <a:bodyPr spcFirstLastPara="0" vert="horz" wrap="square" lIns="8890" tIns="8890" rIns="8890" bIns="8890" numCol="1" spcCol="1270" anchor="ctr" anchorCtr="0">
           <a:noAutofit/>
         </a:bodyPr>
         <a:lstStyle/>
         <a:p>
-          <a:pPr marL="0" lvl="0" indent="0" algn="ctr" defTabSz="488950">
+          <a:pPr marL="0" lvl="0" indent="0" algn="ctr" defTabSz="622300">
             <a:lnSpc>
               <a:spcPct val="90000"/>
             </a:lnSpc>
@@ -12288,12 +12647,12 @@
             <a:buNone/>
           </a:pPr>
           <a:r>
-            <a:rPr lang="en-US" sz="1100" b="1" kern="1200" dirty="0"/>
-            <a:t>5. Loss Budget</a:t>
+            <a:rPr lang="en-US" sz="1400" b="1" kern="1200" dirty="0"/>
+            <a:t>Loss Budget</a:t>
           </a:r>
         </a:p>
         <a:p>
-          <a:pPr marL="0" lvl="0" indent="0" algn="ctr" defTabSz="488950">
+          <a:pPr marL="0" lvl="0" indent="0" algn="ctr" defTabSz="622300">
             <a:lnSpc>
               <a:spcPct val="90000"/>
             </a:lnSpc>
@@ -12307,11 +12666,11 @@
             <a:buNone/>
           </a:pPr>
           <a:r>
-            <a:rPr lang="en-US" sz="1100" b="0" i="0" kern="1200" dirty="0"/>
+            <a:rPr lang="en-US" sz="1400" b="0" i="0" kern="1200" dirty="0"/>
             <a:t>✓</a:t>
           </a:r>
           <a:r>
-            <a:rPr lang="en-US" sz="1100" b="1" kern="1200" dirty="0"/>
+            <a:rPr lang="en-US" sz="1400" b="1" kern="1200" dirty="0"/>
             <a:t> </a:t>
           </a:r>
         </a:p>
@@ -12381,7 +12740,7 @@
         </a:bodyPr>
         <a:lstStyle/>
         <a:p>
-          <a:pPr marL="0" lvl="0" indent="0" algn="ctr" defTabSz="466725">
+          <a:pPr marL="0" lvl="0" indent="0" algn="ctr" defTabSz="533400">
             <a:lnSpc>
               <a:spcPct val="90000"/>
             </a:lnSpc>
@@ -12393,7 +12752,7 @@
             </a:spcAft>
             <a:buNone/>
           </a:pPr>
-          <a:endParaRPr lang="en-US" sz="1050" b="1" kern="1200"/>
+          <a:endParaRPr lang="en-US" sz="1200" b="1" kern="1200"/>
         </a:p>
       </dsp:txBody>
       <dsp:txXfrm>
@@ -12465,7 +12824,7 @@
             <a:buNone/>
           </a:pPr>
           <a:r>
-            <a:rPr lang="en-US" sz="1100" b="1" kern="1200" dirty="0">
+            <a:rPr lang="en-US" sz="1400" b="1" kern="1200" dirty="0">
               <a:solidFill>
                 <a:prstClr val="white"/>
               </a:solidFill>
@@ -12473,7 +12832,7 @@
               <a:ea typeface="+mn-ea"/>
               <a:cs typeface="+mn-cs"/>
             </a:rPr>
-            <a:t>2. Dynamic Range</a:t>
+            <a:t>Dynamic Range</a:t>
           </a:r>
         </a:p>
         <a:p>
@@ -12491,11 +12850,11 @@
             <a:buNone/>
           </a:pPr>
           <a:r>
-            <a:rPr lang="en-US" sz="1100" b="0" i="0" kern="1200" dirty="0"/>
+            <a:rPr lang="en-US" sz="1400" b="0" i="0" kern="1200" dirty="0"/>
             <a:t>✓</a:t>
           </a:r>
           <a:r>
-            <a:rPr lang="en-US" sz="1100" b="1" kern="1200" dirty="0">
+            <a:rPr lang="en-US" sz="1400" b="1" kern="1200" dirty="0">
               <a:solidFill>
                 <a:prstClr val="white"/>
               </a:solidFill>
@@ -12572,7 +12931,7 @@
         </a:bodyPr>
         <a:lstStyle/>
         <a:p>
-          <a:pPr marL="0" lvl="0" indent="0" algn="ctr" defTabSz="222250">
+          <a:pPr marL="0" lvl="0" indent="0" algn="ctr" defTabSz="311150">
             <a:lnSpc>
               <a:spcPct val="90000"/>
             </a:lnSpc>
@@ -12584,7 +12943,7 @@
             </a:spcAft>
             <a:buNone/>
           </a:pPr>
-          <a:endParaRPr lang="en-US" sz="500" kern="1200"/>
+          <a:endParaRPr lang="en-US" sz="700" kern="1200"/>
         </a:p>
       </dsp:txBody>
       <dsp:txXfrm>
@@ -12656,7 +13015,7 @@
             <a:buNone/>
           </a:pPr>
           <a:r>
-            <a:rPr lang="en-US" sz="1100" b="1" kern="1200" dirty="0">
+            <a:rPr lang="en-US" sz="1400" b="1" kern="1200" dirty="0">
               <a:solidFill>
                 <a:prstClr val="white"/>
               </a:solidFill>
@@ -12664,7 +13023,7 @@
               <a:ea typeface="+mn-ea"/>
               <a:cs typeface="+mn-cs"/>
             </a:rPr>
-            <a:t>4. Fidelity</a:t>
+            <a:t>Fidelity</a:t>
           </a:r>
         </a:p>
         <a:p>
@@ -12682,10 +13041,10 @@
             <a:buNone/>
           </a:pPr>
           <a:r>
-            <a:rPr lang="en-US" sz="1100" b="0" i="0" kern="1200" dirty="0"/>
+            <a:rPr lang="en-US" sz="1400" b="0" i="0" kern="1200" dirty="0"/>
             <a:t>✓</a:t>
           </a:r>
-          <a:endParaRPr lang="en-US" sz="1100" b="1" kern="1200" dirty="0">
+          <a:endParaRPr lang="en-US" sz="1400" b="1" kern="1200" dirty="0">
             <a:solidFill>
               <a:prstClr val="white"/>
             </a:solidFill>
@@ -12760,7 +13119,7 @@
         </a:bodyPr>
         <a:lstStyle/>
         <a:p>
-          <a:pPr marL="0" lvl="0" indent="0" algn="ctr" defTabSz="222250">
+          <a:pPr marL="0" lvl="0" indent="0" algn="ctr" defTabSz="311150">
             <a:lnSpc>
               <a:spcPct val="90000"/>
             </a:lnSpc>
@@ -12772,7 +13131,7 @@
             </a:spcAft>
             <a:buNone/>
           </a:pPr>
-          <a:endParaRPr lang="en-US" sz="500" kern="1200"/>
+          <a:endParaRPr lang="en-US" sz="700" kern="1200"/>
         </a:p>
       </dsp:txBody>
       <dsp:txXfrm rot="10800000">
@@ -12844,7 +13203,7 @@
             <a:buNone/>
           </a:pPr>
           <a:r>
-            <a:rPr lang="en-US" sz="1100" b="1" kern="1200" dirty="0">
+            <a:rPr lang="en-US" sz="1400" b="1" kern="1200" dirty="0">
               <a:solidFill>
                 <a:prstClr val="white"/>
               </a:solidFill>
@@ -12852,7 +13211,7 @@
               <a:ea typeface="+mn-ea"/>
               <a:cs typeface="+mn-cs"/>
             </a:rPr>
-            <a:t>7. Cross Talk</a:t>
+            <a:t>Cross Talk</a:t>
           </a:r>
         </a:p>
         <a:p>
@@ -12870,11 +13229,11 @@
             <a:buNone/>
           </a:pPr>
           <a:r>
-            <a:rPr lang="en-US" sz="1100" b="0" i="0" kern="1200" dirty="0"/>
+            <a:rPr lang="en-US" sz="1400" b="0" i="0" kern="1200" dirty="0"/>
             <a:t>✓</a:t>
           </a:r>
           <a:r>
-            <a:rPr lang="en-US" sz="1100" b="1" kern="1200" dirty="0">
+            <a:rPr lang="en-US" sz="1400" b="1" kern="1200" dirty="0">
               <a:solidFill>
                 <a:prstClr val="white"/>
               </a:solidFill>
@@ -12951,7 +13310,7 @@
         </a:bodyPr>
         <a:lstStyle/>
         <a:p>
-          <a:pPr marL="0" lvl="0" indent="0" algn="ctr" defTabSz="466725">
+          <a:pPr marL="0" lvl="0" indent="0" algn="ctr" defTabSz="533400">
             <a:lnSpc>
               <a:spcPct val="90000"/>
             </a:lnSpc>
@@ -12963,7 +13322,7 @@
             </a:spcAft>
             <a:buNone/>
           </a:pPr>
-          <a:endParaRPr lang="en-US" sz="1050" b="1" kern="1200"/>
+          <a:endParaRPr lang="en-US" sz="1200" b="1" kern="1200"/>
         </a:p>
       </dsp:txBody>
       <dsp:txXfrm rot="10800000">
@@ -12985,9 +13344,7 @@
           <a:avLst/>
         </a:prstGeom>
         <a:solidFill>
-          <a:schemeClr val="bg2">
-            <a:lumMod val="75000"/>
-          </a:schemeClr>
+          <a:schemeClr val="accent6"/>
         </a:solidFill>
         <a:ln w="19050" cap="flat" cmpd="sng" algn="ctr">
           <a:solidFill>
@@ -13018,12 +13375,12 @@
         </a:fontRef>
       </dsp:style>
       <dsp:txBody>
-        <a:bodyPr spcFirstLastPara="0" vert="horz" wrap="square" lIns="6985" tIns="6985" rIns="6985" bIns="6985" numCol="1" spcCol="1270" anchor="ctr" anchorCtr="0">
+        <a:bodyPr spcFirstLastPara="0" vert="horz" wrap="square" lIns="8890" tIns="8890" rIns="8890" bIns="8890" numCol="1" spcCol="1270" anchor="ctr" anchorCtr="0">
           <a:noAutofit/>
         </a:bodyPr>
         <a:lstStyle/>
         <a:p>
-          <a:pPr marL="0" lvl="0" indent="0" algn="ctr" defTabSz="488950">
+          <a:pPr marL="0" lvl="0" indent="0" algn="ctr" defTabSz="622300">
             <a:lnSpc>
               <a:spcPct val="90000"/>
             </a:lnSpc>
@@ -13037,9 +13394,29 @@
             <a:buNone/>
           </a:pPr>
           <a:r>
-            <a:rPr lang="en-US" sz="1100" b="1" kern="1200" dirty="0"/>
-            <a:t>3. Frequency Response </a:t>
+            <a:rPr lang="en-US" sz="1400" b="1" kern="1200" dirty="0"/>
+            <a:t>Frequency Response </a:t>
           </a:r>
+        </a:p>
+        <a:p>
+          <a:pPr marL="0" lvl="0" indent="0" algn="ctr" defTabSz="622300">
+            <a:lnSpc>
+              <a:spcPct val="90000"/>
+            </a:lnSpc>
+            <a:spcBef>
+              <a:spcPct val="0"/>
+            </a:spcBef>
+            <a:spcAft>
+              <a:spcPct val="35000"/>
+            </a:spcAft>
+            <a:buFont typeface="+mj-lt"/>
+            <a:buNone/>
+          </a:pPr>
+          <a:r>
+            <a:rPr lang="en-US" sz="1400" b="0" i="0" kern="1200" dirty="0"/>
+            <a:t>✓</a:t>
+          </a:r>
+          <a:endParaRPr lang="en-US" sz="1400" b="1" kern="1200" dirty="0"/>
         </a:p>
       </dsp:txBody>
       <dsp:txXfrm>
@@ -13107,7 +13484,7 @@
         </a:bodyPr>
         <a:lstStyle/>
         <a:p>
-          <a:pPr marL="0" lvl="0" indent="0" algn="ctr" defTabSz="466725">
+          <a:pPr marL="0" lvl="0" indent="0" algn="ctr" defTabSz="533400">
             <a:lnSpc>
               <a:spcPct val="90000"/>
             </a:lnSpc>
@@ -13119,7 +13496,7 @@
             </a:spcAft>
             <a:buNone/>
           </a:pPr>
-          <a:endParaRPr lang="en-US" sz="1050" b="1" kern="1200"/>
+          <a:endParaRPr lang="en-US" sz="1200" b="1" kern="1200"/>
         </a:p>
       </dsp:txBody>
       <dsp:txXfrm rot="10800000">
@@ -13174,12 +13551,12 @@
         </a:fontRef>
       </dsp:style>
       <dsp:txBody>
-        <a:bodyPr spcFirstLastPara="0" vert="horz" wrap="square" lIns="6985" tIns="6985" rIns="6985" bIns="6985" numCol="1" spcCol="1270" anchor="ctr" anchorCtr="0">
+        <a:bodyPr spcFirstLastPara="0" vert="horz" wrap="square" lIns="8890" tIns="8890" rIns="8890" bIns="8890" numCol="1" spcCol="1270" anchor="ctr" anchorCtr="0">
           <a:noAutofit/>
         </a:bodyPr>
         <a:lstStyle/>
         <a:p>
-          <a:pPr marL="0" lvl="0" indent="0" algn="ctr" defTabSz="488950">
+          <a:pPr marL="0" lvl="0" indent="0" algn="ctr" defTabSz="622300">
             <a:lnSpc>
               <a:spcPct val="90000"/>
             </a:lnSpc>
@@ -13193,8 +13570,8 @@
             <a:buNone/>
           </a:pPr>
           <a:r>
-            <a:rPr lang="en-US" sz="1100" b="1" kern="1200" dirty="0"/>
-            <a:t>6. Spatial Resolution </a:t>
+            <a:rPr lang="en-US" sz="1400" b="1" kern="1200" dirty="0"/>
+            <a:t>Spatial Resolution </a:t>
           </a:r>
         </a:p>
       </dsp:txBody>
@@ -13215,15 +13592,15 @@
       <dsp:cNvGrpSpPr/>
     </dsp:nvGrpSpPr>
     <dsp:grpSpPr/>
-    <dsp:sp modelId="{198FC083-0163-42D5-A56D-4B109F1CAE31}">
+    <dsp:sp modelId="{C9F5EEE1-7F32-43D0-B414-A24955CF6411}">
       <dsp:nvSpPr>
         <dsp:cNvPr id="0" name=""/>
         <dsp:cNvSpPr/>
       </dsp:nvSpPr>
       <dsp:spPr>
         <a:xfrm>
-          <a:off x="2654" y="738626"/>
-          <a:ext cx="1160753" cy="696452"/>
+          <a:off x="471718" y="880834"/>
+          <a:ext cx="2052135" cy="1692582"/>
         </a:xfrm>
         <a:prstGeom prst="roundRect">
           <a:avLst>
@@ -13232,6 +13609,7 @@
         </a:prstGeom>
         <a:solidFill>
           <a:schemeClr val="lt1">
+            <a:alpha val="90000"/>
             <a:hueOff val="0"/>
             <a:satOff val="0"/>
             <a:lumOff val="0"/>
@@ -13241,7 +13619,6 @@
         <a:ln w="19050" cap="flat" cmpd="sng" algn="ctr">
           <a:solidFill>
             <a:schemeClr val="accent3">
-              <a:shade val="80000"/>
               <a:hueOff val="0"/>
               <a:satOff val="0"/>
               <a:lumOff val="0"/>
@@ -13263,17 +13640,15 @@
         <a:effectRef idx="0">
           <a:scrgbClr r="0" g="0" b="0"/>
         </a:effectRef>
-        <a:fontRef idx="minor">
-          <a:schemeClr val="lt1"/>
-        </a:fontRef>
+        <a:fontRef idx="minor"/>
       </dsp:style>
       <dsp:txBody>
-        <a:bodyPr spcFirstLastPara="0" vert="horz" wrap="square" lIns="38100" tIns="38100" rIns="38100" bIns="38100" numCol="1" spcCol="1270" anchor="ctr" anchorCtr="0">
+        <a:bodyPr spcFirstLastPara="0" vert="horz" wrap="square" lIns="123825" tIns="123825" rIns="123825" bIns="123825" numCol="1" spcCol="1270" anchor="t" anchorCtr="0">
           <a:noAutofit/>
         </a:bodyPr>
         <a:lstStyle/>
         <a:p>
-          <a:pPr marL="0" lvl="0" indent="0" algn="ctr" defTabSz="444500">
+          <a:pPr marL="57150" lvl="1" indent="-57150" algn="l" defTabSz="488950">
             <a:lnSpc>
               <a:spcPct val="90000"/>
             </a:lnSpc>
@@ -13281,40 +13656,38 @@
               <a:spcPct val="0"/>
             </a:spcBef>
             <a:spcAft>
-              <a:spcPct val="35000"/>
+              <a:spcPct val="15000"/>
             </a:spcAft>
-            <a:buNone/>
+            <a:buChar char="•"/>
           </a:pPr>
           <a:r>
-            <a:rPr lang="en-US" sz="1000" kern="1200" dirty="0"/>
-            <a:t>pip install </a:t>
+            <a:rPr lang="en-US" sz="1100" b="1" i="0" kern="1200" dirty="0"/>
+            <a:t>pip install pySEAFOM (or integrate the repo into your environment)</a:t>
           </a:r>
-          <a:r>
-            <a:rPr lang="en-US" sz="1000" kern="1200" dirty="0" err="1"/>
-            <a:t>pySEAFOM</a:t>
-          </a:r>
-          <a:endParaRPr lang="en-US" sz="1000" kern="1200" dirty="0"/>
         </a:p>
       </dsp:txBody>
       <dsp:txXfrm>
-        <a:off x="23052" y="759024"/>
-        <a:ext cx="1119957" cy="655656"/>
+        <a:off x="510669" y="919785"/>
+        <a:ext cx="1974233" cy="1251984"/>
       </dsp:txXfrm>
     </dsp:sp>
-    <dsp:sp modelId="{37F80E5B-C0CA-4F81-ACAD-F3A5EB722D96}">
+    <dsp:sp modelId="{5FAA9B61-0F86-451A-A039-83E1785AFFB8}">
       <dsp:nvSpPr>
         <dsp:cNvPr id="0" name=""/>
         <dsp:cNvSpPr/>
       </dsp:nvSpPr>
       <dsp:spPr>
         <a:xfrm>
-          <a:off x="1279483" y="942919"/>
-          <a:ext cx="246079" cy="287866"/>
+          <a:off x="1548716" y="1010100"/>
+          <a:ext cx="2667687" cy="2667687"/>
         </a:xfrm>
-        <a:prstGeom prst="rightArrow">
+        <a:prstGeom prst="leftCircularArrow">
           <a:avLst>
-            <a:gd name="adj1" fmla="val 60000"/>
-            <a:gd name="adj2" fmla="val 50000"/>
+            <a:gd name="adj1" fmla="val 4660"/>
+            <a:gd name="adj2" fmla="val 594742"/>
+            <a:gd name="adj3" fmla="val 2370253"/>
+            <a:gd name="adj4" fmla="val 9024489"/>
+            <a:gd name="adj5" fmla="val 5437"/>
           </a:avLst>
         </a:prstGeom>
         <a:solidFill>
@@ -13345,41 +13718,16 @@
           <a:schemeClr val="lt1"/>
         </a:fontRef>
       </dsp:style>
-      <dsp:txBody>
-        <a:bodyPr spcFirstLastPara="0" vert="horz" wrap="square" lIns="0" tIns="0" rIns="0" bIns="0" numCol="1" spcCol="1270" anchor="ctr" anchorCtr="0">
-          <a:noAutofit/>
-        </a:bodyPr>
-        <a:lstStyle/>
-        <a:p>
-          <a:pPr marL="0" lvl="0" indent="0" algn="ctr" defTabSz="1600200">
-            <a:lnSpc>
-              <a:spcPct val="90000"/>
-            </a:lnSpc>
-            <a:spcBef>
-              <a:spcPct val="0"/>
-            </a:spcBef>
-            <a:spcAft>
-              <a:spcPct val="35000"/>
-            </a:spcAft>
-            <a:buNone/>
-          </a:pPr>
-          <a:endParaRPr lang="en-US" sz="3600" kern="1200"/>
-        </a:p>
-      </dsp:txBody>
-      <dsp:txXfrm>
-        <a:off x="1279483" y="1000492"/>
-        <a:ext cx="172255" cy="172720"/>
-      </dsp:txXfrm>
     </dsp:sp>
-    <dsp:sp modelId="{92B177F5-5799-41E8-94D2-6753E1430578}">
+    <dsp:sp modelId="{2C2B6695-81C2-445C-8C0A-2D668EC6C123}">
       <dsp:nvSpPr>
         <dsp:cNvPr id="0" name=""/>
         <dsp:cNvSpPr/>
       </dsp:nvSpPr>
       <dsp:spPr>
         <a:xfrm>
-          <a:off x="1627709" y="738626"/>
-          <a:ext cx="1160753" cy="696452"/>
+          <a:off x="927748" y="2210720"/>
+          <a:ext cx="1824120" cy="725392"/>
         </a:xfrm>
         <a:prstGeom prst="roundRect">
           <a:avLst>
@@ -13387,7 +13735,7 @@
           </a:avLst>
         </a:prstGeom>
         <a:solidFill>
-          <a:schemeClr val="lt1">
+          <a:schemeClr val="accent3">
             <a:hueOff val="0"/>
             <a:satOff val="0"/>
             <a:lumOff val="0"/>
@@ -13396,8 +13744,7 @@
         </a:solidFill>
         <a:ln w="19050" cap="flat" cmpd="sng" algn="ctr">
           <a:solidFill>
-            <a:schemeClr val="accent3">
-              <a:shade val="80000"/>
+            <a:schemeClr val="lt1">
               <a:hueOff val="0"/>
               <a:satOff val="0"/>
               <a:lumOff val="0"/>
@@ -13424,12 +13771,12 @@
         </a:fontRef>
       </dsp:style>
       <dsp:txBody>
-        <a:bodyPr spcFirstLastPara="0" vert="horz" wrap="square" lIns="38100" tIns="38100" rIns="38100" bIns="38100" numCol="1" spcCol="1270" anchor="ctr" anchorCtr="0">
+        <a:bodyPr spcFirstLastPara="0" vert="horz" wrap="square" lIns="26670" tIns="17780" rIns="26670" bIns="17780" numCol="1" spcCol="1270" anchor="ctr" anchorCtr="0">
           <a:noAutofit/>
         </a:bodyPr>
         <a:lstStyle/>
         <a:p>
-          <a:pPr marL="0" lvl="0" indent="0" algn="ctr" defTabSz="444500">
+          <a:pPr marL="0" lvl="0" indent="0" algn="ctr" defTabSz="622300">
             <a:lnSpc>
               <a:spcPct val="90000"/>
             </a:lnSpc>
@@ -13442,31 +13789,113 @@
             <a:buNone/>
           </a:pPr>
           <a:r>
-            <a:rPr lang="en-US" sz="1000" b="0" i="0" kern="1200" dirty="0"/>
-            <a:t>Prepare your 2D array (channels × samples)</a:t>
+            <a:rPr lang="en-US" sz="1400" b="1" i="0" kern="1200"/>
+            <a:t>Install the processing package</a:t>
           </a:r>
-          <a:endParaRPr lang="en-US" sz="1000" kern="1200" dirty="0"/>
+          <a:endParaRPr lang="en-US" sz="1400" kern="1200" dirty="0"/>
         </a:p>
       </dsp:txBody>
       <dsp:txXfrm>
-        <a:off x="1648107" y="759024"/>
-        <a:ext cx="1119957" cy="655656"/>
+        <a:off x="948994" y="2231966"/>
+        <a:ext cx="1781628" cy="682900"/>
       </dsp:txXfrm>
     </dsp:sp>
-    <dsp:sp modelId="{AD97A4AC-09A6-4A35-AB70-9F6504BE89E6}">
+    <dsp:sp modelId="{BFB62CDE-5B4A-4B7F-8C63-93D11A4EBA2C}">
       <dsp:nvSpPr>
         <dsp:cNvPr id="0" name=""/>
         <dsp:cNvSpPr/>
       </dsp:nvSpPr>
       <dsp:spPr>
         <a:xfrm>
-          <a:off x="2904538" y="942919"/>
-          <a:ext cx="246079" cy="287866"/>
+          <a:off x="3343872" y="880834"/>
+          <a:ext cx="2052135" cy="1692582"/>
         </a:xfrm>
-        <a:prstGeom prst="rightArrow">
+        <a:prstGeom prst="roundRect">
           <a:avLst>
-            <a:gd name="adj1" fmla="val 60000"/>
-            <a:gd name="adj2" fmla="val 50000"/>
+            <a:gd name="adj" fmla="val 10000"/>
+          </a:avLst>
+        </a:prstGeom>
+        <a:solidFill>
+          <a:schemeClr val="lt1">
+            <a:alpha val="90000"/>
+            <a:hueOff val="0"/>
+            <a:satOff val="0"/>
+            <a:lumOff val="0"/>
+            <a:alphaOff val="0"/>
+          </a:schemeClr>
+        </a:solidFill>
+        <a:ln w="19050" cap="flat" cmpd="sng" algn="ctr">
+          <a:solidFill>
+            <a:schemeClr val="accent3">
+              <a:hueOff val="0"/>
+              <a:satOff val="0"/>
+              <a:lumOff val="0"/>
+              <a:alphaOff val="0"/>
+            </a:schemeClr>
+          </a:solidFill>
+          <a:prstDash val="solid"/>
+          <a:miter lim="800000"/>
+        </a:ln>
+        <a:effectLst/>
+      </dsp:spPr>
+      <dsp:style>
+        <a:lnRef idx="2">
+          <a:scrgbClr r="0" g="0" b="0"/>
+        </a:lnRef>
+        <a:fillRef idx="1">
+          <a:scrgbClr r="0" g="0" b="0"/>
+        </a:fillRef>
+        <a:effectRef idx="0">
+          <a:scrgbClr r="0" g="0" b="0"/>
+        </a:effectRef>
+        <a:fontRef idx="minor"/>
+      </dsp:style>
+      <dsp:txBody>
+        <a:bodyPr spcFirstLastPara="0" vert="horz" wrap="square" lIns="123825" tIns="123825" rIns="123825" bIns="123825" numCol="1" spcCol="1270" anchor="t" anchorCtr="0">
+          <a:noAutofit/>
+        </a:bodyPr>
+        <a:lstStyle/>
+        <a:p>
+          <a:pPr marL="57150" lvl="1" indent="-57150" algn="l" defTabSz="488950">
+            <a:lnSpc>
+              <a:spcPct val="90000"/>
+            </a:lnSpc>
+            <a:spcBef>
+              <a:spcPct val="0"/>
+            </a:spcBef>
+            <a:spcAft>
+              <a:spcPct val="15000"/>
+            </a:spcAft>
+            <a:buChar char="•"/>
+          </a:pPr>
+          <a:r>
+            <a:rPr lang="en-US" sz="1100" b="1" i="0" kern="1200" dirty="0"/>
+            <a:t>Load and format acoustic data into the required 2D array (channels × samples)</a:t>
+          </a:r>
+        </a:p>
+      </dsp:txBody>
+      <dsp:txXfrm>
+        <a:off x="3382823" y="1282481"/>
+        <a:ext cx="1974233" cy="1251984"/>
+      </dsp:txXfrm>
+    </dsp:sp>
+    <dsp:sp modelId="{B90460B7-0401-4A52-915A-39C0EEA8D048}">
+      <dsp:nvSpPr>
+        <dsp:cNvPr id="0" name=""/>
+        <dsp:cNvSpPr/>
+      </dsp:nvSpPr>
+      <dsp:spPr>
+        <a:xfrm>
+          <a:off x="4403768" y="-289902"/>
+          <a:ext cx="2929905" cy="2929905"/>
+        </a:xfrm>
+        <a:prstGeom prst="circularArrow">
+          <a:avLst>
+            <a:gd name="adj1" fmla="val 4243"/>
+            <a:gd name="adj2" fmla="val 536000"/>
+            <a:gd name="adj3" fmla="val 19288489"/>
+            <a:gd name="adj4" fmla="val 12575511"/>
+            <a:gd name="adj5" fmla="val 4950"/>
           </a:avLst>
         </a:prstGeom>
         <a:solidFill>
@@ -13497,41 +13926,16 @@
           <a:schemeClr val="lt1"/>
         </a:fontRef>
       </dsp:style>
-      <dsp:txBody>
-        <a:bodyPr spcFirstLastPara="0" vert="horz" wrap="square" lIns="0" tIns="0" rIns="0" bIns="0" numCol="1" spcCol="1270" anchor="ctr" anchorCtr="0">
-          <a:noAutofit/>
-        </a:bodyPr>
-        <a:lstStyle/>
-        <a:p>
-          <a:pPr marL="0" lvl="0" indent="0" algn="ctr" defTabSz="1600200">
-            <a:lnSpc>
-              <a:spcPct val="90000"/>
-            </a:lnSpc>
-            <a:spcBef>
-              <a:spcPct val="0"/>
-            </a:spcBef>
-            <a:spcAft>
-              <a:spcPct val="35000"/>
-            </a:spcAft>
-            <a:buNone/>
-          </a:pPr>
-          <a:endParaRPr lang="en-US" sz="3600" kern="1200"/>
-        </a:p>
-      </dsp:txBody>
-      <dsp:txXfrm>
-        <a:off x="2904538" y="1000492"/>
-        <a:ext cx="172255" cy="172720"/>
-      </dsp:txXfrm>
     </dsp:sp>
-    <dsp:sp modelId="{BCA32F45-8225-4186-B7B2-3E75E3588E41}">
+    <dsp:sp modelId="{22157AB5-EA6F-4171-9F2B-D42EA5CC7D09}">
       <dsp:nvSpPr>
         <dsp:cNvPr id="0" name=""/>
         <dsp:cNvSpPr/>
       </dsp:nvSpPr>
       <dsp:spPr>
         <a:xfrm>
-          <a:off x="3252764" y="738626"/>
-          <a:ext cx="1160753" cy="696452"/>
+          <a:off x="3799902" y="518137"/>
+          <a:ext cx="1824120" cy="725392"/>
         </a:xfrm>
         <a:prstGeom prst="roundRect">
           <a:avLst>
@@ -13539,7 +13943,7 @@
           </a:avLst>
         </a:prstGeom>
         <a:solidFill>
-          <a:schemeClr val="lt1">
+          <a:schemeClr val="accent3">
             <a:hueOff val="0"/>
             <a:satOff val="0"/>
             <a:lumOff val="0"/>
@@ -13548,8 +13952,7 @@
         </a:solidFill>
         <a:ln w="19050" cap="flat" cmpd="sng" algn="ctr">
           <a:solidFill>
-            <a:schemeClr val="accent3">
-              <a:shade val="80000"/>
+            <a:schemeClr val="lt1">
               <a:hueOff val="0"/>
               <a:satOff val="0"/>
               <a:lumOff val="0"/>
@@ -13576,12 +13979,12 @@
         </a:fontRef>
       </dsp:style>
       <dsp:txBody>
-        <a:bodyPr spcFirstLastPara="0" vert="horz" wrap="square" lIns="38100" tIns="38100" rIns="38100" bIns="38100" numCol="1" spcCol="1270" anchor="ctr" anchorCtr="0">
+        <a:bodyPr spcFirstLastPara="0" vert="horz" wrap="square" lIns="26670" tIns="17780" rIns="26670" bIns="17780" numCol="1" spcCol="1270" anchor="ctr" anchorCtr="0">
           <a:noAutofit/>
         </a:bodyPr>
         <a:lstStyle/>
         <a:p>
-          <a:pPr marL="0" lvl="0" indent="0" algn="ctr" defTabSz="444500">
+          <a:pPr marL="0" lvl="0" indent="0" algn="ctr" defTabSz="622300">
             <a:lnSpc>
               <a:spcPct val="90000"/>
             </a:lnSpc>
@@ -13594,31 +13997,112 @@
             <a:buNone/>
           </a:pPr>
           <a:r>
-            <a:rPr lang="en-US" sz="1000" b="0" i="0" kern="1200" dirty="0"/>
-            <a:t>Call the module’s compute function(s)</a:t>
+            <a:rPr lang="en-US" sz="1400" b="1" i="0" kern="1200" dirty="0"/>
+            <a:t>Prepare input data</a:t>
           </a:r>
-          <a:endParaRPr lang="en-US" sz="2000" kern="1200" dirty="0"/>
         </a:p>
       </dsp:txBody>
       <dsp:txXfrm>
-        <a:off x="3273162" y="759024"/>
-        <a:ext cx="1119957" cy="655656"/>
+        <a:off x="3821148" y="539383"/>
+        <a:ext cx="1781628" cy="682900"/>
       </dsp:txXfrm>
     </dsp:sp>
-    <dsp:sp modelId="{FFD00C3A-1B97-4E30-988D-761D33D51C69}">
+    <dsp:sp modelId="{75DF6C70-0067-4BA0-A1F3-01CCEA8B956E}">
       <dsp:nvSpPr>
         <dsp:cNvPr id="0" name=""/>
         <dsp:cNvSpPr/>
       </dsp:nvSpPr>
       <dsp:spPr>
         <a:xfrm>
-          <a:off x="4529593" y="942919"/>
-          <a:ext cx="246079" cy="287866"/>
+          <a:off x="6216025" y="880834"/>
+          <a:ext cx="2052135" cy="1692582"/>
         </a:xfrm>
-        <a:prstGeom prst="rightArrow">
+        <a:prstGeom prst="roundRect">
           <a:avLst>
-            <a:gd name="adj1" fmla="val 60000"/>
-            <a:gd name="adj2" fmla="val 50000"/>
+            <a:gd name="adj" fmla="val 10000"/>
+          </a:avLst>
+        </a:prstGeom>
+        <a:solidFill>
+          <a:schemeClr val="lt1">
+            <a:alpha val="90000"/>
+            <a:hueOff val="0"/>
+            <a:satOff val="0"/>
+            <a:lumOff val="0"/>
+            <a:alphaOff val="0"/>
+          </a:schemeClr>
+        </a:solidFill>
+        <a:ln w="19050" cap="flat" cmpd="sng" algn="ctr">
+          <a:solidFill>
+            <a:schemeClr val="accent3">
+              <a:hueOff val="0"/>
+              <a:satOff val="0"/>
+              <a:lumOff val="0"/>
+              <a:alphaOff val="0"/>
+            </a:schemeClr>
+          </a:solidFill>
+          <a:prstDash val="solid"/>
+          <a:miter lim="800000"/>
+        </a:ln>
+        <a:effectLst/>
+      </dsp:spPr>
+      <dsp:style>
+        <a:lnRef idx="2">
+          <a:scrgbClr r="0" g="0" b="0"/>
+        </a:lnRef>
+        <a:fillRef idx="1">
+          <a:scrgbClr r="0" g="0" b="0"/>
+        </a:fillRef>
+        <a:effectRef idx="0">
+          <a:scrgbClr r="0" g="0" b="0"/>
+        </a:effectRef>
+        <a:fontRef idx="minor"/>
+      </dsp:style>
+      <dsp:txBody>
+        <a:bodyPr spcFirstLastPara="0" vert="horz" wrap="square" lIns="123825" tIns="123825" rIns="123825" bIns="123825" numCol="1" spcCol="1270" anchor="t" anchorCtr="0">
+          <a:noAutofit/>
+        </a:bodyPr>
+        <a:lstStyle/>
+        <a:p>
+          <a:pPr marL="57150" lvl="1" indent="-57150" algn="l" defTabSz="488950">
+            <a:lnSpc>
+              <a:spcPct val="90000"/>
+            </a:lnSpc>
+            <a:spcBef>
+              <a:spcPct val="0"/>
+            </a:spcBef>
+            <a:spcAft>
+              <a:spcPct val="15000"/>
+            </a:spcAft>
+            <a:buChar char="•"/>
+          </a:pPr>
+          <a:r>
+            <a:rPr lang="en-US" sz="1100" b="1" i="0" kern="1200" dirty="0"/>
+            <a:t>Call the library’s feature‑extraction and processing functions</a:t>
+          </a:r>
+        </a:p>
+      </dsp:txBody>
+      <dsp:txXfrm>
+        <a:off x="6254976" y="919785"/>
+        <a:ext cx="1974233" cy="1251984"/>
+      </dsp:txXfrm>
+    </dsp:sp>
+    <dsp:sp modelId="{BC7BF6D4-56BD-435E-8C17-60EBB4878659}">
+      <dsp:nvSpPr>
+        <dsp:cNvPr id="0" name=""/>
+        <dsp:cNvSpPr/>
+      </dsp:nvSpPr>
+      <dsp:spPr>
+        <a:xfrm>
+          <a:off x="7293023" y="1010100"/>
+          <a:ext cx="2667687" cy="2667687"/>
+        </a:xfrm>
+        <a:prstGeom prst="leftCircularArrow">
+          <a:avLst>
+            <a:gd name="adj1" fmla="val 4660"/>
+            <a:gd name="adj2" fmla="val 594742"/>
+            <a:gd name="adj3" fmla="val 2370253"/>
+            <a:gd name="adj4" fmla="val 9024489"/>
+            <a:gd name="adj5" fmla="val 5437"/>
           </a:avLst>
         </a:prstGeom>
         <a:solidFill>
@@ -13649,41 +14133,16 @@
           <a:schemeClr val="lt1"/>
         </a:fontRef>
       </dsp:style>
-      <dsp:txBody>
-        <a:bodyPr spcFirstLastPara="0" vert="horz" wrap="square" lIns="0" tIns="0" rIns="0" bIns="0" numCol="1" spcCol="1270" anchor="ctr" anchorCtr="0">
-          <a:noAutofit/>
-        </a:bodyPr>
-        <a:lstStyle/>
-        <a:p>
-          <a:pPr marL="0" lvl="0" indent="0" algn="ctr" defTabSz="533400">
-            <a:lnSpc>
-              <a:spcPct val="90000"/>
-            </a:lnSpc>
-            <a:spcBef>
-              <a:spcPct val="0"/>
-            </a:spcBef>
-            <a:spcAft>
-              <a:spcPct val="35000"/>
-            </a:spcAft>
-            <a:buNone/>
-          </a:pPr>
-          <a:endParaRPr lang="en-US" sz="1200" kern="1200"/>
-        </a:p>
-      </dsp:txBody>
-      <dsp:txXfrm>
-        <a:off x="4529593" y="1000492"/>
-        <a:ext cx="172255" cy="172720"/>
-      </dsp:txXfrm>
     </dsp:sp>
-    <dsp:sp modelId="{A84AEDA7-DF7A-46A2-8B14-785AA474DFCC}">
+    <dsp:sp modelId="{3E280082-7468-4132-9F22-64673CF263DE}">
       <dsp:nvSpPr>
         <dsp:cNvPr id="0" name=""/>
         <dsp:cNvSpPr/>
       </dsp:nvSpPr>
       <dsp:spPr>
         <a:xfrm>
-          <a:off x="4877819" y="738626"/>
-          <a:ext cx="1160753" cy="696452"/>
+          <a:off x="6672055" y="2210720"/>
+          <a:ext cx="1824120" cy="725392"/>
         </a:xfrm>
         <a:prstGeom prst="roundRect">
           <a:avLst>
@@ -13691,7 +14150,7 @@
           </a:avLst>
         </a:prstGeom>
         <a:solidFill>
-          <a:schemeClr val="lt1">
+          <a:schemeClr val="accent3">
             <a:hueOff val="0"/>
             <a:satOff val="0"/>
             <a:lumOff val="0"/>
@@ -13700,8 +14159,7 @@
         </a:solidFill>
         <a:ln w="19050" cap="flat" cmpd="sng" algn="ctr">
           <a:solidFill>
-            <a:schemeClr val="accent3">
-              <a:shade val="80000"/>
+            <a:schemeClr val="lt1">
               <a:hueOff val="0"/>
               <a:satOff val="0"/>
               <a:lumOff val="0"/>
@@ -13728,12 +14186,12 @@
         </a:fontRef>
       </dsp:style>
       <dsp:txBody>
-        <a:bodyPr spcFirstLastPara="0" vert="horz" wrap="square" lIns="38100" tIns="38100" rIns="38100" bIns="38100" numCol="1" spcCol="1270" anchor="ctr" anchorCtr="0">
+        <a:bodyPr spcFirstLastPara="0" vert="horz" wrap="square" lIns="26670" tIns="17780" rIns="26670" bIns="17780" numCol="1" spcCol="1270" anchor="ctr" anchorCtr="0">
           <a:noAutofit/>
         </a:bodyPr>
         <a:lstStyle/>
         <a:p>
-          <a:pPr marL="0" lvl="0" indent="0" algn="ctr" defTabSz="444500">
+          <a:pPr marL="0" lvl="0" indent="0" algn="ctr" defTabSz="622300">
             <a:lnSpc>
               <a:spcPct val="90000"/>
             </a:lnSpc>
@@ -13746,15 +14204,173 @@
             <a:buNone/>
           </a:pPr>
           <a:r>
-            <a:rPr lang="en-US" sz="1000" b="0" i="0" kern="1200" dirty="0"/>
-            <a:t>Call the module’s plot and report function(s) </a:t>
+            <a:rPr lang="en-US" sz="1400" b="1" i="0" kern="1200" dirty="0"/>
+            <a:t>Run core compute functions</a:t>
           </a:r>
-          <a:endParaRPr lang="en-US" sz="1000" kern="1200" dirty="0"/>
         </a:p>
       </dsp:txBody>
       <dsp:txXfrm>
-        <a:off x="4898217" y="759024"/>
-        <a:ext cx="1119957" cy="655656"/>
+        <a:off x="6693301" y="2231966"/>
+        <a:ext cx="1781628" cy="682900"/>
+      </dsp:txXfrm>
+    </dsp:sp>
+    <dsp:sp modelId="{05874099-273A-402C-A4DC-F1F993D9F15C}">
+      <dsp:nvSpPr>
+        <dsp:cNvPr id="0" name=""/>
+        <dsp:cNvSpPr/>
+      </dsp:nvSpPr>
+      <dsp:spPr>
+        <a:xfrm>
+          <a:off x="9088179" y="880834"/>
+          <a:ext cx="2052135" cy="1692582"/>
+        </a:xfrm>
+        <a:prstGeom prst="roundRect">
+          <a:avLst>
+            <a:gd name="adj" fmla="val 10000"/>
+          </a:avLst>
+        </a:prstGeom>
+        <a:solidFill>
+          <a:schemeClr val="lt1">
+            <a:alpha val="90000"/>
+            <a:hueOff val="0"/>
+            <a:satOff val="0"/>
+            <a:lumOff val="0"/>
+            <a:alphaOff val="0"/>
+          </a:schemeClr>
+        </a:solidFill>
+        <a:ln w="19050" cap="flat" cmpd="sng" algn="ctr">
+          <a:solidFill>
+            <a:schemeClr val="accent3">
+              <a:hueOff val="0"/>
+              <a:satOff val="0"/>
+              <a:lumOff val="0"/>
+              <a:alphaOff val="0"/>
+            </a:schemeClr>
+          </a:solidFill>
+          <a:prstDash val="solid"/>
+          <a:miter lim="800000"/>
+        </a:ln>
+        <a:effectLst/>
+      </dsp:spPr>
+      <dsp:style>
+        <a:lnRef idx="2">
+          <a:scrgbClr r="0" g="0" b="0"/>
+        </a:lnRef>
+        <a:fillRef idx="1">
+          <a:scrgbClr r="0" g="0" b="0"/>
+        </a:fillRef>
+        <a:effectRef idx="0">
+          <a:scrgbClr r="0" g="0" b="0"/>
+        </a:effectRef>
+        <a:fontRef idx="minor"/>
+      </dsp:style>
+      <dsp:txBody>
+        <a:bodyPr spcFirstLastPara="0" vert="horz" wrap="square" lIns="123825" tIns="123825" rIns="123825" bIns="123825" numCol="1" spcCol="1270" anchor="t" anchorCtr="0">
+          <a:noAutofit/>
+        </a:bodyPr>
+        <a:lstStyle/>
+        <a:p>
+          <a:pPr marL="57150" lvl="1" indent="-57150" algn="l" defTabSz="488950">
+            <a:lnSpc>
+              <a:spcPct val="90000"/>
+            </a:lnSpc>
+            <a:spcBef>
+              <a:spcPct val="0"/>
+            </a:spcBef>
+            <a:spcAft>
+              <a:spcPct val="15000"/>
+            </a:spcAft>
+            <a:buChar char="•"/>
+          </a:pPr>
+          <a:r>
+            <a:rPr lang="en-US" sz="1100" b="1" i="0" kern="1200" dirty="0"/>
+            <a:t>Use the module’s plotting and reporting functions to produce graphs, metrics, and analysis artifacts</a:t>
+          </a:r>
+        </a:p>
+      </dsp:txBody>
+      <dsp:txXfrm>
+        <a:off x="9127130" y="1282481"/>
+        <a:ext cx="1974233" cy="1251984"/>
+      </dsp:txXfrm>
+    </dsp:sp>
+    <dsp:sp modelId="{F25E4087-8A23-4E4D-85E4-1E618AF60BBF}">
+      <dsp:nvSpPr>
+        <dsp:cNvPr id="0" name=""/>
+        <dsp:cNvSpPr/>
+      </dsp:nvSpPr>
+      <dsp:spPr>
+        <a:xfrm>
+          <a:off x="9544209" y="518137"/>
+          <a:ext cx="1824120" cy="725392"/>
+        </a:xfrm>
+        <a:prstGeom prst="roundRect">
+          <a:avLst>
+            <a:gd name="adj" fmla="val 10000"/>
+          </a:avLst>
+        </a:prstGeom>
+        <a:solidFill>
+          <a:schemeClr val="accent3">
+            <a:hueOff val="0"/>
+            <a:satOff val="0"/>
+            <a:lumOff val="0"/>
+            <a:alphaOff val="0"/>
+          </a:schemeClr>
+        </a:solidFill>
+        <a:ln w="19050" cap="flat" cmpd="sng" algn="ctr">
+          <a:solidFill>
+            <a:schemeClr val="lt1">
+              <a:hueOff val="0"/>
+              <a:satOff val="0"/>
+              <a:lumOff val="0"/>
+              <a:alphaOff val="0"/>
+            </a:schemeClr>
+          </a:solidFill>
+          <a:prstDash val="solid"/>
+          <a:miter lim="800000"/>
+        </a:ln>
+        <a:effectLst/>
+      </dsp:spPr>
+      <dsp:style>
+        <a:lnRef idx="2">
+          <a:scrgbClr r="0" g="0" b="0"/>
+        </a:lnRef>
+        <a:fillRef idx="1">
+          <a:scrgbClr r="0" g="0" b="0"/>
+        </a:fillRef>
+        <a:effectRef idx="0">
+          <a:scrgbClr r="0" g="0" b="0"/>
+        </a:effectRef>
+        <a:fontRef idx="minor">
+          <a:schemeClr val="lt1"/>
+        </a:fontRef>
+      </dsp:style>
+      <dsp:txBody>
+        <a:bodyPr spcFirstLastPara="0" vert="horz" wrap="square" lIns="26670" tIns="17780" rIns="26670" bIns="17780" numCol="1" spcCol="1270" anchor="ctr" anchorCtr="0">
+          <a:noAutofit/>
+        </a:bodyPr>
+        <a:lstStyle/>
+        <a:p>
+          <a:pPr marL="0" lvl="0" indent="0" algn="ctr" defTabSz="622300">
+            <a:lnSpc>
+              <a:spcPct val="90000"/>
+            </a:lnSpc>
+            <a:spcBef>
+              <a:spcPct val="0"/>
+            </a:spcBef>
+            <a:spcAft>
+              <a:spcPct val="35000"/>
+            </a:spcAft>
+            <a:buNone/>
+          </a:pPr>
+          <a:r>
+            <a:rPr lang="en-US" sz="1400" b="1" i="0" kern="1200" dirty="0"/>
+            <a:t>Generate outputs</a:t>
+          </a:r>
+        </a:p>
+      </dsp:txBody>
+      <dsp:txXfrm>
+        <a:off x="9565455" y="539383"/>
+        <a:ext cx="1781628" cy="682900"/>
       </dsp:txXfrm>
     </dsp:sp>
   </dsp:spTree>
@@ -14636,16 +15252,55 @@
 </file>
 
 <file path=ppt/diagrams/layout5.xml><?xml version="1.0" encoding="utf-8"?>
-<dgm:layoutDef xmlns:dgm="http://schemas.openxmlformats.org/drawingml/2006/diagram" xmlns:a="http://schemas.openxmlformats.org/drawingml/2006/main" uniqueId="urn:microsoft.com/office/officeart/2005/8/layout/process1">
+<dgm:layoutDef xmlns:dgm="http://schemas.openxmlformats.org/drawingml/2006/diagram" xmlns:a="http://schemas.openxmlformats.org/drawingml/2006/main" uniqueId="urn:microsoft.com/office/officeart/2005/8/layout/hProcess4">
   <dgm:title val=""/>
   <dgm:desc val=""/>
   <dgm:catLst>
-    <dgm:cat type="process" pri="1000"/>
-    <dgm:cat type="convert" pri="15000"/>
+    <dgm:cat type="process" pri="4000"/>
   </dgm:catLst>
-  <dgm:sampData useDef="1">
+  <dgm:sampData>
     <dgm:dataModel>
-      <dgm:ptLst/>
+      <dgm:ptLst>
+        <dgm:pt modelId="0" type="doc"/>
+        <dgm:pt modelId="1">
+          <dgm:prSet phldr="1"/>
+        </dgm:pt>
+        <dgm:pt modelId="11">
+          <dgm:prSet phldr="1"/>
+        </dgm:pt>
+        <dgm:pt modelId="12">
+          <dgm:prSet phldr="1"/>
+        </dgm:pt>
+        <dgm:pt modelId="2">
+          <dgm:prSet phldr="1"/>
+        </dgm:pt>
+        <dgm:pt modelId="21">
+          <dgm:prSet phldr="1"/>
+        </dgm:pt>
+        <dgm:pt modelId="22">
+          <dgm:prSet phldr="1"/>
+        </dgm:pt>
+        <dgm:pt modelId="3">
+          <dgm:prSet phldr="1"/>
+        </dgm:pt>
+        <dgm:pt modelId="31">
+          <dgm:prSet phldr="1"/>
+        </dgm:pt>
+        <dgm:pt modelId="32">
+          <dgm:prSet phldr="1"/>
+        </dgm:pt>
+      </dgm:ptLst>
+      <dgm:cxnLst>
+        <dgm:cxn modelId="4" srcId="0" destId="1" srcOrd="0" destOrd="0"/>
+        <dgm:cxn modelId="5" srcId="0" destId="2" srcOrd="1" destOrd="0"/>
+        <dgm:cxn modelId="6" srcId="0" destId="3" srcOrd="2" destOrd="0"/>
+        <dgm:cxn modelId="13" srcId="1" destId="11" srcOrd="0" destOrd="0"/>
+        <dgm:cxn modelId="14" srcId="1" destId="12" srcOrd="1" destOrd="0"/>
+        <dgm:cxn modelId="23" srcId="2" destId="21" srcOrd="0" destOrd="0"/>
+        <dgm:cxn modelId="24" srcId="2" destId="22" srcOrd="1" destOrd="0"/>
+        <dgm:cxn modelId="33" srcId="3" destId="31" srcOrd="0" destOrd="0"/>
+        <dgm:cxn modelId="34" srcId="3" destId="32" srcOrd="1" destOrd="0"/>
+      </dgm:cxnLst>
       <dgm:bg/>
       <dgm:whole/>
     </dgm:dataModel>
@@ -14655,11 +15310,15 @@
       <dgm:ptLst>
         <dgm:pt modelId="0" type="doc"/>
         <dgm:pt modelId="1"/>
+        <dgm:pt modelId="11"/>
         <dgm:pt modelId="2"/>
+        <dgm:pt modelId="21"/>
       </dgm:ptLst>
       <dgm:cxnLst>
-        <dgm:cxn modelId="3" srcId="0" destId="1" srcOrd="0" destOrd="0"/>
-        <dgm:cxn modelId="4" srcId="0" destId="2" srcOrd="1" destOrd="0"/>
+        <dgm:cxn modelId="4" srcId="0" destId="1" srcOrd="0" destOrd="0"/>
+        <dgm:cxn modelId="5" srcId="0" destId="2" srcOrd="1" destOrd="0"/>
+        <dgm:cxn modelId="13" srcId="1" destId="11" srcOrd="0" destOrd="0"/>
+        <dgm:cxn modelId="23" srcId="2" destId="21" srcOrd="0" destOrd="0"/>
       </dgm:cxnLst>
       <dgm:bg/>
       <dgm:whole/>
@@ -14670,15 +15329,23 @@
       <dgm:ptLst>
         <dgm:pt modelId="0" type="doc"/>
         <dgm:pt modelId="1"/>
+        <dgm:pt modelId="11"/>
         <dgm:pt modelId="2"/>
+        <dgm:pt modelId="21"/>
         <dgm:pt modelId="3"/>
+        <dgm:pt modelId="31"/>
         <dgm:pt modelId="4"/>
+        <dgm:pt modelId="41"/>
       </dgm:ptLst>
       <dgm:cxnLst>
         <dgm:cxn modelId="5" srcId="0" destId="1" srcOrd="0" destOrd="0"/>
         <dgm:cxn modelId="6" srcId="0" destId="2" srcOrd="1" destOrd="0"/>
         <dgm:cxn modelId="7" srcId="0" destId="3" srcOrd="2" destOrd="0"/>
         <dgm:cxn modelId="8" srcId="0" destId="4" srcOrd="3" destOrd="0"/>
+        <dgm:cxn modelId="13" srcId="1" destId="11" srcOrd="0" destOrd="0"/>
+        <dgm:cxn modelId="23" srcId="2" destId="21" srcOrd="0" destOrd="0"/>
+        <dgm:cxn modelId="33" srcId="3" destId="31" srcOrd="0" destOrd="0"/>
+        <dgm:cxn modelId="43" srcId="4" destId="41" srcOrd="0" destOrd="0"/>
       </dgm:cxnLst>
       <dgm:bg/>
       <dgm:whole/>
@@ -14687,96 +15354,443 @@
   <dgm:layoutNode name="Name0">
     <dgm:varLst>
       <dgm:dir/>
+      <dgm:animLvl val="lvl"/>
       <dgm:resizeHandles val="exact"/>
     </dgm:varLst>
-    <dgm:choose name="Name1">
-      <dgm:if name="Name2" func="var" arg="dir" op="equ" val="norm">
-        <dgm:alg type="lin"/>
-      </dgm:if>
-      <dgm:else name="Name3">
-        <dgm:alg type="lin">
-          <dgm:param type="linDir" val="fromR"/>
-        </dgm:alg>
-      </dgm:else>
-    </dgm:choose>
+    <dgm:alg type="composite"/>
     <dgm:shape xmlns:r="http://schemas.openxmlformats.org/officeDocument/2006/relationships" r:blip="">
       <dgm:adjLst/>
     </dgm:shape>
     <dgm:presOf/>
     <dgm:constrLst>
-      <dgm:constr type="w" for="ch" ptType="node" refType="w"/>
-      <dgm:constr type="h" for="ch" ptType="node" op="equ"/>
-      <dgm:constr type="primFontSz" for="ch" ptType="node" op="equ" val="65"/>
-      <dgm:constr type="w" for="ch" ptType="sibTrans" refType="w" refFor="ch" refPtType="node" op="equ" fact="0.4"/>
-      <dgm:constr type="h" for="ch" ptType="sibTrans" op="equ"/>
-      <dgm:constr type="primFontSz" for="des" forName="connectorText" op="equ" val="55"/>
-      <dgm:constr type="primFontSz" for="des" forName="connectorText" refType="primFontSz" refFor="ch" refPtType="node" op="lte" fact="0.8"/>
+      <dgm:constr type="w" for="ch" forName="tSp" refType="w"/>
+      <dgm:constr type="h" for="ch" forName="tSp" refType="h" fact="0.15"/>
+      <dgm:constr type="l" for="ch" forName="tSp"/>
+      <dgm:constr type="t" for="ch" forName="tSp"/>
+      <dgm:constr type="w" for="ch" forName="bSp" refType="w"/>
+      <dgm:constr type="h" for="ch" forName="bSp" refType="h" fact="0.15"/>
+      <dgm:constr type="l" for="ch" forName="bSp"/>
+      <dgm:constr type="t" for="ch" forName="bSp" refType="h" fact="0.85"/>
+      <dgm:constr type="w" for="ch" forName="process" refType="w"/>
+      <dgm:constr type="h" for="ch" forName="process" refType="h" fact="0.7"/>
+      <dgm:constr type="l" for="ch" forName="process"/>
+      <dgm:constr type="t" for="ch" forName="process" refType="h" fact="0.15"/>
     </dgm:constrLst>
     <dgm:ruleLst/>
-    <dgm:forEach name="nodesForEach" axis="ch" ptType="node">
-      <dgm:layoutNode name="node">
-        <dgm:varLst>
-          <dgm:bulletEnabled val="1"/>
-        </dgm:varLst>
-        <dgm:alg type="tx"/>
-        <dgm:shape xmlns:r="http://schemas.openxmlformats.org/officeDocument/2006/relationships" type="roundRect" r:blip="">
-          <dgm:adjLst>
-            <dgm:adj idx="1" val="0.1"/>
-          </dgm:adjLst>
-        </dgm:shape>
-        <dgm:presOf axis="desOrSelf" ptType="node"/>
-        <dgm:constrLst>
-          <dgm:constr type="h" refType="w" fact="0.6"/>
-          <dgm:constr type="tMarg" refType="primFontSz" fact="0.3"/>
-          <dgm:constr type="bMarg" refType="primFontSz" fact="0.3"/>
-          <dgm:constr type="lMarg" refType="primFontSz" fact="0.3"/>
-          <dgm:constr type="rMarg" refType="primFontSz" fact="0.3"/>
-        </dgm:constrLst>
-        <dgm:ruleLst>
-          <dgm:rule type="primFontSz" val="18" fact="NaN" max="NaN"/>
-          <dgm:rule type="h" val="NaN" fact="1.5" max="NaN"/>
-          <dgm:rule type="primFontSz" val="5" fact="NaN" max="NaN"/>
-          <dgm:rule type="h" val="INF" fact="NaN" max="NaN"/>
-        </dgm:ruleLst>
-      </dgm:layoutNode>
-      <dgm:forEach name="sibTransForEach" axis="followSib" ptType="sibTrans" cnt="1">
-        <dgm:layoutNode name="sibTrans">
-          <dgm:alg type="conn">
-            <dgm:param type="begPts" val="auto"/>
-            <dgm:param type="endPts" val="auto"/>
+    <dgm:layoutNode name="tSp">
+      <dgm:alg type="sp"/>
+      <dgm:shape xmlns:r="http://schemas.openxmlformats.org/officeDocument/2006/relationships" r:blip="">
+        <dgm:adjLst/>
+      </dgm:shape>
+      <dgm:presOf/>
+      <dgm:constrLst/>
+      <dgm:ruleLst/>
+    </dgm:layoutNode>
+    <dgm:layoutNode name="bSp">
+      <dgm:alg type="sp"/>
+      <dgm:shape xmlns:r="http://schemas.openxmlformats.org/officeDocument/2006/relationships" r:blip="">
+        <dgm:adjLst/>
+      </dgm:shape>
+      <dgm:presOf/>
+      <dgm:constrLst/>
+      <dgm:ruleLst/>
+    </dgm:layoutNode>
+    <dgm:layoutNode name="process">
+      <dgm:choose name="Name1">
+        <dgm:if name="Name2" func="var" arg="dir" op="equ" val="norm">
+          <dgm:alg type="lin">
+            <dgm:param type="linDir" val="fromL"/>
           </dgm:alg>
-          <dgm:shape xmlns:r="http://schemas.openxmlformats.org/officeDocument/2006/relationships" type="conn" r:blip="">
+        </dgm:if>
+        <dgm:else name="Name3">
+          <dgm:alg type="lin">
+            <dgm:param type="linDir" val="fromR"/>
+          </dgm:alg>
+        </dgm:else>
+      </dgm:choose>
+      <dgm:shape xmlns:r="http://schemas.openxmlformats.org/officeDocument/2006/relationships" r:blip="">
+        <dgm:adjLst/>
+      </dgm:shape>
+      <dgm:presOf/>
+      <dgm:constrLst>
+        <dgm:constr type="w" for="ch" forName="composite1" refType="w"/>
+        <dgm:constr type="w" for="ch" forName="composite2" refType="w" refFor="ch" refForName="composite1" op="equ"/>
+        <dgm:constr type="h" for="ch" forName="composite1" refType="h"/>
+        <dgm:constr type="h" for="ch" forName="composite2" refType="h" refFor="ch" refForName="composite1" op="equ"/>
+        <dgm:constr type="primFontSz" for="des" forName="parentNode1" val="65"/>
+        <dgm:constr type="primFontSz" for="des" forName="parentNode2" refType="primFontSz" refFor="des" refForName="parentNode1" op="equ"/>
+        <dgm:constr type="secFontSz" for="des" forName="childNode1tx" val="65"/>
+        <dgm:constr type="secFontSz" for="des" forName="childNode2tx" refType="secFontSz" refFor="des" refForName="childNode1tx" op="equ"/>
+        <dgm:constr type="w" for="des" ptType="sibTrans" refType="w" refFor="ch" refForName="composite1" op="equ" fact="0.05"/>
+      </dgm:constrLst>
+      <dgm:ruleLst/>
+      <dgm:forEach name="Name4" axis="ch" ptType="node" step="2">
+        <dgm:layoutNode name="composite1">
+          <dgm:alg type="composite">
+            <dgm:param type="ar" val="0.943"/>
+          </dgm:alg>
+          <dgm:shape xmlns:r="http://schemas.openxmlformats.org/officeDocument/2006/relationships" r:blip="">
             <dgm:adjLst/>
           </dgm:shape>
-          <dgm:presOf axis="self"/>
-          <dgm:constrLst>
-            <dgm:constr type="h" refType="w" fact="0.62"/>
-            <dgm:constr type="connDist"/>
-            <dgm:constr type="begPad" refType="connDist" fact="0.25"/>
-            <dgm:constr type="endPad" refType="connDist" fact="0.22"/>
-          </dgm:constrLst>
+          <dgm:presOf/>
+          <dgm:choose name="Name5">
+            <dgm:if name="Name6" func="var" arg="dir" op="equ" val="norm">
+              <dgm:constrLst>
+                <dgm:constr type="h" refType="w" fact="1.06"/>
+                <dgm:constr type="w" for="ch" forName="dummyNode1" refType="w"/>
+                <dgm:constr type="h" for="ch" forName="dummyNode1" refType="h"/>
+                <dgm:constr type="t" for="ch" forName="dummyNode1"/>
+                <dgm:constr type="l" for="ch" forName="dummyNode1"/>
+                <dgm:constr type="w" for="ch" forName="childNode1" refType="w" fact="0.9"/>
+                <dgm:constr type="h" for="ch" forName="childNode1" refType="h" fact="0.7"/>
+                <dgm:constr type="t" for="ch" forName="childNode1" refType="h" fact="0.15"/>
+                <dgm:constr type="l" for="ch" forName="childNode1"/>
+                <dgm:constr type="w" for="ch" forName="childNode1tx" refType="w" fact="0.9"/>
+                <dgm:constr type="h" for="ch" forName="childNode1tx" refType="h" fact="0.55"/>
+                <dgm:constr type="t" for="ch" forName="childNode1tx" refType="h" fact="0.15"/>
+                <dgm:constr type="l" for="ch" forName="childNode1tx"/>
+                <dgm:constr type="w" for="ch" forName="parentNode1" refType="w" fact="0.8"/>
+                <dgm:constr type="h" for="ch" forName="parentNode1" refType="h" fact="0.3"/>
+                <dgm:constr type="t" for="ch" forName="parentNode1" refType="h" fact="0.7"/>
+                <dgm:constr type="l" for="ch" forName="parentNode1" refType="w" fact="0.2"/>
+                <dgm:constr type="w" for="ch" forName="connSite1" refType="w" fact="0.01"/>
+                <dgm:constr type="h" for="ch" forName="connSite1" refType="h" fact="0.01"/>
+                <dgm:constr type="t" for="ch" forName="connSite1"/>
+                <dgm:constr type="l" for="ch" forName="connSite1" refType="w" fact="0.35"/>
+              </dgm:constrLst>
+            </dgm:if>
+            <dgm:else name="Name7">
+              <dgm:constrLst>
+                <dgm:constr type="h" refType="w" fact="1.06"/>
+                <dgm:constr type="w" for="ch" forName="dummyNode1" refType="w"/>
+                <dgm:constr type="h" for="ch" forName="dummyNode1" refType="h"/>
+                <dgm:constr type="t" for="ch" forName="dummyNode1"/>
+                <dgm:constr type="l" for="ch" forName="dummyNode1"/>
+                <dgm:constr type="w" for="ch" forName="childNode1" refType="w" fact="0.9"/>
+                <dgm:constr type="h" for="ch" forName="childNode1" refType="h" fact="0.7"/>
+                <dgm:constr type="t" for="ch" forName="childNode1" refType="h" fact="0.15"/>
+                <dgm:constr type="l" for="ch" forName="childNode1" refType="w" fact="0.1"/>
+                <dgm:constr type="w" for="ch" forName="childNode1tx" refType="w" fact="0.9"/>
+                <dgm:constr type="h" for="ch" forName="childNode1tx" refType="h" fact="0.55"/>
+                <dgm:constr type="t" for="ch" forName="childNode1tx" refType="h" fact="0.15"/>
+                <dgm:constr type="l" for="ch" forName="childNode1tx" refType="w" fact="0.1"/>
+                <dgm:constr type="w" for="ch" forName="parentNode1" refType="w" fact="0.8"/>
+                <dgm:constr type="h" for="ch" forName="parentNode1" refType="h" fact="0.3"/>
+                <dgm:constr type="t" for="ch" forName="parentNode1" refType="h" fact="0.7"/>
+                <dgm:constr type="l" for="ch" forName="parentNode1"/>
+                <dgm:constr type="w" for="ch" forName="connSite1" refType="w" fact="0.01"/>
+                <dgm:constr type="h" for="ch" forName="connSite1" refType="h" fact="0.01"/>
+                <dgm:constr type="t" for="ch" forName="connSite1"/>
+                <dgm:constr type="l" for="ch" forName="connSite1" refType="w" fact="0.65"/>
+              </dgm:constrLst>
+            </dgm:else>
+          </dgm:choose>
           <dgm:ruleLst/>
-          <dgm:layoutNode name="connectorText">
+          <dgm:layoutNode name="dummyNode1">
+            <dgm:alg type="sp"/>
+            <dgm:shape xmlns:r="http://schemas.openxmlformats.org/officeDocument/2006/relationships" type="rect" r:blip="" hideGeom="1">
+              <dgm:adjLst/>
+            </dgm:shape>
+            <dgm:presOf/>
+            <dgm:constrLst/>
+            <dgm:ruleLst/>
+          </dgm:layoutNode>
+          <dgm:layoutNode name="childNode1" styleLbl="bgAcc1">
+            <dgm:varLst>
+              <dgm:bulletEnabled val="1"/>
+            </dgm:varLst>
+            <dgm:alg type="sp"/>
+            <dgm:shape xmlns:r="http://schemas.openxmlformats.org/officeDocument/2006/relationships" type="roundRect" r:blip="">
+              <dgm:adjLst>
+                <dgm:adj idx="1" val="0.1"/>
+              </dgm:adjLst>
+            </dgm:shape>
+            <dgm:presOf axis="des" ptType="node"/>
+            <dgm:constrLst/>
+            <dgm:ruleLst/>
+          </dgm:layoutNode>
+          <dgm:layoutNode name="childNode1tx" styleLbl="bgAcc1">
+            <dgm:varLst>
+              <dgm:bulletEnabled val="1"/>
+            </dgm:varLst>
             <dgm:alg type="tx">
-              <dgm:param type="autoTxRot" val="grav"/>
+              <dgm:param type="stBulletLvl" val="1"/>
             </dgm:alg>
-            <dgm:shape xmlns:r="http://schemas.openxmlformats.org/officeDocument/2006/relationships" type="conn" r:blip="" hideGeom="1">
-              <dgm:adjLst/>
+            <dgm:shape xmlns:r="http://schemas.openxmlformats.org/officeDocument/2006/relationships" type="roundRect" r:blip="" hideGeom="1">
+              <dgm:adjLst>
+                <dgm:adj idx="1" val="0.1"/>
+              </dgm:adjLst>
+            </dgm:shape>
+            <dgm:presOf axis="des" ptType="node"/>
+            <dgm:constrLst>
+              <dgm:constr type="secFontSz" val="65"/>
+              <dgm:constr type="primFontSz" refType="secFontSz"/>
+              <dgm:constr type="tMarg" refType="secFontSz" fact="0.15"/>
+              <dgm:constr type="bMarg" refType="secFontSz" fact="0.15"/>
+              <dgm:constr type="lMarg" refType="secFontSz" fact="0.15"/>
+              <dgm:constr type="rMarg" refType="secFontSz" fact="0.15"/>
+            </dgm:constrLst>
+            <dgm:ruleLst>
+              <dgm:rule type="secFontSz" val="5" fact="NaN" max="NaN"/>
+            </dgm:ruleLst>
+          </dgm:layoutNode>
+          <dgm:layoutNode name="parentNode1" styleLbl="node1">
+            <dgm:varLst>
+              <dgm:chMax val="1"/>
+              <dgm:bulletEnabled val="1"/>
+            </dgm:varLst>
+            <dgm:alg type="tx"/>
+            <dgm:shape xmlns:r="http://schemas.openxmlformats.org/officeDocument/2006/relationships" type="roundRect" r:blip="">
+              <dgm:adjLst>
+                <dgm:adj idx="1" val="0.1"/>
+              </dgm:adjLst>
             </dgm:shape>
             <dgm:presOf axis="self"/>
             <dgm:constrLst>
-              <dgm:constr type="lMarg"/>
-              <dgm:constr type="rMarg"/>
-              <dgm:constr type="tMarg"/>
-              <dgm:constr type="bMarg"/>
+              <dgm:constr type="tMarg" refType="primFontSz" fact="0.1"/>
+              <dgm:constr type="bMarg" refType="primFontSz" fact="0.1"/>
+              <dgm:constr type="lMarg" refType="primFontSz" fact="0.15"/>
+              <dgm:constr type="rMarg" refType="primFontSz" fact="0.15"/>
             </dgm:constrLst>
             <dgm:ruleLst>
               <dgm:rule type="primFontSz" val="5" fact="NaN" max="NaN"/>
             </dgm:ruleLst>
           </dgm:layoutNode>
+          <dgm:layoutNode name="connSite1" moveWith="childNode1">
+            <dgm:alg type="sp"/>
+            <dgm:shape xmlns:r="http://schemas.openxmlformats.org/officeDocument/2006/relationships" r:blip="">
+              <dgm:adjLst/>
+            </dgm:shape>
+            <dgm:presOf/>
+            <dgm:constrLst/>
+            <dgm:ruleLst/>
+          </dgm:layoutNode>
         </dgm:layoutNode>
+        <dgm:forEach name="Name8" axis="followSib" ptType="sibTrans" cnt="1">
+          <dgm:layoutNode name="Name9">
+            <dgm:alg type="conn">
+              <dgm:param type="connRout" val="curve"/>
+              <dgm:param type="srcNode" val="parentNode1"/>
+              <dgm:param type="dstNode" val="connSite2"/>
+              <dgm:param type="begPts" val="bCtr"/>
+              <dgm:param type="endPts" val="bCtr"/>
+            </dgm:alg>
+            <dgm:shape xmlns:r="http://schemas.openxmlformats.org/officeDocument/2006/relationships" type="conn" r:blip="" zOrderOff="-2">
+              <dgm:adjLst/>
+            </dgm:shape>
+            <dgm:presOf axis="self"/>
+            <dgm:choose name="Name10">
+              <dgm:if name="Name11" func="var" arg="dir" op="equ" val="norm">
+                <dgm:constrLst>
+                  <dgm:constr type="h" refType="w" fact="0.35"/>
+                  <dgm:constr type="wArH" refType="h"/>
+                  <dgm:constr type="hArH" refType="h"/>
+                  <dgm:constr type="connDist"/>
+                  <dgm:constr type="diam" refType="connDist" fact="-1.15"/>
+                  <dgm:constr type="begPad"/>
+                  <dgm:constr type="endPad"/>
+                </dgm:constrLst>
+              </dgm:if>
+              <dgm:else name="Name12">
+                <dgm:constrLst>
+                  <dgm:constr type="h" refType="w" fact="0.35"/>
+                  <dgm:constr type="wArH" refType="h"/>
+                  <dgm:constr type="hArH" refType="h"/>
+                  <dgm:constr type="connDist"/>
+                  <dgm:constr type="diam" refType="connDist" fact="1.15"/>
+                  <dgm:constr type="begPad"/>
+                  <dgm:constr type="endPad"/>
+                </dgm:constrLst>
+              </dgm:else>
+            </dgm:choose>
+            <dgm:ruleLst/>
+          </dgm:layoutNode>
+        </dgm:forEach>
+        <dgm:forEach name="Name13" axis="followSib" ptType="node" cnt="1">
+          <dgm:layoutNode name="composite2">
+            <dgm:alg type="composite">
+              <dgm:param type="ar" val="0.943"/>
+            </dgm:alg>
+            <dgm:shape xmlns:r="http://schemas.openxmlformats.org/officeDocument/2006/relationships" r:blip="">
+              <dgm:adjLst/>
+            </dgm:shape>
+            <dgm:presOf/>
+            <dgm:choose name="Name14">
+              <dgm:if name="Name15" func="var" arg="dir" op="equ" val="norm">
+                <dgm:constrLst>
+                  <dgm:constr type="h" refType="w" fact="1.06"/>
+                  <dgm:constr type="w" for="ch" forName="dummyNode2" refType="w"/>
+                  <dgm:constr type="h" for="ch" forName="dummyNode2" refType="h"/>
+                  <dgm:constr type="t" for="ch" forName="dummyNode2"/>
+                  <dgm:constr type="l" for="ch" forName="dummyNode2"/>
+                  <dgm:constr type="w" for="ch" forName="childNode2" refType="w" fact="0.9"/>
+                  <dgm:constr type="h" for="ch" forName="childNode2" refType="h" fact="0.7"/>
+                  <dgm:constr type="t" for="ch" forName="childNode2" refType="h" fact="0.15"/>
+                  <dgm:constr type="l" for="ch" forName="childNode2"/>
+                  <dgm:constr type="w" for="ch" forName="childNode2tx" refType="w" fact="0.9"/>
+                  <dgm:constr type="h" for="ch" forName="childNode2tx" refType="h" fact="0.55"/>
+                  <dgm:constr type="t" for="ch" forName="childNode2tx" refType="h" fact="0.3"/>
+                  <dgm:constr type="l" for="ch" forName="childNode2tx"/>
+                  <dgm:constr type="w" for="ch" forName="parentNode2" refType="w" fact="0.8"/>
+                  <dgm:constr type="h" for="ch" forName="parentNode2" refType="h" fact="0.3"/>
+                  <dgm:constr type="t" for="ch" forName="parentNode2"/>
+                  <dgm:constr type="l" for="ch" forName="parentNode2" refType="w" fact="0.2"/>
+                  <dgm:constr type="w" for="ch" forName="connSite2" refType="w" fact="0.01"/>
+                  <dgm:constr type="h" for="ch" forName="connSite2" refType="h" fact="0.01"/>
+                  <dgm:constr type="t" for="ch" forName="connSite2" refType="h" fact="0.99"/>
+                  <dgm:constr type="l" for="ch" forName="connSite2" refType="w" fact="0.25"/>
+                </dgm:constrLst>
+              </dgm:if>
+              <dgm:else name="Name16">
+                <dgm:constrLst>
+                  <dgm:constr type="h" refType="w" fact="1.06"/>
+                  <dgm:constr type="w" for="ch" forName="dummyNode2" refType="w"/>
+                  <dgm:constr type="h" for="ch" forName="dummyNode2" refType="h"/>
+                  <dgm:constr type="t" for="ch" forName="dummyNode2"/>
+                  <dgm:constr type="l" for="ch" forName="dummyNode2"/>
+                  <dgm:constr type="w" for="ch" forName="childNode2" refType="w" fact="0.9"/>
+                  <dgm:constr type="h" for="ch" forName="childNode2" refType="h" fact="0.7"/>
+                  <dgm:constr type="t" for="ch" forName="childNode2" refType="h" fact="0.15"/>
+                  <dgm:constr type="l" for="ch" forName="childNode2" refType="w" fact="0.1"/>
+                  <dgm:constr type="w" for="ch" forName="childNode2tx" refType="w" fact="0.9"/>
+                  <dgm:constr type="h" for="ch" forName="childNode2tx" refType="h" fact="0.55"/>
+                  <dgm:constr type="t" for="ch" forName="childNode2tx" refType="h" fact="0.3"/>
+                  <dgm:constr type="l" for="ch" forName="childNode2tx" refType="w" fact="0.1"/>
+                  <dgm:constr type="w" for="ch" forName="parentNode2" refType="w" fact="0.8"/>
+                  <dgm:constr type="h" for="ch" forName="parentNode2" refType="h" fact="0.3"/>
+                  <dgm:constr type="t" for="ch" forName="parentNode2"/>
+                  <dgm:constr type="l" for="ch" forName="parentNode2"/>
+                  <dgm:constr type="w" for="ch" forName="connSite2" refType="w" fact="0.01"/>
+                  <dgm:constr type="h" for="ch" forName="connSite2" refType="h" fact="0.01"/>
+                  <dgm:constr type="t" for="ch" forName="connSite2" refType="h" fact="0.99"/>
+                  <dgm:constr type="l" for="ch" forName="connSite2" refType="w" fact="0.85"/>
+                </dgm:constrLst>
+              </dgm:else>
+            </dgm:choose>
+            <dgm:ruleLst/>
+            <dgm:layoutNode name="dummyNode2">
+              <dgm:alg type="sp"/>
+              <dgm:shape xmlns:r="http://schemas.openxmlformats.org/officeDocument/2006/relationships" type="rect" r:blip="" hideGeom="1">
+                <dgm:adjLst/>
+              </dgm:shape>
+              <dgm:presOf/>
+              <dgm:constrLst/>
+              <dgm:ruleLst/>
+            </dgm:layoutNode>
+            <dgm:layoutNode name="childNode2" styleLbl="bgAcc1">
+              <dgm:varLst>
+                <dgm:bulletEnabled val="1"/>
+              </dgm:varLst>
+              <dgm:alg type="sp"/>
+              <dgm:shape xmlns:r="http://schemas.openxmlformats.org/officeDocument/2006/relationships" type="roundRect" r:blip="">
+                <dgm:adjLst>
+                  <dgm:adj idx="1" val="0.1"/>
+                </dgm:adjLst>
+              </dgm:shape>
+              <dgm:presOf axis="des" ptType="node"/>
+              <dgm:constrLst/>
+              <dgm:ruleLst/>
+            </dgm:layoutNode>
+            <dgm:layoutNode name="childNode2tx" styleLbl="bgAcc1">
+              <dgm:varLst>
+                <dgm:bulletEnabled val="1"/>
+              </dgm:varLst>
+              <dgm:alg type="tx">
+                <dgm:param type="stBulletLvl" val="1"/>
+              </dgm:alg>
+              <dgm:shape xmlns:r="http://schemas.openxmlformats.org/officeDocument/2006/relationships" type="roundRect" r:blip="" hideGeom="1">
+                <dgm:adjLst>
+                  <dgm:adj idx="1" val="0.1"/>
+                </dgm:adjLst>
+              </dgm:shape>
+              <dgm:presOf axis="des" ptType="node"/>
+              <dgm:constrLst>
+                <dgm:constr type="secFontSz" val="65"/>
+                <dgm:constr type="primFontSz" refType="secFontSz"/>
+                <dgm:constr type="tMarg" refType="secFontSz" fact="0.15"/>
+                <dgm:constr type="bMarg" refType="secFontSz" fact="0.15"/>
+                <dgm:constr type="lMarg" refType="secFontSz" fact="0.15"/>
+                <dgm:constr type="rMarg" refType="secFontSz" fact="0.15"/>
+              </dgm:constrLst>
+              <dgm:ruleLst>
+                <dgm:rule type="secFontSz" val="5" fact="NaN" max="NaN"/>
+              </dgm:ruleLst>
+            </dgm:layoutNode>
+            <dgm:layoutNode name="parentNode2" styleLbl="node1">
+              <dgm:varLst>
+                <dgm:chMax val="0"/>
+                <dgm:bulletEnabled val="1"/>
+              </dgm:varLst>
+              <dgm:alg type="tx"/>
+              <dgm:shape xmlns:r="http://schemas.openxmlformats.org/officeDocument/2006/relationships" type="roundRect" r:blip="">
+                <dgm:adjLst>
+                  <dgm:adj idx="1" val="0.1"/>
+                </dgm:adjLst>
+              </dgm:shape>
+              <dgm:presOf axis="self"/>
+              <dgm:constrLst>
+                <dgm:constr type="tMarg" refType="primFontSz" fact="0.1"/>
+                <dgm:constr type="bMarg" refType="primFontSz" fact="0.1"/>
+                <dgm:constr type="lMarg" refType="primFontSz" fact="0.15"/>
+                <dgm:constr type="rMarg" refType="primFontSz" fact="0.15"/>
+              </dgm:constrLst>
+              <dgm:ruleLst>
+                <dgm:rule type="primFontSz" val="5" fact="NaN" max="NaN"/>
+              </dgm:ruleLst>
+            </dgm:layoutNode>
+            <dgm:layoutNode name="connSite2" moveWith="childNode2">
+              <dgm:alg type="sp"/>
+              <dgm:shape xmlns:r="http://schemas.openxmlformats.org/officeDocument/2006/relationships" r:blip="">
+                <dgm:adjLst/>
+              </dgm:shape>
+              <dgm:presOf/>
+              <dgm:constrLst/>
+              <dgm:ruleLst/>
+            </dgm:layoutNode>
+          </dgm:layoutNode>
+          <dgm:forEach name="Name17" axis="followSib" ptType="sibTrans" cnt="1">
+            <dgm:layoutNode name="Name18">
+              <dgm:alg type="conn">
+                <dgm:param type="connRout" val="curve"/>
+                <dgm:param type="srcNode" val="parentNode2"/>
+                <dgm:param type="dstNode" val="connSite1"/>
+                <dgm:param type="begPts" val="tCtr"/>
+                <dgm:param type="endPts" val="tCtr"/>
+              </dgm:alg>
+              <dgm:shape xmlns:r="http://schemas.openxmlformats.org/officeDocument/2006/relationships" type="conn" r:blip="" zOrderOff="-2">
+                <dgm:adjLst/>
+              </dgm:shape>
+              <dgm:presOf axis="self"/>
+              <dgm:choose name="Name19">
+                <dgm:if name="Name20" func="var" arg="dir" op="equ" val="norm">
+                  <dgm:constrLst>
+                    <dgm:constr type="h" refType="w" fact="0.35"/>
+                    <dgm:constr type="wArH" refType="h"/>
+                    <dgm:constr type="hArH" refType="h"/>
+                    <dgm:constr type="connDist"/>
+                    <dgm:constr type="diam" refType="connDist" fact="1.15"/>
+                    <dgm:constr type="begPad"/>
+                    <dgm:constr type="endPad"/>
+                  </dgm:constrLst>
+                </dgm:if>
+                <dgm:else name="Name21">
+                  <dgm:constrLst>
+                    <dgm:constr type="h" refType="w" fact="0.35"/>
+                    <dgm:constr type="wArH" refType="h"/>
+                    <dgm:constr type="hArH" refType="h"/>
+                    <dgm:constr type="connDist"/>
+                    <dgm:constr type="diam" refType="connDist" fact="-1.15"/>
+                    <dgm:constr type="begPad"/>
+                    <dgm:constr type="endPad"/>
+                  </dgm:constrLst>
+                </dgm:else>
+              </dgm:choose>
+              <dgm:ruleLst/>
+            </dgm:layoutNode>
+          </dgm:forEach>
+        </dgm:forEach>
       </dgm:forEach>
-    </dgm:forEach>
+    </dgm:layoutNode>
   </dgm:layoutNode>
 </dgm:layoutDef>
 </file>
@@ -20098,7 +21112,7 @@
           <a:p>
             <a:fld id="{64AF2E3A-0E65-479D-A5E3-03C6FE5A6CB0}" type="datetimeFigureOut">
               <a:rPr lang="en-US" smtClean="0"/>
-              <a:t>1/11/2026</a:t>
+              <a:t>2/20/2026</a:t>
             </a:fld>
             <a:endParaRPr lang="en-US"/>
           </a:p>
@@ -20296,7 +21310,7 @@
           <a:p>
             <a:fld id="{64AF2E3A-0E65-479D-A5E3-03C6FE5A6CB0}" type="datetimeFigureOut">
               <a:rPr lang="en-US" smtClean="0"/>
-              <a:t>1/11/2026</a:t>
+              <a:t>2/20/2026</a:t>
             </a:fld>
             <a:endParaRPr lang="en-US"/>
           </a:p>
@@ -20504,7 +21518,7 @@
           <a:p>
             <a:fld id="{64AF2E3A-0E65-479D-A5E3-03C6FE5A6CB0}" type="datetimeFigureOut">
               <a:rPr lang="en-US" smtClean="0"/>
-              <a:t>1/11/2026</a:t>
+              <a:t>2/20/2026</a:t>
             </a:fld>
             <a:endParaRPr lang="en-US"/>
           </a:p>
@@ -20702,7 +21716,7 @@
           <a:p>
             <a:fld id="{64AF2E3A-0E65-479D-A5E3-03C6FE5A6CB0}" type="datetimeFigureOut">
               <a:rPr lang="en-US" smtClean="0"/>
-              <a:t>1/11/2026</a:t>
+              <a:t>2/20/2026</a:t>
             </a:fld>
             <a:endParaRPr lang="en-US"/>
           </a:p>
@@ -20764,49 +21778,32 @@
       </p:sp>
       <p:pic>
         <p:nvPicPr>
-          <p:cNvPr id="9" name="Picture 2" descr="SEAFOM Logo">
+          <p:cNvPr id="7" name="Picture 6" descr="A logo for a company&#10;&#10;AI-generated content may be incorrect.">
             <a:extLst>
               <a:ext uri="{FF2B5EF4-FFF2-40B4-BE49-F238E27FC236}">
-                <a16:creationId xmlns:a16="http://schemas.microsoft.com/office/drawing/2014/main" id="{E066B403-E53F-84A8-0496-B2EE581A01C4}"/>
+                <a16:creationId xmlns:a16="http://schemas.microsoft.com/office/drawing/2014/main" id="{5E0AE5C6-C3A3-4D45-378C-0785B6B731AE}"/>
               </a:ext>
             </a:extLst>
           </p:cNvPr>
           <p:cNvPicPr>
-            <a:picLocks noChangeAspect="1" noChangeArrowheads="1"/>
+            <a:picLocks noChangeAspect="1"/>
           </p:cNvPicPr>
           <p:nvPr userDrawn="1"/>
         </p:nvPicPr>
         <p:blipFill>
-          <a:blip r:embed="rId2">
-            <a:extLst>
-              <a:ext uri="{28A0092B-C50C-407E-A947-70E740481C1C}">
-                <a14:useLocalDpi xmlns:a14="http://schemas.microsoft.com/office/drawing/2010/main" val="0"/>
-              </a:ext>
-            </a:extLst>
-          </a:blip>
-          <a:srcRect/>
+          <a:blip r:embed="rId2"/>
           <a:stretch>
             <a:fillRect/>
           </a:stretch>
         </p:blipFill>
-        <p:spPr bwMode="auto">
+        <p:spPr>
           <a:xfrm>
-            <a:off x="9565419" y="0"/>
-            <a:ext cx="2626580" cy="723769"/>
+            <a:off x="9895398" y="0"/>
+            <a:ext cx="2296602" cy="869141"/>
           </a:xfrm>
           <a:prstGeom prst="rect">
             <a:avLst/>
           </a:prstGeom>
-          <a:noFill/>
-          <a:extLst>
-            <a:ext uri="{909E8E84-426E-40DD-AFC4-6F175D3DCCD1}">
-              <a14:hiddenFill xmlns:a14="http://schemas.microsoft.com/office/drawing/2010/main">
-                <a:solidFill>
-                  <a:srgbClr val="FFFFFF"/>
-                </a:solidFill>
-              </a14:hiddenFill>
-            </a:ext>
-          </a:extLst>
         </p:spPr>
       </p:pic>
     </p:spTree>
@@ -21024,7 +22021,7 @@
           <a:p>
             <a:fld id="{64AF2E3A-0E65-479D-A5E3-03C6FE5A6CB0}" type="datetimeFigureOut">
               <a:rPr lang="en-US" smtClean="0"/>
-              <a:t>1/11/2026</a:t>
+              <a:t>2/20/2026</a:t>
             </a:fld>
             <a:endParaRPr lang="en-US"/>
           </a:p>
@@ -21289,7 +22286,7 @@
           <a:p>
             <a:fld id="{64AF2E3A-0E65-479D-A5E3-03C6FE5A6CB0}" type="datetimeFigureOut">
               <a:rPr lang="en-US" smtClean="0"/>
-              <a:t>1/11/2026</a:t>
+              <a:t>2/20/2026</a:t>
             </a:fld>
             <a:endParaRPr lang="en-US"/>
           </a:p>
@@ -21701,7 +22698,7 @@
           <a:p>
             <a:fld id="{64AF2E3A-0E65-479D-A5E3-03C6FE5A6CB0}" type="datetimeFigureOut">
               <a:rPr lang="en-US" smtClean="0"/>
-              <a:t>1/11/2026</a:t>
+              <a:t>2/20/2026</a:t>
             </a:fld>
             <a:endParaRPr lang="en-US"/>
           </a:p>
@@ -21842,7 +22839,7 @@
           <a:p>
             <a:fld id="{64AF2E3A-0E65-479D-A5E3-03C6FE5A6CB0}" type="datetimeFigureOut">
               <a:rPr lang="en-US" smtClean="0"/>
-              <a:t>1/11/2026</a:t>
+              <a:t>2/20/2026</a:t>
             </a:fld>
             <a:endParaRPr lang="en-US"/>
           </a:p>
@@ -21955,7 +22952,7 @@
           <a:p>
             <a:fld id="{64AF2E3A-0E65-479D-A5E3-03C6FE5A6CB0}" type="datetimeFigureOut">
               <a:rPr lang="en-US" smtClean="0"/>
-              <a:t>1/11/2026</a:t>
+              <a:t>2/20/2026</a:t>
             </a:fld>
             <a:endParaRPr lang="en-US"/>
           </a:p>
@@ -22266,7 +23263,7 @@
           <a:p>
             <a:fld id="{64AF2E3A-0E65-479D-A5E3-03C6FE5A6CB0}" type="datetimeFigureOut">
               <a:rPr lang="en-US" smtClean="0"/>
-              <a:t>1/11/2026</a:t>
+              <a:t>2/20/2026</a:t>
             </a:fld>
             <a:endParaRPr lang="en-US"/>
           </a:p>
@@ -22554,7 +23551,7 @@
           <a:p>
             <a:fld id="{64AF2E3A-0E65-479D-A5E3-03C6FE5A6CB0}" type="datetimeFigureOut">
               <a:rPr lang="en-US" smtClean="0"/>
-              <a:t>1/11/2026</a:t>
+              <a:t>2/20/2026</a:t>
             </a:fld>
             <a:endParaRPr lang="en-US"/>
           </a:p>
@@ -22795,7 +23792,7 @@
           <a:p>
             <a:fld id="{64AF2E3A-0E65-479D-A5E3-03C6FE5A6CB0}" type="datetimeFigureOut">
               <a:rPr lang="en-US" smtClean="0"/>
-              <a:t>1/11/2026</a:t>
+              <a:t>2/20/2026</a:t>
             </a:fld>
             <a:endParaRPr lang="en-US"/>
           </a:p>
@@ -23267,11 +24264,88 @@
           <a:p>
             <a:r>
               <a:rPr lang="en-US" dirty="0"/>
-              <a:t>Nov 2025</a:t>
+              <a:t>March 2026</a:t>
             </a:r>
           </a:p>
         </p:txBody>
       </p:sp>
+      <p:pic>
+        <p:nvPicPr>
+          <p:cNvPr id="5" name="Picture 4" descr="A logo for a company&#10;&#10;AI-generated content may be incorrect.">
+            <a:extLst>
+              <a:ext uri="{FF2B5EF4-FFF2-40B4-BE49-F238E27FC236}">
+                <a16:creationId xmlns:a16="http://schemas.microsoft.com/office/drawing/2014/main" id="{C6429DA1-C5EF-6642-CEF4-A779DD0557EB}"/>
+              </a:ext>
+            </a:extLst>
+          </p:cNvPr>
+          <p:cNvPicPr>
+            <a:picLocks noChangeAspect="1"/>
+          </p:cNvPicPr>
+          <p:nvPr/>
+        </p:nvPicPr>
+        <p:blipFill>
+          <a:blip r:embed="rId2"/>
+          <a:stretch>
+            <a:fillRect/>
+          </a:stretch>
+        </p:blipFill>
+        <p:spPr>
+          <a:xfrm>
+            <a:off x="3920924" y="4429919"/>
+            <a:ext cx="4022350" cy="1522243"/>
+          </a:xfrm>
+          <a:prstGeom prst="rect">
+            <a:avLst/>
+          </a:prstGeom>
+        </p:spPr>
+      </p:pic>
+      <p:pic>
+        <p:nvPicPr>
+          <p:cNvPr id="6" name="Picture 2" descr="SEAFOM Logo">
+            <a:extLst>
+              <a:ext uri="{FF2B5EF4-FFF2-40B4-BE49-F238E27FC236}">
+                <a16:creationId xmlns:a16="http://schemas.microsoft.com/office/drawing/2014/main" id="{5FB39458-D30B-1D02-D3DD-64B631B584E1}"/>
+              </a:ext>
+            </a:extLst>
+          </p:cNvPr>
+          <p:cNvPicPr>
+            <a:picLocks noChangeAspect="1" noChangeArrowheads="1"/>
+          </p:cNvPicPr>
+          <p:nvPr/>
+        </p:nvPicPr>
+        <p:blipFill>
+          <a:blip r:embed="rId3">
+            <a:extLst>
+              <a:ext uri="{28A0092B-C50C-407E-A947-70E740481C1C}">
+                <a14:useLocalDpi xmlns:a14="http://schemas.microsoft.com/office/drawing/2010/main" val="0"/>
+              </a:ext>
+            </a:extLst>
+          </a:blip>
+          <a:srcRect/>
+          <a:stretch>
+            <a:fillRect/>
+          </a:stretch>
+        </p:blipFill>
+        <p:spPr bwMode="auto">
+          <a:xfrm>
+            <a:off x="9565419" y="0"/>
+            <a:ext cx="2626580" cy="723769"/>
+          </a:xfrm>
+          <a:prstGeom prst="rect">
+            <a:avLst/>
+          </a:prstGeom>
+          <a:noFill/>
+          <a:extLst>
+            <a:ext uri="{909E8E84-426E-40DD-AFC4-6F175D3DCCD1}">
+              <a14:hiddenFill xmlns:a14="http://schemas.microsoft.com/office/drawing/2010/main">
+                <a:solidFill>
+                  <a:srgbClr val="FFFFFF"/>
+                </a:solidFill>
+              </a14:hiddenFill>
+            </a:ext>
+          </a:extLst>
+        </p:spPr>
+      </p:pic>
     </p:spTree>
     <p:extLst>
       <p:ext uri="{BB962C8B-B14F-4D97-AF65-F5344CB8AC3E}">
@@ -23349,585 +24423,8 @@
 </p:sld>
 </file>
 
-<file path=ppt/slides/slide2.xml><?xml version="1.0" encoding="utf-8"?>
-<p:sld xmlns:a="http://schemas.openxmlformats.org/drawingml/2006/main" xmlns:r="http://schemas.openxmlformats.org/officeDocument/2006/relationships" xmlns:p="http://schemas.openxmlformats.org/presentationml/2006/main">
-  <p:cSld>
-    <p:spTree>
-      <p:nvGrpSpPr>
-        <p:cNvPr id="1" name=""/>
-        <p:cNvGrpSpPr/>
-        <p:nvPr/>
-      </p:nvGrpSpPr>
-      <p:grpSpPr>
-        <a:xfrm>
-          <a:off x="0" y="0"/>
-          <a:ext cx="0" cy="0"/>
-          <a:chOff x="0" y="0"/>
-          <a:chExt cx="0" cy="0"/>
-        </a:xfrm>
-      </p:grpSpPr>
-      <p:graphicFrame>
-        <p:nvGraphicFramePr>
-          <p:cNvPr id="5" name="Content Placeholder 4">
-            <a:extLst>
-              <a:ext uri="{FF2B5EF4-FFF2-40B4-BE49-F238E27FC236}">
-                <a16:creationId xmlns:a16="http://schemas.microsoft.com/office/drawing/2014/main" id="{CE0C9345-A776-924D-0DD6-4850018A392D}"/>
-              </a:ext>
-            </a:extLst>
-          </p:cNvPr>
-          <p:cNvGraphicFramePr>
-            <a:graphicFrameLocks noGrp="1"/>
-          </p:cNvGraphicFramePr>
-          <p:nvPr>
-            <p:ph idx="1"/>
-            <p:extLst>
-              <p:ext uri="{D42A27DB-BD31-4B8C-83A1-F6EECF244321}">
-                <p14:modId xmlns:p14="http://schemas.microsoft.com/office/powerpoint/2010/main" val="314803335"/>
-              </p:ext>
-            </p:extLst>
-          </p:nvPr>
-        </p:nvGraphicFramePr>
-        <p:xfrm>
-          <a:off x="82338" y="1456267"/>
-          <a:ext cx="12027324" cy="4495800"/>
-        </p:xfrm>
-        <a:graphic>
-          <a:graphicData uri="http://schemas.openxmlformats.org/drawingml/2006/diagram">
-            <dgm:relIds xmlns:dgm="http://schemas.openxmlformats.org/drawingml/2006/diagram" xmlns:r="http://schemas.openxmlformats.org/officeDocument/2006/relationships" r:dm="rId2" r:lo="rId3" r:qs="rId4" r:cs="rId5"/>
-          </a:graphicData>
-        </a:graphic>
-      </p:graphicFrame>
-      <p:sp>
-        <p:nvSpPr>
-          <p:cNvPr id="8" name="Title 1">
-            <a:extLst>
-              <a:ext uri="{FF2B5EF4-FFF2-40B4-BE49-F238E27FC236}">
-                <a16:creationId xmlns:a16="http://schemas.microsoft.com/office/drawing/2014/main" id="{5C1C1D79-A542-2E6C-73B5-B94C0C8F35ED}"/>
-              </a:ext>
-            </a:extLst>
-          </p:cNvPr>
-          <p:cNvSpPr txBox="1">
-            <a:spLocks/>
-          </p:cNvSpPr>
-          <p:nvPr/>
-        </p:nvSpPr>
-        <p:spPr>
-          <a:xfrm>
-            <a:off x="2962656" y="5736972"/>
-            <a:ext cx="2913888" cy="987552"/>
-          </a:xfrm>
-          <a:prstGeom prst="rect">
-            <a:avLst/>
-          </a:prstGeom>
-        </p:spPr>
-        <p:txBody>
-          <a:bodyPr vert="horz" lIns="91440" tIns="45720" rIns="91440" bIns="45720" rtlCol="0" anchor="ctr">
-            <a:normAutofit/>
-          </a:bodyPr>
-          <a:lstStyle>
-            <a:lvl1pPr algn="l" defTabSz="914400" rtl="0" eaLnBrk="1" latinLnBrk="0" hangingPunct="1">
-              <a:lnSpc>
-                <a:spcPct val="90000"/>
-              </a:lnSpc>
-              <a:spcBef>
-                <a:spcPct val="0"/>
-              </a:spcBef>
-              <a:buNone/>
-              <a:defRPr sz="4400" kern="1200">
-                <a:solidFill>
-                  <a:schemeClr val="tx1"/>
-                </a:solidFill>
-                <a:latin typeface="+mj-lt"/>
-                <a:ea typeface="+mj-ea"/>
-                <a:cs typeface="+mj-cs"/>
-              </a:defRPr>
-            </a:lvl1pPr>
-          </a:lstStyle>
-          <a:p>
-            <a:r>
-              <a:rPr lang="en-US" sz="3600" b="1" dirty="0" err="1">
-                <a:solidFill>
-                  <a:schemeClr val="bg1"/>
-                </a:solidFill>
-              </a:rPr>
-              <a:t>pySEAFOAM</a:t>
-            </a:r>
-            <a:r>
-              <a:rPr lang="en-US" sz="3600" b="1" dirty="0">
-                <a:solidFill>
-                  <a:schemeClr val="bg1"/>
-                </a:solidFill>
-              </a:rPr>
-              <a:t> </a:t>
-            </a:r>
-          </a:p>
-        </p:txBody>
-      </p:sp>
-      <p:sp>
-        <p:nvSpPr>
-          <p:cNvPr id="9" name="TextBox 8">
-            <a:extLst>
-              <a:ext uri="{FF2B5EF4-FFF2-40B4-BE49-F238E27FC236}">
-                <a16:creationId xmlns:a16="http://schemas.microsoft.com/office/drawing/2014/main" id="{258FEDE9-F563-4959-C0F4-C01EFD9AA067}"/>
-              </a:ext>
-            </a:extLst>
-          </p:cNvPr>
-          <p:cNvSpPr txBox="1"/>
-          <p:nvPr/>
-        </p:nvSpPr>
-        <p:spPr>
-          <a:xfrm>
-            <a:off x="0" y="251080"/>
-            <a:ext cx="11338560" cy="954107"/>
-          </a:xfrm>
-          <a:prstGeom prst="rect">
-            <a:avLst/>
-          </a:prstGeom>
-          <a:noFill/>
-        </p:spPr>
-        <p:txBody>
-          <a:bodyPr wrap="square" rtlCol="0">
-            <a:spAutoFit/>
-          </a:bodyPr>
-          <a:lstStyle/>
-          <a:p>
-            <a:r>
-              <a:rPr lang="en-US" sz="3200" b="1" dirty="0" err="1">
-                <a:solidFill>
-                  <a:schemeClr val="bg1"/>
-                </a:solidFill>
-                <a:highlight>
-                  <a:srgbClr val="0000FF"/>
-                </a:highlight>
-              </a:rPr>
-              <a:t>pySEAFOM</a:t>
-            </a:r>
-            <a:endParaRPr lang="en-US" sz="2800" dirty="0"/>
-          </a:p>
-          <a:p>
-            <a:r>
-              <a:rPr lang="en-US" sz="2400" dirty="0"/>
-              <a:t>SEAFOM's Community-Driven Standard Fiber Optics Data Processing Library</a:t>
-            </a:r>
-          </a:p>
-        </p:txBody>
-      </p:sp>
-    </p:spTree>
-    <p:extLst>
-      <p:ext uri="{BB962C8B-B14F-4D97-AF65-F5344CB8AC3E}">
-        <p14:creationId xmlns:p14="http://schemas.microsoft.com/office/powerpoint/2010/main" val="997169851"/>
-      </p:ext>
-    </p:extLst>
-  </p:cSld>
-  <p:clrMapOvr>
-    <a:masterClrMapping/>
-  </p:clrMapOvr>
-</p:sld>
-</file>
-
-<file path=ppt/slides/slide3.xml><?xml version="1.0" encoding="utf-8"?>
-<p:sld xmlns:a="http://schemas.openxmlformats.org/drawingml/2006/main" xmlns:r="http://schemas.openxmlformats.org/officeDocument/2006/relationships" xmlns:p="http://schemas.openxmlformats.org/presentationml/2006/main">
-  <p:cSld>
-    <p:spTree>
-      <p:nvGrpSpPr>
-        <p:cNvPr id="1" name=""/>
-        <p:cNvGrpSpPr/>
-        <p:nvPr/>
-      </p:nvGrpSpPr>
-      <p:grpSpPr>
-        <a:xfrm>
-          <a:off x="0" y="0"/>
-          <a:ext cx="0" cy="0"/>
-          <a:chOff x="0" y="0"/>
-          <a:chExt cx="0" cy="0"/>
-        </a:xfrm>
-      </p:grpSpPr>
-      <p:graphicFrame>
-        <p:nvGraphicFramePr>
-          <p:cNvPr id="5" name="Content Placeholder 4">
-            <a:extLst>
-              <a:ext uri="{FF2B5EF4-FFF2-40B4-BE49-F238E27FC236}">
-                <a16:creationId xmlns:a16="http://schemas.microsoft.com/office/drawing/2014/main" id="{34D34C36-F082-C7B3-1633-8E43E374AAC9}"/>
-              </a:ext>
-            </a:extLst>
-          </p:cNvPr>
-          <p:cNvGraphicFramePr>
-            <a:graphicFrameLocks noGrp="1"/>
-          </p:cNvGraphicFramePr>
-          <p:nvPr>
-            <p:ph idx="1"/>
-            <p:extLst>
-              <p:ext uri="{D42A27DB-BD31-4B8C-83A1-F6EECF244321}">
-                <p14:modId xmlns:p14="http://schemas.microsoft.com/office/powerpoint/2010/main" val="2615141005"/>
-              </p:ext>
-            </p:extLst>
-          </p:nvPr>
-        </p:nvGraphicFramePr>
-        <p:xfrm>
-          <a:off x="333955" y="1024212"/>
-          <a:ext cx="11419895" cy="5400442"/>
-        </p:xfrm>
-        <a:graphic>
-          <a:graphicData uri="http://schemas.openxmlformats.org/drawingml/2006/diagram">
-            <dgm:relIds xmlns:dgm="http://schemas.openxmlformats.org/drawingml/2006/diagram" xmlns:r="http://schemas.openxmlformats.org/officeDocument/2006/relationships" r:dm="rId2" r:lo="rId3" r:qs="rId4" r:cs="rId5"/>
-          </a:graphicData>
-        </a:graphic>
-      </p:graphicFrame>
-      <p:sp>
-        <p:nvSpPr>
-          <p:cNvPr id="6" name="TextBox 5">
-            <a:extLst>
-              <a:ext uri="{FF2B5EF4-FFF2-40B4-BE49-F238E27FC236}">
-                <a16:creationId xmlns:a16="http://schemas.microsoft.com/office/drawing/2014/main" id="{DAA0E0B6-C72F-45D3-B145-1DEAC3DFB930}"/>
-              </a:ext>
-            </a:extLst>
-          </p:cNvPr>
-          <p:cNvSpPr txBox="1"/>
-          <p:nvPr/>
-        </p:nvSpPr>
-        <p:spPr>
-          <a:xfrm>
-            <a:off x="0" y="251080"/>
-            <a:ext cx="11338560" cy="461665"/>
-          </a:xfrm>
-          <a:prstGeom prst="rect">
-            <a:avLst/>
-          </a:prstGeom>
-          <a:noFill/>
-        </p:spPr>
-        <p:txBody>
-          <a:bodyPr wrap="square" rtlCol="0">
-            <a:spAutoFit/>
-          </a:bodyPr>
-          <a:lstStyle/>
-          <a:p>
-            <a:r>
-              <a:rPr lang="en-US" sz="2400" b="1" dirty="0"/>
-              <a:t>Roadmap for Development &amp; Adoption</a:t>
-            </a:r>
-          </a:p>
-        </p:txBody>
-      </p:sp>
-    </p:spTree>
-    <p:extLst>
-      <p:ext uri="{BB962C8B-B14F-4D97-AF65-F5344CB8AC3E}">
-        <p14:creationId xmlns:p14="http://schemas.microsoft.com/office/powerpoint/2010/main" val="3609631159"/>
-      </p:ext>
-    </p:extLst>
-  </p:cSld>
-  <p:clrMapOvr>
-    <a:masterClrMapping/>
-  </p:clrMapOvr>
-</p:sld>
-</file>
-
-<file path=ppt/slides/slide4.xml><?xml version="1.0" encoding="utf-8"?>
-<p:sld xmlns:a="http://schemas.openxmlformats.org/drawingml/2006/main" xmlns:r="http://schemas.openxmlformats.org/officeDocument/2006/relationships" xmlns:p="http://schemas.openxmlformats.org/presentationml/2006/main">
-  <p:cSld>
-    <p:spTree>
-      <p:nvGrpSpPr>
-        <p:cNvPr id="1" name="">
-          <a:extLst>
-            <a:ext uri="{FF2B5EF4-FFF2-40B4-BE49-F238E27FC236}">
-              <a16:creationId xmlns:a16="http://schemas.microsoft.com/office/drawing/2014/main" id="{2E21AFE7-D6AD-E7A6-B7F7-CCA5FF9DAFEC}"/>
-            </a:ext>
-          </a:extLst>
-        </p:cNvPr>
-        <p:cNvGrpSpPr/>
-        <p:nvPr/>
-      </p:nvGrpSpPr>
-      <p:grpSpPr>
-        <a:xfrm>
-          <a:off x="0" y="0"/>
-          <a:ext cx="0" cy="0"/>
-          <a:chOff x="0" y="0"/>
-          <a:chExt cx="0" cy="0"/>
-        </a:xfrm>
-      </p:grpSpPr>
-      <p:sp>
-        <p:nvSpPr>
-          <p:cNvPr id="4" name="TextBox 3">
-            <a:extLst>
-              <a:ext uri="{FF2B5EF4-FFF2-40B4-BE49-F238E27FC236}">
-                <a16:creationId xmlns:a16="http://schemas.microsoft.com/office/drawing/2014/main" id="{18E6EFF1-1DF3-4285-3413-8486395A3965}"/>
-              </a:ext>
-            </a:extLst>
-          </p:cNvPr>
-          <p:cNvSpPr txBox="1"/>
-          <p:nvPr/>
-        </p:nvSpPr>
-        <p:spPr>
-          <a:xfrm>
-            <a:off x="108284" y="258498"/>
-            <a:ext cx="11338560" cy="461665"/>
-          </a:xfrm>
-          <a:prstGeom prst="rect">
-            <a:avLst/>
-          </a:prstGeom>
-          <a:noFill/>
-        </p:spPr>
-        <p:txBody>
-          <a:bodyPr wrap="square" rtlCol="0">
-            <a:spAutoFit/>
-          </a:bodyPr>
-          <a:lstStyle/>
-          <a:p>
-            <a:r>
-              <a:rPr lang="en-US" sz="2400" b="1"/>
-              <a:t>GitHub Access Levels</a:t>
-            </a:r>
-            <a:endParaRPr lang="en-US" sz="2400" b="1" dirty="0"/>
-          </a:p>
-        </p:txBody>
-      </p:sp>
-      <p:graphicFrame>
-        <p:nvGraphicFramePr>
-          <p:cNvPr id="5" name="Diagram 4">
-            <a:extLst>
-              <a:ext uri="{FF2B5EF4-FFF2-40B4-BE49-F238E27FC236}">
-                <a16:creationId xmlns:a16="http://schemas.microsoft.com/office/drawing/2014/main" id="{908E90FC-1670-F7B7-C787-26BECD49125B}"/>
-              </a:ext>
-            </a:extLst>
-          </p:cNvPr>
-          <p:cNvGraphicFramePr/>
-          <p:nvPr>
-            <p:extLst>
-              <p:ext uri="{D42A27DB-BD31-4B8C-83A1-F6EECF244321}">
-                <p14:modId xmlns:p14="http://schemas.microsoft.com/office/powerpoint/2010/main" val="3278840943"/>
-              </p:ext>
-            </p:extLst>
-          </p:nvPr>
-        </p:nvGraphicFramePr>
-        <p:xfrm>
-          <a:off x="541680" y="1367348"/>
-          <a:ext cx="9840570" cy="4804852"/>
-        </p:xfrm>
-        <a:graphic>
-          <a:graphicData uri="http://schemas.openxmlformats.org/drawingml/2006/diagram">
-            <dgm:relIds xmlns:dgm="http://schemas.openxmlformats.org/drawingml/2006/diagram" xmlns:r="http://schemas.openxmlformats.org/officeDocument/2006/relationships" r:dm="rId2" r:lo="rId3" r:qs="rId4" r:cs="rId5"/>
-          </a:graphicData>
-        </a:graphic>
-      </p:graphicFrame>
-      <p:grpSp>
-        <p:nvGrpSpPr>
-          <p:cNvPr id="2" name="Group 1">
-            <a:extLst>
-              <a:ext uri="{FF2B5EF4-FFF2-40B4-BE49-F238E27FC236}">
-                <a16:creationId xmlns:a16="http://schemas.microsoft.com/office/drawing/2014/main" id="{1F39D5F6-70C7-6FD5-5A63-387650AD3795}"/>
-              </a:ext>
-            </a:extLst>
-          </p:cNvPr>
-          <p:cNvGrpSpPr/>
-          <p:nvPr/>
-        </p:nvGrpSpPr>
-        <p:grpSpPr>
-          <a:xfrm>
-            <a:off x="7454103" y="564195"/>
-            <a:ext cx="1933515" cy="589486"/>
-            <a:chOff x="3294327" y="329983"/>
-            <a:chExt cx="1933515" cy="589486"/>
-          </a:xfrm>
-        </p:grpSpPr>
-        <p:sp>
-          <p:nvSpPr>
-            <p:cNvPr id="3" name="Rectangle 2">
-              <a:extLst>
-                <a:ext uri="{FF2B5EF4-FFF2-40B4-BE49-F238E27FC236}">
-                  <a16:creationId xmlns:a16="http://schemas.microsoft.com/office/drawing/2014/main" id="{76E2CA01-898D-DBBA-C98A-CA86B04C572D}"/>
-                </a:ext>
-              </a:extLst>
-            </p:cNvPr>
-            <p:cNvSpPr/>
-            <p:nvPr/>
-          </p:nvSpPr>
-          <p:spPr>
-            <a:xfrm>
-              <a:off x="3294327" y="329983"/>
-              <a:ext cx="1933515" cy="589486"/>
-            </a:xfrm>
-            <a:prstGeom prst="rect">
-              <a:avLst/>
-            </a:prstGeom>
-            <a:solidFill>
-              <a:schemeClr val="tx1"/>
-            </a:solidFill>
-          </p:spPr>
-          <p:style>
-            <a:lnRef idx="2">
-              <a:schemeClr val="lt1">
-                <a:hueOff val="0"/>
-                <a:satOff val="0"/>
-                <a:lumOff val="0"/>
-                <a:alphaOff val="0"/>
-              </a:schemeClr>
-            </a:lnRef>
-            <a:fillRef idx="1">
-              <a:scrgbClr r="0" g="0" b="0"/>
-            </a:fillRef>
-            <a:effectRef idx="0">
-              <a:schemeClr val="accent6">
-                <a:hueOff val="0"/>
-                <a:satOff val="0"/>
-                <a:lumOff val="0"/>
-                <a:alphaOff val="0"/>
-              </a:schemeClr>
-            </a:effectRef>
-            <a:fontRef idx="minor">
-              <a:schemeClr val="lt1"/>
-            </a:fontRef>
-          </p:style>
-          <p:txBody>
-            <a:bodyPr/>
-            <a:lstStyle/>
-            <a:p>
-              <a:endParaRPr lang="en-US"/>
-            </a:p>
-          </p:txBody>
-        </p:sp>
-        <p:sp>
-          <p:nvSpPr>
-            <p:cNvPr id="6" name="TextBox 5">
-              <a:extLst>
-                <a:ext uri="{FF2B5EF4-FFF2-40B4-BE49-F238E27FC236}">
-                  <a16:creationId xmlns:a16="http://schemas.microsoft.com/office/drawing/2014/main" id="{36F6C389-D919-A1B0-4C41-85B67C778205}"/>
-                </a:ext>
-              </a:extLst>
-            </p:cNvPr>
-            <p:cNvSpPr txBox="1"/>
-            <p:nvPr/>
-          </p:nvSpPr>
-          <p:spPr>
-            <a:xfrm>
-              <a:off x="3294327" y="329983"/>
-              <a:ext cx="1933515" cy="589486"/>
-            </a:xfrm>
-            <a:prstGeom prst="rect">
-              <a:avLst/>
-            </a:prstGeom>
-          </p:spPr>
-          <p:style>
-            <a:lnRef idx="0">
-              <a:scrgbClr r="0" g="0" b="0"/>
-            </a:lnRef>
-            <a:fillRef idx="0">
-              <a:scrgbClr r="0" g="0" b="0"/>
-            </a:fillRef>
-            <a:effectRef idx="0">
-              <a:scrgbClr r="0" g="0" b="0"/>
-            </a:effectRef>
-            <a:fontRef idx="minor">
-              <a:schemeClr val="lt1"/>
-            </a:fontRef>
-          </p:style>
-          <p:txBody>
-            <a:bodyPr spcFirstLastPara="0" vert="horz" wrap="square" lIns="7620" tIns="7620" rIns="7620" bIns="7620" numCol="1" spcCol="1270" anchor="ctr" anchorCtr="0">
-              <a:noAutofit/>
-            </a:bodyPr>
-            <a:lstStyle/>
-            <a:p>
-              <a:pPr marL="0" lvl="0" indent="0" algn="ctr" defTabSz="533400">
-                <a:lnSpc>
-                  <a:spcPct val="90000"/>
-                </a:lnSpc>
-                <a:spcBef>
-                  <a:spcPct val="0"/>
-                </a:spcBef>
-                <a:spcAft>
-                  <a:spcPct val="35000"/>
-                </a:spcAft>
-                <a:buNone/>
-              </a:pPr>
-              <a:r>
-                <a:rPr lang="en-US" sz="1200" b="1" kern="1200" dirty="0"/>
-                <a:t>All Repo Admins: </a:t>
-              </a:r>
-            </a:p>
-            <a:p>
-              <a:pPr marL="0" lvl="0" indent="0" algn="ctr" defTabSz="533400">
-                <a:lnSpc>
-                  <a:spcPct val="90000"/>
-                </a:lnSpc>
-                <a:spcBef>
-                  <a:spcPct val="0"/>
-                </a:spcBef>
-                <a:spcAft>
-                  <a:spcPct val="35000"/>
-                </a:spcAft>
-                <a:buNone/>
-              </a:pPr>
-              <a:r>
-                <a:rPr lang="en-US" sz="1200" b="1" u="sng" kern="1200" dirty="0"/>
-                <a:t>OTM+ Streeting Committee</a:t>
-              </a:r>
-            </a:p>
-          </p:txBody>
-        </p:sp>
-      </p:grpSp>
-      <p:sp>
-        <p:nvSpPr>
-          <p:cNvPr id="7" name="Rectangle 6">
-            <a:extLst>
-              <a:ext uri="{FF2B5EF4-FFF2-40B4-BE49-F238E27FC236}">
-                <a16:creationId xmlns:a16="http://schemas.microsoft.com/office/drawing/2014/main" id="{77D0BFEA-E1DE-DBB0-4626-7D50AAA747A3}"/>
-              </a:ext>
-            </a:extLst>
-          </p:cNvPr>
-          <p:cNvSpPr/>
-          <p:nvPr/>
-        </p:nvSpPr>
-        <p:spPr>
-          <a:xfrm>
-            <a:off x="7591011" y="1189677"/>
-            <a:ext cx="1699039" cy="4982524"/>
-          </a:xfrm>
-          <a:prstGeom prst="rect">
-            <a:avLst/>
-          </a:prstGeom>
-          <a:noFill/>
-          <a:ln w="12700">
-            <a:prstDash val="dash"/>
-          </a:ln>
-        </p:spPr>
-        <p:style>
-          <a:lnRef idx="2">
-            <a:schemeClr val="accent1">
-              <a:shade val="15000"/>
-            </a:schemeClr>
-          </a:lnRef>
-          <a:fillRef idx="1">
-            <a:schemeClr val="accent1"/>
-          </a:fillRef>
-          <a:effectRef idx="0">
-            <a:schemeClr val="accent1"/>
-          </a:effectRef>
-          <a:fontRef idx="minor">
-            <a:schemeClr val="lt1"/>
-          </a:fontRef>
-        </p:style>
-        <p:txBody>
-          <a:bodyPr rtlCol="0" anchor="ctr"/>
-          <a:lstStyle/>
-          <a:p>
-            <a:pPr algn="ctr"/>
-            <a:endParaRPr lang="en-US"/>
-          </a:p>
-        </p:txBody>
-      </p:sp>
-    </p:spTree>
-    <p:extLst>
-      <p:ext uri="{BB962C8B-B14F-4D97-AF65-F5344CB8AC3E}">
-        <p14:creationId xmlns:p14="http://schemas.microsoft.com/office/powerpoint/2010/main" val="2701834378"/>
-      </p:ext>
-    </p:extLst>
-  </p:cSld>
-  <p:clrMapOvr>
-    <a:masterClrMapping/>
-  </p:clrMapOvr>
-</p:sld>
-</file>
-
-<file path=ppt/slides/slide5.xml><?xml version="1.0" encoding="utf-8"?>
-<p:sld xmlns:a="http://schemas.openxmlformats.org/drawingml/2006/main" xmlns:r="http://schemas.openxmlformats.org/officeDocument/2006/relationships" xmlns:p="http://schemas.openxmlformats.org/presentationml/2006/main">
+<file path=ppt/slides/slide11.xml><?xml version="1.0" encoding="utf-8"?>
+<p:sld xmlns:a="http://schemas.openxmlformats.org/drawingml/2006/main" xmlns:r="http://schemas.openxmlformats.org/officeDocument/2006/relationships" xmlns:p="http://schemas.openxmlformats.org/presentationml/2006/main" show="0">
   <p:cSld>
     <p:spTree>
       <p:nvGrpSpPr>
@@ -25219,418 +25716,7 @@
 </p:sld>
 </file>
 
-<file path=ppt/slides/slide6.xml><?xml version="1.0" encoding="utf-8"?>
-<p:sld xmlns:a="http://schemas.openxmlformats.org/drawingml/2006/main" xmlns:r="http://schemas.openxmlformats.org/officeDocument/2006/relationships" xmlns:p="http://schemas.openxmlformats.org/presentationml/2006/main">
-  <p:cSld>
-    <p:spTree>
-      <p:nvGrpSpPr>
-        <p:cNvPr id="1" name=""/>
-        <p:cNvGrpSpPr/>
-        <p:nvPr/>
-      </p:nvGrpSpPr>
-      <p:grpSpPr>
-        <a:xfrm>
-          <a:off x="0" y="0"/>
-          <a:ext cx="0" cy="0"/>
-          <a:chOff x="0" y="0"/>
-          <a:chExt cx="0" cy="0"/>
-        </a:xfrm>
-      </p:grpSpPr>
-      <p:pic>
-        <p:nvPicPr>
-          <p:cNvPr id="7" name="Picture 6">
-            <a:extLst>
-              <a:ext uri="{FF2B5EF4-FFF2-40B4-BE49-F238E27FC236}">
-                <a16:creationId xmlns:a16="http://schemas.microsoft.com/office/drawing/2014/main" id="{06750C7B-352F-E1D2-7698-7F93851933A5}"/>
-              </a:ext>
-            </a:extLst>
-          </p:cNvPr>
-          <p:cNvPicPr>
-            <a:picLocks noChangeAspect="1"/>
-          </p:cNvPicPr>
-          <p:nvPr/>
-        </p:nvPicPr>
-        <p:blipFill>
-          <a:blip r:embed="rId2"/>
-          <a:stretch>
-            <a:fillRect/>
-          </a:stretch>
-        </p:blipFill>
-        <p:spPr>
-          <a:xfrm>
-            <a:off x="2932595" y="1348428"/>
-            <a:ext cx="8242692" cy="5348706"/>
-          </a:xfrm>
-          <a:prstGeom prst="rect">
-            <a:avLst/>
-          </a:prstGeom>
-        </p:spPr>
-      </p:pic>
-      <p:sp>
-        <p:nvSpPr>
-          <p:cNvPr id="8" name="TextBox 7">
-            <a:extLst>
-              <a:ext uri="{FF2B5EF4-FFF2-40B4-BE49-F238E27FC236}">
-                <a16:creationId xmlns:a16="http://schemas.microsoft.com/office/drawing/2014/main" id="{D309792C-9703-002E-6000-DA4BE63B6216}"/>
-              </a:ext>
-            </a:extLst>
-          </p:cNvPr>
-          <p:cNvSpPr txBox="1"/>
-          <p:nvPr/>
-        </p:nvSpPr>
-        <p:spPr>
-          <a:xfrm>
-            <a:off x="108284" y="258498"/>
-            <a:ext cx="11338560" cy="584775"/>
-          </a:xfrm>
-          <a:prstGeom prst="rect">
-            <a:avLst/>
-          </a:prstGeom>
-          <a:noFill/>
-        </p:spPr>
-        <p:txBody>
-          <a:bodyPr wrap="square" rtlCol="0">
-            <a:spAutoFit/>
-          </a:bodyPr>
-          <a:lstStyle/>
-          <a:p>
-            <a:pPr lvl="0"/>
-            <a:r>
-              <a:rPr lang="en-US" sz="3200" b="1" dirty="0" err="1"/>
-              <a:t>pySEAFOM</a:t>
-            </a:r>
-            <a:endParaRPr lang="en-US" sz="3200" dirty="0"/>
-          </a:p>
-        </p:txBody>
-      </p:sp>
-      <p:sp>
-        <p:nvSpPr>
-          <p:cNvPr id="12" name="TextBox 11">
-            <a:extLst>
-              <a:ext uri="{FF2B5EF4-FFF2-40B4-BE49-F238E27FC236}">
-                <a16:creationId xmlns:a16="http://schemas.microsoft.com/office/drawing/2014/main" id="{DDF99BFB-3ACB-57E1-8080-72F34CCFA474}"/>
-              </a:ext>
-            </a:extLst>
-          </p:cNvPr>
-          <p:cNvSpPr txBox="1"/>
-          <p:nvPr/>
-        </p:nvSpPr>
-        <p:spPr>
-          <a:xfrm>
-            <a:off x="367241" y="911184"/>
-            <a:ext cx="8501591" cy="369332"/>
-          </a:xfrm>
-          <a:prstGeom prst="rect">
-            <a:avLst/>
-          </a:prstGeom>
-          <a:noFill/>
-        </p:spPr>
-        <p:txBody>
-          <a:bodyPr wrap="square">
-            <a:spAutoFit/>
-          </a:bodyPr>
-          <a:lstStyle/>
-          <a:p>
-            <a:r>
-              <a:rPr lang="en-US" dirty="0">
-                <a:hlinkClick r:id="rId3"/>
-              </a:rPr>
-              <a:t>https://github.com/SEAFOM-Fiber-Optic-Monitoring-Group/pySEAFOM</a:t>
-            </a:r>
-            <a:r>
-              <a:rPr lang="en-US" dirty="0"/>
-              <a:t> </a:t>
-            </a:r>
-          </a:p>
-        </p:txBody>
-      </p:sp>
-    </p:spTree>
-    <p:extLst>
-      <p:ext uri="{BB962C8B-B14F-4D97-AF65-F5344CB8AC3E}">
-        <p14:creationId xmlns:p14="http://schemas.microsoft.com/office/powerpoint/2010/main" val="178843416"/>
-      </p:ext>
-    </p:extLst>
-  </p:cSld>
-  <p:clrMapOvr>
-    <a:masterClrMapping/>
-  </p:clrMapOvr>
-</p:sld>
-</file>
-
-<file path=ppt/slides/slide7.xml><?xml version="1.0" encoding="utf-8"?>
-<p:sld xmlns:a="http://schemas.openxmlformats.org/drawingml/2006/main" xmlns:r="http://schemas.openxmlformats.org/officeDocument/2006/relationships" xmlns:p="http://schemas.openxmlformats.org/presentationml/2006/main">
-  <p:cSld>
-    <p:spTree>
-      <p:nvGrpSpPr>
-        <p:cNvPr id="1" name=""/>
-        <p:cNvGrpSpPr/>
-        <p:nvPr/>
-      </p:nvGrpSpPr>
-      <p:grpSpPr>
-        <a:xfrm>
-          <a:off x="0" y="0"/>
-          <a:ext cx="0" cy="0"/>
-          <a:chOff x="0" y="0"/>
-          <a:chExt cx="0" cy="0"/>
-        </a:xfrm>
-      </p:grpSpPr>
-      <p:graphicFrame>
-        <p:nvGraphicFramePr>
-          <p:cNvPr id="10" name="Diagram 9">
-            <a:extLst>
-              <a:ext uri="{FF2B5EF4-FFF2-40B4-BE49-F238E27FC236}">
-                <a16:creationId xmlns:a16="http://schemas.microsoft.com/office/drawing/2014/main" id="{04FFF0D5-86E4-BFB4-A048-E34CF6C0B9DB}"/>
-              </a:ext>
-            </a:extLst>
-          </p:cNvPr>
-          <p:cNvGraphicFramePr/>
-          <p:nvPr>
-            <p:extLst>
-              <p:ext uri="{D42A27DB-BD31-4B8C-83A1-F6EECF244321}">
-                <p14:modId xmlns:p14="http://schemas.microsoft.com/office/powerpoint/2010/main" val="1587030261"/>
-              </p:ext>
-            </p:extLst>
-          </p:nvPr>
-        </p:nvGraphicFramePr>
-        <p:xfrm>
-          <a:off x="-1757881" y="806116"/>
-          <a:ext cx="9261576" cy="5590674"/>
-        </p:xfrm>
-        <a:graphic>
-          <a:graphicData uri="http://schemas.openxmlformats.org/drawingml/2006/diagram">
-            <dgm:relIds xmlns:dgm="http://schemas.openxmlformats.org/drawingml/2006/diagram" xmlns:r="http://schemas.openxmlformats.org/officeDocument/2006/relationships" r:dm="rId2" r:lo="rId3" r:qs="rId4" r:cs="rId5"/>
-          </a:graphicData>
-        </a:graphic>
-      </p:graphicFrame>
-      <p:sp>
-        <p:nvSpPr>
-          <p:cNvPr id="4" name="TextBox 3">
-            <a:extLst>
-              <a:ext uri="{FF2B5EF4-FFF2-40B4-BE49-F238E27FC236}">
-                <a16:creationId xmlns:a16="http://schemas.microsoft.com/office/drawing/2014/main" id="{E3199A79-7AF1-F97A-782A-9810527253DD}"/>
-              </a:ext>
-            </a:extLst>
-          </p:cNvPr>
-          <p:cNvSpPr txBox="1"/>
-          <p:nvPr/>
-        </p:nvSpPr>
-        <p:spPr>
-          <a:xfrm>
-            <a:off x="0" y="251080"/>
-            <a:ext cx="11338560" cy="461665"/>
-          </a:xfrm>
-          <a:prstGeom prst="rect">
-            <a:avLst/>
-          </a:prstGeom>
-          <a:noFill/>
-        </p:spPr>
-        <p:txBody>
-          <a:bodyPr wrap="square" rtlCol="0">
-            <a:spAutoFit/>
-          </a:bodyPr>
-          <a:lstStyle/>
-          <a:p>
-            <a:r>
-              <a:rPr lang="en-US" sz="2400" b="1" dirty="0"/>
-              <a:t>Data processing and visualization tools  </a:t>
-            </a:r>
-          </a:p>
-        </p:txBody>
-      </p:sp>
-      <p:sp>
-        <p:nvSpPr>
-          <p:cNvPr id="2" name="TextBox 1">
-            <a:extLst>
-              <a:ext uri="{FF2B5EF4-FFF2-40B4-BE49-F238E27FC236}">
-                <a16:creationId xmlns:a16="http://schemas.microsoft.com/office/drawing/2014/main" id="{22D6B876-51A5-CDD2-898A-E4BB297A725F}"/>
-              </a:ext>
-            </a:extLst>
-          </p:cNvPr>
-          <p:cNvSpPr txBox="1"/>
-          <p:nvPr/>
-        </p:nvSpPr>
-        <p:spPr>
-          <a:xfrm>
-            <a:off x="7361753" y="1588214"/>
-            <a:ext cx="3018968" cy="1477328"/>
-          </a:xfrm>
-          <a:prstGeom prst="rect">
-            <a:avLst/>
-          </a:prstGeom>
-          <a:noFill/>
-        </p:spPr>
-        <p:txBody>
-          <a:bodyPr wrap="none" rtlCol="0">
-            <a:spAutoFit/>
-          </a:bodyPr>
-          <a:lstStyle/>
-          <a:p>
-            <a:r>
-              <a:rPr lang="en-US" b="1" dirty="0"/>
-              <a:t>New module requirements </a:t>
-            </a:r>
-          </a:p>
-          <a:p>
-            <a:pPr marL="342900" indent="-342900">
-              <a:buFont typeface="+mj-lt"/>
-              <a:buAutoNum type="arabicPeriod"/>
-            </a:pPr>
-            <a:r>
-              <a:rPr lang="en-US" dirty="0"/>
-              <a:t>Core implementation </a:t>
-            </a:r>
-          </a:p>
-          <a:p>
-            <a:pPr marL="342900" indent="-342900">
-              <a:buFont typeface="+mj-lt"/>
-              <a:buAutoNum type="arabicPeriod"/>
-            </a:pPr>
-            <a:r>
-              <a:rPr lang="en-US" dirty="0"/>
-              <a:t>API doc </a:t>
-            </a:r>
-          </a:p>
-          <a:p>
-            <a:pPr marL="342900" indent="-342900">
-              <a:buFont typeface="+mj-lt"/>
-              <a:buAutoNum type="arabicPeriod"/>
-            </a:pPr>
-            <a:r>
-              <a:rPr lang="en-US" dirty="0"/>
-              <a:t>Workflow walkthrough</a:t>
-            </a:r>
-          </a:p>
-          <a:p>
-            <a:pPr marL="342900" indent="-342900">
-              <a:buFont typeface="+mj-lt"/>
-              <a:buAutoNum type="arabicPeriod"/>
-            </a:pPr>
-            <a:r>
-              <a:rPr lang="en-US" dirty="0"/>
-              <a:t>Validation notebook</a:t>
-            </a:r>
-          </a:p>
-        </p:txBody>
-      </p:sp>
-      <p:graphicFrame>
-        <p:nvGraphicFramePr>
-          <p:cNvPr id="9" name="Diagram 8">
-            <a:extLst>
-              <a:ext uri="{FF2B5EF4-FFF2-40B4-BE49-F238E27FC236}">
-                <a16:creationId xmlns:a16="http://schemas.microsoft.com/office/drawing/2014/main" id="{AC6D72F3-4A60-50F7-4E1A-41769F30B1FC}"/>
-              </a:ext>
-            </a:extLst>
-          </p:cNvPr>
-          <p:cNvGraphicFramePr/>
-          <p:nvPr>
-            <p:extLst>
-              <p:ext uri="{D42A27DB-BD31-4B8C-83A1-F6EECF244321}">
-                <p14:modId xmlns:p14="http://schemas.microsoft.com/office/powerpoint/2010/main" val="974016842"/>
-              </p:ext>
-            </p:extLst>
-          </p:nvPr>
-        </p:nvGraphicFramePr>
-        <p:xfrm>
-          <a:off x="5879433" y="3268578"/>
-          <a:ext cx="6041228" cy="2173705"/>
-        </p:xfrm>
-        <a:graphic>
-          <a:graphicData uri="http://schemas.openxmlformats.org/drawingml/2006/diagram">
-            <dgm:relIds xmlns:dgm="http://schemas.openxmlformats.org/drawingml/2006/diagram" xmlns:r="http://schemas.openxmlformats.org/officeDocument/2006/relationships" r:dm="rId7" r:lo="rId8" r:qs="rId9" r:cs="rId10"/>
-          </a:graphicData>
-        </a:graphic>
-      </p:graphicFrame>
-      <p:pic>
-        <p:nvPicPr>
-          <p:cNvPr id="1032" name="Picture 8">
-            <a:extLst>
-              <a:ext uri="{FF2B5EF4-FFF2-40B4-BE49-F238E27FC236}">
-                <a16:creationId xmlns:a16="http://schemas.microsoft.com/office/drawing/2014/main" id="{DD8C88D5-2ECC-586E-F688-6577B864EA43}"/>
-              </a:ext>
-            </a:extLst>
-          </p:cNvPr>
-          <p:cNvPicPr>
-            <a:picLocks noChangeAspect="1" noChangeArrowheads="1"/>
-          </p:cNvPicPr>
-          <p:nvPr/>
-        </p:nvPicPr>
-        <p:blipFill>
-          <a:blip r:embed="rId12">
-            <a:extLst>
-              <a:ext uri="{28A0092B-C50C-407E-A947-70E740481C1C}">
-                <a14:useLocalDpi xmlns:a14="http://schemas.microsoft.com/office/drawing/2010/main" val="0"/>
-              </a:ext>
-            </a:extLst>
-          </a:blip>
-          <a:srcRect/>
-          <a:stretch>
-            <a:fillRect/>
-          </a:stretch>
-        </p:blipFill>
-        <p:spPr bwMode="auto">
-          <a:xfrm rot="18752489" flipH="1">
-            <a:off x="2131309" y="2961709"/>
-            <a:ext cx="1322780" cy="1322780"/>
-          </a:xfrm>
-          <a:prstGeom prst="rect">
-            <a:avLst/>
-          </a:prstGeom>
-          <a:noFill/>
-          <a:extLst>
-            <a:ext uri="{909E8E84-426E-40DD-AFC4-6F175D3DCCD1}">
-              <a14:hiddenFill xmlns:a14="http://schemas.microsoft.com/office/drawing/2010/main">
-                <a:solidFill>
-                  <a:srgbClr val="FFFFFF"/>
-                </a:solidFill>
-              </a14:hiddenFill>
-            </a:ext>
-          </a:extLst>
-        </p:spPr>
-      </p:pic>
-      <p:pic>
-        <p:nvPicPr>
-          <p:cNvPr id="5" name="Picture 4">
-            <a:extLst>
-              <a:ext uri="{FF2B5EF4-FFF2-40B4-BE49-F238E27FC236}">
-                <a16:creationId xmlns:a16="http://schemas.microsoft.com/office/drawing/2014/main" id="{4F541BD6-DD7D-990B-BC10-2FFD4339654B}"/>
-              </a:ext>
-            </a:extLst>
-          </p:cNvPr>
-          <p:cNvPicPr>
-            <a:picLocks noChangeAspect="1"/>
-          </p:cNvPicPr>
-          <p:nvPr/>
-        </p:nvPicPr>
-        <p:blipFill>
-          <a:blip r:embed="rId13"/>
-          <a:stretch>
-            <a:fillRect/>
-          </a:stretch>
-        </p:blipFill>
-        <p:spPr>
-          <a:xfrm>
-            <a:off x="5879433" y="5078430"/>
-            <a:ext cx="2438525" cy="914447"/>
-          </a:xfrm>
-          <a:prstGeom prst="rect">
-            <a:avLst/>
-          </a:prstGeom>
-        </p:spPr>
-      </p:pic>
-    </p:spTree>
-    <p:extLst>
-      <p:ext uri="{BB962C8B-B14F-4D97-AF65-F5344CB8AC3E}">
-        <p14:creationId xmlns:p14="http://schemas.microsoft.com/office/powerpoint/2010/main" val="348206209"/>
-      </p:ext>
-    </p:extLst>
-  </p:cSld>
-  <p:clrMapOvr>
-    <a:masterClrMapping/>
-  </p:clrMapOvr>
-</p:sld>
-</file>
-
-<file path=ppt/slides/slide8.xml><?xml version="1.0" encoding="utf-8"?>
+<file path=ppt/slides/slide12.xml><?xml version="1.0" encoding="utf-8"?>
 <p:sld xmlns:a="http://schemas.openxmlformats.org/drawingml/2006/main" xmlns:r="http://schemas.openxmlformats.org/officeDocument/2006/relationships" xmlns:p="http://schemas.openxmlformats.org/presentationml/2006/main">
   <p:cSld>
     <p:spTree>
@@ -25756,7 +25842,1072 @@
 </p:sld>
 </file>
 
-<file path=ppt/slides/slide9.xml><?xml version="1.0" encoding="utf-8"?>
+<file path=ppt/slides/slide2.xml><?xml version="1.0" encoding="utf-8"?>
+<p:sld xmlns:a="http://schemas.openxmlformats.org/drawingml/2006/main" xmlns:r="http://schemas.openxmlformats.org/officeDocument/2006/relationships" xmlns:p="http://schemas.openxmlformats.org/presentationml/2006/main">
+  <p:cSld>
+    <p:spTree>
+      <p:nvGrpSpPr>
+        <p:cNvPr id="1" name=""/>
+        <p:cNvGrpSpPr/>
+        <p:nvPr/>
+      </p:nvGrpSpPr>
+      <p:grpSpPr>
+        <a:xfrm>
+          <a:off x="0" y="0"/>
+          <a:ext cx="0" cy="0"/>
+          <a:chOff x="0" y="0"/>
+          <a:chExt cx="0" cy="0"/>
+        </a:xfrm>
+      </p:grpSpPr>
+      <p:graphicFrame>
+        <p:nvGraphicFramePr>
+          <p:cNvPr id="5" name="Content Placeholder 4">
+            <a:extLst>
+              <a:ext uri="{FF2B5EF4-FFF2-40B4-BE49-F238E27FC236}">
+                <a16:creationId xmlns:a16="http://schemas.microsoft.com/office/drawing/2014/main" id="{CE0C9345-A776-924D-0DD6-4850018A392D}"/>
+              </a:ext>
+            </a:extLst>
+          </p:cNvPr>
+          <p:cNvGraphicFramePr>
+            <a:graphicFrameLocks noGrp="1"/>
+          </p:cNvGraphicFramePr>
+          <p:nvPr>
+            <p:ph idx="1"/>
+            <p:extLst>
+              <p:ext uri="{D42A27DB-BD31-4B8C-83A1-F6EECF244321}">
+                <p14:modId xmlns:p14="http://schemas.microsoft.com/office/powerpoint/2010/main" val="314803335"/>
+              </p:ext>
+            </p:extLst>
+          </p:nvPr>
+        </p:nvGraphicFramePr>
+        <p:xfrm>
+          <a:off x="82338" y="1456267"/>
+          <a:ext cx="12027324" cy="4495800"/>
+        </p:xfrm>
+        <a:graphic>
+          <a:graphicData uri="http://schemas.openxmlformats.org/drawingml/2006/diagram">
+            <dgm:relIds xmlns:dgm="http://schemas.openxmlformats.org/drawingml/2006/diagram" xmlns:r="http://schemas.openxmlformats.org/officeDocument/2006/relationships" r:dm="rId2" r:lo="rId3" r:qs="rId4" r:cs="rId5"/>
+          </a:graphicData>
+        </a:graphic>
+      </p:graphicFrame>
+      <p:sp>
+        <p:nvSpPr>
+          <p:cNvPr id="8" name="Title 1">
+            <a:extLst>
+              <a:ext uri="{FF2B5EF4-FFF2-40B4-BE49-F238E27FC236}">
+                <a16:creationId xmlns:a16="http://schemas.microsoft.com/office/drawing/2014/main" id="{5C1C1D79-A542-2E6C-73B5-B94C0C8F35ED}"/>
+              </a:ext>
+            </a:extLst>
+          </p:cNvPr>
+          <p:cNvSpPr txBox="1">
+            <a:spLocks/>
+          </p:cNvSpPr>
+          <p:nvPr/>
+        </p:nvSpPr>
+        <p:spPr>
+          <a:xfrm>
+            <a:off x="2962656" y="5736972"/>
+            <a:ext cx="2913888" cy="987552"/>
+          </a:xfrm>
+          <a:prstGeom prst="rect">
+            <a:avLst/>
+          </a:prstGeom>
+        </p:spPr>
+        <p:txBody>
+          <a:bodyPr vert="horz" lIns="91440" tIns="45720" rIns="91440" bIns="45720" rtlCol="0" anchor="ctr">
+            <a:normAutofit/>
+          </a:bodyPr>
+          <a:lstStyle>
+            <a:lvl1pPr algn="l" defTabSz="914400" rtl="0" eaLnBrk="1" latinLnBrk="0" hangingPunct="1">
+              <a:lnSpc>
+                <a:spcPct val="90000"/>
+              </a:lnSpc>
+              <a:spcBef>
+                <a:spcPct val="0"/>
+              </a:spcBef>
+              <a:buNone/>
+              <a:defRPr sz="4400" kern="1200">
+                <a:solidFill>
+                  <a:schemeClr val="tx1"/>
+                </a:solidFill>
+                <a:latin typeface="+mj-lt"/>
+                <a:ea typeface="+mj-ea"/>
+                <a:cs typeface="+mj-cs"/>
+              </a:defRPr>
+            </a:lvl1pPr>
+          </a:lstStyle>
+          <a:p>
+            <a:r>
+              <a:rPr lang="en-US" sz="3600" b="1" dirty="0" err="1">
+                <a:solidFill>
+                  <a:schemeClr val="bg1"/>
+                </a:solidFill>
+              </a:rPr>
+              <a:t>pySEAFOAM</a:t>
+            </a:r>
+            <a:r>
+              <a:rPr lang="en-US" sz="3600" b="1" dirty="0">
+                <a:solidFill>
+                  <a:schemeClr val="bg1"/>
+                </a:solidFill>
+              </a:rPr>
+              <a:t> </a:t>
+            </a:r>
+          </a:p>
+        </p:txBody>
+      </p:sp>
+      <p:sp>
+        <p:nvSpPr>
+          <p:cNvPr id="9" name="TextBox 8">
+            <a:extLst>
+              <a:ext uri="{FF2B5EF4-FFF2-40B4-BE49-F238E27FC236}">
+                <a16:creationId xmlns:a16="http://schemas.microsoft.com/office/drawing/2014/main" id="{258FEDE9-F563-4959-C0F4-C01EFD9AA067}"/>
+              </a:ext>
+            </a:extLst>
+          </p:cNvPr>
+          <p:cNvSpPr txBox="1"/>
+          <p:nvPr/>
+        </p:nvSpPr>
+        <p:spPr>
+          <a:xfrm>
+            <a:off x="-39757" y="533351"/>
+            <a:ext cx="9410369" cy="830997"/>
+          </a:xfrm>
+          <a:prstGeom prst="rect">
+            <a:avLst/>
+          </a:prstGeom>
+          <a:noFill/>
+        </p:spPr>
+        <p:txBody>
+          <a:bodyPr wrap="square" rtlCol="0">
+            <a:spAutoFit/>
+          </a:bodyPr>
+          <a:lstStyle/>
+          <a:p>
+            <a:r>
+              <a:rPr lang="en-US" sz="2400" b="1" dirty="0"/>
+              <a:t>SEAFOM's Community-Driven Standard Fiber Optics Data Processing Library</a:t>
+            </a:r>
+          </a:p>
+        </p:txBody>
+      </p:sp>
+    </p:spTree>
+    <p:extLst>
+      <p:ext uri="{BB962C8B-B14F-4D97-AF65-F5344CB8AC3E}">
+        <p14:creationId xmlns:p14="http://schemas.microsoft.com/office/powerpoint/2010/main" val="997169851"/>
+      </p:ext>
+    </p:extLst>
+  </p:cSld>
+  <p:clrMapOvr>
+    <a:masterClrMapping/>
+  </p:clrMapOvr>
+</p:sld>
+</file>
+
+<file path=ppt/slides/slide3.xml><?xml version="1.0" encoding="utf-8"?>
+<p:sld xmlns:a="http://schemas.openxmlformats.org/drawingml/2006/main" xmlns:r="http://schemas.openxmlformats.org/officeDocument/2006/relationships" xmlns:p="http://schemas.openxmlformats.org/presentationml/2006/main">
+  <p:cSld>
+    <p:spTree>
+      <p:nvGrpSpPr>
+        <p:cNvPr id="1" name=""/>
+        <p:cNvGrpSpPr/>
+        <p:nvPr/>
+      </p:nvGrpSpPr>
+      <p:grpSpPr>
+        <a:xfrm>
+          <a:off x="0" y="0"/>
+          <a:ext cx="0" cy="0"/>
+          <a:chOff x="0" y="0"/>
+          <a:chExt cx="0" cy="0"/>
+        </a:xfrm>
+      </p:grpSpPr>
+      <p:graphicFrame>
+        <p:nvGraphicFramePr>
+          <p:cNvPr id="5" name="Content Placeholder 4">
+            <a:extLst>
+              <a:ext uri="{FF2B5EF4-FFF2-40B4-BE49-F238E27FC236}">
+                <a16:creationId xmlns:a16="http://schemas.microsoft.com/office/drawing/2014/main" id="{34D34C36-F082-C7B3-1633-8E43E374AAC9}"/>
+              </a:ext>
+            </a:extLst>
+          </p:cNvPr>
+          <p:cNvGraphicFramePr>
+            <a:graphicFrameLocks noGrp="1"/>
+          </p:cNvGraphicFramePr>
+          <p:nvPr>
+            <p:ph idx="1"/>
+            <p:extLst>
+              <p:ext uri="{D42A27DB-BD31-4B8C-83A1-F6EECF244321}">
+                <p14:modId xmlns:p14="http://schemas.microsoft.com/office/powerpoint/2010/main" val="2615141005"/>
+              </p:ext>
+            </p:extLst>
+          </p:nvPr>
+        </p:nvGraphicFramePr>
+        <p:xfrm>
+          <a:off x="333955" y="1024212"/>
+          <a:ext cx="11419895" cy="5400442"/>
+        </p:xfrm>
+        <a:graphic>
+          <a:graphicData uri="http://schemas.openxmlformats.org/drawingml/2006/diagram">
+            <dgm:relIds xmlns:dgm="http://schemas.openxmlformats.org/drawingml/2006/diagram" xmlns:r="http://schemas.openxmlformats.org/officeDocument/2006/relationships" r:dm="rId2" r:lo="rId3" r:qs="rId4" r:cs="rId5"/>
+          </a:graphicData>
+        </a:graphic>
+      </p:graphicFrame>
+      <p:sp>
+        <p:nvSpPr>
+          <p:cNvPr id="6" name="TextBox 5">
+            <a:extLst>
+              <a:ext uri="{FF2B5EF4-FFF2-40B4-BE49-F238E27FC236}">
+                <a16:creationId xmlns:a16="http://schemas.microsoft.com/office/drawing/2014/main" id="{DAA0E0B6-C72F-45D3-B145-1DEAC3DFB930}"/>
+              </a:ext>
+            </a:extLst>
+          </p:cNvPr>
+          <p:cNvSpPr txBox="1"/>
+          <p:nvPr/>
+        </p:nvSpPr>
+        <p:spPr>
+          <a:xfrm>
+            <a:off x="0" y="251080"/>
+            <a:ext cx="11338560" cy="461665"/>
+          </a:xfrm>
+          <a:prstGeom prst="rect">
+            <a:avLst/>
+          </a:prstGeom>
+          <a:noFill/>
+        </p:spPr>
+        <p:txBody>
+          <a:bodyPr wrap="square" rtlCol="0">
+            <a:spAutoFit/>
+          </a:bodyPr>
+          <a:lstStyle/>
+          <a:p>
+            <a:r>
+              <a:rPr lang="en-US" sz="2400" b="1" dirty="0"/>
+              <a:t>Roadmap for Development &amp; Adoption</a:t>
+            </a:r>
+          </a:p>
+        </p:txBody>
+      </p:sp>
+    </p:spTree>
+    <p:extLst>
+      <p:ext uri="{BB962C8B-B14F-4D97-AF65-F5344CB8AC3E}">
+        <p14:creationId xmlns:p14="http://schemas.microsoft.com/office/powerpoint/2010/main" val="3609631159"/>
+      </p:ext>
+    </p:extLst>
+  </p:cSld>
+  <p:clrMapOvr>
+    <a:masterClrMapping/>
+  </p:clrMapOvr>
+</p:sld>
+</file>
+
+<file path=ppt/slides/slide4.xml><?xml version="1.0" encoding="utf-8"?>
+<p:sld xmlns:a="http://schemas.openxmlformats.org/drawingml/2006/main" xmlns:r="http://schemas.openxmlformats.org/officeDocument/2006/relationships" xmlns:p="http://schemas.openxmlformats.org/presentationml/2006/main">
+  <p:cSld>
+    <p:spTree>
+      <p:nvGrpSpPr>
+        <p:cNvPr id="1" name="">
+          <a:extLst>
+            <a:ext uri="{FF2B5EF4-FFF2-40B4-BE49-F238E27FC236}">
+              <a16:creationId xmlns:a16="http://schemas.microsoft.com/office/drawing/2014/main" id="{2E21AFE7-D6AD-E7A6-B7F7-CCA5FF9DAFEC}"/>
+            </a:ext>
+          </a:extLst>
+        </p:cNvPr>
+        <p:cNvGrpSpPr/>
+        <p:nvPr/>
+      </p:nvGrpSpPr>
+      <p:grpSpPr>
+        <a:xfrm>
+          <a:off x="0" y="0"/>
+          <a:ext cx="0" cy="0"/>
+          <a:chOff x="0" y="0"/>
+          <a:chExt cx="0" cy="0"/>
+        </a:xfrm>
+      </p:grpSpPr>
+      <p:sp>
+        <p:nvSpPr>
+          <p:cNvPr id="4" name="TextBox 3">
+            <a:extLst>
+              <a:ext uri="{FF2B5EF4-FFF2-40B4-BE49-F238E27FC236}">
+                <a16:creationId xmlns:a16="http://schemas.microsoft.com/office/drawing/2014/main" id="{18E6EFF1-1DF3-4285-3413-8486395A3965}"/>
+              </a:ext>
+            </a:extLst>
+          </p:cNvPr>
+          <p:cNvSpPr txBox="1"/>
+          <p:nvPr/>
+        </p:nvSpPr>
+        <p:spPr>
+          <a:xfrm>
+            <a:off x="108284" y="258498"/>
+            <a:ext cx="11338560" cy="461665"/>
+          </a:xfrm>
+          <a:prstGeom prst="rect">
+            <a:avLst/>
+          </a:prstGeom>
+          <a:noFill/>
+        </p:spPr>
+        <p:txBody>
+          <a:bodyPr wrap="square" rtlCol="0">
+            <a:spAutoFit/>
+          </a:bodyPr>
+          <a:lstStyle/>
+          <a:p>
+            <a:r>
+              <a:rPr lang="en-US" sz="2400" b="1" dirty="0"/>
+              <a:t>GitHub Access Levels</a:t>
+            </a:r>
+          </a:p>
+        </p:txBody>
+      </p:sp>
+      <p:graphicFrame>
+        <p:nvGraphicFramePr>
+          <p:cNvPr id="5" name="Diagram 4">
+            <a:extLst>
+              <a:ext uri="{FF2B5EF4-FFF2-40B4-BE49-F238E27FC236}">
+                <a16:creationId xmlns:a16="http://schemas.microsoft.com/office/drawing/2014/main" id="{908E90FC-1670-F7B7-C787-26BECD49125B}"/>
+              </a:ext>
+            </a:extLst>
+          </p:cNvPr>
+          <p:cNvGraphicFramePr/>
+          <p:nvPr>
+            <p:extLst>
+              <p:ext uri="{D42A27DB-BD31-4B8C-83A1-F6EECF244321}">
+                <p14:modId xmlns:p14="http://schemas.microsoft.com/office/powerpoint/2010/main" val="3549123698"/>
+              </p:ext>
+            </p:extLst>
+          </p:nvPr>
+        </p:nvGraphicFramePr>
+        <p:xfrm>
+          <a:off x="541680" y="1367348"/>
+          <a:ext cx="9840570" cy="4804852"/>
+        </p:xfrm>
+        <a:graphic>
+          <a:graphicData uri="http://schemas.openxmlformats.org/drawingml/2006/diagram">
+            <dgm:relIds xmlns:dgm="http://schemas.openxmlformats.org/drawingml/2006/diagram" xmlns:r="http://schemas.openxmlformats.org/officeDocument/2006/relationships" r:dm="rId2" r:lo="rId3" r:qs="rId4" r:cs="rId5"/>
+          </a:graphicData>
+        </a:graphic>
+      </p:graphicFrame>
+      <p:grpSp>
+        <p:nvGrpSpPr>
+          <p:cNvPr id="2" name="Group 1">
+            <a:extLst>
+              <a:ext uri="{FF2B5EF4-FFF2-40B4-BE49-F238E27FC236}">
+                <a16:creationId xmlns:a16="http://schemas.microsoft.com/office/drawing/2014/main" id="{1F39D5F6-70C7-6FD5-5A63-387650AD3795}"/>
+              </a:ext>
+            </a:extLst>
+          </p:cNvPr>
+          <p:cNvGrpSpPr/>
+          <p:nvPr/>
+        </p:nvGrpSpPr>
+        <p:grpSpPr>
+          <a:xfrm>
+            <a:off x="7454103" y="564195"/>
+            <a:ext cx="1933515" cy="589486"/>
+            <a:chOff x="3294327" y="329983"/>
+            <a:chExt cx="1933515" cy="589486"/>
+          </a:xfrm>
+        </p:grpSpPr>
+        <p:sp>
+          <p:nvSpPr>
+            <p:cNvPr id="3" name="Rectangle 2">
+              <a:extLst>
+                <a:ext uri="{FF2B5EF4-FFF2-40B4-BE49-F238E27FC236}">
+                  <a16:creationId xmlns:a16="http://schemas.microsoft.com/office/drawing/2014/main" id="{76E2CA01-898D-DBBA-C98A-CA86B04C572D}"/>
+                </a:ext>
+              </a:extLst>
+            </p:cNvPr>
+            <p:cNvSpPr/>
+            <p:nvPr/>
+          </p:nvSpPr>
+          <p:spPr>
+            <a:xfrm>
+              <a:off x="3294327" y="329983"/>
+              <a:ext cx="1933515" cy="589486"/>
+            </a:xfrm>
+            <a:prstGeom prst="rect">
+              <a:avLst/>
+            </a:prstGeom>
+            <a:solidFill>
+              <a:schemeClr val="tx1"/>
+            </a:solidFill>
+          </p:spPr>
+          <p:style>
+            <a:lnRef idx="2">
+              <a:schemeClr val="lt1">
+                <a:hueOff val="0"/>
+                <a:satOff val="0"/>
+                <a:lumOff val="0"/>
+                <a:alphaOff val="0"/>
+              </a:schemeClr>
+            </a:lnRef>
+            <a:fillRef idx="1">
+              <a:scrgbClr r="0" g="0" b="0"/>
+            </a:fillRef>
+            <a:effectRef idx="0">
+              <a:schemeClr val="accent6">
+                <a:hueOff val="0"/>
+                <a:satOff val="0"/>
+                <a:lumOff val="0"/>
+                <a:alphaOff val="0"/>
+              </a:schemeClr>
+            </a:effectRef>
+            <a:fontRef idx="minor">
+              <a:schemeClr val="lt1"/>
+            </a:fontRef>
+          </p:style>
+          <p:txBody>
+            <a:bodyPr/>
+            <a:lstStyle/>
+            <a:p>
+              <a:endParaRPr lang="en-US"/>
+            </a:p>
+          </p:txBody>
+        </p:sp>
+        <p:sp>
+          <p:nvSpPr>
+            <p:cNvPr id="6" name="TextBox 5">
+              <a:extLst>
+                <a:ext uri="{FF2B5EF4-FFF2-40B4-BE49-F238E27FC236}">
+                  <a16:creationId xmlns:a16="http://schemas.microsoft.com/office/drawing/2014/main" id="{36F6C389-D919-A1B0-4C41-85B67C778205}"/>
+                </a:ext>
+              </a:extLst>
+            </p:cNvPr>
+            <p:cNvSpPr txBox="1"/>
+            <p:nvPr/>
+          </p:nvSpPr>
+          <p:spPr>
+            <a:xfrm>
+              <a:off x="3294327" y="329983"/>
+              <a:ext cx="1933515" cy="589486"/>
+            </a:xfrm>
+            <a:prstGeom prst="rect">
+              <a:avLst/>
+            </a:prstGeom>
+          </p:spPr>
+          <p:style>
+            <a:lnRef idx="0">
+              <a:scrgbClr r="0" g="0" b="0"/>
+            </a:lnRef>
+            <a:fillRef idx="0">
+              <a:scrgbClr r="0" g="0" b="0"/>
+            </a:fillRef>
+            <a:effectRef idx="0">
+              <a:scrgbClr r="0" g="0" b="0"/>
+            </a:effectRef>
+            <a:fontRef idx="minor">
+              <a:schemeClr val="lt1"/>
+            </a:fontRef>
+          </p:style>
+          <p:txBody>
+            <a:bodyPr spcFirstLastPara="0" vert="horz" wrap="square" lIns="7620" tIns="7620" rIns="7620" bIns="7620" numCol="1" spcCol="1270" anchor="ctr" anchorCtr="0">
+              <a:noAutofit/>
+            </a:bodyPr>
+            <a:lstStyle/>
+            <a:p>
+              <a:pPr marL="0" lvl="0" indent="0" algn="ctr" defTabSz="533400">
+                <a:lnSpc>
+                  <a:spcPct val="90000"/>
+                </a:lnSpc>
+                <a:spcBef>
+                  <a:spcPct val="0"/>
+                </a:spcBef>
+                <a:spcAft>
+                  <a:spcPct val="35000"/>
+                </a:spcAft>
+                <a:buNone/>
+              </a:pPr>
+              <a:r>
+                <a:rPr lang="en-US" sz="1200" b="1" kern="1200" dirty="0"/>
+                <a:t>All Repo Admins: </a:t>
+              </a:r>
+            </a:p>
+            <a:p>
+              <a:pPr marL="0" lvl="0" indent="0" algn="ctr" defTabSz="533400">
+                <a:lnSpc>
+                  <a:spcPct val="90000"/>
+                </a:lnSpc>
+                <a:spcBef>
+                  <a:spcPct val="0"/>
+                </a:spcBef>
+                <a:spcAft>
+                  <a:spcPct val="35000"/>
+                </a:spcAft>
+                <a:buNone/>
+              </a:pPr>
+              <a:r>
+                <a:rPr lang="en-US" sz="1200" b="1" u="sng" kern="1200" dirty="0"/>
+                <a:t>OTM+ Streeting Committee</a:t>
+              </a:r>
+            </a:p>
+          </p:txBody>
+        </p:sp>
+      </p:grpSp>
+      <p:sp>
+        <p:nvSpPr>
+          <p:cNvPr id="7" name="Rectangle 6">
+            <a:extLst>
+              <a:ext uri="{FF2B5EF4-FFF2-40B4-BE49-F238E27FC236}">
+                <a16:creationId xmlns:a16="http://schemas.microsoft.com/office/drawing/2014/main" id="{77D0BFEA-E1DE-DBB0-4626-7D50AAA747A3}"/>
+              </a:ext>
+            </a:extLst>
+          </p:cNvPr>
+          <p:cNvSpPr/>
+          <p:nvPr/>
+        </p:nvSpPr>
+        <p:spPr>
+          <a:xfrm>
+            <a:off x="7591011" y="1189677"/>
+            <a:ext cx="1699039" cy="4982524"/>
+          </a:xfrm>
+          <a:prstGeom prst="rect">
+            <a:avLst/>
+          </a:prstGeom>
+          <a:noFill/>
+          <a:ln w="12700">
+            <a:prstDash val="dash"/>
+          </a:ln>
+        </p:spPr>
+        <p:style>
+          <a:lnRef idx="2">
+            <a:schemeClr val="accent1">
+              <a:shade val="15000"/>
+            </a:schemeClr>
+          </a:lnRef>
+          <a:fillRef idx="1">
+            <a:schemeClr val="accent1"/>
+          </a:fillRef>
+          <a:effectRef idx="0">
+            <a:schemeClr val="accent1"/>
+          </a:effectRef>
+          <a:fontRef idx="minor">
+            <a:schemeClr val="lt1"/>
+          </a:fontRef>
+        </p:style>
+        <p:txBody>
+          <a:bodyPr rtlCol="0" anchor="ctr"/>
+          <a:lstStyle/>
+          <a:p>
+            <a:pPr algn="ctr"/>
+            <a:endParaRPr lang="en-US"/>
+          </a:p>
+        </p:txBody>
+      </p:sp>
+    </p:spTree>
+    <p:extLst>
+      <p:ext uri="{BB962C8B-B14F-4D97-AF65-F5344CB8AC3E}">
+        <p14:creationId xmlns:p14="http://schemas.microsoft.com/office/powerpoint/2010/main" val="2701834378"/>
+      </p:ext>
+    </p:extLst>
+  </p:cSld>
+  <p:clrMapOvr>
+    <a:masterClrMapping/>
+  </p:clrMapOvr>
+</p:sld>
+</file>
+
+<file path=ppt/slides/slide5.xml><?xml version="1.0" encoding="utf-8"?>
+<p:sld xmlns:a="http://schemas.openxmlformats.org/drawingml/2006/main" xmlns:r="http://schemas.openxmlformats.org/officeDocument/2006/relationships" xmlns:p="http://schemas.openxmlformats.org/presentationml/2006/main">
+  <p:cSld>
+    <p:spTree>
+      <p:nvGrpSpPr>
+        <p:cNvPr id="1" name=""/>
+        <p:cNvGrpSpPr/>
+        <p:nvPr/>
+      </p:nvGrpSpPr>
+      <p:grpSpPr>
+        <a:xfrm>
+          <a:off x="0" y="0"/>
+          <a:ext cx="0" cy="0"/>
+          <a:chOff x="0" y="0"/>
+          <a:chExt cx="0" cy="0"/>
+        </a:xfrm>
+      </p:grpSpPr>
+      <p:sp>
+        <p:nvSpPr>
+          <p:cNvPr id="8" name="TextBox 7">
+            <a:extLst>
+              <a:ext uri="{FF2B5EF4-FFF2-40B4-BE49-F238E27FC236}">
+                <a16:creationId xmlns:a16="http://schemas.microsoft.com/office/drawing/2014/main" id="{D309792C-9703-002E-6000-DA4BE63B6216}"/>
+              </a:ext>
+            </a:extLst>
+          </p:cNvPr>
+          <p:cNvSpPr txBox="1"/>
+          <p:nvPr/>
+        </p:nvSpPr>
+        <p:spPr>
+          <a:xfrm>
+            <a:off x="108284" y="258498"/>
+            <a:ext cx="11338560" cy="584775"/>
+          </a:xfrm>
+          <a:prstGeom prst="rect">
+            <a:avLst/>
+          </a:prstGeom>
+          <a:noFill/>
+        </p:spPr>
+        <p:txBody>
+          <a:bodyPr wrap="square" rtlCol="0">
+            <a:spAutoFit/>
+          </a:bodyPr>
+          <a:lstStyle/>
+          <a:p>
+            <a:pPr lvl="0"/>
+            <a:r>
+              <a:rPr lang="en-US" sz="3200" b="1" dirty="0"/>
+              <a:t>Repository and Documentation </a:t>
+            </a:r>
+            <a:endParaRPr lang="en-US" sz="3200" dirty="0"/>
+          </a:p>
+        </p:txBody>
+      </p:sp>
+      <p:sp>
+        <p:nvSpPr>
+          <p:cNvPr id="12" name="TextBox 11">
+            <a:extLst>
+              <a:ext uri="{FF2B5EF4-FFF2-40B4-BE49-F238E27FC236}">
+                <a16:creationId xmlns:a16="http://schemas.microsoft.com/office/drawing/2014/main" id="{DDF99BFB-3ACB-57E1-8080-72F34CCFA474}"/>
+              </a:ext>
+            </a:extLst>
+          </p:cNvPr>
+          <p:cNvSpPr txBox="1"/>
+          <p:nvPr/>
+        </p:nvSpPr>
+        <p:spPr>
+          <a:xfrm>
+            <a:off x="375193" y="1252409"/>
+            <a:ext cx="8501591" cy="369332"/>
+          </a:xfrm>
+          <a:prstGeom prst="rect">
+            <a:avLst/>
+          </a:prstGeom>
+          <a:noFill/>
+        </p:spPr>
+        <p:txBody>
+          <a:bodyPr wrap="square">
+            <a:spAutoFit/>
+          </a:bodyPr>
+          <a:lstStyle/>
+          <a:p>
+            <a:r>
+              <a:rPr lang="en-US" dirty="0">
+                <a:hlinkClick r:id="rId2"/>
+              </a:rPr>
+              <a:t>https://github.com/SEAFOM-Fiber-Optic-Monitoring-Group/pySEAFOM</a:t>
+            </a:r>
+            <a:r>
+              <a:rPr lang="en-US" dirty="0"/>
+              <a:t> </a:t>
+            </a:r>
+          </a:p>
+        </p:txBody>
+      </p:sp>
+      <p:pic>
+        <p:nvPicPr>
+          <p:cNvPr id="3" name="Picture 2">
+            <a:extLst>
+              <a:ext uri="{FF2B5EF4-FFF2-40B4-BE49-F238E27FC236}">
+                <a16:creationId xmlns:a16="http://schemas.microsoft.com/office/drawing/2014/main" id="{B3BC7833-1857-CCF4-B04B-7AD16567E70A}"/>
+              </a:ext>
+            </a:extLst>
+          </p:cNvPr>
+          <p:cNvPicPr>
+            <a:picLocks noChangeAspect="1"/>
+          </p:cNvPicPr>
+          <p:nvPr/>
+        </p:nvPicPr>
+        <p:blipFill>
+          <a:blip r:embed="rId3"/>
+          <a:stretch>
+            <a:fillRect/>
+          </a:stretch>
+        </p:blipFill>
+        <p:spPr>
+          <a:xfrm>
+            <a:off x="0" y="1844703"/>
+            <a:ext cx="5690949" cy="4615732"/>
+          </a:xfrm>
+          <a:prstGeom prst="rect">
+            <a:avLst/>
+          </a:prstGeom>
+        </p:spPr>
+      </p:pic>
+      <p:pic>
+        <p:nvPicPr>
+          <p:cNvPr id="5" name="Picture 4">
+            <a:extLst>
+              <a:ext uri="{FF2B5EF4-FFF2-40B4-BE49-F238E27FC236}">
+                <a16:creationId xmlns:a16="http://schemas.microsoft.com/office/drawing/2014/main" id="{E30F6090-A84F-85AE-E70C-A9A21187BF9A}"/>
+              </a:ext>
+            </a:extLst>
+          </p:cNvPr>
+          <p:cNvPicPr>
+            <a:picLocks noChangeAspect="1"/>
+          </p:cNvPicPr>
+          <p:nvPr/>
+        </p:nvPicPr>
+        <p:blipFill>
+          <a:blip r:embed="rId4"/>
+          <a:stretch>
+            <a:fillRect/>
+          </a:stretch>
+        </p:blipFill>
+        <p:spPr>
+          <a:xfrm>
+            <a:off x="5924664" y="2070555"/>
+            <a:ext cx="6123438" cy="3876261"/>
+          </a:xfrm>
+          <a:prstGeom prst="rect">
+            <a:avLst/>
+          </a:prstGeom>
+        </p:spPr>
+      </p:pic>
+    </p:spTree>
+    <p:extLst>
+      <p:ext uri="{BB962C8B-B14F-4D97-AF65-F5344CB8AC3E}">
+        <p14:creationId xmlns:p14="http://schemas.microsoft.com/office/powerpoint/2010/main" val="178843416"/>
+      </p:ext>
+    </p:extLst>
+  </p:cSld>
+  <p:clrMapOvr>
+    <a:masterClrMapping/>
+  </p:clrMapOvr>
+</p:sld>
+</file>
+
+<file path=ppt/slides/slide6.xml><?xml version="1.0" encoding="utf-8"?>
+<p:sld xmlns:a="http://schemas.openxmlformats.org/drawingml/2006/main" xmlns:r="http://schemas.openxmlformats.org/officeDocument/2006/relationships" xmlns:p="http://schemas.openxmlformats.org/presentationml/2006/main">
+  <p:cSld>
+    <p:spTree>
+      <p:nvGrpSpPr>
+        <p:cNvPr id="1" name=""/>
+        <p:cNvGrpSpPr/>
+        <p:nvPr/>
+      </p:nvGrpSpPr>
+      <p:grpSpPr>
+        <a:xfrm>
+          <a:off x="0" y="0"/>
+          <a:ext cx="0" cy="0"/>
+          <a:chOff x="0" y="0"/>
+          <a:chExt cx="0" cy="0"/>
+        </a:xfrm>
+      </p:grpSpPr>
+      <p:sp>
+        <p:nvSpPr>
+          <p:cNvPr id="4" name="TextBox 3">
+            <a:extLst>
+              <a:ext uri="{FF2B5EF4-FFF2-40B4-BE49-F238E27FC236}">
+                <a16:creationId xmlns:a16="http://schemas.microsoft.com/office/drawing/2014/main" id="{E3199A79-7AF1-F97A-782A-9810527253DD}"/>
+              </a:ext>
+            </a:extLst>
+          </p:cNvPr>
+          <p:cNvSpPr txBox="1"/>
+          <p:nvPr/>
+        </p:nvSpPr>
+        <p:spPr>
+          <a:xfrm>
+            <a:off x="0" y="251080"/>
+            <a:ext cx="11338560" cy="523220"/>
+          </a:xfrm>
+          <a:prstGeom prst="rect">
+            <a:avLst/>
+          </a:prstGeom>
+          <a:noFill/>
+        </p:spPr>
+        <p:txBody>
+          <a:bodyPr wrap="square" rtlCol="0">
+            <a:spAutoFit/>
+          </a:bodyPr>
+          <a:lstStyle/>
+          <a:p>
+            <a:r>
+              <a:rPr lang="en-US" sz="2800" b="1" dirty="0"/>
+              <a:t>Modules so far</a:t>
+            </a:r>
+          </a:p>
+        </p:txBody>
+      </p:sp>
+      <p:sp>
+        <p:nvSpPr>
+          <p:cNvPr id="2" name="TextBox 1">
+            <a:extLst>
+              <a:ext uri="{FF2B5EF4-FFF2-40B4-BE49-F238E27FC236}">
+                <a16:creationId xmlns:a16="http://schemas.microsoft.com/office/drawing/2014/main" id="{22D6B876-51A5-CDD2-898A-E4BB297A725F}"/>
+              </a:ext>
+            </a:extLst>
+          </p:cNvPr>
+          <p:cNvSpPr txBox="1"/>
+          <p:nvPr/>
+        </p:nvSpPr>
+        <p:spPr>
+          <a:xfrm>
+            <a:off x="9071811" y="4066813"/>
+            <a:ext cx="3018968" cy="1477328"/>
+          </a:xfrm>
+          <a:prstGeom prst="rect">
+            <a:avLst/>
+          </a:prstGeom>
+          <a:noFill/>
+        </p:spPr>
+        <p:txBody>
+          <a:bodyPr wrap="none" rtlCol="0">
+            <a:spAutoFit/>
+          </a:bodyPr>
+          <a:lstStyle/>
+          <a:p>
+            <a:r>
+              <a:rPr lang="en-US" b="1" dirty="0"/>
+              <a:t>New module requirements </a:t>
+            </a:r>
+          </a:p>
+          <a:p>
+            <a:pPr marL="342900" indent="-342900">
+              <a:buFont typeface="+mj-lt"/>
+              <a:buAutoNum type="arabicPeriod"/>
+            </a:pPr>
+            <a:r>
+              <a:rPr lang="en-US" dirty="0"/>
+              <a:t>Core implementation </a:t>
+            </a:r>
+          </a:p>
+          <a:p>
+            <a:pPr marL="342900" indent="-342900">
+              <a:buFont typeface="+mj-lt"/>
+              <a:buAutoNum type="arabicPeriod"/>
+            </a:pPr>
+            <a:r>
+              <a:rPr lang="en-US" dirty="0"/>
+              <a:t>API doc </a:t>
+            </a:r>
+          </a:p>
+          <a:p>
+            <a:pPr marL="342900" indent="-342900">
+              <a:buFont typeface="+mj-lt"/>
+              <a:buAutoNum type="arabicPeriod"/>
+            </a:pPr>
+            <a:r>
+              <a:rPr lang="en-US" dirty="0"/>
+              <a:t>Workflow walkthrough</a:t>
+            </a:r>
+          </a:p>
+          <a:p>
+            <a:pPr marL="342900" indent="-342900">
+              <a:buFont typeface="+mj-lt"/>
+              <a:buAutoNum type="arabicPeriod"/>
+            </a:pPr>
+            <a:r>
+              <a:rPr lang="en-US" dirty="0"/>
+              <a:t>Validation notebook</a:t>
+            </a:r>
+          </a:p>
+        </p:txBody>
+      </p:sp>
+      <p:grpSp>
+        <p:nvGrpSpPr>
+          <p:cNvPr id="3" name="Group 2">
+            <a:extLst>
+              <a:ext uri="{FF2B5EF4-FFF2-40B4-BE49-F238E27FC236}">
+                <a16:creationId xmlns:a16="http://schemas.microsoft.com/office/drawing/2014/main" id="{B4216EDE-9EFB-A14A-81F7-A698B9A65E2A}"/>
+              </a:ext>
+            </a:extLst>
+          </p:cNvPr>
+          <p:cNvGrpSpPr/>
+          <p:nvPr/>
+        </p:nvGrpSpPr>
+        <p:grpSpPr>
+          <a:xfrm>
+            <a:off x="1319719" y="712745"/>
+            <a:ext cx="9261576" cy="5590674"/>
+            <a:chOff x="1319719" y="712745"/>
+            <a:chExt cx="9261576" cy="5590674"/>
+          </a:xfrm>
+        </p:grpSpPr>
+        <p:graphicFrame>
+          <p:nvGraphicFramePr>
+            <p:cNvPr id="10" name="Diagram 9">
+              <a:extLst>
+                <a:ext uri="{FF2B5EF4-FFF2-40B4-BE49-F238E27FC236}">
+                  <a16:creationId xmlns:a16="http://schemas.microsoft.com/office/drawing/2014/main" id="{04FFF0D5-86E4-BFB4-A048-E34CF6C0B9DB}"/>
+                </a:ext>
+              </a:extLst>
+            </p:cNvPr>
+            <p:cNvGraphicFramePr/>
+            <p:nvPr>
+              <p:extLst>
+                <p:ext uri="{D42A27DB-BD31-4B8C-83A1-F6EECF244321}">
+                  <p14:modId xmlns:p14="http://schemas.microsoft.com/office/powerpoint/2010/main" val="2692833470"/>
+                </p:ext>
+              </p:extLst>
+            </p:nvPr>
+          </p:nvGraphicFramePr>
+          <p:xfrm>
+            <a:off x="1319719" y="712745"/>
+            <a:ext cx="9261576" cy="5590674"/>
+          </p:xfrm>
+          <a:graphic>
+            <a:graphicData uri="http://schemas.openxmlformats.org/drawingml/2006/diagram">
+              <dgm:relIds xmlns:dgm="http://schemas.openxmlformats.org/drawingml/2006/diagram" xmlns:r="http://schemas.openxmlformats.org/officeDocument/2006/relationships" r:dm="rId2" r:lo="rId3" r:qs="rId4" r:cs="rId5"/>
+            </a:graphicData>
+          </a:graphic>
+        </p:graphicFrame>
+        <p:pic>
+          <p:nvPicPr>
+            <p:cNvPr id="1032" name="Picture 8">
+              <a:extLst>
+                <a:ext uri="{FF2B5EF4-FFF2-40B4-BE49-F238E27FC236}">
+                  <a16:creationId xmlns:a16="http://schemas.microsoft.com/office/drawing/2014/main" id="{DD8C88D5-2ECC-586E-F688-6577B864EA43}"/>
+                </a:ext>
+              </a:extLst>
+            </p:cNvPr>
+            <p:cNvPicPr>
+              <a:picLocks noChangeAspect="1" noChangeArrowheads="1"/>
+            </p:cNvPicPr>
+            <p:nvPr/>
+          </p:nvPicPr>
+          <p:blipFill>
+            <a:blip r:embed="rId7">
+              <a:extLst>
+                <a:ext uri="{28A0092B-C50C-407E-A947-70E740481C1C}">
+                  <a14:useLocalDpi xmlns:a14="http://schemas.microsoft.com/office/drawing/2010/main" val="0"/>
+                </a:ext>
+              </a:extLst>
+            </a:blip>
+            <a:srcRect/>
+            <a:stretch>
+              <a:fillRect/>
+            </a:stretch>
+          </p:blipFill>
+          <p:spPr bwMode="auto">
+            <a:xfrm rot="18752489" flipH="1">
+              <a:off x="5248221" y="2906050"/>
+              <a:ext cx="1322780" cy="1322780"/>
+            </a:xfrm>
+            <a:prstGeom prst="rect">
+              <a:avLst/>
+            </a:prstGeom>
+            <a:noFill/>
+            <a:extLst>
+              <a:ext uri="{909E8E84-426E-40DD-AFC4-6F175D3DCCD1}">
+                <a14:hiddenFill xmlns:a14="http://schemas.microsoft.com/office/drawing/2010/main">
+                  <a:solidFill>
+                    <a:srgbClr val="FFFFFF"/>
+                  </a:solidFill>
+                </a14:hiddenFill>
+              </a:ext>
+            </a:extLst>
+          </p:spPr>
+        </p:pic>
+      </p:grpSp>
+    </p:spTree>
+    <p:extLst>
+      <p:ext uri="{BB962C8B-B14F-4D97-AF65-F5344CB8AC3E}">
+        <p14:creationId xmlns:p14="http://schemas.microsoft.com/office/powerpoint/2010/main" val="348206209"/>
+      </p:ext>
+    </p:extLst>
+  </p:cSld>
+  <p:clrMapOvr>
+    <a:masterClrMapping/>
+  </p:clrMapOvr>
+</p:sld>
+</file>
+
+<file path=ppt/slides/slide7.xml><?xml version="1.0" encoding="utf-8"?>
+<p:sld xmlns:a="http://schemas.openxmlformats.org/drawingml/2006/main" xmlns:r="http://schemas.openxmlformats.org/officeDocument/2006/relationships" xmlns:p="http://schemas.openxmlformats.org/presentationml/2006/main">
+  <p:cSld>
+    <p:spTree>
+      <p:nvGrpSpPr>
+        <p:cNvPr id="1" name="">
+          <a:extLst>
+            <a:ext uri="{FF2B5EF4-FFF2-40B4-BE49-F238E27FC236}">
+              <a16:creationId xmlns:a16="http://schemas.microsoft.com/office/drawing/2014/main" id="{F5237680-1036-FD40-771D-148B51B97DCC}"/>
+            </a:ext>
+          </a:extLst>
+        </p:cNvPr>
+        <p:cNvGrpSpPr/>
+        <p:nvPr/>
+      </p:nvGrpSpPr>
+      <p:grpSpPr>
+        <a:xfrm>
+          <a:off x="0" y="0"/>
+          <a:ext cx="0" cy="0"/>
+          <a:chOff x="0" y="0"/>
+          <a:chExt cx="0" cy="0"/>
+        </a:xfrm>
+      </p:grpSpPr>
+      <p:sp>
+        <p:nvSpPr>
+          <p:cNvPr id="4" name="TextBox 3">
+            <a:extLst>
+              <a:ext uri="{FF2B5EF4-FFF2-40B4-BE49-F238E27FC236}">
+                <a16:creationId xmlns:a16="http://schemas.microsoft.com/office/drawing/2014/main" id="{40D892B3-6ED8-9655-75E1-6A5D6C659248}"/>
+              </a:ext>
+            </a:extLst>
+          </p:cNvPr>
+          <p:cNvSpPr txBox="1"/>
+          <p:nvPr/>
+        </p:nvSpPr>
+        <p:spPr>
+          <a:xfrm>
+            <a:off x="0" y="251080"/>
+            <a:ext cx="11338560" cy="523220"/>
+          </a:xfrm>
+          <a:prstGeom prst="rect">
+            <a:avLst/>
+          </a:prstGeom>
+          <a:noFill/>
+        </p:spPr>
+        <p:txBody>
+          <a:bodyPr wrap="square" rtlCol="0">
+            <a:spAutoFit/>
+          </a:bodyPr>
+          <a:lstStyle/>
+          <a:p>
+            <a:r>
+              <a:rPr lang="en-US" sz="2800" b="1" dirty="0"/>
+              <a:t>Business Process Flow</a:t>
+            </a:r>
+          </a:p>
+        </p:txBody>
+      </p:sp>
+      <p:graphicFrame>
+        <p:nvGraphicFramePr>
+          <p:cNvPr id="9" name="Diagram 8">
+            <a:extLst>
+              <a:ext uri="{FF2B5EF4-FFF2-40B4-BE49-F238E27FC236}">
+                <a16:creationId xmlns:a16="http://schemas.microsoft.com/office/drawing/2014/main" id="{F4A65CC7-2DFA-3E51-4EFD-5E4E7CF17266}"/>
+              </a:ext>
+            </a:extLst>
+          </p:cNvPr>
+          <p:cNvGraphicFramePr/>
+          <p:nvPr>
+            <p:extLst>
+              <p:ext uri="{D42A27DB-BD31-4B8C-83A1-F6EECF244321}">
+                <p14:modId xmlns:p14="http://schemas.microsoft.com/office/powerpoint/2010/main" val="2477348037"/>
+              </p:ext>
+            </p:extLst>
+          </p:nvPr>
+        </p:nvGraphicFramePr>
+        <p:xfrm>
+          <a:off x="170396" y="1877098"/>
+          <a:ext cx="11840049" cy="3454251"/>
+        </p:xfrm>
+        <a:graphic>
+          <a:graphicData uri="http://schemas.openxmlformats.org/drawingml/2006/diagram">
+            <dgm:relIds xmlns:dgm="http://schemas.openxmlformats.org/drawingml/2006/diagram" xmlns:r="http://schemas.openxmlformats.org/officeDocument/2006/relationships" r:dm="rId2" r:lo="rId3" r:qs="rId4" r:cs="rId5"/>
+          </a:graphicData>
+        </a:graphic>
+      </p:graphicFrame>
+    </p:spTree>
+    <p:extLst>
+      <p:ext uri="{BB962C8B-B14F-4D97-AF65-F5344CB8AC3E}">
+        <p14:creationId xmlns:p14="http://schemas.microsoft.com/office/powerpoint/2010/main" val="1785318421"/>
+      </p:ext>
+    </p:extLst>
+  </p:cSld>
+  <p:clrMapOvr>
+    <a:masterClrMapping/>
+  </p:clrMapOvr>
+</p:sld>
+</file>
+
+<file path=ppt/slides/slide8.xml><?xml version="1.0" encoding="utf-8"?>
 <p:sld xmlns:a="http://schemas.openxmlformats.org/drawingml/2006/main" xmlns:r="http://schemas.openxmlformats.org/officeDocument/2006/relationships" xmlns:p="http://schemas.openxmlformats.org/presentationml/2006/main">
   <p:cSld>
     <p:spTree>
@@ -25810,7 +26961,7 @@
             <a:pPr lvl="0"/>
             <a:r>
               <a:rPr lang="en-US" sz="3200" b="1" dirty="0"/>
-              <a:t>Output Template</a:t>
+              <a:t>Sample Output Template</a:t>
             </a:r>
           </a:p>
         </p:txBody>
@@ -25909,6 +27060,72 @@
     <p:extLst>
       <p:ext uri="{BB962C8B-B14F-4D97-AF65-F5344CB8AC3E}">
         <p14:creationId xmlns:p14="http://schemas.microsoft.com/office/powerpoint/2010/main" val="1528255773"/>
+      </p:ext>
+    </p:extLst>
+  </p:cSld>
+  <p:clrMapOvr>
+    <a:masterClrMapping/>
+  </p:clrMapOvr>
+</p:sld>
+</file>
+
+<file path=ppt/slides/slide9.xml><?xml version="1.0" encoding="utf-8"?>
+<p:sld xmlns:a="http://schemas.openxmlformats.org/drawingml/2006/main" xmlns:r="http://schemas.openxmlformats.org/officeDocument/2006/relationships" xmlns:p="http://schemas.openxmlformats.org/presentationml/2006/main">
+  <p:cSld>
+    <p:spTree>
+      <p:nvGrpSpPr>
+        <p:cNvPr id="1" name=""/>
+        <p:cNvGrpSpPr/>
+        <p:nvPr/>
+      </p:nvGrpSpPr>
+      <p:grpSpPr>
+        <a:xfrm>
+          <a:off x="0" y="0"/>
+          <a:ext cx="0" cy="0"/>
+          <a:chOff x="0" y="0"/>
+          <a:chExt cx="0" cy="0"/>
+        </a:xfrm>
+      </p:grpSpPr>
+      <p:sp>
+        <p:nvSpPr>
+          <p:cNvPr id="4" name="TextBox 3">
+            <a:extLst>
+              <a:ext uri="{FF2B5EF4-FFF2-40B4-BE49-F238E27FC236}">
+                <a16:creationId xmlns:a16="http://schemas.microsoft.com/office/drawing/2014/main" id="{79B40E0F-6392-1FE3-D9EB-EFA9D71A09BD}"/>
+              </a:ext>
+            </a:extLst>
+          </p:cNvPr>
+          <p:cNvSpPr txBox="1"/>
+          <p:nvPr/>
+        </p:nvSpPr>
+        <p:spPr>
+          <a:xfrm>
+            <a:off x="108284" y="258498"/>
+            <a:ext cx="11338560" cy="584775"/>
+          </a:xfrm>
+          <a:prstGeom prst="rect">
+            <a:avLst/>
+          </a:prstGeom>
+          <a:noFill/>
+        </p:spPr>
+        <p:txBody>
+          <a:bodyPr wrap="square" rtlCol="0">
+            <a:spAutoFit/>
+          </a:bodyPr>
+          <a:lstStyle/>
+          <a:p>
+            <a:pPr lvl="0"/>
+            <a:r>
+              <a:rPr lang="en-US" sz="3200" b="1" dirty="0"/>
+              <a:t>Sample Output Template</a:t>
+            </a:r>
+          </a:p>
+        </p:txBody>
+      </p:sp>
+    </p:spTree>
+    <p:extLst>
+      <p:ext uri="{BB962C8B-B14F-4D97-AF65-F5344CB8AC3E}">
+        <p14:creationId xmlns:p14="http://schemas.microsoft.com/office/powerpoint/2010/main" val="2192517749"/>
       </p:ext>
     </p:extLst>
   </p:cSld>

--- a/pySEAFOM_updates.pptx
+++ b/pySEAFOM_updates.pptx
@@ -126,7 +126,7 @@
 <file path=ppt/revisionInfo.xml><?xml version="1.0" encoding="utf-8"?>
 <p1510:revInfo xmlns:a="http://schemas.openxmlformats.org/drawingml/2006/main" xmlns:r="http://schemas.openxmlformats.org/officeDocument/2006/relationships" xmlns:p1510="http://schemas.microsoft.com/office/powerpoint/2015/10/main">
   <p1510:revLst>
-    <p1510:client id="{C2F2CB6F-16AD-4657-ABB9-2079F8BF5977}" v="177" dt="2026-02-20T12:43:51.878"/>
+    <p1510:client id="{C2F2CB6F-16AD-4657-ABB9-2079F8BF5977}" v="208" dt="2026-03-21T10:37:32.589"/>
   </p1510:revLst>
 </p1510:revInfo>
 </file>
@@ -214,6 +214,46 @@
     </pc:docChg>
   </pc:docChgLst>
   <pc:docChgLst>
+    <pc:chgData name="Moradi, Peyman" userId="dba91eb0-4a36-42e9-bb56-2c55a234965d" providerId="ADAL" clId="{206DAC3E-7CBD-49A7-B112-27788DC86FDE}"/>
+    <pc:docChg chg="modSld">
+      <pc:chgData name="Moradi, Peyman" userId="dba91eb0-4a36-42e9-bb56-2c55a234965d" providerId="ADAL" clId="{206DAC3E-7CBD-49A7-B112-27788DC86FDE}" dt="2026-03-21T10:37:32.589" v="31" actId="108"/>
+      <pc:docMkLst>
+        <pc:docMk/>
+      </pc:docMkLst>
+      <pc:sldChg chg="modSp mod">
+        <pc:chgData name="Moradi, Peyman" userId="dba91eb0-4a36-42e9-bb56-2c55a234965d" providerId="ADAL" clId="{206DAC3E-7CBD-49A7-B112-27788DC86FDE}" dt="2026-03-21T10:37:32.589" v="31" actId="108"/>
+        <pc:sldMkLst>
+          <pc:docMk/>
+          <pc:sldMk cId="348206209" sldId="259"/>
+        </pc:sldMkLst>
+        <pc:grpChg chg="mod">
+          <ac:chgData name="Moradi, Peyman" userId="dba91eb0-4a36-42e9-bb56-2c55a234965d" providerId="ADAL" clId="{206DAC3E-7CBD-49A7-B112-27788DC86FDE}" dt="2026-03-21T10:36:52.525" v="14" actId="1076"/>
+          <ac:grpSpMkLst>
+            <pc:docMk/>
+            <pc:sldMk cId="348206209" sldId="259"/>
+            <ac:grpSpMk id="3" creationId="{B4216EDE-9EFB-A14A-81F7-A698B9A65E2A}"/>
+          </ac:grpSpMkLst>
+        </pc:grpChg>
+        <pc:graphicFrameChg chg="mod modGraphic">
+          <ac:chgData name="Moradi, Peyman" userId="dba91eb0-4a36-42e9-bb56-2c55a234965d" providerId="ADAL" clId="{206DAC3E-7CBD-49A7-B112-27788DC86FDE}" dt="2026-03-21T10:37:32.589" v="31" actId="108"/>
+          <ac:graphicFrameMkLst>
+            <pc:docMk/>
+            <pc:sldMk cId="348206209" sldId="259"/>
+            <ac:graphicFrameMk id="10" creationId="{04FFF0D5-86E4-BFB4-A048-E34CF6C0B9DB}"/>
+          </ac:graphicFrameMkLst>
+        </pc:graphicFrameChg>
+        <pc:picChg chg="mod">
+          <ac:chgData name="Moradi, Peyman" userId="dba91eb0-4a36-42e9-bb56-2c55a234965d" providerId="ADAL" clId="{206DAC3E-7CBD-49A7-B112-27788DC86FDE}" dt="2026-03-21T10:36:52.525" v="14" actId="1076"/>
+          <ac:picMkLst>
+            <pc:docMk/>
+            <pc:sldMk cId="348206209" sldId="259"/>
+            <ac:picMk id="1032" creationId="{DD8C88D5-2ECC-586E-F688-6577B864EA43}"/>
+          </ac:picMkLst>
+        </pc:picChg>
+      </pc:sldChg>
+    </pc:docChg>
+  </pc:docChgLst>
+  <pc:docChgLst>
     <pc:chgData name="Moradi, Peyman" userId="dba91eb0-4a36-42e9-bb56-2c55a234965d" providerId="ADAL" clId="{C2F2CB6F-16AD-4657-ABB9-2079F8BF5977}"/>
     <pc:docChg chg="undo custSel addSld modSld sldOrd modMainMaster">
       <pc:chgData name="Moradi, Peyman" userId="dba91eb0-4a36-42e9-bb56-2c55a234965d" providerId="ADAL" clId="{C2F2CB6F-16AD-4657-ABB9-2079F8BF5977}" dt="2026-02-20T12:45:22.766" v="333" actId="20577"/>
@@ -241,14 +281,6 @@
           <pc:docMk/>
           <pc:sldMk cId="3609631159" sldId="258"/>
         </pc:sldMkLst>
-        <pc:picChg chg="add mod">
-          <ac:chgData name="Moradi, Peyman" userId="dba91eb0-4a36-42e9-bb56-2c55a234965d" providerId="ADAL" clId="{C2F2CB6F-16AD-4657-ABB9-2079F8BF5977}" dt="2026-02-20T12:30:49.170" v="90"/>
-          <ac:picMkLst>
-            <pc:docMk/>
-            <pc:sldMk cId="3609631159" sldId="258"/>
-            <ac:picMk id="2" creationId="{3DB1111D-0211-AA57-F873-67C51840D33B}"/>
-          </ac:picMkLst>
-        </pc:picChg>
       </pc:sldChg>
       <pc:sldChg chg="addSp delSp modSp mod">
         <pc:chgData name="Moradi, Peyman" userId="dba91eb0-4a36-42e9-bb56-2c55a234965d" providerId="ADAL" clId="{C2F2CB6F-16AD-4657-ABB9-2079F8BF5977}" dt="2026-02-20T12:45:22.766" v="333" actId="20577"/>
@@ -280,14 +312,6 @@
             <ac:grpSpMk id="3" creationId="{B4216EDE-9EFB-A14A-81F7-A698B9A65E2A}"/>
           </ac:grpSpMkLst>
         </pc:grpChg>
-        <pc:graphicFrameChg chg="del">
-          <ac:chgData name="Moradi, Peyman" userId="dba91eb0-4a36-42e9-bb56-2c55a234965d" providerId="ADAL" clId="{C2F2CB6F-16AD-4657-ABB9-2079F8BF5977}" dt="2026-02-20T12:37:42.577" v="211" actId="478"/>
-          <ac:graphicFrameMkLst>
-            <pc:docMk/>
-            <pc:sldMk cId="348206209" sldId="259"/>
-            <ac:graphicFrameMk id="9" creationId="{AC6D72F3-4A60-50F7-4E1A-41769F30B1FC}"/>
-          </ac:graphicFrameMkLst>
-        </pc:graphicFrameChg>
         <pc:graphicFrameChg chg="mod modGraphic">
           <ac:chgData name="Moradi, Peyman" userId="dba91eb0-4a36-42e9-bb56-2c55a234965d" providerId="ADAL" clId="{C2F2CB6F-16AD-4657-ABB9-2079F8BF5977}" dt="2026-02-20T12:37:58.751" v="216" actId="164"/>
           <ac:graphicFrameMkLst>
@@ -296,14 +320,6 @@
             <ac:graphicFrameMk id="10" creationId="{04FFF0D5-86E4-BFB4-A048-E34CF6C0B9DB}"/>
           </ac:graphicFrameMkLst>
         </pc:graphicFrameChg>
-        <pc:picChg chg="add del mod">
-          <ac:chgData name="Moradi, Peyman" userId="dba91eb0-4a36-42e9-bb56-2c55a234965d" providerId="ADAL" clId="{C2F2CB6F-16AD-4657-ABB9-2079F8BF5977}" dt="2026-02-20T12:37:43.243" v="212" actId="478"/>
-          <ac:picMkLst>
-            <pc:docMk/>
-            <pc:sldMk cId="348206209" sldId="259"/>
-            <ac:picMk id="5" creationId="{4F541BD6-DD7D-990B-BC10-2FFD4339654B}"/>
-          </ac:picMkLst>
-        </pc:picChg>
         <pc:picChg chg="mod">
           <ac:chgData name="Moradi, Peyman" userId="dba91eb0-4a36-42e9-bb56-2c55a234965d" providerId="ADAL" clId="{C2F2CB6F-16AD-4657-ABB9-2079F8BF5977}" dt="2026-02-20T12:37:58.751" v="216" actId="164"/>
           <ac:picMkLst>
@@ -404,14 +420,6 @@
             <ac:picMk id="5" creationId="{E30F6090-A84F-85AE-E70C-A9A21187BF9A}"/>
           </ac:picMkLst>
         </pc:picChg>
-        <pc:picChg chg="del mod">
-          <ac:chgData name="Moradi, Peyman" userId="dba91eb0-4a36-42e9-bb56-2c55a234965d" providerId="ADAL" clId="{C2F2CB6F-16AD-4657-ABB9-2079F8BF5977}" dt="2026-02-20T12:34:14.819" v="114" actId="478"/>
-          <ac:picMkLst>
-            <pc:docMk/>
-            <pc:sldMk cId="178843416" sldId="264"/>
-            <ac:picMk id="7" creationId="{06750C7B-352F-E1D2-7698-7F93851933A5}"/>
-          </ac:picMkLst>
-        </pc:picChg>
       </pc:sldChg>
       <pc:sldChg chg="ord">
         <pc:chgData name="Moradi, Peyman" userId="dba91eb0-4a36-42e9-bb56-2c55a234965d" providerId="ADAL" clId="{C2F2CB6F-16AD-4657-ABB9-2079F8BF5977}" dt="2026-02-20T12:43:41.534" v="313"/>
@@ -441,14 +449,6 @@
           <pc:docMk/>
           <pc:sldMk cId="1785318421" sldId="267"/>
         </pc:sldMkLst>
-        <pc:spChg chg="add del">
-          <ac:chgData name="Moradi, Peyman" userId="dba91eb0-4a36-42e9-bb56-2c55a234965d" providerId="ADAL" clId="{C2F2CB6F-16AD-4657-ABB9-2079F8BF5977}" dt="2026-02-20T12:38:55.301" v="233" actId="478"/>
-          <ac:spMkLst>
-            <pc:docMk/>
-            <pc:sldMk cId="1785318421" sldId="267"/>
-            <ac:spMk id="2" creationId="{AA18AC7E-51BC-2890-B748-4ED5CE587E17}"/>
-          </ac:spMkLst>
-        </pc:spChg>
         <pc:spChg chg="mod">
           <ac:chgData name="Moradi, Peyman" userId="dba91eb0-4a36-42e9-bb56-2c55a234965d" providerId="ADAL" clId="{C2F2CB6F-16AD-4657-ABB9-2079F8BF5977}" dt="2026-02-20T12:44:58.328" v="326" actId="403"/>
           <ac:spMkLst>
@@ -465,30 +465,6 @@
             <ac:graphicFrameMk id="9" creationId="{F4A65CC7-2DFA-3E51-4EFD-5E4E7CF17266}"/>
           </ac:graphicFrameMkLst>
         </pc:graphicFrameChg>
-        <pc:graphicFrameChg chg="del">
-          <ac:chgData name="Moradi, Peyman" userId="dba91eb0-4a36-42e9-bb56-2c55a234965d" providerId="ADAL" clId="{C2F2CB6F-16AD-4657-ABB9-2079F8BF5977}" dt="2026-02-20T12:38:03.230" v="217" actId="478"/>
-          <ac:graphicFrameMkLst>
-            <pc:docMk/>
-            <pc:sldMk cId="1785318421" sldId="267"/>
-            <ac:graphicFrameMk id="10" creationId="{40290919-E4E5-C19C-AF5E-E36CB7648FD5}"/>
-          </ac:graphicFrameMkLst>
-        </pc:graphicFrameChg>
-        <pc:picChg chg="add del">
-          <ac:chgData name="Moradi, Peyman" userId="dba91eb0-4a36-42e9-bb56-2c55a234965d" providerId="ADAL" clId="{C2F2CB6F-16AD-4657-ABB9-2079F8BF5977}" dt="2026-02-20T12:40:22.692" v="275" actId="478"/>
-          <ac:picMkLst>
-            <pc:docMk/>
-            <pc:sldMk cId="1785318421" sldId="267"/>
-            <ac:picMk id="5" creationId="{A01A39A7-DDB4-159F-7BC6-6E6613A701DC}"/>
-          </ac:picMkLst>
-        </pc:picChg>
-        <pc:picChg chg="del">
-          <ac:chgData name="Moradi, Peyman" userId="dba91eb0-4a36-42e9-bb56-2c55a234965d" providerId="ADAL" clId="{C2F2CB6F-16AD-4657-ABB9-2079F8BF5977}" dt="2026-02-20T12:38:05.190" v="218" actId="478"/>
-          <ac:picMkLst>
-            <pc:docMk/>
-            <pc:sldMk cId="1785318421" sldId="267"/>
-            <ac:picMk id="1032" creationId="{F5AA8EDC-5700-570A-AA6C-FB6E17CF3858}"/>
-          </ac:picMkLst>
-        </pc:picChg>
       </pc:sldChg>
       <pc:sldChg chg="addSp delSp modSp new mod">
         <pc:chgData name="Moradi, Peyman" userId="dba91eb0-4a36-42e9-bb56-2c55a234965d" providerId="ADAL" clId="{C2F2CB6F-16AD-4657-ABB9-2079F8BF5977}" dt="2026-02-20T12:43:55.950" v="324" actId="478"/>
@@ -496,36 +472,12 @@
           <pc:docMk/>
           <pc:sldMk cId="2192517749" sldId="268"/>
         </pc:sldMkLst>
-        <pc:spChg chg="del mod">
-          <ac:chgData name="Moradi, Peyman" userId="dba91eb0-4a36-42e9-bb56-2c55a234965d" providerId="ADAL" clId="{C2F2CB6F-16AD-4657-ABB9-2079F8BF5977}" dt="2026-02-20T12:43:53.787" v="322" actId="478"/>
-          <ac:spMkLst>
-            <pc:docMk/>
-            <pc:sldMk cId="2192517749" sldId="268"/>
-            <ac:spMk id="2" creationId="{E89043BA-38FD-8AD1-092F-D56136FD1FE2}"/>
-          </ac:spMkLst>
-        </pc:spChg>
-        <pc:spChg chg="del">
-          <ac:chgData name="Moradi, Peyman" userId="dba91eb0-4a36-42e9-bb56-2c55a234965d" providerId="ADAL" clId="{C2F2CB6F-16AD-4657-ABB9-2079F8BF5977}" dt="2026-02-20T12:43:55.347" v="323" actId="478"/>
-          <ac:spMkLst>
-            <pc:docMk/>
-            <pc:sldMk cId="2192517749" sldId="268"/>
-            <ac:spMk id="3" creationId="{2EE4F911-9A81-91D6-CD82-54EDF6A6FF58}"/>
-          </ac:spMkLst>
-        </pc:spChg>
         <pc:spChg chg="add mod">
           <ac:chgData name="Moradi, Peyman" userId="dba91eb0-4a36-42e9-bb56-2c55a234965d" providerId="ADAL" clId="{C2F2CB6F-16AD-4657-ABB9-2079F8BF5977}" dt="2026-02-20T12:43:51.878" v="321"/>
           <ac:spMkLst>
             <pc:docMk/>
             <pc:sldMk cId="2192517749" sldId="268"/>
             <ac:spMk id="4" creationId="{79B40E0F-6392-1FE3-D9EB-EFA9D71A09BD}"/>
-          </ac:spMkLst>
-        </pc:spChg>
-        <pc:spChg chg="add del mod">
-          <ac:chgData name="Moradi, Peyman" userId="dba91eb0-4a36-42e9-bb56-2c55a234965d" providerId="ADAL" clId="{C2F2CB6F-16AD-4657-ABB9-2079F8BF5977}" dt="2026-02-20T12:43:55.950" v="324" actId="478"/>
-          <ac:spMkLst>
-            <pc:docMk/>
-            <pc:sldMk cId="2192517749" sldId="268"/>
-            <ac:spMk id="6" creationId="{E3FD4BDD-95D8-EA5F-1D61-7B3F4A025191}"/>
           </ac:spMkLst>
         </pc:spChg>
       </pc:sldChg>
@@ -549,15 +501,6 @@
               <pc:sldMasterMk cId="4273989651" sldId="2147483648"/>
               <pc:sldLayoutMk cId="3198248103" sldId="2147483650"/>
               <ac:picMk id="7" creationId="{5E0AE5C6-C3A3-4D45-378C-0785B6B731AE}"/>
-            </ac:picMkLst>
-          </pc:picChg>
-          <pc:picChg chg="del">
-            <ac:chgData name="Moradi, Peyman" userId="dba91eb0-4a36-42e9-bb56-2c55a234965d" providerId="ADAL" clId="{C2F2CB6F-16AD-4657-ABB9-2079F8BF5977}" dt="2026-02-20T12:32:05.883" v="101" actId="478"/>
-            <ac:picMkLst>
-              <pc:docMk/>
-              <pc:sldMasterMk cId="4273989651" sldId="2147483648"/>
-              <pc:sldLayoutMk cId="3198248103" sldId="2147483650"/>
-              <ac:picMk id="9" creationId="{E066B403-E53F-84A8-0496-B2EE581A01C4}"/>
             </ac:picMkLst>
           </pc:picChg>
         </pc:sldLayoutChg>
@@ -7433,7 +7376,14 @@
             <a:buNone/>
           </a:pPr>
           <a:r>
-            <a:rPr lang="en-US" sz="1400" b="0" i="0" kern="1200" dirty="0"/>
+            <a:rPr lang="en-US" sz="1800" b="1" i="0" kern="1200" dirty="0">
+              <a:solidFill>
+                <a:prstClr val="white"/>
+              </a:solidFill>
+              <a:latin typeface="Amasis MT Pro Black" panose="020F0502020204030204" pitchFamily="18" charset="0"/>
+              <a:ea typeface="+mn-ea"/>
+              <a:cs typeface="+mn-cs"/>
+            </a:rPr>
             <a:t>✓</a:t>
           </a:r>
           <a:r>
@@ -7488,7 +7438,7 @@
             <a:buAutoNum type="arabicPeriod"/>
           </a:pPr>
           <a:r>
-            <a:rPr lang="en-US" sz="1400" b="1" dirty="0"/>
+            <a:rPr lang="en-US" sz="1400" b="1" kern="1200" dirty="0"/>
             <a:t>Frequency Response </a:t>
           </a:r>
         </a:p>
@@ -7498,10 +7448,16 @@
             <a:buAutoNum type="arabicPeriod"/>
           </a:pPr>
           <a:r>
-            <a:rPr lang="en-US" sz="1400" b="0" i="0" dirty="0"/>
+            <a:rPr lang="en-US" sz="1800" b="1" i="0" kern="1200" dirty="0">
+              <a:solidFill>
+                <a:prstClr val="white"/>
+              </a:solidFill>
+              <a:latin typeface="Amasis MT Pro Black" panose="020F0502020204030204" pitchFamily="18" charset="0"/>
+              <a:ea typeface="+mn-ea"/>
+              <a:cs typeface="+mn-cs"/>
+            </a:rPr>
             <a:t>✓</a:t>
           </a:r>
-          <a:endParaRPr lang="en-US" sz="1400" b="1" dirty="0"/>
         </a:p>
       </dgm:t>
     </dgm:pt>
@@ -7531,22 +7487,55 @@
       <dgm:prSet custT="1"/>
       <dgm:spPr>
         <a:solidFill>
-          <a:schemeClr val="bg2">
-            <a:lumMod val="75000"/>
-          </a:schemeClr>
+          <a:schemeClr val="accent6"/>
         </a:solidFill>
       </dgm:spPr>
       <dgm:t>
         <a:bodyPr/>
         <a:lstStyle/>
         <a:p>
-          <a:pPr>
+          <a:pPr marL="0" lvl="0" algn="ctr" defTabSz="622300">
+            <a:lnSpc>
+              <a:spcPct val="90000"/>
+            </a:lnSpc>
+            <a:spcBef>
+              <a:spcPct val="0"/>
+            </a:spcBef>
+            <a:spcAft>
+              <a:spcPct val="35000"/>
+            </a:spcAft>
             <a:buFont typeface="+mj-lt"/>
             <a:buAutoNum type="arabicPeriod"/>
           </a:pPr>
           <a:r>
-            <a:rPr lang="en-US" sz="1400" b="1" dirty="0"/>
+            <a:rPr lang="en-US" sz="1400" b="1" kern="1200" dirty="0"/>
             <a:t>Spatial Resolution </a:t>
+          </a:r>
+        </a:p>
+        <a:p>
+          <a:pPr marL="0" lvl="0" algn="ctr" defTabSz="622300">
+            <a:lnSpc>
+              <a:spcPct val="90000"/>
+            </a:lnSpc>
+            <a:spcBef>
+              <a:spcPct val="0"/>
+            </a:spcBef>
+            <a:spcAft>
+              <a:spcPct val="35000"/>
+            </a:spcAft>
+            <a:buFont typeface="+mj-lt"/>
+            <a:buNone/>
+          </a:pPr>
+          <a:r>
+            <a:rPr lang="en-US" sz="1800" b="1" i="0" kern="1200" dirty="0">
+              <a:solidFill>
+                <a:prstClr val="white"/>
+              </a:solidFill>
+              <a:latin typeface="Amasis MT Pro Black" panose="020F0502020204030204" pitchFamily="18" charset="0"/>
+              <a:ea typeface="+mn-ea"/>
+              <a:cs typeface="+mn-cs"/>
+            </a:rPr>
+            <a:t>✓</a:t>
           </a:r>
         </a:p>
       </dgm:t>
@@ -7593,10 +7582,14 @@
             <a:t>Self Noise </a:t>
           </a:r>
           <a:r>
-            <a:rPr lang="en-US" sz="1400" b="0" i="0" dirty="0"/>
+            <a:rPr lang="en-US" sz="1800" b="1" i="0" dirty="0">
+              <a:latin typeface="Amasis MT Pro Black" panose="020F0502020204030204" pitchFamily="18" charset="0"/>
+            </a:rPr>
             <a:t>✓</a:t>
           </a:r>
-          <a:endParaRPr lang="en-US" sz="1400" b="1" dirty="0"/>
+          <a:endParaRPr lang="en-US" sz="1400" b="1" dirty="0">
+            <a:latin typeface="Amasis MT Pro Black" panose="020F0502020204030204" pitchFamily="18" charset="0"/>
+          </a:endParaRPr>
         </a:p>
       </dgm:t>
     </dgm:pt>
@@ -7638,7 +7631,7 @@
             <a:buAutoNum type="arabicPeriod"/>
           </a:pPr>
           <a:r>
-            <a:rPr lang="en-US" sz="1400" b="1" dirty="0"/>
+            <a:rPr lang="en-US" sz="1400" b="1" kern="1200" dirty="0"/>
             <a:t>Loss Budget</a:t>
           </a:r>
         </a:p>
@@ -7648,11 +7641,18 @@
             <a:buAutoNum type="arabicPeriod"/>
           </a:pPr>
           <a:r>
-            <a:rPr lang="en-US" sz="1400" b="0" i="0" dirty="0"/>
+            <a:rPr lang="en-US" sz="1800" b="1" i="0" kern="1200" dirty="0">
+              <a:solidFill>
+                <a:prstClr val="white"/>
+              </a:solidFill>
+              <a:latin typeface="Amasis MT Pro Black" panose="020F0502020204030204" pitchFamily="18" charset="0"/>
+              <a:ea typeface="+mn-ea"/>
+              <a:cs typeface="+mn-cs"/>
+            </a:rPr>
             <a:t>✓</a:t>
           </a:r>
           <a:r>
-            <a:rPr lang="en-US" sz="1400" b="1" dirty="0"/>
+            <a:rPr lang="en-US" sz="1400" b="1" kern="1200" dirty="0"/>
             <a:t> </a:t>
           </a:r>
         </a:p>
@@ -7744,17 +7744,16 @@
             <a:buNone/>
           </a:pPr>
           <a:r>
-            <a:rPr lang="en-US" sz="1400" b="0" i="0" kern="1200" dirty="0"/>
+            <a:rPr lang="en-US" sz="1800" b="1" i="0" kern="1200" dirty="0">
+              <a:solidFill>
+                <a:prstClr val="white"/>
+              </a:solidFill>
+              <a:latin typeface="Amasis MT Pro Black" panose="020F0502020204030204" pitchFamily="18" charset="0"/>
+              <a:ea typeface="+mn-ea"/>
+              <a:cs typeface="+mn-cs"/>
+            </a:rPr>
             <a:t>✓</a:t>
           </a:r>
-          <a:endParaRPr lang="en-US" sz="1400" b="1" kern="1200" dirty="0">
-            <a:solidFill>
-              <a:prstClr val="white"/>
-            </a:solidFill>
-            <a:latin typeface="Aptos" panose="02110004020202020204"/>
-            <a:ea typeface="+mn-ea"/>
-            <a:cs typeface="+mn-cs"/>
-          </a:endParaRPr>
         </a:p>
       </dgm:t>
     </dgm:pt>
@@ -7844,7 +7843,14 @@
             <a:buNone/>
           </a:pPr>
           <a:r>
-            <a:rPr lang="en-US" sz="1400" b="0" i="0" kern="1200" dirty="0"/>
+            <a:rPr lang="en-US" sz="1800" b="1" i="0" kern="1200" dirty="0">
+              <a:solidFill>
+                <a:prstClr val="white"/>
+              </a:solidFill>
+              <a:latin typeface="Amasis MT Pro Black" panose="020F0502020204030204" pitchFamily="18" charset="0"/>
+              <a:ea typeface="+mn-ea"/>
+              <a:cs typeface="+mn-cs"/>
+            </a:rPr>
             <a:t>✓</a:t>
           </a:r>
           <a:r>
@@ -7883,6 +7889,52 @@
         </a:p>
       </dgm:t>
     </dgm:pt>
+    <dgm:pt modelId="{2BA55374-8309-4101-9186-84CA35B46176}">
+      <dgm:prSet custT="1"/>
+      <dgm:spPr>
+        <a:solidFill>
+          <a:schemeClr val="bg1">
+            <a:lumMod val="75000"/>
+          </a:schemeClr>
+        </a:solidFill>
+      </dgm:spPr>
+      <dgm:t>
+        <a:bodyPr/>
+        <a:lstStyle/>
+        <a:p>
+          <a:pPr>
+            <a:buFont typeface="+mj-lt"/>
+            <a:buAutoNum type="arabicPeriod"/>
+          </a:pPr>
+          <a:r>
+            <a:rPr lang="en-US" sz="1400" b="1" dirty="0"/>
+            <a:t>LF DAS</a:t>
+          </a:r>
+        </a:p>
+      </dgm:t>
+    </dgm:pt>
+    <dgm:pt modelId="{F5351BC1-5585-42AC-9E6D-29B5692B7929}" type="parTrans" cxnId="{6DA93C85-6D09-4D15-BC53-09364F5B02C5}">
+      <dgm:prSet/>
+      <dgm:spPr/>
+      <dgm:t>
+        <a:bodyPr/>
+        <a:lstStyle/>
+        <a:p>
+          <a:endParaRPr lang="en-US"/>
+        </a:p>
+      </dgm:t>
+    </dgm:pt>
+    <dgm:pt modelId="{1045FAEF-CEDA-44F5-B7FB-2C70DC6F865A}" type="sibTrans" cxnId="{6DA93C85-6D09-4D15-BC53-09364F5B02C5}">
+      <dgm:prSet/>
+      <dgm:spPr/>
+      <dgm:t>
+        <a:bodyPr/>
+        <a:lstStyle/>
+        <a:p>
+          <a:endParaRPr lang="en-US"/>
+        </a:p>
+      </dgm:t>
+    </dgm:pt>
     <dgm:pt modelId="{B282CD55-80AA-4736-94EB-595F4BA0CA63}" type="pres">
       <dgm:prSet presAssocID="{5CB66685-683C-4DF0-8AB4-3FD46DD78B5A}" presName="cycle" presStyleCnt="0">
         <dgm:presLayoutVars>
@@ -7899,15 +7951,15 @@
       <dgm:spPr/>
     </dgm:pt>
     <dgm:pt modelId="{A5500CA8-E1AC-4EA2-84FF-778CCAFF54E5}" type="pres">
-      <dgm:prSet presAssocID="{56529125-8434-4C93-921F-7E52EBD6AC44}" presName="Name9" presStyleLbl="parChTrans1D2" presStyleIdx="0" presStyleCnt="7"/>
+      <dgm:prSet presAssocID="{56529125-8434-4C93-921F-7E52EBD6AC44}" presName="Name9" presStyleLbl="parChTrans1D2" presStyleIdx="0" presStyleCnt="8"/>
       <dgm:spPr/>
     </dgm:pt>
     <dgm:pt modelId="{52197289-1EFF-4DFD-8359-D848E03FF289}" type="pres">
-      <dgm:prSet presAssocID="{56529125-8434-4C93-921F-7E52EBD6AC44}" presName="connTx" presStyleLbl="parChTrans1D2" presStyleIdx="0" presStyleCnt="7"/>
+      <dgm:prSet presAssocID="{56529125-8434-4C93-921F-7E52EBD6AC44}" presName="connTx" presStyleLbl="parChTrans1D2" presStyleIdx="0" presStyleCnt="8"/>
       <dgm:spPr/>
     </dgm:pt>
     <dgm:pt modelId="{D641129D-BF39-4F22-BF56-9E2A62EAEF7C}" type="pres">
-      <dgm:prSet presAssocID="{F11269FF-AE4B-4E34-AD0E-37A12D1B3070}" presName="node" presStyleLbl="node1" presStyleIdx="0" presStyleCnt="7">
+      <dgm:prSet presAssocID="{F11269FF-AE4B-4E34-AD0E-37A12D1B3070}" presName="node" presStyleLbl="node1" presStyleIdx="0" presStyleCnt="8">
         <dgm:presLayoutVars>
           <dgm:bulletEnabled val="1"/>
         </dgm:presLayoutVars>
@@ -7915,15 +7967,15 @@
       <dgm:spPr/>
     </dgm:pt>
     <dgm:pt modelId="{60E69F3E-8134-4538-A3EF-3F6FEA683E0F}" type="pres">
-      <dgm:prSet presAssocID="{AC75B354-EAB7-44F9-A1F5-C819F398FE79}" presName="Name9" presStyleLbl="parChTrans1D2" presStyleIdx="1" presStyleCnt="7"/>
+      <dgm:prSet presAssocID="{AC75B354-EAB7-44F9-A1F5-C819F398FE79}" presName="Name9" presStyleLbl="parChTrans1D2" presStyleIdx="1" presStyleCnt="8"/>
       <dgm:spPr/>
     </dgm:pt>
     <dgm:pt modelId="{6E93971E-9A9F-4D69-AA4E-0592A2D29FE4}" type="pres">
-      <dgm:prSet presAssocID="{AC75B354-EAB7-44F9-A1F5-C819F398FE79}" presName="connTx" presStyleLbl="parChTrans1D2" presStyleIdx="1" presStyleCnt="7"/>
+      <dgm:prSet presAssocID="{AC75B354-EAB7-44F9-A1F5-C819F398FE79}" presName="connTx" presStyleLbl="parChTrans1D2" presStyleIdx="1" presStyleCnt="8"/>
       <dgm:spPr/>
     </dgm:pt>
     <dgm:pt modelId="{C29E633D-FDB3-4A03-AF0D-B36013E3D45B}" type="pres">
-      <dgm:prSet presAssocID="{9276693D-18BD-4E6A-98A8-CD3AC8A0169F}" presName="node" presStyleLbl="node1" presStyleIdx="1" presStyleCnt="7">
+      <dgm:prSet presAssocID="{9276693D-18BD-4E6A-98A8-CD3AC8A0169F}" presName="node" presStyleLbl="node1" presStyleIdx="1" presStyleCnt="8">
         <dgm:presLayoutVars>
           <dgm:bulletEnabled val="1"/>
         </dgm:presLayoutVars>
@@ -7931,15 +7983,15 @@
       <dgm:spPr/>
     </dgm:pt>
     <dgm:pt modelId="{3C3F841D-B84E-439D-A70D-DACE222F23B4}" type="pres">
-      <dgm:prSet presAssocID="{4251F846-A5D6-4502-A172-7C452AF5EACD}" presName="Name9" presStyleLbl="parChTrans1D2" presStyleIdx="2" presStyleCnt="7"/>
+      <dgm:prSet presAssocID="{4251F846-A5D6-4502-A172-7C452AF5EACD}" presName="Name9" presStyleLbl="parChTrans1D2" presStyleIdx="2" presStyleCnt="8"/>
       <dgm:spPr/>
     </dgm:pt>
     <dgm:pt modelId="{406C70AC-63CB-46A2-A134-1D284C5603F3}" type="pres">
-      <dgm:prSet presAssocID="{4251F846-A5D6-4502-A172-7C452AF5EACD}" presName="connTx" presStyleLbl="parChTrans1D2" presStyleIdx="2" presStyleCnt="7"/>
+      <dgm:prSet presAssocID="{4251F846-A5D6-4502-A172-7C452AF5EACD}" presName="connTx" presStyleLbl="parChTrans1D2" presStyleIdx="2" presStyleCnt="8"/>
       <dgm:spPr/>
     </dgm:pt>
     <dgm:pt modelId="{CB79E053-F38E-4A67-BA83-A4800638DD26}" type="pres">
-      <dgm:prSet presAssocID="{D169CF8C-37F4-4D3C-B839-17BE92F2A6E9}" presName="node" presStyleLbl="node1" presStyleIdx="2" presStyleCnt="7">
+      <dgm:prSet presAssocID="{D169CF8C-37F4-4D3C-B839-17BE92F2A6E9}" presName="node" presStyleLbl="node1" presStyleIdx="2" presStyleCnt="8">
         <dgm:presLayoutVars>
           <dgm:bulletEnabled val="1"/>
         </dgm:presLayoutVars>
@@ -7955,15 +8007,15 @@
       </dgm:spPr>
     </dgm:pt>
     <dgm:pt modelId="{21F3E271-E659-4F2A-B5D3-98DDE2FF03DA}" type="pres">
-      <dgm:prSet presAssocID="{50EF01FF-9F4A-44BE-AF75-01ADE32A4BD1}" presName="Name9" presStyleLbl="parChTrans1D2" presStyleIdx="3" presStyleCnt="7"/>
+      <dgm:prSet presAssocID="{50EF01FF-9F4A-44BE-AF75-01ADE32A4BD1}" presName="Name9" presStyleLbl="parChTrans1D2" presStyleIdx="3" presStyleCnt="8"/>
       <dgm:spPr/>
     </dgm:pt>
     <dgm:pt modelId="{AA77F63E-918B-4155-9BFC-21717E1E4A68}" type="pres">
-      <dgm:prSet presAssocID="{50EF01FF-9F4A-44BE-AF75-01ADE32A4BD1}" presName="connTx" presStyleLbl="parChTrans1D2" presStyleIdx="3" presStyleCnt="7"/>
+      <dgm:prSet presAssocID="{50EF01FF-9F4A-44BE-AF75-01ADE32A4BD1}" presName="connTx" presStyleLbl="parChTrans1D2" presStyleIdx="3" presStyleCnt="8"/>
       <dgm:spPr/>
     </dgm:pt>
     <dgm:pt modelId="{381951C3-DC69-4329-A787-F6F20281D3F6}" type="pres">
-      <dgm:prSet presAssocID="{0AAC9302-6561-4DEF-82F8-2F08F6FCB9E7}" presName="node" presStyleLbl="node1" presStyleIdx="3" presStyleCnt="7">
+      <dgm:prSet presAssocID="{0AAC9302-6561-4DEF-82F8-2F08F6FCB9E7}" presName="node" presStyleLbl="node1" presStyleIdx="3" presStyleCnt="8">
         <dgm:presLayoutVars>
           <dgm:bulletEnabled val="1"/>
         </dgm:presLayoutVars>
@@ -7979,15 +8031,15 @@
       </dgm:spPr>
     </dgm:pt>
     <dgm:pt modelId="{97AB2DA7-3196-4812-85DB-C0730E66FABE}" type="pres">
-      <dgm:prSet presAssocID="{289487A0-EA96-456F-9739-128913BC60F7}" presName="Name9" presStyleLbl="parChTrans1D2" presStyleIdx="4" presStyleCnt="7"/>
+      <dgm:prSet presAssocID="{289487A0-EA96-456F-9739-128913BC60F7}" presName="Name9" presStyleLbl="parChTrans1D2" presStyleIdx="4" presStyleCnt="8"/>
       <dgm:spPr/>
     </dgm:pt>
     <dgm:pt modelId="{F5FCA264-2A39-4DAD-9B2A-A854A053E783}" type="pres">
-      <dgm:prSet presAssocID="{289487A0-EA96-456F-9739-128913BC60F7}" presName="connTx" presStyleLbl="parChTrans1D2" presStyleIdx="4" presStyleCnt="7"/>
+      <dgm:prSet presAssocID="{289487A0-EA96-456F-9739-128913BC60F7}" presName="connTx" presStyleLbl="parChTrans1D2" presStyleIdx="4" presStyleCnt="8"/>
       <dgm:spPr/>
     </dgm:pt>
     <dgm:pt modelId="{13F65213-867A-4369-9543-F3799FB5E0F8}" type="pres">
-      <dgm:prSet presAssocID="{5F80989D-4BBF-474F-AA54-878ABB0C0F60}" presName="node" presStyleLbl="node1" presStyleIdx="4" presStyleCnt="7">
+      <dgm:prSet presAssocID="{5F80989D-4BBF-474F-AA54-878ABB0C0F60}" presName="node" presStyleLbl="node1" presStyleIdx="4" presStyleCnt="8">
         <dgm:presLayoutVars>
           <dgm:bulletEnabled val="1"/>
         </dgm:presLayoutVars>
@@ -8003,15 +8055,15 @@
       </dgm:spPr>
     </dgm:pt>
     <dgm:pt modelId="{18CBF4D6-765C-4365-B23D-911EEF96DF4B}" type="pres">
-      <dgm:prSet presAssocID="{7E89B98A-1A8B-490B-9141-C5866B0A59E6}" presName="Name9" presStyleLbl="parChTrans1D2" presStyleIdx="5" presStyleCnt="7"/>
+      <dgm:prSet presAssocID="{7E89B98A-1A8B-490B-9141-C5866B0A59E6}" presName="Name9" presStyleLbl="parChTrans1D2" presStyleIdx="5" presStyleCnt="8"/>
       <dgm:spPr/>
     </dgm:pt>
     <dgm:pt modelId="{DCA37DC1-8E0B-4D17-87B9-4DD7390141DB}" type="pres">
-      <dgm:prSet presAssocID="{7E89B98A-1A8B-490B-9141-C5866B0A59E6}" presName="connTx" presStyleLbl="parChTrans1D2" presStyleIdx="5" presStyleCnt="7"/>
+      <dgm:prSet presAssocID="{7E89B98A-1A8B-490B-9141-C5866B0A59E6}" presName="connTx" presStyleLbl="parChTrans1D2" presStyleIdx="5" presStyleCnt="8"/>
       <dgm:spPr/>
     </dgm:pt>
     <dgm:pt modelId="{8726FD26-0446-4A34-A789-F609EFF6B576}" type="pres">
-      <dgm:prSet presAssocID="{EA1DB194-0418-4CBC-A71D-38D26681E52F}" presName="node" presStyleLbl="node1" presStyleIdx="5" presStyleCnt="7">
+      <dgm:prSet presAssocID="{EA1DB194-0418-4CBC-A71D-38D26681E52F}" presName="node" presStyleLbl="node1" presStyleIdx="5" presStyleCnt="8">
         <dgm:presLayoutVars>
           <dgm:bulletEnabled val="1"/>
         </dgm:presLayoutVars>
@@ -8019,15 +8071,31 @@
       <dgm:spPr/>
     </dgm:pt>
     <dgm:pt modelId="{0B890D38-9A63-42F6-B391-F93CB128C0AE}" type="pres">
-      <dgm:prSet presAssocID="{D0949D85-B545-4504-A7DC-E57327AD8B4D}" presName="Name9" presStyleLbl="parChTrans1D2" presStyleIdx="6" presStyleCnt="7"/>
+      <dgm:prSet presAssocID="{D0949D85-B545-4504-A7DC-E57327AD8B4D}" presName="Name9" presStyleLbl="parChTrans1D2" presStyleIdx="6" presStyleCnt="8"/>
       <dgm:spPr/>
     </dgm:pt>
     <dgm:pt modelId="{D5893B7E-6692-4C02-8564-ECC24D44F21B}" type="pres">
-      <dgm:prSet presAssocID="{D0949D85-B545-4504-A7DC-E57327AD8B4D}" presName="connTx" presStyleLbl="parChTrans1D2" presStyleIdx="6" presStyleCnt="7"/>
+      <dgm:prSet presAssocID="{D0949D85-B545-4504-A7DC-E57327AD8B4D}" presName="connTx" presStyleLbl="parChTrans1D2" presStyleIdx="6" presStyleCnt="8"/>
       <dgm:spPr/>
     </dgm:pt>
     <dgm:pt modelId="{01EEE674-D7A4-44BB-95E6-EEE4B45DB353}" type="pres">
-      <dgm:prSet presAssocID="{5AE3CAE3-FE28-43AE-BE4A-8BCBE734CEE7}" presName="node" presStyleLbl="node1" presStyleIdx="6" presStyleCnt="7">
+      <dgm:prSet presAssocID="{5AE3CAE3-FE28-43AE-BE4A-8BCBE734CEE7}" presName="node" presStyleLbl="node1" presStyleIdx="6" presStyleCnt="8">
+        <dgm:presLayoutVars>
+          <dgm:bulletEnabled val="1"/>
+        </dgm:presLayoutVars>
+      </dgm:prSet>
+      <dgm:spPr/>
+    </dgm:pt>
+    <dgm:pt modelId="{3B9E1353-2632-4497-81E7-C879A35F94AC}" type="pres">
+      <dgm:prSet presAssocID="{F5351BC1-5585-42AC-9E6D-29B5692B7929}" presName="Name9" presStyleLbl="parChTrans1D2" presStyleIdx="7" presStyleCnt="8"/>
+      <dgm:spPr/>
+    </dgm:pt>
+    <dgm:pt modelId="{66CAC345-B6CA-4B31-8EC6-C36D08782BE2}" type="pres">
+      <dgm:prSet presAssocID="{F5351BC1-5585-42AC-9E6D-29B5692B7929}" presName="connTx" presStyleLbl="parChTrans1D2" presStyleIdx="7" presStyleCnt="8"/>
+      <dgm:spPr/>
+    </dgm:pt>
+    <dgm:pt modelId="{53DB598F-3538-45FC-A34A-6E2175D70F64}" type="pres">
+      <dgm:prSet presAssocID="{2BA55374-8309-4101-9186-84CA35B46176}" presName="node" presStyleLbl="node1" presStyleIdx="7" presStyleCnt="8">
         <dgm:presLayoutVars>
           <dgm:bulletEnabled val="1"/>
         </dgm:presLayoutVars>
@@ -8039,6 +8107,7 @@
     <dgm:cxn modelId="{67062F00-1056-4E6B-939E-9E6A12216FDE}" srcId="{A0F00485-747B-48A5-BA46-8B953C12D208}" destId="{EA1DB194-0418-4CBC-A71D-38D26681E52F}" srcOrd="5" destOrd="0" parTransId="{7E89B98A-1A8B-490B-9141-C5866B0A59E6}" sibTransId="{C52DFD15-2C78-4952-8E58-95640A80D599}"/>
     <dgm:cxn modelId="{74F7F50C-38EC-412C-85A8-66ADD63F9E8A}" type="presOf" srcId="{D0949D85-B545-4504-A7DC-E57327AD8B4D}" destId="{0B890D38-9A63-42F6-B391-F93CB128C0AE}" srcOrd="0" destOrd="0" presId="urn:microsoft.com/office/officeart/2005/8/layout/radial1"/>
     <dgm:cxn modelId="{137A1327-7C1B-4AA9-8F9D-0DE11448C333}" type="presOf" srcId="{AC75B354-EAB7-44F9-A1F5-C819F398FE79}" destId="{6E93971E-9A9F-4D69-AA4E-0592A2D29FE4}" srcOrd="1" destOrd="0" presId="urn:microsoft.com/office/officeart/2005/8/layout/radial1"/>
+    <dgm:cxn modelId="{792ECF31-F916-4AAB-B53F-A4ED05A5EA3D}" type="presOf" srcId="{F5351BC1-5585-42AC-9E6D-29B5692B7929}" destId="{3B9E1353-2632-4497-81E7-C879A35F94AC}" srcOrd="0" destOrd="0" presId="urn:microsoft.com/office/officeart/2005/8/layout/radial1"/>
     <dgm:cxn modelId="{0843ED3A-166A-4CE4-9E2E-8FAA1974E4F7}" type="presOf" srcId="{9276693D-18BD-4E6A-98A8-CD3AC8A0169F}" destId="{C29E633D-FDB3-4A03-AF0D-B36013E3D45B}" srcOrd="0" destOrd="0" presId="urn:microsoft.com/office/officeart/2005/8/layout/radial1"/>
     <dgm:cxn modelId="{AF535C3B-733F-49F3-9E7F-F0A993ABA9AF}" srcId="{A0F00485-747B-48A5-BA46-8B953C12D208}" destId="{5F80989D-4BBF-474F-AA54-878ABB0C0F60}" srcOrd="4" destOrd="0" parTransId="{289487A0-EA96-456F-9739-128913BC60F7}" sibTransId="{4F740DBB-0ACE-4807-A96E-0F8FFB9F6FBF}"/>
     <dgm:cxn modelId="{F731FB3C-EB1A-437B-9B7E-04D5C44CC693}" type="presOf" srcId="{D0949D85-B545-4504-A7DC-E57327AD8B4D}" destId="{D5893B7E-6692-4C02-8564-ECC24D44F21B}" srcOrd="1" destOrd="0" presId="urn:microsoft.com/office/officeart/2005/8/layout/radial1"/>
@@ -8051,6 +8120,7 @@
     <dgm:cxn modelId="{E9205B4C-9F25-4180-89CB-69626C198506}" srcId="{A0F00485-747B-48A5-BA46-8B953C12D208}" destId="{F11269FF-AE4B-4E34-AD0E-37A12D1B3070}" srcOrd="0" destOrd="0" parTransId="{56529125-8434-4C93-921F-7E52EBD6AC44}" sibTransId="{EE5B9790-9664-4327-8F15-126ECF32512B}"/>
     <dgm:cxn modelId="{7E2B6371-6A06-4A0D-9E22-7DC13CFFDA28}" srcId="{A0F00485-747B-48A5-BA46-8B953C12D208}" destId="{D169CF8C-37F4-4D3C-B839-17BE92F2A6E9}" srcOrd="2" destOrd="0" parTransId="{4251F846-A5D6-4502-A172-7C452AF5EACD}" sibTransId="{CDC99734-453B-4ABC-AD9A-3B662D24AEE7}"/>
     <dgm:cxn modelId="{54099F74-5011-4E65-ADE7-8C1CD012BB18}" type="presOf" srcId="{289487A0-EA96-456F-9739-128913BC60F7}" destId="{F5FCA264-2A39-4DAD-9B2A-A854A053E783}" srcOrd="1" destOrd="0" presId="urn:microsoft.com/office/officeart/2005/8/layout/radial1"/>
+    <dgm:cxn modelId="{6DA93C85-6D09-4D15-BC53-09364F5B02C5}" srcId="{A0F00485-747B-48A5-BA46-8B953C12D208}" destId="{2BA55374-8309-4101-9186-84CA35B46176}" srcOrd="7" destOrd="0" parTransId="{F5351BC1-5585-42AC-9E6D-29B5692B7929}" sibTransId="{1045FAEF-CEDA-44F5-B7FB-2C70DC6F865A}"/>
     <dgm:cxn modelId="{4B4DE486-5150-4F19-B654-6B145458E1F0}" type="presOf" srcId="{7E89B98A-1A8B-490B-9141-C5866B0A59E6}" destId="{DCA37DC1-8E0B-4D17-87B9-4DD7390141DB}" srcOrd="1" destOrd="0" presId="urn:microsoft.com/office/officeart/2005/8/layout/radial1"/>
     <dgm:cxn modelId="{DDF88F87-0A6A-4C92-8F08-007063158EB6}" type="presOf" srcId="{5CB66685-683C-4DF0-8AB4-3FD46DD78B5A}" destId="{B282CD55-80AA-4736-94EB-595F4BA0CA63}" srcOrd="0" destOrd="0" presId="urn:microsoft.com/office/officeart/2005/8/layout/radial1"/>
     <dgm:cxn modelId="{F8759987-C014-4D4B-AE6A-8D206C44EA2A}" srcId="{5CB66685-683C-4DF0-8AB4-3FD46DD78B5A}" destId="{A0F00485-747B-48A5-BA46-8B953C12D208}" srcOrd="0" destOrd="0" parTransId="{278E96FD-817D-427D-9B8C-A14E379A75EA}" sibTransId="{B9792CD5-E8CC-48BE-9FC9-AB4A934C8308}"/>
@@ -8059,6 +8129,8 @@
     <dgm:cxn modelId="{17602798-90A6-40FA-80F7-321490EFA96E}" type="presOf" srcId="{4251F846-A5D6-4502-A172-7C452AF5EACD}" destId="{406C70AC-63CB-46A2-A134-1D284C5603F3}" srcOrd="1" destOrd="0" presId="urn:microsoft.com/office/officeart/2005/8/layout/radial1"/>
     <dgm:cxn modelId="{F239029C-BB44-4051-8662-62A1C24B64F9}" type="presOf" srcId="{4251F846-A5D6-4502-A172-7C452AF5EACD}" destId="{3C3F841D-B84E-439D-A70D-DACE222F23B4}" srcOrd="0" destOrd="0" presId="urn:microsoft.com/office/officeart/2005/8/layout/radial1"/>
     <dgm:cxn modelId="{65C4ADA4-6453-4ED0-A99C-2DBF73167821}" type="presOf" srcId="{50EF01FF-9F4A-44BE-AF75-01ADE32A4BD1}" destId="{21F3E271-E659-4F2A-B5D3-98DDE2FF03DA}" srcOrd="0" destOrd="0" presId="urn:microsoft.com/office/officeart/2005/8/layout/radial1"/>
+    <dgm:cxn modelId="{4BDF40AC-115C-4AC8-B3F9-65939DAAA2C8}" type="presOf" srcId="{2BA55374-8309-4101-9186-84CA35B46176}" destId="{53DB598F-3538-45FC-A34A-6E2175D70F64}" srcOrd="0" destOrd="0" presId="urn:microsoft.com/office/officeart/2005/8/layout/radial1"/>
+    <dgm:cxn modelId="{79A316B5-329D-483B-A121-F0DE4A73B765}" type="presOf" srcId="{F5351BC1-5585-42AC-9E6D-29B5692B7929}" destId="{66CAC345-B6CA-4B31-8EC6-C36D08782BE2}" srcOrd="1" destOrd="0" presId="urn:microsoft.com/office/officeart/2005/8/layout/radial1"/>
     <dgm:cxn modelId="{7980C2BA-4385-4229-8C4C-7BFA3EC484C4}" type="presOf" srcId="{5AE3CAE3-FE28-43AE-BE4A-8BCBE734CEE7}" destId="{01EEE674-D7A4-44BB-95E6-EEE4B45DB353}" srcOrd="0" destOrd="0" presId="urn:microsoft.com/office/officeart/2005/8/layout/radial1"/>
     <dgm:cxn modelId="{B6B4E5BD-CB8F-477C-BC8E-D303EC1BFED8}" type="presOf" srcId="{50EF01FF-9F4A-44BE-AF75-01ADE32A4BD1}" destId="{AA77F63E-918B-4155-9BFC-21717E1E4A68}" srcOrd="1" destOrd="0" presId="urn:microsoft.com/office/officeart/2005/8/layout/radial1"/>
     <dgm:cxn modelId="{ACB607CB-1027-46B0-B941-9D6C782BBBC4}" srcId="{A0F00485-747B-48A5-BA46-8B953C12D208}" destId="{0AAC9302-6561-4DEF-82F8-2F08F6FCB9E7}" srcOrd="3" destOrd="0" parTransId="{50EF01FF-9F4A-44BE-AF75-01ADE32A4BD1}" sibTransId="{04F11AFB-DBAA-4145-A497-078B1B896D4E}"/>
@@ -8089,6 +8161,9 @@
     <dgm:cxn modelId="{DEC1566C-FCF0-4668-9E34-65DEF5ABC027}" type="presParOf" srcId="{B282CD55-80AA-4736-94EB-595F4BA0CA63}" destId="{0B890D38-9A63-42F6-B391-F93CB128C0AE}" srcOrd="13" destOrd="0" presId="urn:microsoft.com/office/officeart/2005/8/layout/radial1"/>
     <dgm:cxn modelId="{666DA491-ED13-4981-8288-41E4A9880B50}" type="presParOf" srcId="{0B890D38-9A63-42F6-B391-F93CB128C0AE}" destId="{D5893B7E-6692-4C02-8564-ECC24D44F21B}" srcOrd="0" destOrd="0" presId="urn:microsoft.com/office/officeart/2005/8/layout/radial1"/>
     <dgm:cxn modelId="{9ED3238D-57A7-42B2-B37A-7CD20883CE24}" type="presParOf" srcId="{B282CD55-80AA-4736-94EB-595F4BA0CA63}" destId="{01EEE674-D7A4-44BB-95E6-EEE4B45DB353}" srcOrd="14" destOrd="0" presId="urn:microsoft.com/office/officeart/2005/8/layout/radial1"/>
+    <dgm:cxn modelId="{F75728D6-082D-4774-9AB7-39A6D656ACDB}" type="presParOf" srcId="{B282CD55-80AA-4736-94EB-595F4BA0CA63}" destId="{3B9E1353-2632-4497-81E7-C879A35F94AC}" srcOrd="15" destOrd="0" presId="urn:microsoft.com/office/officeart/2005/8/layout/radial1"/>
+    <dgm:cxn modelId="{89CFE837-AE7F-4F0B-87AA-5C93DCDAA002}" type="presParOf" srcId="{3B9E1353-2632-4497-81E7-C879A35F94AC}" destId="{66CAC345-B6CA-4B31-8EC6-C36D08782BE2}" srcOrd="0" destOrd="0" presId="urn:microsoft.com/office/officeart/2005/8/layout/radial1"/>
+    <dgm:cxn modelId="{418AB0B9-FCAF-4DF3-8978-27A0DA2C11B2}" type="presParOf" srcId="{B282CD55-80AA-4736-94EB-595F4BA0CA63}" destId="{53DB598F-3538-45FC-A34A-6E2175D70F64}" srcOrd="16" destOrd="0" presId="urn:microsoft.com/office/officeart/2005/8/layout/radial1"/>
   </dgm:cxnLst>
   <dgm:bg/>
   <dgm:whole/>
@@ -12276,8 +12351,8 @@
       </dsp:nvSpPr>
       <dsp:spPr>
         <a:xfrm>
-          <a:off x="3910636" y="2182226"/>
-          <a:ext cx="1440302" cy="1440302"/>
+          <a:off x="4185792" y="2328452"/>
+          <a:ext cx="1356269" cy="1356269"/>
         </a:xfrm>
         <a:prstGeom prst="ellipse">
           <a:avLst/>
@@ -12340,8 +12415,8 @@
         </a:p>
       </dsp:txBody>
       <dsp:txXfrm>
-        <a:off x="4121563" y="2393153"/>
-        <a:ext cx="1018448" cy="1018448"/>
+        <a:off x="4384413" y="2527073"/>
+        <a:ext cx="959027" cy="959027"/>
       </dsp:txXfrm>
     </dsp:sp>
     <dsp:sp modelId="{A5500CA8-E1AC-4EA2-84FF-778CCAFF54E5}">
@@ -12351,8 +12426,8 @@
       </dsp:nvSpPr>
       <dsp:spPr>
         <a:xfrm rot="16200000">
-          <a:off x="4270054" y="1807497"/>
-          <a:ext cx="721467" cy="27992"/>
+          <a:off x="4390211" y="1842188"/>
+          <a:ext cx="947432" cy="25095"/>
         </a:xfrm>
         <a:custGeom>
           <a:avLst/>
@@ -12363,10 +12438,10 @@
           <a:pathLst>
             <a:path>
               <a:moveTo>
-                <a:pt x="0" y="13996"/>
+                <a:pt x="0" y="12547"/>
               </a:moveTo>
               <a:lnTo>
-                <a:pt x="721467" y="13996"/>
+                <a:pt x="947432" y="12547"/>
               </a:lnTo>
             </a:path>
           </a:pathLst>
@@ -12420,8 +12495,8 @@
         </a:p>
       </dsp:txBody>
       <dsp:txXfrm>
-        <a:off x="4612751" y="1803456"/>
-        <a:ext cx="36073" cy="36073"/>
+        <a:off x="4840241" y="1831050"/>
+        <a:ext cx="47371" cy="47371"/>
       </dsp:txXfrm>
     </dsp:sp>
     <dsp:sp modelId="{D641129D-BF39-4F22-BF56-9E2A62EAEF7C}">
@@ -12431,8 +12506,8 @@
       </dsp:nvSpPr>
       <dsp:spPr>
         <a:xfrm>
-          <a:off x="3910636" y="20456"/>
-          <a:ext cx="1440302" cy="1440302"/>
+          <a:off x="4185792" y="24750"/>
+          <a:ext cx="1356269" cy="1356269"/>
         </a:xfrm>
         <a:prstGeom prst="ellipse">
           <a:avLst/>
@@ -12492,15 +12567,19 @@
             <a:t>Self Noise </a:t>
           </a:r>
           <a:r>
-            <a:rPr lang="en-US" sz="1400" b="0" i="0" kern="1200" dirty="0"/>
+            <a:rPr lang="en-US" sz="1800" b="1" i="0" kern="1200" dirty="0">
+              <a:latin typeface="Amasis MT Pro Black" panose="020F0502020204030204" pitchFamily="18" charset="0"/>
+            </a:rPr>
             <a:t>✓</a:t>
           </a:r>
-          <a:endParaRPr lang="en-US" sz="1400" b="1" kern="1200" dirty="0"/>
+          <a:endParaRPr lang="en-US" sz="1400" b="1" kern="1200" dirty="0">
+            <a:latin typeface="Amasis MT Pro Black" panose="020F0502020204030204" pitchFamily="18" charset="0"/>
+          </a:endParaRPr>
         </a:p>
       </dsp:txBody>
       <dsp:txXfrm>
-        <a:off x="4121563" y="231383"/>
-        <a:ext cx="1018448" cy="1018448"/>
+        <a:off x="4384413" y="223371"/>
+        <a:ext cx="959027" cy="959027"/>
       </dsp:txXfrm>
     </dsp:sp>
     <dsp:sp modelId="{60E69F3E-8134-4538-A3EF-3F6FEA683E0F}">
@@ -12509,9 +12588,9 @@
         <dsp:cNvSpPr/>
       </dsp:nvSpPr>
       <dsp:spPr>
-        <a:xfrm rot="19285714">
-          <a:off x="5115124" y="2214461"/>
-          <a:ext cx="721467" cy="27992"/>
+        <a:xfrm rot="18900000">
+          <a:off x="5204692" y="2179557"/>
+          <a:ext cx="947432" cy="25095"/>
         </a:xfrm>
         <a:custGeom>
           <a:avLst/>
@@ -12522,10 +12601,10 @@
           <a:pathLst>
             <a:path>
               <a:moveTo>
-                <a:pt x="0" y="13996"/>
+                <a:pt x="0" y="12547"/>
               </a:moveTo>
               <a:lnTo>
-                <a:pt x="721467" y="13996"/>
+                <a:pt x="947432" y="12547"/>
               </a:lnTo>
             </a:path>
           </a:pathLst>
@@ -12579,8 +12658,8 @@
         </a:p>
       </dsp:txBody>
       <dsp:txXfrm>
-        <a:off x="5457821" y="2210420"/>
-        <a:ext cx="36073" cy="36073"/>
+        <a:off x="5654723" y="2168420"/>
+        <a:ext cx="47371" cy="47371"/>
       </dsp:txXfrm>
     </dsp:sp>
     <dsp:sp modelId="{C29E633D-FDB3-4A03-AF0D-B36013E3D45B}">
@@ -12590,8 +12669,8 @@
       </dsp:nvSpPr>
       <dsp:spPr>
         <a:xfrm>
-          <a:off x="5600776" y="834385"/>
-          <a:ext cx="1440302" cy="1440302"/>
+          <a:off x="5814756" y="699489"/>
+          <a:ext cx="1356269" cy="1356269"/>
         </a:xfrm>
         <a:prstGeom prst="ellipse">
           <a:avLst/>
@@ -12666,7 +12745,14 @@
             <a:buNone/>
           </a:pPr>
           <a:r>
-            <a:rPr lang="en-US" sz="1400" b="0" i="0" kern="1200" dirty="0"/>
+            <a:rPr lang="en-US" sz="1800" b="1" i="0" kern="1200" dirty="0">
+              <a:solidFill>
+                <a:prstClr val="white"/>
+              </a:solidFill>
+              <a:latin typeface="Amasis MT Pro Black" panose="020F0502020204030204" pitchFamily="18" charset="0"/>
+              <a:ea typeface="+mn-ea"/>
+              <a:cs typeface="+mn-cs"/>
+            </a:rPr>
             <a:t>✓</a:t>
           </a:r>
           <a:r>
@@ -12676,8 +12762,8 @@
         </a:p>
       </dsp:txBody>
       <dsp:txXfrm>
-        <a:off x="5811703" y="1045312"/>
-        <a:ext cx="1018448" cy="1018448"/>
+        <a:off x="6013377" y="898110"/>
+        <a:ext cx="959027" cy="959027"/>
       </dsp:txXfrm>
     </dsp:sp>
     <dsp:sp modelId="{3C3F841D-B84E-439D-A70D-DACE222F23B4}">
@@ -12686,9 +12772,9 @@
         <dsp:cNvSpPr/>
       </dsp:nvSpPr>
       <dsp:spPr>
-        <a:xfrm rot="771429">
-          <a:off x="5323839" y="3128901"/>
-          <a:ext cx="721467" cy="27992"/>
+        <a:xfrm>
+          <a:off x="5542062" y="2994039"/>
+          <a:ext cx="947432" cy="25095"/>
         </a:xfrm>
         <a:custGeom>
           <a:avLst/>
@@ -12699,10 +12785,10 @@
           <a:pathLst>
             <a:path>
               <a:moveTo>
-                <a:pt x="0" y="13996"/>
+                <a:pt x="0" y="12547"/>
               </a:moveTo>
               <a:lnTo>
-                <a:pt x="721467" y="13996"/>
+                <a:pt x="947432" y="12547"/>
               </a:lnTo>
             </a:path>
           </a:pathLst>
@@ -12756,8 +12842,8 @@
         </a:p>
       </dsp:txBody>
       <dsp:txXfrm>
-        <a:off x="5666536" y="3124861"/>
-        <a:ext cx="36073" cy="36073"/>
+        <a:off x="5992092" y="2982901"/>
+        <a:ext cx="47371" cy="47371"/>
       </dsp:txXfrm>
     </dsp:sp>
     <dsp:sp modelId="{CB79E053-F38E-4A67-BA83-A4800638DD26}">
@@ -12767,8 +12853,8 @@
       </dsp:nvSpPr>
       <dsp:spPr>
         <a:xfrm>
-          <a:off x="6018206" y="2663266"/>
-          <a:ext cx="1440302" cy="1440302"/>
+          <a:off x="6489494" y="2328452"/>
+          <a:ext cx="1356269" cy="1356269"/>
         </a:xfrm>
         <a:prstGeom prst="ellipse">
           <a:avLst/>
@@ -12850,7 +12936,14 @@
             <a:buNone/>
           </a:pPr>
           <a:r>
-            <a:rPr lang="en-US" sz="1400" b="0" i="0" kern="1200" dirty="0"/>
+            <a:rPr lang="en-US" sz="1800" b="1" i="0" kern="1200" dirty="0">
+              <a:solidFill>
+                <a:prstClr val="white"/>
+              </a:solidFill>
+              <a:latin typeface="Amasis MT Pro Black" panose="020F0502020204030204" pitchFamily="18" charset="0"/>
+              <a:ea typeface="+mn-ea"/>
+              <a:cs typeface="+mn-cs"/>
+            </a:rPr>
             <a:t>✓</a:t>
           </a:r>
           <a:r>
@@ -12867,8 +12960,8 @@
         </a:p>
       </dsp:txBody>
       <dsp:txXfrm>
-        <a:off x="6229133" y="2874193"/>
-        <a:ext cx="1018448" cy="1018448"/>
+        <a:off x="6688115" y="2527073"/>
+        <a:ext cx="959027" cy="959027"/>
       </dsp:txXfrm>
     </dsp:sp>
     <dsp:sp modelId="{21F3E271-E659-4F2A-B5D3-98DDE2FF03DA}">
@@ -12877,9 +12970,9 @@
         <dsp:cNvSpPr/>
       </dsp:nvSpPr>
       <dsp:spPr>
-        <a:xfrm rot="3857143">
-          <a:off x="4739032" y="3862225"/>
-          <a:ext cx="721467" cy="27992"/>
+        <a:xfrm rot="2700000">
+          <a:off x="5204692" y="3808521"/>
+          <a:ext cx="947432" cy="25095"/>
         </a:xfrm>
         <a:custGeom>
           <a:avLst/>
@@ -12890,10 +12983,10 @@
           <a:pathLst>
             <a:path>
               <a:moveTo>
-                <a:pt x="0" y="13996"/>
+                <a:pt x="0" y="12547"/>
               </a:moveTo>
               <a:lnTo>
-                <a:pt x="721467" y="13996"/>
+                <a:pt x="947432" y="12547"/>
               </a:lnTo>
             </a:path>
           </a:pathLst>
@@ -12947,8 +13040,8 @@
         </a:p>
       </dsp:txBody>
       <dsp:txXfrm>
-        <a:off x="5081729" y="3858185"/>
-        <a:ext cx="36073" cy="36073"/>
+        <a:off x="5654723" y="3797383"/>
+        <a:ext cx="47371" cy="47371"/>
       </dsp:txXfrm>
     </dsp:sp>
     <dsp:sp modelId="{381951C3-DC69-4329-A787-F6F20281D3F6}">
@@ -12958,8 +13051,8 @@
       </dsp:nvSpPr>
       <dsp:spPr>
         <a:xfrm>
-          <a:off x="4848593" y="4129914"/>
-          <a:ext cx="1440302" cy="1440302"/>
+          <a:off x="5814756" y="3957416"/>
+          <a:ext cx="1356269" cy="1356269"/>
         </a:xfrm>
         <a:prstGeom prst="ellipse">
           <a:avLst/>
@@ -13041,22 +13134,21 @@
             <a:buNone/>
           </a:pPr>
           <a:r>
-            <a:rPr lang="en-US" sz="1400" b="0" i="0" kern="1200" dirty="0"/>
+            <a:rPr lang="en-US" sz="1800" b="1" i="0" kern="1200" dirty="0">
+              <a:solidFill>
+                <a:prstClr val="white"/>
+              </a:solidFill>
+              <a:latin typeface="Amasis MT Pro Black" panose="020F0502020204030204" pitchFamily="18" charset="0"/>
+              <a:ea typeface="+mn-ea"/>
+              <a:cs typeface="+mn-cs"/>
+            </a:rPr>
             <a:t>✓</a:t>
           </a:r>
-          <a:endParaRPr lang="en-US" sz="1400" b="1" kern="1200" dirty="0">
-            <a:solidFill>
-              <a:prstClr val="white"/>
-            </a:solidFill>
-            <a:latin typeface="Aptos" panose="02110004020202020204"/>
-            <a:ea typeface="+mn-ea"/>
-            <a:cs typeface="+mn-cs"/>
-          </a:endParaRPr>
         </a:p>
       </dsp:txBody>
       <dsp:txXfrm>
-        <a:off x="5059520" y="4340841"/>
-        <a:ext cx="1018448" cy="1018448"/>
+        <a:off x="6013377" y="4156037"/>
+        <a:ext cx="959027" cy="959027"/>
       </dsp:txXfrm>
     </dsp:sp>
     <dsp:sp modelId="{97AB2DA7-3196-4812-85DB-C0730E66FABE}">
@@ -13065,9 +13157,9 @@
         <dsp:cNvSpPr/>
       </dsp:nvSpPr>
       <dsp:spPr>
-        <a:xfrm rot="6942857">
-          <a:off x="3801075" y="3862225"/>
-          <a:ext cx="721467" cy="27992"/>
+        <a:xfrm rot="5400000">
+          <a:off x="4390211" y="4145890"/>
+          <a:ext cx="947432" cy="25095"/>
         </a:xfrm>
         <a:custGeom>
           <a:avLst/>
@@ -13078,10 +13170,10 @@
           <a:pathLst>
             <a:path>
               <a:moveTo>
-                <a:pt x="0" y="13996"/>
+                <a:pt x="0" y="12547"/>
               </a:moveTo>
               <a:lnTo>
-                <a:pt x="721467" y="13996"/>
+                <a:pt x="947432" y="12547"/>
               </a:lnTo>
             </a:path>
           </a:pathLst>
@@ -13134,9 +13226,9 @@
           <a:endParaRPr lang="en-US" sz="700" kern="1200"/>
         </a:p>
       </dsp:txBody>
-      <dsp:txXfrm rot="10800000">
-        <a:off x="4143772" y="3858185"/>
-        <a:ext cx="36073" cy="36073"/>
+      <dsp:txXfrm>
+        <a:off x="4840241" y="4134752"/>
+        <a:ext cx="47371" cy="47371"/>
       </dsp:txXfrm>
     </dsp:sp>
     <dsp:sp modelId="{13F65213-867A-4369-9543-F3799FB5E0F8}">
@@ -13146,8 +13238,8 @@
       </dsp:nvSpPr>
       <dsp:spPr>
         <a:xfrm>
-          <a:off x="2972679" y="4129914"/>
-          <a:ext cx="1440302" cy="1440302"/>
+          <a:off x="4185792" y="4632154"/>
+          <a:ext cx="1356269" cy="1356269"/>
         </a:xfrm>
         <a:prstGeom prst="ellipse">
           <a:avLst/>
@@ -13229,7 +13321,14 @@
             <a:buNone/>
           </a:pPr>
           <a:r>
-            <a:rPr lang="en-US" sz="1400" b="0" i="0" kern="1200" dirty="0"/>
+            <a:rPr lang="en-US" sz="1800" b="1" i="0" kern="1200" dirty="0">
+              <a:solidFill>
+                <a:prstClr val="white"/>
+              </a:solidFill>
+              <a:latin typeface="Amasis MT Pro Black" panose="020F0502020204030204" pitchFamily="18" charset="0"/>
+              <a:ea typeface="+mn-ea"/>
+              <a:cs typeface="+mn-cs"/>
+            </a:rPr>
             <a:t>✓</a:t>
           </a:r>
           <a:r>
@@ -13246,8 +13345,8 @@
         </a:p>
       </dsp:txBody>
       <dsp:txXfrm>
-        <a:off x="3183606" y="4340841"/>
-        <a:ext cx="1018448" cy="1018448"/>
+        <a:off x="4384413" y="4830775"/>
+        <a:ext cx="959027" cy="959027"/>
       </dsp:txXfrm>
     </dsp:sp>
     <dsp:sp modelId="{18CBF4D6-765C-4365-B23D-911EEF96DF4B}">
@@ -13256,9 +13355,9 @@
         <dsp:cNvSpPr/>
       </dsp:nvSpPr>
       <dsp:spPr>
-        <a:xfrm rot="10028571">
-          <a:off x="3216269" y="3128901"/>
-          <a:ext cx="721467" cy="27992"/>
+        <a:xfrm rot="8100000">
+          <a:off x="3575729" y="3808521"/>
+          <a:ext cx="947432" cy="25095"/>
         </a:xfrm>
         <a:custGeom>
           <a:avLst/>
@@ -13269,10 +13368,10 @@
           <a:pathLst>
             <a:path>
               <a:moveTo>
-                <a:pt x="0" y="13996"/>
+                <a:pt x="0" y="12547"/>
               </a:moveTo>
               <a:lnTo>
-                <a:pt x="721467" y="13996"/>
+                <a:pt x="947432" y="12547"/>
               </a:lnTo>
             </a:path>
           </a:pathLst>
@@ -13326,8 +13425,8 @@
         </a:p>
       </dsp:txBody>
       <dsp:txXfrm rot="10800000">
-        <a:off x="3558966" y="3124861"/>
-        <a:ext cx="36073" cy="36073"/>
+        <a:off x="4025760" y="3797383"/>
+        <a:ext cx="47371" cy="47371"/>
       </dsp:txXfrm>
     </dsp:sp>
     <dsp:sp modelId="{8726FD26-0446-4A34-A789-F609EFF6B576}">
@@ -13337,8 +13436,8 @@
       </dsp:nvSpPr>
       <dsp:spPr>
         <a:xfrm>
-          <a:off x="1803066" y="2663266"/>
-          <a:ext cx="1440302" cy="1440302"/>
+          <a:off x="2556829" y="3957416"/>
+          <a:ext cx="1356269" cy="1356269"/>
         </a:xfrm>
         <a:prstGeom prst="ellipse">
           <a:avLst/>
@@ -13413,15 +13512,21 @@
             <a:buNone/>
           </a:pPr>
           <a:r>
-            <a:rPr lang="en-US" sz="1400" b="0" i="0" kern="1200" dirty="0"/>
+            <a:rPr lang="en-US" sz="1800" b="1" i="0" kern="1200" dirty="0">
+              <a:solidFill>
+                <a:prstClr val="white"/>
+              </a:solidFill>
+              <a:latin typeface="Amasis MT Pro Black" panose="020F0502020204030204" pitchFamily="18" charset="0"/>
+              <a:ea typeface="+mn-ea"/>
+              <a:cs typeface="+mn-cs"/>
+            </a:rPr>
             <a:t>✓</a:t>
           </a:r>
-          <a:endParaRPr lang="en-US" sz="1400" b="1" kern="1200" dirty="0"/>
         </a:p>
       </dsp:txBody>
       <dsp:txXfrm>
-        <a:off x="2013993" y="2874193"/>
-        <a:ext cx="1018448" cy="1018448"/>
+        <a:off x="2755450" y="4156037"/>
+        <a:ext cx="959027" cy="959027"/>
       </dsp:txXfrm>
     </dsp:sp>
     <dsp:sp modelId="{0B890D38-9A63-42F6-B391-F93CB128C0AE}">
@@ -13430,9 +13535,9 @@
         <dsp:cNvSpPr/>
       </dsp:nvSpPr>
       <dsp:spPr>
-        <a:xfrm rot="13114286">
-          <a:off x="3424984" y="2214461"/>
-          <a:ext cx="721467" cy="27992"/>
+        <a:xfrm rot="10800000">
+          <a:off x="3238360" y="2994039"/>
+          <a:ext cx="947432" cy="25095"/>
         </a:xfrm>
         <a:custGeom>
           <a:avLst/>
@@ -13443,10 +13548,10 @@
           <a:pathLst>
             <a:path>
               <a:moveTo>
-                <a:pt x="0" y="13996"/>
+                <a:pt x="0" y="12547"/>
               </a:moveTo>
               <a:lnTo>
-                <a:pt x="721467" y="13996"/>
+                <a:pt x="947432" y="12547"/>
               </a:lnTo>
             </a:path>
           </a:pathLst>
@@ -13500,8 +13605,8 @@
         </a:p>
       </dsp:txBody>
       <dsp:txXfrm rot="10800000">
-        <a:off x="3767681" y="2210420"/>
-        <a:ext cx="36073" cy="36073"/>
+        <a:off x="3688390" y="2982901"/>
+        <a:ext cx="47371" cy="47371"/>
       </dsp:txXfrm>
     </dsp:sp>
     <dsp:sp modelId="{01EEE674-D7A4-44BB-95E6-EEE4B45DB353}">
@@ -13511,14 +13616,194 @@
       </dsp:nvSpPr>
       <dsp:spPr>
         <a:xfrm>
-          <a:off x="2220496" y="834385"/>
-          <a:ext cx="1440302" cy="1440302"/>
+          <a:off x="1882090" y="2328452"/>
+          <a:ext cx="1356269" cy="1356269"/>
         </a:xfrm>
         <a:prstGeom prst="ellipse">
           <a:avLst/>
         </a:prstGeom>
         <a:solidFill>
-          <a:schemeClr val="bg2">
+          <a:schemeClr val="accent6"/>
+        </a:solidFill>
+        <a:ln w="19050" cap="flat" cmpd="sng" algn="ctr">
+          <a:solidFill>
+            <a:schemeClr val="lt1">
+              <a:hueOff val="0"/>
+              <a:satOff val="0"/>
+              <a:lumOff val="0"/>
+              <a:alphaOff val="0"/>
+            </a:schemeClr>
+          </a:solidFill>
+          <a:prstDash val="solid"/>
+          <a:miter lim="800000"/>
+        </a:ln>
+        <a:effectLst/>
+      </dsp:spPr>
+      <dsp:style>
+        <a:lnRef idx="2">
+          <a:scrgbClr r="0" g="0" b="0"/>
+        </a:lnRef>
+        <a:fillRef idx="1">
+          <a:scrgbClr r="0" g="0" b="0"/>
+        </a:fillRef>
+        <a:effectRef idx="0">
+          <a:scrgbClr r="0" g="0" b="0"/>
+        </a:effectRef>
+        <a:fontRef idx="minor">
+          <a:schemeClr val="lt1"/>
+        </a:fontRef>
+      </dsp:style>
+      <dsp:txBody>
+        <a:bodyPr spcFirstLastPara="0" vert="horz" wrap="square" lIns="8890" tIns="8890" rIns="8890" bIns="8890" numCol="1" spcCol="1270" anchor="ctr" anchorCtr="0">
+          <a:noAutofit/>
+        </a:bodyPr>
+        <a:lstStyle/>
+        <a:p>
+          <a:pPr marL="0" lvl="0" indent="0" algn="ctr" defTabSz="622300">
+            <a:lnSpc>
+              <a:spcPct val="90000"/>
+            </a:lnSpc>
+            <a:spcBef>
+              <a:spcPct val="0"/>
+            </a:spcBef>
+            <a:spcAft>
+              <a:spcPct val="35000"/>
+            </a:spcAft>
+            <a:buFont typeface="+mj-lt"/>
+            <a:buNone/>
+          </a:pPr>
+          <a:r>
+            <a:rPr lang="en-US" sz="1400" b="1" kern="1200" dirty="0"/>
+            <a:t>Spatial Resolution </a:t>
+          </a:r>
+        </a:p>
+        <a:p>
+          <a:pPr marL="0" lvl="0" indent="0" algn="ctr" defTabSz="622300">
+            <a:lnSpc>
+              <a:spcPct val="90000"/>
+            </a:lnSpc>
+            <a:spcBef>
+              <a:spcPct val="0"/>
+            </a:spcBef>
+            <a:spcAft>
+              <a:spcPct val="35000"/>
+            </a:spcAft>
+            <a:buFont typeface="+mj-lt"/>
+            <a:buNone/>
+          </a:pPr>
+          <a:r>
+            <a:rPr lang="en-US" sz="1800" b="1" i="0" kern="1200" dirty="0">
+              <a:solidFill>
+                <a:prstClr val="white"/>
+              </a:solidFill>
+              <a:latin typeface="Amasis MT Pro Black" panose="020F0502020204030204" pitchFamily="18" charset="0"/>
+              <a:ea typeface="+mn-ea"/>
+              <a:cs typeface="+mn-cs"/>
+            </a:rPr>
+            <a:t>✓</a:t>
+          </a:r>
+        </a:p>
+      </dsp:txBody>
+      <dsp:txXfrm>
+        <a:off x="2080711" y="2527073"/>
+        <a:ext cx="959027" cy="959027"/>
+      </dsp:txXfrm>
+    </dsp:sp>
+    <dsp:sp modelId="{3B9E1353-2632-4497-81E7-C879A35F94AC}">
+      <dsp:nvSpPr>
+        <dsp:cNvPr id="0" name=""/>
+        <dsp:cNvSpPr/>
+      </dsp:nvSpPr>
+      <dsp:spPr>
+        <a:xfrm rot="13500000">
+          <a:off x="3575729" y="2179557"/>
+          <a:ext cx="947432" cy="25095"/>
+        </a:xfrm>
+        <a:custGeom>
+          <a:avLst/>
+          <a:gdLst/>
+          <a:ahLst/>
+          <a:cxnLst/>
+          <a:rect l="0" t="0" r="0" b="0"/>
+          <a:pathLst>
+            <a:path>
+              <a:moveTo>
+                <a:pt x="0" y="12547"/>
+              </a:moveTo>
+              <a:lnTo>
+                <a:pt x="947432" y="12547"/>
+              </a:lnTo>
+            </a:path>
+          </a:pathLst>
+        </a:custGeom>
+        <a:noFill/>
+        <a:ln w="19050" cap="flat" cmpd="sng" algn="ctr">
+          <a:solidFill>
+            <a:schemeClr val="accent5">
+              <a:hueOff val="0"/>
+              <a:satOff val="0"/>
+              <a:lumOff val="0"/>
+              <a:alphaOff val="0"/>
+            </a:schemeClr>
+          </a:solidFill>
+          <a:prstDash val="solid"/>
+          <a:miter lim="800000"/>
+        </a:ln>
+        <a:effectLst/>
+      </dsp:spPr>
+      <dsp:style>
+        <a:lnRef idx="2">
+          <a:scrgbClr r="0" g="0" b="0"/>
+        </a:lnRef>
+        <a:fillRef idx="0">
+          <a:scrgbClr r="0" g="0" b="0"/>
+        </a:fillRef>
+        <a:effectRef idx="0">
+          <a:scrgbClr r="0" g="0" b="0"/>
+        </a:effectRef>
+        <a:fontRef idx="minor"/>
+      </dsp:style>
+      <dsp:txBody>
+        <a:bodyPr spcFirstLastPara="0" vert="horz" wrap="square" lIns="12700" tIns="0" rIns="12700" bIns="0" numCol="1" spcCol="1270" anchor="ctr" anchorCtr="0">
+          <a:noAutofit/>
+        </a:bodyPr>
+        <a:lstStyle/>
+        <a:p>
+          <a:pPr marL="0" lvl="0" indent="0" algn="ctr" defTabSz="222250">
+            <a:lnSpc>
+              <a:spcPct val="90000"/>
+            </a:lnSpc>
+            <a:spcBef>
+              <a:spcPct val="0"/>
+            </a:spcBef>
+            <a:spcAft>
+              <a:spcPct val="35000"/>
+            </a:spcAft>
+            <a:buNone/>
+          </a:pPr>
+          <a:endParaRPr lang="en-US" sz="500" kern="1200"/>
+        </a:p>
+      </dsp:txBody>
+      <dsp:txXfrm rot="10800000">
+        <a:off x="4025760" y="2168420"/>
+        <a:ext cx="47371" cy="47371"/>
+      </dsp:txXfrm>
+    </dsp:sp>
+    <dsp:sp modelId="{53DB598F-3538-45FC-A34A-6E2175D70F64}">
+      <dsp:nvSpPr>
+        <dsp:cNvPr id="0" name=""/>
+        <dsp:cNvSpPr/>
+      </dsp:nvSpPr>
+      <dsp:spPr>
+        <a:xfrm>
+          <a:off x="2556829" y="699489"/>
+          <a:ext cx="1356269" cy="1356269"/>
+        </a:xfrm>
+        <a:prstGeom prst="ellipse">
+          <a:avLst/>
+        </a:prstGeom>
+        <a:solidFill>
+          <a:schemeClr val="bg1">
             <a:lumMod val="75000"/>
           </a:schemeClr>
         </a:solidFill>
@@ -13571,13 +13856,13 @@
           </a:pPr>
           <a:r>
             <a:rPr lang="en-US" sz="1400" b="1" kern="1200" dirty="0"/>
-            <a:t>Spatial Resolution </a:t>
+            <a:t>LF DAS</a:t>
           </a:r>
         </a:p>
       </dsp:txBody>
       <dsp:txXfrm>
-        <a:off x="2431423" y="1045312"/>
-        <a:ext cx="1018448" cy="1018448"/>
+        <a:off x="2755450" y="898110"/>
+        <a:ext cx="959027" cy="959027"/>
       </dsp:txXfrm>
     </dsp:sp>
   </dsp:spTree>
@@ -21112,7 +21397,7 @@
           <a:p>
             <a:fld id="{64AF2E3A-0E65-479D-A5E3-03C6FE5A6CB0}" type="datetimeFigureOut">
               <a:rPr lang="en-US" smtClean="0"/>
-              <a:t>2/20/2026</a:t>
+              <a:t>3/21/2026</a:t>
             </a:fld>
             <a:endParaRPr lang="en-US"/>
           </a:p>
@@ -21310,7 +21595,7 @@
           <a:p>
             <a:fld id="{64AF2E3A-0E65-479D-A5E3-03C6FE5A6CB0}" type="datetimeFigureOut">
               <a:rPr lang="en-US" smtClean="0"/>
-              <a:t>2/20/2026</a:t>
+              <a:t>3/21/2026</a:t>
             </a:fld>
             <a:endParaRPr lang="en-US"/>
           </a:p>
@@ -21518,7 +21803,7 @@
           <a:p>
             <a:fld id="{64AF2E3A-0E65-479D-A5E3-03C6FE5A6CB0}" type="datetimeFigureOut">
               <a:rPr lang="en-US" smtClean="0"/>
-              <a:t>2/20/2026</a:t>
+              <a:t>3/21/2026</a:t>
             </a:fld>
             <a:endParaRPr lang="en-US"/>
           </a:p>
@@ -21716,7 +22001,7 @@
           <a:p>
             <a:fld id="{64AF2E3A-0E65-479D-A5E3-03C6FE5A6CB0}" type="datetimeFigureOut">
               <a:rPr lang="en-US" smtClean="0"/>
-              <a:t>2/20/2026</a:t>
+              <a:t>3/21/2026</a:t>
             </a:fld>
             <a:endParaRPr lang="en-US"/>
           </a:p>
@@ -22021,7 +22306,7 @@
           <a:p>
             <a:fld id="{64AF2E3A-0E65-479D-A5E3-03C6FE5A6CB0}" type="datetimeFigureOut">
               <a:rPr lang="en-US" smtClean="0"/>
-              <a:t>2/20/2026</a:t>
+              <a:t>3/21/2026</a:t>
             </a:fld>
             <a:endParaRPr lang="en-US"/>
           </a:p>
@@ -22286,7 +22571,7 @@
           <a:p>
             <a:fld id="{64AF2E3A-0E65-479D-A5E3-03C6FE5A6CB0}" type="datetimeFigureOut">
               <a:rPr lang="en-US" smtClean="0"/>
-              <a:t>2/20/2026</a:t>
+              <a:t>3/21/2026</a:t>
             </a:fld>
             <a:endParaRPr lang="en-US"/>
           </a:p>
@@ -22698,7 +22983,7 @@
           <a:p>
             <a:fld id="{64AF2E3A-0E65-479D-A5E3-03C6FE5A6CB0}" type="datetimeFigureOut">
               <a:rPr lang="en-US" smtClean="0"/>
-              <a:t>2/20/2026</a:t>
+              <a:t>3/21/2026</a:t>
             </a:fld>
             <a:endParaRPr lang="en-US"/>
           </a:p>
@@ -22839,7 +23124,7 @@
           <a:p>
             <a:fld id="{64AF2E3A-0E65-479D-A5E3-03C6FE5A6CB0}" type="datetimeFigureOut">
               <a:rPr lang="en-US" smtClean="0"/>
-              <a:t>2/20/2026</a:t>
+              <a:t>3/21/2026</a:t>
             </a:fld>
             <a:endParaRPr lang="en-US"/>
           </a:p>
@@ -22952,7 +23237,7 @@
           <a:p>
             <a:fld id="{64AF2E3A-0E65-479D-A5E3-03C6FE5A6CB0}" type="datetimeFigureOut">
               <a:rPr lang="en-US" smtClean="0"/>
-              <a:t>2/20/2026</a:t>
+              <a:t>3/21/2026</a:t>
             </a:fld>
             <a:endParaRPr lang="en-US"/>
           </a:p>
@@ -23263,7 +23548,7 @@
           <a:p>
             <a:fld id="{64AF2E3A-0E65-479D-A5E3-03C6FE5A6CB0}" type="datetimeFigureOut">
               <a:rPr lang="en-US" smtClean="0"/>
-              <a:t>2/20/2026</a:t>
+              <a:t>3/21/2026</a:t>
             </a:fld>
             <a:endParaRPr lang="en-US"/>
           </a:p>
@@ -23551,7 +23836,7 @@
           <a:p>
             <a:fld id="{64AF2E3A-0E65-479D-A5E3-03C6FE5A6CB0}" type="datetimeFigureOut">
               <a:rPr lang="en-US" smtClean="0"/>
-              <a:t>2/20/2026</a:t>
+              <a:t>3/21/2026</a:t>
             </a:fld>
             <a:endParaRPr lang="en-US"/>
           </a:p>
@@ -23792,7 +24077,7 @@
           <a:p>
             <a:fld id="{64AF2E3A-0E65-479D-A5E3-03C6FE5A6CB0}" type="datetimeFigureOut">
               <a:rPr lang="en-US" smtClean="0"/>
-              <a:t>2/20/2026</a:t>
+              <a:t>3/21/2026</a:t>
             </a:fld>
             <a:endParaRPr lang="en-US"/>
           </a:p>
@@ -26713,8 +26998,8 @@
         </p:nvGrpSpPr>
         <p:grpSpPr>
           <a:xfrm>
-            <a:off x="1319719" y="712745"/>
-            <a:ext cx="9261576" cy="5590674"/>
+            <a:off x="853440" y="712745"/>
+            <a:ext cx="9727855" cy="6013175"/>
             <a:chOff x="1319719" y="712745"/>
             <a:chExt cx="9261576" cy="5590674"/>
           </a:xfrm>
@@ -26732,7 +27017,7 @@
             <p:nvPr>
               <p:extLst>
                 <p:ext uri="{D42A27DB-BD31-4B8C-83A1-F6EECF244321}">
-                  <p14:modId xmlns:p14="http://schemas.microsoft.com/office/powerpoint/2010/main" val="2692833470"/>
+                  <p14:modId xmlns:p14="http://schemas.microsoft.com/office/powerpoint/2010/main" val="3086716862"/>
                 </p:ext>
               </p:extLst>
             </p:nvPr>
@@ -26776,7 +27061,7 @@
           </p:blipFill>
           <p:spPr bwMode="auto">
             <a:xfrm rot="18752489" flipH="1">
-              <a:off x="5248221" y="2906050"/>
+              <a:off x="5204692" y="2783250"/>
               <a:ext cx="1322780" cy="1322780"/>
             </a:xfrm>
             <a:prstGeom prst="rect">
